--- a/output/wordlabs-enjoy-3day.pptx
+++ b/output/wordlabs-enjoy-3day.pptx
@@ -4240,7 +4240,7 @@
                 <a:ea typeface="Calibri" pitchFamily="34" charset="-122"/>
                 <a:cs typeface="Calibri" pitchFamily="34" charset="-120"/>
               </a:rPr>
-              <a:t>"to take pleasure from"</a:t>
+              <a:t>"to take pleasure in"</a:t>
             </a:r>
             <a:endParaRPr lang="en-US" sz="2200" dirty="0"/>
           </a:p>
@@ -5288,7 +5288,7 @@
                 <a:ea typeface="Calibri" pitchFamily="34" charset="-122"/>
                 <a:cs typeface="Calibri" pitchFamily="34" charset="-120"/>
               </a:rPr>
-              <a:t>Word Labs  •  wordlabs.app  •  Root: 'enjoy' = to take pleasure from</a:t>
+              <a:t>Word Labs  •  wordlabs.app  •  Root: 'enjoy' = to take pleasure in</a:t>
             </a:r>
             <a:endParaRPr lang="en-US" sz="800" dirty="0"/>
           </a:p>
@@ -5928,7 +5928,7 @@
                 <a:ea typeface="Calibri" pitchFamily="34" charset="-122"/>
                 <a:cs typeface="Calibri" pitchFamily="34" charset="-120"/>
               </a:rPr>
-              <a:t>Word Labs  •  wordlabs.app  •  Root: 'enjoy' = to take pleasure from</a:t>
+              <a:t>Word Labs  •  wordlabs.app  •  Root: 'enjoy' = to take pleasure in</a:t>
             </a:r>
             <a:endParaRPr lang="en-US" sz="800" dirty="0"/>
           </a:p>
@@ -6040,7 +6040,7 @@
                 <a:ea typeface="Calibri" pitchFamily="34" charset="-122"/>
                 <a:cs typeface="Calibri" pitchFamily="34" charset="-120"/>
               </a:rPr>
-              <a:t>The students found the science experiment </a:t>
+              <a:t>She found the excursion truly </a:t>
             </a:r>
             <a:pPr algn="l" indent="0" marL="0">
               <a:buNone/>
@@ -6071,7 +6071,7 @@
                 <a:ea typeface="Calibri" pitchFamily="34" charset="-122"/>
                 <a:cs typeface="Calibri" pitchFamily="34" charset="-120"/>
               </a:rPr>
-              <a:t>, and their </a:t>
+              <a:t>, and her </a:t>
             </a:r>
             <a:pPr algn="l" indent="0" marL="0">
               <a:buNone/>
@@ -6102,7 +6102,7 @@
                 <a:ea typeface="Calibri" pitchFamily="34" charset="-122"/>
                 <a:cs typeface="Calibri" pitchFamily="34" charset="-120"/>
               </a:rPr>
-              <a:t> was obvious to everyone in the room.</a:t>
+              <a:t> showed on her face.</a:t>
             </a:r>
             <a:endParaRPr lang="en-US" sz="1800" dirty="0"/>
           </a:p>
@@ -6716,7 +6716,7 @@
                 <a:ea typeface="Calibri" pitchFamily="34" charset="-122"/>
                 <a:cs typeface="Calibri" pitchFamily="34" charset="-120"/>
               </a:rPr>
-              <a:t>Word Labs  •  wordlabs.app  •  Root: 'enjoy' = to take pleasure from</a:t>
+              <a:t>Word Labs  •  wordlabs.app  •  Root: 'enjoy' = to take pleasure in</a:t>
             </a:r>
             <a:endParaRPr lang="en-US" sz="800" dirty="0"/>
           </a:p>
@@ -7543,7 +7543,7 @@
                 <a:ea typeface="Calibri" pitchFamily="34" charset="-122"/>
                 <a:cs typeface="Calibri" pitchFamily="34" charset="-120"/>
               </a:rPr>
-              <a:t>Word Labs  •  wordlabs.app  •  Root: 'enjoy' = to take pleasure from</a:t>
+              <a:t>Word Labs  •  wordlabs.app  •  Root: 'enjoy' = to take pleasure in</a:t>
             </a:r>
             <a:endParaRPr lang="en-US" sz="800" dirty="0"/>
           </a:p>
@@ -7860,7 +7860,7 @@
                 <a:ea typeface="Calibri" pitchFamily="34" charset="-122"/>
                 <a:cs typeface="Calibri" pitchFamily="34" charset="-120"/>
               </a:rPr>
-              <a:t>to take pleasure from</a:t>
+              <a:t>to take pleasure in</a:t>
             </a:r>
             <a:endParaRPr lang="en-US" sz="850" dirty="0"/>
           </a:p>
@@ -7972,7 +7972,7 @@
                 <a:ea typeface="Calibri" pitchFamily="34" charset="-122"/>
                 <a:cs typeface="Calibri" pitchFamily="34" charset="-120"/>
               </a:rPr>
-              <a:t>able to be, capable of</a:t>
+              <a:t>able to be; having the quality of</a:t>
             </a:r>
             <a:endParaRPr lang="en-US" sz="850" dirty="0"/>
           </a:p>
@@ -8528,7 +8528,7 @@
                 <a:ea typeface="Calibri" pitchFamily="34" charset="-122"/>
                 <a:cs typeface="Calibri" pitchFamily="34" charset="-120"/>
               </a:rPr>
-              <a:t>Word Labs  •  wordlabs.app  •  Root: 'enjoy' = to take pleasure from</a:t>
+              <a:t>Word Labs  •  wordlabs.app  •  Root: 'enjoy' = to take pleasure in</a:t>
             </a:r>
             <a:endParaRPr lang="en-US" sz="800" dirty="0"/>
           </a:p>
@@ -8845,7 +8845,7 @@
                 <a:ea typeface="Calibri" pitchFamily="34" charset="-122"/>
                 <a:cs typeface="Calibri" pitchFamily="34" charset="-120"/>
               </a:rPr>
-              <a:t>to take pleasure from</a:t>
+              <a:t>to take pleasure in</a:t>
             </a:r>
             <a:endParaRPr lang="en-US" sz="850" dirty="0"/>
           </a:p>
@@ -8957,7 +8957,7 @@
                 <a:ea typeface="Calibri" pitchFamily="34" charset="-122"/>
                 <a:cs typeface="Calibri" pitchFamily="34" charset="-120"/>
               </a:rPr>
-              <a:t>able to be, capable of</a:t>
+              <a:t>able to be; having the quality of</a:t>
             </a:r>
             <a:endParaRPr lang="en-US" sz="850" dirty="0"/>
           </a:p>
@@ -9855,7 +9855,7 @@
                 <a:ea typeface="Calibri" pitchFamily="34" charset="-122"/>
                 <a:cs typeface="Calibri" pitchFamily="34" charset="-120"/>
               </a:rPr>
-              <a:t>Word Labs  •  wordlabs.app  •  Root: 'enjoy' = to take pleasure from</a:t>
+              <a:t>Word Labs  •  wordlabs.app  •  Root: 'enjoy' = to take pleasure in</a:t>
             </a:r>
             <a:endParaRPr lang="en-US" sz="800" dirty="0"/>
           </a:p>
@@ -10172,7 +10172,7 @@
                 <a:ea typeface="Calibri" pitchFamily="34" charset="-122"/>
                 <a:cs typeface="Calibri" pitchFamily="34" charset="-120"/>
               </a:rPr>
-              <a:t>to take pleasure from</a:t>
+              <a:t>to take pleasure in</a:t>
             </a:r>
             <a:endParaRPr lang="en-US" sz="850" dirty="0"/>
           </a:p>
@@ -10284,7 +10284,7 @@
                 <a:ea typeface="Calibri" pitchFamily="34" charset="-122"/>
                 <a:cs typeface="Calibri" pitchFamily="34" charset="-120"/>
               </a:rPr>
-              <a:t>able to be, capable of</a:t>
+              <a:t>able to be; having the quality of</a:t>
             </a:r>
             <a:endParaRPr lang="en-US" sz="850" dirty="0"/>
           </a:p>
@@ -11644,7 +11644,7 @@
                 <a:ea typeface="Calibri" pitchFamily="34" charset="-122"/>
                 <a:cs typeface="Calibri" pitchFamily="34" charset="-120"/>
               </a:rPr>
-              <a:t>Word Labs  •  wordlabs.app  •  Root: 'enjoy' = to take pleasure from</a:t>
+              <a:t>Word Labs  •  wordlabs.app  •  Root: 'enjoy' = to take pleasure in</a:t>
             </a:r>
             <a:endParaRPr lang="en-US" sz="800" dirty="0"/>
           </a:p>
@@ -12471,7 +12471,7 @@
                 <a:ea typeface="Calibri" pitchFamily="34" charset="-122"/>
                 <a:cs typeface="Calibri" pitchFamily="34" charset="-120"/>
               </a:rPr>
-              <a:t>Word Labs  •  wordlabs.app  •  Root: 'enjoy' = to take pleasure from</a:t>
+              <a:t>Word Labs  •  wordlabs.app  •  Root: 'enjoy' = to take pleasure in</a:t>
             </a:r>
             <a:endParaRPr lang="en-US" sz="800" dirty="0"/>
           </a:p>
@@ -12788,7 +12788,7 @@
                 <a:ea typeface="Calibri" pitchFamily="34" charset="-122"/>
                 <a:cs typeface="Calibri" pitchFamily="34" charset="-120"/>
               </a:rPr>
-              <a:t>to take pleasure from</a:t>
+              <a:t>to take pleasure in</a:t>
             </a:r>
             <a:endParaRPr lang="en-US" sz="850" dirty="0"/>
           </a:p>
@@ -12900,7 +12900,7 @@
                 <a:ea typeface="Calibri" pitchFamily="34" charset="-122"/>
                 <a:cs typeface="Calibri" pitchFamily="34" charset="-120"/>
               </a:rPr>
-              <a:t>state or result of</a:t>
+              <a:t>state or result of an action</a:t>
             </a:r>
             <a:endParaRPr lang="en-US" sz="850" dirty="0"/>
           </a:p>
@@ -13456,7 +13456,7 @@
                 <a:ea typeface="Calibri" pitchFamily="34" charset="-122"/>
                 <a:cs typeface="Calibri" pitchFamily="34" charset="-120"/>
               </a:rPr>
-              <a:t>Word Labs  •  wordlabs.app  •  Root: 'enjoy' = to take pleasure from</a:t>
+              <a:t>Word Labs  •  wordlabs.app  •  Root: 'enjoy' = to take pleasure in</a:t>
             </a:r>
             <a:endParaRPr lang="en-US" sz="800" dirty="0"/>
           </a:p>
@@ -13773,7 +13773,7 @@
                 <a:ea typeface="Calibri" pitchFamily="34" charset="-122"/>
                 <a:cs typeface="Calibri" pitchFamily="34" charset="-120"/>
               </a:rPr>
-              <a:t>to take pleasure from</a:t>
+              <a:t>to take pleasure in</a:t>
             </a:r>
             <a:endParaRPr lang="en-US" sz="850" dirty="0"/>
           </a:p>
@@ -13885,7 +13885,7 @@
                 <a:ea typeface="Calibri" pitchFamily="34" charset="-122"/>
                 <a:cs typeface="Calibri" pitchFamily="34" charset="-120"/>
               </a:rPr>
-              <a:t>state or result of</a:t>
+              <a:t>state or result of an action</a:t>
             </a:r>
             <a:endParaRPr lang="en-US" sz="850" dirty="0"/>
           </a:p>
@@ -14587,7 +14587,7 @@
                 <a:ea typeface="Calibri" pitchFamily="34" charset="-122"/>
                 <a:cs typeface="Calibri" pitchFamily="34" charset="-120"/>
               </a:rPr>
-              <a:t>Root 'enjoy' — to take pleasure from</a:t>
+              <a:t>Root 'enjoy' — to take pleasure in</a:t>
             </a:r>
             <a:endParaRPr lang="en-US" sz="1600" dirty="0"/>
           </a:p>
@@ -14943,7 +14943,7 @@
                 <a:ea typeface="Calibri" pitchFamily="34" charset="-122"/>
                 <a:cs typeface="Calibri" pitchFamily="34" charset="-120"/>
               </a:rPr>
-              <a:t>Word Labs  •  wordlabs.app  •  Root: 'enjoy' = to take pleasure from</a:t>
+              <a:t>Word Labs  •  wordlabs.app  •  Root: 'enjoy' = to take pleasure in</a:t>
             </a:r>
             <a:endParaRPr lang="en-US" sz="800" dirty="0"/>
           </a:p>
@@ -15260,7 +15260,7 @@
                 <a:ea typeface="Calibri" pitchFamily="34" charset="-122"/>
                 <a:cs typeface="Calibri" pitchFamily="34" charset="-120"/>
               </a:rPr>
-              <a:t>to take pleasure from</a:t>
+              <a:t>to take pleasure in</a:t>
             </a:r>
             <a:endParaRPr lang="en-US" sz="850" dirty="0"/>
           </a:p>
@@ -15372,7 +15372,7 @@
                 <a:ea typeface="Calibri" pitchFamily="34" charset="-122"/>
                 <a:cs typeface="Calibri" pitchFamily="34" charset="-120"/>
               </a:rPr>
-              <a:t>state or result of</a:t>
+              <a:t>state or result of an action</a:t>
             </a:r>
             <a:endParaRPr lang="en-US" sz="850" dirty="0"/>
           </a:p>
@@ -16975,7 +16975,7 @@
                 <a:ea typeface="Calibri" pitchFamily="34" charset="-122"/>
                 <a:cs typeface="Calibri" pitchFamily="34" charset="-120"/>
               </a:rPr>
-              <a:t>Word Labs  •  wordlabs.app  •  Root: 'enjoy' = to take pleasure from</a:t>
+              <a:t>Word Labs  •  wordlabs.app  •  Root: 'enjoy' = to take pleasure in</a:t>
             </a:r>
             <a:endParaRPr lang="en-US" sz="800" dirty="0"/>
           </a:p>
@@ -17309,7 +17309,7 @@
                 <a:ea typeface="Trebuchet MS" pitchFamily="34" charset="-122"/>
                 <a:cs typeface="Trebuchet MS" pitchFamily="34" charset="-120"/>
               </a:rPr>
-              <a:t>2</a:t>
+              <a:t>1</a:t>
             </a:r>
             <a:pPr algn="ctr" indent="0" marL="0">
               <a:buNone/>
@@ -17323,7 +17323,7 @@
                 <a:ea typeface="Trebuchet MS" pitchFamily="34" charset="-122"/>
                 <a:cs typeface="Trebuchet MS" pitchFamily="34" charset="-120"/>
               </a:rPr>
-              <a:t>  punctuation marks</a:t>
+              <a:t>  punctuation mark</a:t>
             </a:r>
             <a:endParaRPr lang="en-US" sz="2800" dirty="0"/>
           </a:p>
@@ -17615,7 +17615,7 @@
                 <a:ea typeface="Calibri" pitchFamily="34" charset="-122"/>
                 <a:cs typeface="Calibri" pitchFamily="34" charset="-120"/>
               </a:rPr>
-              <a:t>Word Labs  •  wordlabs.app  •  Root: 'enjoy' = to take pleasure from</a:t>
+              <a:t>Word Labs  •  wordlabs.app  •  Root: 'enjoy' = to take pleasure in</a:t>
             </a:r>
             <a:endParaRPr lang="en-US" sz="800" dirty="0"/>
           </a:p>
@@ -17727,7 +17727,7 @@
                 <a:ea typeface="Calibri" pitchFamily="34" charset="-122"/>
                 <a:cs typeface="Calibri" pitchFamily="34" charset="-120"/>
               </a:rPr>
-              <a:t>Although the rainy weather was </a:t>
+              <a:t>The </a:t>
             </a:r>
             <a:pPr algn="l" indent="0" marL="0">
               <a:buNone/>
@@ -17744,7 +17744,7 @@
                 <a:ea typeface="Calibri" pitchFamily="34" charset="-122"/>
                 <a:cs typeface="Calibri" pitchFamily="34" charset="-120"/>
               </a:rPr>
-              <a:t>unenjoyable</a:t>
+              <a:t>enjoyer</a:t>
             </a:r>
             <a:pPr algn="l" indent="0" marL="0">
               <a:buNone/>
@@ -17758,7 +17758,7 @@
                 <a:ea typeface="Calibri" pitchFamily="34" charset="-122"/>
                 <a:cs typeface="Calibri" pitchFamily="34" charset="-120"/>
               </a:rPr>
-              <a:t>, the children's </a:t>
+              <a:t> of music </a:t>
             </a:r>
             <a:pPr algn="l" indent="0" marL="0">
               <a:buNone/>
@@ -17775,7 +17775,7 @@
                 <a:ea typeface="Calibri" pitchFamily="34" charset="-122"/>
                 <a:cs typeface="Calibri" pitchFamily="34" charset="-120"/>
               </a:rPr>
-              <a:t>enjoyment</a:t>
+              <a:t>enjoyed</a:t>
             </a:r>
             <a:pPr algn="l" indent="0" marL="0">
               <a:buNone/>
@@ -17789,118 +17789,215 @@
                 <a:ea typeface="Calibri" pitchFamily="34" charset="-122"/>
                 <a:cs typeface="Calibri" pitchFamily="34" charset="-120"/>
               </a:rPr>
-              <a:t> of the indoor games showed they were </a:t>
-            </a:r>
+              <a:t> every song, finding real enjoyment in the performance!</a:t>
+            </a:r>
+            <a:endParaRPr lang="en-US" sz="1800" dirty="0"/>
+          </a:p>
+        </p:txBody>
+      </p:sp>
+      <p:sp>
+        <p:nvSpPr>
+          <p:cNvPr id="13" name="Shape 11"/>
+          <p:cNvSpPr/>
+          <p:nvPr/>
+        </p:nvSpPr>
+        <p:spPr>
+          <a:xfrm>
+            <a:off x="365760" y="2852928"/>
+            <a:ext cx="8412480" cy="475488"/>
+          </a:xfrm>
+          <a:prstGeom prst="rect">
+            <a:avLst>
+              <a:gd name="adj" fmla="val 15385"/>
+            </a:avLst>
+          </a:prstGeom>
+          <a:solidFill>
+            <a:srgbClr val="CCFBF1"/>
+          </a:solidFill>
+          <a:ln w="12700">
+            <a:solidFill>
+              <a:srgbClr val="0D9488"/>
+            </a:solidFill>
+            <a:prstDash val="solid"/>
+          </a:ln>
+        </p:spPr>
+      </p:sp>
+      <p:sp>
+        <p:nvSpPr>
+          <p:cNvPr id="14" name="Text 12"/>
+          <p:cNvSpPr/>
+          <p:nvPr/>
+        </p:nvSpPr>
+        <p:spPr>
+          <a:xfrm>
+            <a:off x="502920" y="2852928"/>
+            <a:ext cx="8229600" cy="475488"/>
+          </a:xfrm>
+          <a:prstGeom prst="rect">
+            <a:avLst/>
+          </a:prstGeom>
+          <a:noFill/>
+          <a:ln/>
+        </p:spPr>
+        <p:txBody>
+          <a:bodyPr wrap="square" rtlCol="0" anchor="ctr"/>
+          <a:lstStyle/>
+          <a:p>
             <a:pPr algn="l" indent="0" marL="0">
               <a:buNone/>
             </a:pPr>
             <a:r>
-              <a:rPr lang="en-US" sz="1800" b="1" dirty="0">
-                <a:solidFill>
-                  <a:srgbClr val="0D9488"/>
-                </a:solidFill>
-                <a:highlight>
-                  <a:srgbClr val="CCFBF1"/>
-                </a:highlight>
+              <a:rPr lang="en-US" sz="1200" b="1" dirty="0">
+                <a:solidFill>
+                  <a:srgbClr val="0F766E"/>
+                </a:solidFill>
                 <a:latin typeface="Calibri" pitchFamily="34" charset="0"/>
                 <a:ea typeface="Calibri" pitchFamily="34" charset="-122"/>
                 <a:cs typeface="Calibri" pitchFamily="34" charset="-120"/>
               </a:rPr>
-              <a:t>enjoying</a:t>
-            </a:r>
-            <a:pPr algn="l" indent="0" marL="0">
-              <a:buNone/>
-            </a:pPr>
-            <a:r>
-              <a:rPr lang="en-US" sz="1800" dirty="0">
-                <a:solidFill>
-                  <a:srgbClr val="0F172A"/>
+              <a:t>Now rewrite each focus word below with space between letters — leave room for your breakdown.</a:t>
+            </a:r>
+            <a:endParaRPr lang="en-US" sz="1200" dirty="0"/>
+          </a:p>
+        </p:txBody>
+      </p:sp>
+      <p:sp>
+        <p:nvSpPr>
+          <p:cNvPr id="15" name="Shape 13"/>
+          <p:cNvSpPr/>
+          <p:nvPr/>
+        </p:nvSpPr>
+        <p:spPr>
+          <a:xfrm>
+            <a:off x="411480" y="3456432"/>
+            <a:ext cx="2499360" cy="1005840"/>
+          </a:xfrm>
+          <a:prstGeom prst="rect">
+            <a:avLst>
+              <a:gd name="adj" fmla="val 7273"/>
+            </a:avLst>
+          </a:prstGeom>
+          <a:solidFill>
+            <a:srgbClr val="F8FAFC"/>
+          </a:solidFill>
+          <a:ln w="12700">
+            <a:solidFill>
+              <a:srgbClr val="E2E8F0"/>
+            </a:solidFill>
+            <a:prstDash val="solid"/>
+          </a:ln>
+        </p:spPr>
+      </p:sp>
+      <p:sp>
+        <p:nvSpPr>
+          <p:cNvPr id="16" name="Shape 14"/>
+          <p:cNvSpPr/>
+          <p:nvPr/>
+        </p:nvSpPr>
+        <p:spPr>
+          <a:xfrm>
+            <a:off x="411480" y="3977640"/>
+            <a:ext cx="2499360" cy="0"/>
+          </a:xfrm>
+          <a:prstGeom prst="line">
+            <a:avLst/>
+          </a:prstGeom>
+          <a:noFill/>
+          <a:ln w="12700">
+            <a:solidFill>
+              <a:srgbClr val="E2E8F0"/>
+            </a:solidFill>
+            <a:prstDash val="dash"/>
+          </a:ln>
+        </p:spPr>
+      </p:sp>
+      <p:sp>
+        <p:nvSpPr>
+          <p:cNvPr id="17" name="Text 15"/>
+          <p:cNvSpPr/>
+          <p:nvPr/>
+        </p:nvSpPr>
+        <p:spPr>
+          <a:xfrm>
+            <a:off x="411480" y="3456432"/>
+            <a:ext cx="2499360" cy="502920"/>
+          </a:xfrm>
+          <a:prstGeom prst="rect">
+            <a:avLst/>
+          </a:prstGeom>
+          <a:noFill/>
+          <a:ln/>
+        </p:spPr>
+        <p:txBody>
+          <a:bodyPr wrap="square" lIns="0" tIns="0" rIns="0" bIns="0" rtlCol="0" anchor="ctr"/>
+          <a:lstStyle/>
+          <a:p>
+            <a:pPr algn="ctr" indent="0" marL="0">
+              <a:buNone/>
+            </a:pPr>
+            <a:r>
+              <a:rPr lang="en-US" sz="1400" b="1" dirty="0">
+                <a:solidFill>
+                  <a:srgbClr val="0D9488"/>
+                </a:solidFill>
+                <a:latin typeface="Trebuchet MS" pitchFamily="34" charset="0"/>
+                <a:ea typeface="Trebuchet MS" pitchFamily="34" charset="-122"/>
+                <a:cs typeface="Trebuchet MS" pitchFamily="34" charset="-120"/>
+              </a:rPr>
+              <a:t>enjoyer</a:t>
+            </a:r>
+            <a:endParaRPr lang="en-US" sz="1400" dirty="0"/>
+          </a:p>
+        </p:txBody>
+      </p:sp>
+      <p:sp>
+        <p:nvSpPr>
+          <p:cNvPr id="18" name="Text 16"/>
+          <p:cNvSpPr/>
+          <p:nvPr/>
+        </p:nvSpPr>
+        <p:spPr>
+          <a:xfrm>
+            <a:off x="411480" y="4005072"/>
+            <a:ext cx="2499360" cy="457200"/>
+          </a:xfrm>
+          <a:prstGeom prst="rect">
+            <a:avLst/>
+          </a:prstGeom>
+          <a:noFill/>
+          <a:ln/>
+        </p:spPr>
+        <p:txBody>
+          <a:bodyPr wrap="square" lIns="0" tIns="0" rIns="0" bIns="0" rtlCol="0" anchor="ctr"/>
+          <a:lstStyle/>
+          <a:p>
+            <a:pPr algn="ctr" indent="0" marL="0">
+              <a:buNone/>
+            </a:pPr>
+            <a:r>
+              <a:rPr lang="en-US" sz="900" i="1" dirty="0">
+                <a:solidFill>
+                  <a:srgbClr val="475569"/>
                 </a:solidFill>
                 <a:latin typeface="Calibri" pitchFamily="34" charset="0"/>
                 <a:ea typeface="Calibri" pitchFamily="34" charset="-122"/>
                 <a:cs typeface="Calibri" pitchFamily="34" charset="-120"/>
               </a:rPr>
-              <a:t> themselves.</a:t>
-            </a:r>
-            <a:endParaRPr lang="en-US" sz="1800" dirty="0"/>
-          </a:p>
-        </p:txBody>
-      </p:sp>
-      <p:sp>
-        <p:nvSpPr>
-          <p:cNvPr id="13" name="Shape 11"/>
-          <p:cNvSpPr/>
-          <p:nvPr/>
-        </p:nvSpPr>
-        <p:spPr>
-          <a:xfrm>
-            <a:off x="365760" y="2852928"/>
-            <a:ext cx="8412480" cy="475488"/>
-          </a:xfrm>
-          <a:prstGeom prst="rect">
-            <a:avLst>
-              <a:gd name="adj" fmla="val 15385"/>
-            </a:avLst>
-          </a:prstGeom>
-          <a:solidFill>
-            <a:srgbClr val="CCFBF1"/>
-          </a:solidFill>
-          <a:ln w="12700">
-            <a:solidFill>
-              <a:srgbClr val="0D9488"/>
-            </a:solidFill>
-            <a:prstDash val="solid"/>
-          </a:ln>
-        </p:spPr>
-      </p:sp>
-      <p:sp>
-        <p:nvSpPr>
-          <p:cNvPr id="14" name="Text 12"/>
-          <p:cNvSpPr/>
-          <p:nvPr/>
-        </p:nvSpPr>
-        <p:spPr>
-          <a:xfrm>
-            <a:off x="502920" y="2852928"/>
-            <a:ext cx="8229600" cy="475488"/>
-          </a:xfrm>
-          <a:prstGeom prst="rect">
-            <a:avLst/>
-          </a:prstGeom>
-          <a:noFill/>
-          <a:ln/>
-        </p:spPr>
-        <p:txBody>
-          <a:bodyPr wrap="square" rtlCol="0" anchor="ctr"/>
-          <a:lstStyle/>
-          <a:p>
-            <a:pPr algn="l" indent="0" marL="0">
-              <a:buNone/>
-            </a:pPr>
-            <a:r>
-              <a:rPr lang="en-US" sz="1200" b="1" dirty="0">
-                <a:solidFill>
-                  <a:srgbClr val="0F766E"/>
-                </a:solidFill>
-                <a:latin typeface="Calibri" pitchFamily="34" charset="0"/>
-                <a:ea typeface="Calibri" pitchFamily="34" charset="-122"/>
-                <a:cs typeface="Calibri" pitchFamily="34" charset="-120"/>
-              </a:rPr>
-              <a:t>Now rewrite each focus word below with space between letters — leave room for your breakdown.</a:t>
-            </a:r>
-            <a:endParaRPr lang="en-US" sz="1200" dirty="0"/>
-          </a:p>
-        </p:txBody>
-      </p:sp>
-      <p:sp>
-        <p:nvSpPr>
-          <p:cNvPr id="15" name="Shape 13"/>
-          <p:cNvSpPr/>
-          <p:nvPr/>
-        </p:nvSpPr>
-        <p:spPr>
-          <a:xfrm>
-            <a:off x="411480" y="3456432"/>
+              <a:t>write your breakdown below</a:t>
+            </a:r>
+            <a:endParaRPr lang="en-US" sz="900" dirty="0"/>
+          </a:p>
+        </p:txBody>
+      </p:sp>
+      <p:sp>
+        <p:nvSpPr>
+          <p:cNvPr id="19" name="Shape 17"/>
+          <p:cNvSpPr/>
+          <p:nvPr/>
+        </p:nvSpPr>
+        <p:spPr>
+          <a:xfrm>
+            <a:off x="3185160" y="3456432"/>
             <a:ext cx="2499360" cy="1005840"/>
           </a:xfrm>
           <a:prstGeom prst="rect">
@@ -17921,13 +18018,13 @@
       </p:sp>
       <p:sp>
         <p:nvSpPr>
-          <p:cNvPr id="16" name="Shape 14"/>
-          <p:cNvSpPr/>
-          <p:nvPr/>
-        </p:nvSpPr>
-        <p:spPr>
-          <a:xfrm>
-            <a:off x="411480" y="3977640"/>
+          <p:cNvPr id="20" name="Shape 18"/>
+          <p:cNvSpPr/>
+          <p:nvPr/>
+        </p:nvSpPr>
+        <p:spPr>
+          <a:xfrm>
+            <a:off x="3185160" y="3977640"/>
             <a:ext cx="2499360" cy="0"/>
           </a:xfrm>
           <a:prstGeom prst="line">
@@ -17944,13 +18041,13 @@
       </p:sp>
       <p:sp>
         <p:nvSpPr>
-          <p:cNvPr id="17" name="Text 15"/>
-          <p:cNvSpPr/>
-          <p:nvPr/>
-        </p:nvSpPr>
-        <p:spPr>
-          <a:xfrm>
-            <a:off x="411480" y="3456432"/>
+          <p:cNvPr id="21" name="Text 19"/>
+          <p:cNvSpPr/>
+          <p:nvPr/>
+        </p:nvSpPr>
+        <p:spPr>
+          <a:xfrm>
+            <a:off x="3185160" y="3456432"/>
             <a:ext cx="2499360" cy="502920"/>
           </a:xfrm>
           <a:prstGeom prst="rect">
@@ -17975,135 +18072,7 @@
                 <a:ea typeface="Trebuchet MS" pitchFamily="34" charset="-122"/>
                 <a:cs typeface="Trebuchet MS" pitchFamily="34" charset="-120"/>
               </a:rPr>
-              <a:t>unenjoyable</a:t>
-            </a:r>
-            <a:endParaRPr lang="en-US" sz="1400" dirty="0"/>
-          </a:p>
-        </p:txBody>
-      </p:sp>
-      <p:sp>
-        <p:nvSpPr>
-          <p:cNvPr id="18" name="Text 16"/>
-          <p:cNvSpPr/>
-          <p:nvPr/>
-        </p:nvSpPr>
-        <p:spPr>
-          <a:xfrm>
-            <a:off x="411480" y="4005072"/>
-            <a:ext cx="2499360" cy="457200"/>
-          </a:xfrm>
-          <a:prstGeom prst="rect">
-            <a:avLst/>
-          </a:prstGeom>
-          <a:noFill/>
-          <a:ln/>
-        </p:spPr>
-        <p:txBody>
-          <a:bodyPr wrap="square" lIns="0" tIns="0" rIns="0" bIns="0" rtlCol="0" anchor="ctr"/>
-          <a:lstStyle/>
-          <a:p>
-            <a:pPr algn="ctr" indent="0" marL="0">
-              <a:buNone/>
-            </a:pPr>
-            <a:r>
-              <a:rPr lang="en-US" sz="900" i="1" dirty="0">
-                <a:solidFill>
-                  <a:srgbClr val="475569"/>
-                </a:solidFill>
-                <a:latin typeface="Calibri" pitchFamily="34" charset="0"/>
-                <a:ea typeface="Calibri" pitchFamily="34" charset="-122"/>
-                <a:cs typeface="Calibri" pitchFamily="34" charset="-120"/>
-              </a:rPr>
-              <a:t>write your breakdown below</a:t>
-            </a:r>
-            <a:endParaRPr lang="en-US" sz="900" dirty="0"/>
-          </a:p>
-        </p:txBody>
-      </p:sp>
-      <p:sp>
-        <p:nvSpPr>
-          <p:cNvPr id="19" name="Shape 17"/>
-          <p:cNvSpPr/>
-          <p:nvPr/>
-        </p:nvSpPr>
-        <p:spPr>
-          <a:xfrm>
-            <a:off x="3185160" y="3456432"/>
-            <a:ext cx="2499360" cy="1005840"/>
-          </a:xfrm>
-          <a:prstGeom prst="rect">
-            <a:avLst>
-              <a:gd name="adj" fmla="val 7273"/>
-            </a:avLst>
-          </a:prstGeom>
-          <a:solidFill>
-            <a:srgbClr val="F8FAFC"/>
-          </a:solidFill>
-          <a:ln w="12700">
-            <a:solidFill>
-              <a:srgbClr val="E2E8F0"/>
-            </a:solidFill>
-            <a:prstDash val="solid"/>
-          </a:ln>
-        </p:spPr>
-      </p:sp>
-      <p:sp>
-        <p:nvSpPr>
-          <p:cNvPr id="20" name="Shape 18"/>
-          <p:cNvSpPr/>
-          <p:nvPr/>
-        </p:nvSpPr>
-        <p:spPr>
-          <a:xfrm>
-            <a:off x="3185160" y="3977640"/>
-            <a:ext cx="2499360" cy="0"/>
-          </a:xfrm>
-          <a:prstGeom prst="line">
-            <a:avLst/>
-          </a:prstGeom>
-          <a:noFill/>
-          <a:ln w="12700">
-            <a:solidFill>
-              <a:srgbClr val="E2E8F0"/>
-            </a:solidFill>
-            <a:prstDash val="dash"/>
-          </a:ln>
-        </p:spPr>
-      </p:sp>
-      <p:sp>
-        <p:nvSpPr>
-          <p:cNvPr id="21" name="Text 19"/>
-          <p:cNvSpPr/>
-          <p:nvPr/>
-        </p:nvSpPr>
-        <p:spPr>
-          <a:xfrm>
-            <a:off x="3185160" y="3456432"/>
-            <a:ext cx="2499360" cy="502920"/>
-          </a:xfrm>
-          <a:prstGeom prst="rect">
-            <a:avLst/>
-          </a:prstGeom>
-          <a:noFill/>
-          <a:ln/>
-        </p:spPr>
-        <p:txBody>
-          <a:bodyPr wrap="square" lIns="0" tIns="0" rIns="0" bIns="0" rtlCol="0" anchor="ctr"/>
-          <a:lstStyle/>
-          <a:p>
-            <a:pPr algn="ctr" indent="0" marL="0">
-              <a:buNone/>
-            </a:pPr>
-            <a:r>
-              <a:rPr lang="en-US" sz="1400" b="1" dirty="0">
-                <a:solidFill>
-                  <a:srgbClr val="0D9488"/>
-                </a:solidFill>
-                <a:latin typeface="Trebuchet MS" pitchFamily="34" charset="0"/>
-                <a:ea typeface="Trebuchet MS" pitchFamily="34" charset="-122"/>
-                <a:cs typeface="Trebuchet MS" pitchFamily="34" charset="-120"/>
-              </a:rPr>
-              <a:t>enjoyment</a:t>
+              <a:t>enjoyed</a:t>
             </a:r>
             <a:endParaRPr lang="en-US" sz="1400" dirty="0"/>
           </a:p>
@@ -18562,7 +18531,7 @@
                 <a:ea typeface="Calibri" pitchFamily="34" charset="-122"/>
                 <a:cs typeface="Calibri" pitchFamily="34" charset="-120"/>
               </a:rPr>
-              <a:t>Word Labs  •  wordlabs.app  •  Root: 'enjoy' = to take pleasure from</a:t>
+              <a:t>Word Labs  •  wordlabs.app  •  Root: 'enjoy' = to take pleasure in</a:t>
             </a:r>
             <a:endParaRPr lang="en-US" sz="800" dirty="0"/>
           </a:p>
@@ -18701,7 +18670,7 @@
                 <a:ea typeface="Trebuchet MS" pitchFamily="34" charset="-122"/>
                 <a:cs typeface="Trebuchet MS" pitchFamily="34" charset="-120"/>
               </a:rPr>
-              <a:t>unenjoyable</a:t>
+              <a:t>enjoyer</a:t>
             </a:r>
             <a:endParaRPr lang="en-US" sz="2800" dirty="0"/>
           </a:p>
@@ -19389,7 +19358,7 @@
                 <a:ea typeface="Calibri" pitchFamily="34" charset="-122"/>
                 <a:cs typeface="Calibri" pitchFamily="34" charset="-120"/>
               </a:rPr>
-              <a:t>Word Labs  •  wordlabs.app  •  Root: 'enjoy' = to take pleasure from</a:t>
+              <a:t>Word Labs  •  wordlabs.app  •  Root: 'enjoy' = to take pleasure in</a:t>
             </a:r>
             <a:endParaRPr lang="en-US" sz="800" dirty="0"/>
           </a:p>
@@ -19528,7 +19497,7 @@
                 <a:ea typeface="Trebuchet MS" pitchFamily="34" charset="-122"/>
                 <a:cs typeface="Trebuchet MS" pitchFamily="34" charset="-120"/>
               </a:rPr>
-              <a:t>unenjoyable</a:t>
+              <a:t>enjoyer</a:t>
             </a:r>
             <a:endParaRPr lang="en-US" sz="2800" dirty="0"/>
           </a:p>
@@ -19608,7 +19577,7 @@
         </p:nvSpPr>
         <p:spPr>
           <a:xfrm>
-            <a:off x="2221992" y="2258568"/>
+            <a:off x="2938272" y="2258568"/>
             <a:ext cx="1828800" cy="292608"/>
           </a:xfrm>
           <a:prstGeom prst="rect">
@@ -19617,11 +19586,11 @@
             </a:avLst>
           </a:prstGeom>
           <a:solidFill>
-            <a:srgbClr val="DDD6FE"/>
+            <a:srgbClr val="CCFBF1"/>
           </a:solidFill>
           <a:ln w="19050">
             <a:solidFill>
-              <a:srgbClr val="7C3AED"/>
+              <a:srgbClr val="0D9488"/>
             </a:solidFill>
             <a:prstDash val="solid"/>
           </a:ln>
@@ -19642,7 +19611,7 @@
         </p:nvSpPr>
         <p:spPr>
           <a:xfrm>
-            <a:off x="2221992" y="2258568"/>
+            <a:off x="2938272" y="2258568"/>
             <a:ext cx="1828800" cy="292608"/>
           </a:xfrm>
           <a:prstGeom prst="rect">
@@ -19661,13 +19630,13 @@
             <a:r>
               <a:rPr lang="en-US" sz="1300" b="1" dirty="0">
                 <a:solidFill>
-                  <a:srgbClr val="4C1D95"/>
+                  <a:srgbClr val="0F766E"/>
                 </a:solidFill>
                 <a:latin typeface="Trebuchet MS" pitchFamily="34" charset="0"/>
                 <a:ea typeface="Trebuchet MS" pitchFamily="34" charset="-122"/>
                 <a:cs typeface="Trebuchet MS" pitchFamily="34" charset="-120"/>
               </a:rPr>
-              <a:t>un</a:t>
+              <a:t>enjoy</a:t>
             </a:r>
             <a:endParaRPr lang="en-US" sz="1300" dirty="0"/>
           </a:p>
@@ -19681,7 +19650,7 @@
         </p:nvSpPr>
         <p:spPr>
           <a:xfrm>
-            <a:off x="2221992" y="2569464"/>
+            <a:off x="2938272" y="2569464"/>
             <a:ext cx="1828800" cy="201168"/>
           </a:xfrm>
           <a:prstGeom prst="rect">
@@ -19706,7 +19675,7 @@
                 <a:ea typeface="Calibri" pitchFamily="34" charset="-122"/>
                 <a:cs typeface="Calibri" pitchFamily="34" charset="-120"/>
               </a:rPr>
-              <a:t>not</a:t>
+              <a:t>to take pleasure in</a:t>
             </a:r>
             <a:endParaRPr lang="en-US" sz="850" dirty="0"/>
           </a:p>
@@ -19720,7 +19689,7 @@
         </p:nvSpPr>
         <p:spPr>
           <a:xfrm>
-            <a:off x="4370832" y="2258568"/>
+            <a:off x="5803392" y="2258568"/>
             <a:ext cx="1828800" cy="292608"/>
           </a:xfrm>
           <a:prstGeom prst="rect">
@@ -19729,11 +19698,11 @@
             </a:avLst>
           </a:prstGeom>
           <a:solidFill>
-            <a:srgbClr val="CCFBF1"/>
+            <a:srgbClr val="FCE7F3"/>
           </a:solidFill>
           <a:ln w="19050">
             <a:solidFill>
-              <a:srgbClr val="0D9488"/>
+              <a:srgbClr val="DB2777"/>
             </a:solidFill>
             <a:prstDash val="solid"/>
           </a:ln>
@@ -19754,7 +19723,7 @@
         </p:nvSpPr>
         <p:spPr>
           <a:xfrm>
-            <a:off x="4370832" y="2258568"/>
+            <a:off x="5803392" y="2258568"/>
             <a:ext cx="1828800" cy="292608"/>
           </a:xfrm>
           <a:prstGeom prst="rect">
@@ -19773,13 +19742,13 @@
             <a:r>
               <a:rPr lang="en-US" sz="1300" b="1" dirty="0">
                 <a:solidFill>
-                  <a:srgbClr val="0F766E"/>
+                  <a:srgbClr val="9D174D"/>
                 </a:solidFill>
                 <a:latin typeface="Trebuchet MS" pitchFamily="34" charset="0"/>
                 <a:ea typeface="Trebuchet MS" pitchFamily="34" charset="-122"/>
                 <a:cs typeface="Trebuchet MS" pitchFamily="34" charset="-120"/>
               </a:rPr>
-              <a:t>enjoy</a:t>
+              <a:t>er</a:t>
             </a:r>
             <a:endParaRPr lang="en-US" sz="1300" dirty="0"/>
           </a:p>
@@ -19793,7 +19762,7 @@
         </p:nvSpPr>
         <p:spPr>
           <a:xfrm>
-            <a:off x="4370832" y="2569464"/>
+            <a:off x="5803392" y="2569464"/>
             <a:ext cx="1828800" cy="201168"/>
           </a:xfrm>
           <a:prstGeom prst="rect">
@@ -19818,7 +19787,7 @@
                 <a:ea typeface="Calibri" pitchFamily="34" charset="-122"/>
                 <a:cs typeface="Calibri" pitchFamily="34" charset="-120"/>
               </a:rPr>
-              <a:t>to take pleasure from</a:t>
+              <a:t>a person who does something</a:t>
             </a:r>
             <a:endParaRPr lang="en-US" sz="850" dirty="0"/>
           </a:p>
@@ -19832,30 +19801,23 @@
         </p:nvSpPr>
         <p:spPr>
           <a:xfrm>
-            <a:off x="6519672" y="2258568"/>
-            <a:ext cx="1828800" cy="292608"/>
+            <a:off x="365760" y="3273552"/>
+            <a:ext cx="1371600" cy="658368"/>
           </a:xfrm>
           <a:prstGeom prst="rect">
             <a:avLst>
-              <a:gd name="adj" fmla="val 25000"/>
+              <a:gd name="adj" fmla="val 8333"/>
             </a:avLst>
           </a:prstGeom>
           <a:solidFill>
-            <a:srgbClr val="FCE7F3"/>
-          </a:solidFill>
-          <a:ln w="19050">
-            <a:solidFill>
-              <a:srgbClr val="DB2777"/>
-            </a:solidFill>
-            <a:prstDash val="solid"/>
-          </a:ln>
-          <a:effectLst>
-            <a:outerShdw sx="100000" sy="100000" kx="0" ky="0" algn="bl" rotWithShape="0" blurRad="101600" dist="38100" dir="8100000">
-              <a:srgbClr val="000000">
-                <a:alpha val="12000"/>
-              </a:srgbClr>
-            </a:outerShdw>
-          </a:effectLst>
+            <a:srgbClr val="E2E8F0"/>
+          </a:solidFill>
+          <a:ln w="12700">
+            <a:solidFill>
+              <a:srgbClr val="E2E8F0"/>
+            </a:solidFill>
+            <a:prstDash val="solid"/>
+          </a:ln>
         </p:spPr>
       </p:sp>
       <p:sp>
@@ -19866,90 +19828,117 @@
         </p:nvSpPr>
         <p:spPr>
           <a:xfrm>
-            <a:off x="6519672" y="2258568"/>
-            <a:ext cx="1828800" cy="292608"/>
-          </a:xfrm>
-          <a:prstGeom prst="rect">
-            <a:avLst/>
-          </a:prstGeom>
-          <a:noFill/>
-          <a:ln/>
-        </p:spPr>
-        <p:txBody>
-          <a:bodyPr wrap="square" lIns="0" tIns="0" rIns="0" bIns="0" rtlCol="0" anchor="ctr"/>
-          <a:lstStyle/>
-          <a:p>
-            <a:pPr algn="ctr" indent="0" marL="0">
-              <a:buNone/>
-            </a:pPr>
-            <a:r>
-              <a:rPr lang="en-US" sz="1300" b="1" dirty="0">
-                <a:solidFill>
-                  <a:srgbClr val="9D174D"/>
+            <a:off x="365760" y="3273552"/>
+            <a:ext cx="1371600" cy="658368"/>
+          </a:xfrm>
+          <a:prstGeom prst="rect">
+            <a:avLst/>
+          </a:prstGeom>
+          <a:noFill/>
+          <a:ln/>
+        </p:spPr>
+        <p:txBody>
+          <a:bodyPr wrap="square" lIns="0" tIns="0" rIns="0" bIns="0" rtlCol="0" anchor="ctr"/>
+          <a:lstStyle/>
+          <a:p>
+            <a:pPr algn="ctr" indent="0" marL="0">
+              <a:buNone/>
+            </a:pPr>
+            <a:r>
+              <a:rPr lang="en-US" sz="1100" b="1" dirty="0">
+                <a:solidFill>
+                  <a:srgbClr val="475569"/>
                 </a:solidFill>
                 <a:latin typeface="Trebuchet MS" pitchFamily="34" charset="0"/>
                 <a:ea typeface="Trebuchet MS" pitchFamily="34" charset="-122"/>
                 <a:cs typeface="Trebuchet MS" pitchFamily="34" charset="-120"/>
               </a:rPr>
-              <a:t>able</a:t>
-            </a:r>
-            <a:endParaRPr lang="en-US" sz="1300" dirty="0"/>
-          </a:p>
-        </p:txBody>
-      </p:sp>
-      <p:sp>
-        <p:nvSpPr>
-          <p:cNvPr id="24" name="Text 22"/>
-          <p:cNvSpPr/>
-          <p:nvPr/>
-        </p:nvSpPr>
-        <p:spPr>
-          <a:xfrm>
-            <a:off x="6519672" y="2569464"/>
-            <a:ext cx="1828800" cy="201168"/>
-          </a:xfrm>
-          <a:prstGeom prst="rect">
-            <a:avLst/>
-          </a:prstGeom>
-          <a:noFill/>
-          <a:ln/>
-        </p:spPr>
-        <p:txBody>
-          <a:bodyPr wrap="square" lIns="0" tIns="0" rIns="0" bIns="0" rtlCol="0" anchor="t"/>
-          <a:lstStyle/>
-          <a:p>
-            <a:pPr algn="ctr" indent="0" marL="0">
-              <a:buNone/>
-            </a:pPr>
-            <a:r>
-              <a:rPr lang="en-US" sz="850" dirty="0">
-                <a:solidFill>
-                  <a:srgbClr val="475569"/>
+              <a:t>Syllables</a:t>
+            </a:r>
+            <a:endParaRPr lang="en-US" sz="1100" dirty="0"/>
+          </a:p>
+        </p:txBody>
+      </p:sp>
+      <p:sp>
+        <p:nvSpPr>
+          <p:cNvPr id="24" name="Shape 22"/>
+          <p:cNvSpPr/>
+          <p:nvPr/>
+        </p:nvSpPr>
+        <p:spPr>
+          <a:xfrm>
+            <a:off x="1874520" y="3273552"/>
+            <a:ext cx="6903720" cy="658368"/>
+          </a:xfrm>
+          <a:prstGeom prst="rect">
+            <a:avLst>
+              <a:gd name="adj" fmla="val 8333"/>
+            </a:avLst>
+          </a:prstGeom>
+          <a:solidFill>
+            <a:srgbClr val="F8FAFC"/>
+          </a:solidFill>
+          <a:ln w="12700">
+            <a:solidFill>
+              <a:srgbClr val="E2E8F0"/>
+            </a:solidFill>
+            <a:prstDash val="dash"/>
+          </a:ln>
+        </p:spPr>
+      </p:sp>
+      <p:sp>
+        <p:nvSpPr>
+          <p:cNvPr id="25" name="Text 23"/>
+          <p:cNvSpPr/>
+          <p:nvPr/>
+        </p:nvSpPr>
+        <p:spPr>
+          <a:xfrm>
+            <a:off x="1874520" y="3273552"/>
+            <a:ext cx="6903720" cy="658368"/>
+          </a:xfrm>
+          <a:prstGeom prst="rect">
+            <a:avLst/>
+          </a:prstGeom>
+          <a:noFill/>
+          <a:ln/>
+        </p:spPr>
+        <p:txBody>
+          <a:bodyPr wrap="square" rtlCol="0" anchor="ctr"/>
+          <a:lstStyle/>
+          <a:p>
+            <a:pPr algn="ctr" indent="0" marL="0">
+              <a:buNone/>
+            </a:pPr>
+            <a:r>
+              <a:rPr lang="en-US" sz="1100" i="1" dirty="0">
+                <a:solidFill>
+                  <a:srgbClr val="CBD5E1"/>
                 </a:solidFill>
                 <a:latin typeface="Calibri" pitchFamily="34" charset="0"/>
                 <a:ea typeface="Calibri" pitchFamily="34" charset="-122"/>
                 <a:cs typeface="Calibri" pitchFamily="34" charset="-120"/>
               </a:rPr>
-              <a:t>able to be, capable of</a:t>
-            </a:r>
-            <a:endParaRPr lang="en-US" sz="850" dirty="0"/>
-          </a:p>
-        </p:txBody>
-      </p:sp>
-      <p:sp>
-        <p:nvSpPr>
-          <p:cNvPr id="25" name="Shape 23"/>
-          <p:cNvSpPr/>
-          <p:nvPr/>
-        </p:nvSpPr>
-        <p:spPr>
-          <a:xfrm>
-            <a:off x="365760" y="3273552"/>
-            <a:ext cx="1371600" cy="658368"/>
+              <a:t>Write here...</a:t>
+            </a:r>
+            <a:endParaRPr lang="en-US" sz="1100" dirty="0"/>
+          </a:p>
+        </p:txBody>
+      </p:sp>
+      <p:sp>
+        <p:nvSpPr>
+          <p:cNvPr id="26" name="Shape 24"/>
+          <p:cNvSpPr/>
+          <p:nvPr/>
+        </p:nvSpPr>
+        <p:spPr>
+          <a:xfrm>
+            <a:off x="365760" y="4096512"/>
+            <a:ext cx="1371600" cy="804672"/>
           </a:xfrm>
           <a:prstGeom prst="rect">
             <a:avLst>
-              <a:gd name="adj" fmla="val 8333"/>
+              <a:gd name="adj" fmla="val 6818"/>
             </a:avLst>
           </a:prstGeom>
           <a:solidFill>
@@ -19965,14 +19954,14 @@
       </p:sp>
       <p:sp>
         <p:nvSpPr>
-          <p:cNvPr id="26" name="Text 24"/>
-          <p:cNvSpPr/>
-          <p:nvPr/>
-        </p:nvSpPr>
-        <p:spPr>
-          <a:xfrm>
-            <a:off x="365760" y="3273552"/>
-            <a:ext cx="1371600" cy="658368"/>
+          <p:cNvPr id="27" name="Text 25"/>
+          <p:cNvSpPr/>
+          <p:nvPr/>
+        </p:nvSpPr>
+        <p:spPr>
+          <a:xfrm>
+            <a:off x="365760" y="4096512"/>
+            <a:ext cx="1371600" cy="804672"/>
           </a:xfrm>
           <a:prstGeom prst="rect">
             <a:avLst/>
@@ -19996,7 +19985,7 @@
                 <a:ea typeface="Trebuchet MS" pitchFamily="34" charset="-122"/>
                 <a:cs typeface="Trebuchet MS" pitchFamily="34" charset="-120"/>
               </a:rPr>
-              <a:t>Syllables</a:t>
+              <a:t>Phonemes</a:t>
             </a:r>
             <a:endParaRPr lang="en-US" sz="1100" dirty="0"/>
           </a:p>
@@ -20004,80 +19993,14 @@
       </p:sp>
       <p:sp>
         <p:nvSpPr>
-          <p:cNvPr id="27" name="Shape 25"/>
-          <p:cNvSpPr/>
-          <p:nvPr/>
-        </p:nvSpPr>
-        <p:spPr>
-          <a:xfrm>
-            <a:off x="1874520" y="3273552"/>
-            <a:ext cx="6903720" cy="658368"/>
-          </a:xfrm>
-          <a:prstGeom prst="rect">
-            <a:avLst>
-              <a:gd name="adj" fmla="val 8333"/>
-            </a:avLst>
-          </a:prstGeom>
-          <a:solidFill>
-            <a:srgbClr val="F8FAFC"/>
-          </a:solidFill>
-          <a:ln w="12700">
-            <a:solidFill>
-              <a:srgbClr val="E2E8F0"/>
-            </a:solidFill>
-            <a:prstDash val="dash"/>
-          </a:ln>
-        </p:spPr>
-      </p:sp>
-      <p:sp>
-        <p:nvSpPr>
-          <p:cNvPr id="28" name="Text 26"/>
-          <p:cNvSpPr/>
-          <p:nvPr/>
-        </p:nvSpPr>
-        <p:spPr>
-          <a:xfrm>
-            <a:off x="1874520" y="3273552"/>
-            <a:ext cx="6903720" cy="658368"/>
-          </a:xfrm>
-          <a:prstGeom prst="rect">
-            <a:avLst/>
-          </a:prstGeom>
-          <a:noFill/>
-          <a:ln/>
-        </p:spPr>
-        <p:txBody>
-          <a:bodyPr wrap="square" rtlCol="0" anchor="ctr"/>
-          <a:lstStyle/>
-          <a:p>
-            <a:pPr algn="ctr" indent="0" marL="0">
-              <a:buNone/>
-            </a:pPr>
-            <a:r>
-              <a:rPr lang="en-US" sz="1100" i="1" dirty="0">
-                <a:solidFill>
-                  <a:srgbClr val="CBD5E1"/>
-                </a:solidFill>
-                <a:latin typeface="Calibri" pitchFamily="34" charset="0"/>
-                <a:ea typeface="Calibri" pitchFamily="34" charset="-122"/>
-                <a:cs typeface="Calibri" pitchFamily="34" charset="-120"/>
-              </a:rPr>
-              <a:t>Write here...</a:t>
-            </a:r>
-            <a:endParaRPr lang="en-US" sz="1100" dirty="0"/>
-          </a:p>
-        </p:txBody>
-      </p:sp>
-      <p:sp>
-        <p:nvSpPr>
-          <p:cNvPr id="29" name="Shape 27"/>
-          <p:cNvSpPr/>
-          <p:nvPr/>
-        </p:nvSpPr>
-        <p:spPr>
-          <a:xfrm>
-            <a:off x="365760" y="4096512"/>
-            <a:ext cx="1371600" cy="804672"/>
+          <p:cNvPr id="28" name="Shape 26"/>
+          <p:cNvSpPr/>
+          <p:nvPr/>
+        </p:nvSpPr>
+        <p:spPr>
+          <a:xfrm>
+            <a:off x="1874520" y="4096512"/>
+            <a:ext cx="6903720" cy="804672"/>
           </a:xfrm>
           <a:prstGeom prst="rect">
             <a:avLst>
@@ -20085,85 +20008,19 @@
             </a:avLst>
           </a:prstGeom>
           <a:solidFill>
-            <a:srgbClr val="E2E8F0"/>
+            <a:srgbClr val="F8FAFC"/>
           </a:solidFill>
           <a:ln w="12700">
             <a:solidFill>
               <a:srgbClr val="E2E8F0"/>
             </a:solidFill>
-            <a:prstDash val="solid"/>
-          </a:ln>
-        </p:spPr>
-      </p:sp>
-      <p:sp>
-        <p:nvSpPr>
-          <p:cNvPr id="30" name="Text 28"/>
-          <p:cNvSpPr/>
-          <p:nvPr/>
-        </p:nvSpPr>
-        <p:spPr>
-          <a:xfrm>
-            <a:off x="365760" y="4096512"/>
-            <a:ext cx="1371600" cy="804672"/>
-          </a:xfrm>
-          <a:prstGeom prst="rect">
-            <a:avLst/>
-          </a:prstGeom>
-          <a:noFill/>
-          <a:ln/>
-        </p:spPr>
-        <p:txBody>
-          <a:bodyPr wrap="square" lIns="0" tIns="0" rIns="0" bIns="0" rtlCol="0" anchor="ctr"/>
-          <a:lstStyle/>
-          <a:p>
-            <a:pPr algn="ctr" indent="0" marL="0">
-              <a:buNone/>
-            </a:pPr>
-            <a:r>
-              <a:rPr lang="en-US" sz="1100" b="1" dirty="0">
-                <a:solidFill>
-                  <a:srgbClr val="475569"/>
-                </a:solidFill>
-                <a:latin typeface="Trebuchet MS" pitchFamily="34" charset="0"/>
-                <a:ea typeface="Trebuchet MS" pitchFamily="34" charset="-122"/>
-                <a:cs typeface="Trebuchet MS" pitchFamily="34" charset="-120"/>
-              </a:rPr>
-              <a:t>Phonemes</a:t>
-            </a:r>
-            <a:endParaRPr lang="en-US" sz="1100" dirty="0"/>
-          </a:p>
-        </p:txBody>
-      </p:sp>
-      <p:sp>
-        <p:nvSpPr>
-          <p:cNvPr id="31" name="Shape 29"/>
-          <p:cNvSpPr/>
-          <p:nvPr/>
-        </p:nvSpPr>
-        <p:spPr>
-          <a:xfrm>
-            <a:off x="1874520" y="4096512"/>
-            <a:ext cx="6903720" cy="804672"/>
-          </a:xfrm>
-          <a:prstGeom prst="rect">
-            <a:avLst>
-              <a:gd name="adj" fmla="val 6818"/>
-            </a:avLst>
-          </a:prstGeom>
-          <a:solidFill>
-            <a:srgbClr val="F8FAFC"/>
-          </a:solidFill>
-          <a:ln w="12700">
-            <a:solidFill>
-              <a:srgbClr val="E2E8F0"/>
-            </a:solidFill>
             <a:prstDash val="dash"/>
           </a:ln>
         </p:spPr>
       </p:sp>
       <p:sp>
         <p:nvSpPr>
-          <p:cNvPr id="32" name="Text 30"/>
+          <p:cNvPr id="29" name="Text 27"/>
           <p:cNvSpPr/>
           <p:nvPr/>
         </p:nvSpPr>
@@ -20486,7 +20343,7 @@
                 <a:ea typeface="Calibri" pitchFamily="34" charset="-122"/>
                 <a:cs typeface="Calibri" pitchFamily="34" charset="-120"/>
               </a:rPr>
-              <a:t>Word Labs  •  wordlabs.app  •  Root: 'enjoy' = to take pleasure from</a:t>
+              <a:t>Word Labs  •  wordlabs.app  •  Root: 'enjoy' = to take pleasure in</a:t>
             </a:r>
             <a:endParaRPr lang="en-US" sz="800" dirty="0"/>
           </a:p>
@@ -20625,7 +20482,7 @@
                 <a:ea typeface="Trebuchet MS" pitchFamily="34" charset="-122"/>
                 <a:cs typeface="Trebuchet MS" pitchFamily="34" charset="-120"/>
               </a:rPr>
-              <a:t>unenjoyable</a:t>
+              <a:t>enjoyer</a:t>
             </a:r>
             <a:endParaRPr lang="en-US" sz="2800" dirty="0"/>
           </a:p>
@@ -20705,7 +20562,7 @@
         </p:nvSpPr>
         <p:spPr>
           <a:xfrm>
-            <a:off x="2221992" y="2258568"/>
+            <a:off x="2938272" y="2258568"/>
             <a:ext cx="1828800" cy="292608"/>
           </a:xfrm>
           <a:prstGeom prst="rect">
@@ -20714,11 +20571,11 @@
             </a:avLst>
           </a:prstGeom>
           <a:solidFill>
-            <a:srgbClr val="DDD6FE"/>
+            <a:srgbClr val="CCFBF1"/>
           </a:solidFill>
           <a:ln w="19050">
             <a:solidFill>
-              <a:srgbClr val="7C3AED"/>
+              <a:srgbClr val="0D9488"/>
             </a:solidFill>
             <a:prstDash val="solid"/>
           </a:ln>
@@ -20739,7 +20596,7 @@
         </p:nvSpPr>
         <p:spPr>
           <a:xfrm>
-            <a:off x="2221992" y="2258568"/>
+            <a:off x="2938272" y="2258568"/>
             <a:ext cx="1828800" cy="292608"/>
           </a:xfrm>
           <a:prstGeom prst="rect">
@@ -20758,13 +20615,13 @@
             <a:r>
               <a:rPr lang="en-US" sz="1300" b="1" dirty="0">
                 <a:solidFill>
-                  <a:srgbClr val="4C1D95"/>
+                  <a:srgbClr val="0F766E"/>
                 </a:solidFill>
                 <a:latin typeface="Trebuchet MS" pitchFamily="34" charset="0"/>
                 <a:ea typeface="Trebuchet MS" pitchFamily="34" charset="-122"/>
                 <a:cs typeface="Trebuchet MS" pitchFamily="34" charset="-120"/>
               </a:rPr>
-              <a:t>un</a:t>
+              <a:t>enjoy</a:t>
             </a:r>
             <a:endParaRPr lang="en-US" sz="1300" dirty="0"/>
           </a:p>
@@ -20778,7 +20635,7 @@
         </p:nvSpPr>
         <p:spPr>
           <a:xfrm>
-            <a:off x="2221992" y="2569464"/>
+            <a:off x="2938272" y="2569464"/>
             <a:ext cx="1828800" cy="201168"/>
           </a:xfrm>
           <a:prstGeom prst="rect">
@@ -20803,7 +20660,7 @@
                 <a:ea typeface="Calibri" pitchFamily="34" charset="-122"/>
                 <a:cs typeface="Calibri" pitchFamily="34" charset="-120"/>
               </a:rPr>
-              <a:t>not</a:t>
+              <a:t>to take pleasure in</a:t>
             </a:r>
             <a:endParaRPr lang="en-US" sz="850" dirty="0"/>
           </a:p>
@@ -20817,7 +20674,7 @@
         </p:nvSpPr>
         <p:spPr>
           <a:xfrm>
-            <a:off x="4370832" y="2258568"/>
+            <a:off x="5803392" y="2258568"/>
             <a:ext cx="1828800" cy="292608"/>
           </a:xfrm>
           <a:prstGeom prst="rect">
@@ -20826,11 +20683,11 @@
             </a:avLst>
           </a:prstGeom>
           <a:solidFill>
-            <a:srgbClr val="CCFBF1"/>
+            <a:srgbClr val="FCE7F3"/>
           </a:solidFill>
           <a:ln w="19050">
             <a:solidFill>
-              <a:srgbClr val="0D9488"/>
+              <a:srgbClr val="DB2777"/>
             </a:solidFill>
             <a:prstDash val="solid"/>
           </a:ln>
@@ -20851,7 +20708,7 @@
         </p:nvSpPr>
         <p:spPr>
           <a:xfrm>
-            <a:off x="4370832" y="2258568"/>
+            <a:off x="5803392" y="2258568"/>
             <a:ext cx="1828800" cy="292608"/>
           </a:xfrm>
           <a:prstGeom prst="rect">
@@ -20870,13 +20727,13 @@
             <a:r>
               <a:rPr lang="en-US" sz="1300" b="1" dirty="0">
                 <a:solidFill>
-                  <a:srgbClr val="0F766E"/>
+                  <a:srgbClr val="9D174D"/>
                 </a:solidFill>
                 <a:latin typeface="Trebuchet MS" pitchFamily="34" charset="0"/>
                 <a:ea typeface="Trebuchet MS" pitchFamily="34" charset="-122"/>
                 <a:cs typeface="Trebuchet MS" pitchFamily="34" charset="-120"/>
               </a:rPr>
-              <a:t>enjoy</a:t>
+              <a:t>er</a:t>
             </a:r>
             <a:endParaRPr lang="en-US" sz="1300" dirty="0"/>
           </a:p>
@@ -20890,7 +20747,7 @@
         </p:nvSpPr>
         <p:spPr>
           <a:xfrm>
-            <a:off x="4370832" y="2569464"/>
+            <a:off x="5803392" y="2569464"/>
             <a:ext cx="1828800" cy="201168"/>
           </a:xfrm>
           <a:prstGeom prst="rect">
@@ -20915,7 +20772,7 @@
                 <a:ea typeface="Calibri" pitchFamily="34" charset="-122"/>
                 <a:cs typeface="Calibri" pitchFamily="34" charset="-120"/>
               </a:rPr>
-              <a:t>to take pleasure from</a:t>
+              <a:t>a person who does something</a:t>
             </a:r>
             <a:endParaRPr lang="en-US" sz="850" dirty="0"/>
           </a:p>
@@ -20929,30 +20786,23 @@
         </p:nvSpPr>
         <p:spPr>
           <a:xfrm>
-            <a:off x="6519672" y="2258568"/>
-            <a:ext cx="1828800" cy="292608"/>
+            <a:off x="365760" y="3273552"/>
+            <a:ext cx="1371600" cy="658368"/>
           </a:xfrm>
           <a:prstGeom prst="rect">
             <a:avLst>
-              <a:gd name="adj" fmla="val 25000"/>
+              <a:gd name="adj" fmla="val 8333"/>
             </a:avLst>
           </a:prstGeom>
           <a:solidFill>
-            <a:srgbClr val="FCE7F3"/>
-          </a:solidFill>
-          <a:ln w="19050">
-            <a:solidFill>
-              <a:srgbClr val="DB2777"/>
-            </a:solidFill>
-            <a:prstDash val="solid"/>
-          </a:ln>
-          <a:effectLst>
-            <a:outerShdw sx="100000" sy="100000" kx="0" ky="0" algn="bl" rotWithShape="0" blurRad="101600" dist="38100" dir="8100000">
-              <a:srgbClr val="000000">
-                <a:alpha val="12000"/>
-              </a:srgbClr>
-            </a:outerShdw>
-          </a:effectLst>
+            <a:srgbClr val="E2E8F0"/>
+          </a:solidFill>
+          <a:ln w="12700">
+            <a:solidFill>
+              <a:srgbClr val="E2E8F0"/>
+            </a:solidFill>
+            <a:prstDash val="solid"/>
+          </a:ln>
         </p:spPr>
       </p:sp>
       <p:sp>
@@ -20963,86 +20813,47 @@
         </p:nvSpPr>
         <p:spPr>
           <a:xfrm>
-            <a:off x="6519672" y="2258568"/>
-            <a:ext cx="1828800" cy="292608"/>
-          </a:xfrm>
-          <a:prstGeom prst="rect">
-            <a:avLst/>
-          </a:prstGeom>
-          <a:noFill/>
-          <a:ln/>
-        </p:spPr>
-        <p:txBody>
-          <a:bodyPr wrap="square" lIns="0" tIns="0" rIns="0" bIns="0" rtlCol="0" anchor="ctr"/>
-          <a:lstStyle/>
-          <a:p>
-            <a:pPr algn="ctr" indent="0" marL="0">
-              <a:buNone/>
-            </a:pPr>
-            <a:r>
-              <a:rPr lang="en-US" sz="1300" b="1" dirty="0">
-                <a:solidFill>
-                  <a:srgbClr val="9D174D"/>
+            <a:off x="365760" y="3273552"/>
+            <a:ext cx="1371600" cy="658368"/>
+          </a:xfrm>
+          <a:prstGeom prst="rect">
+            <a:avLst/>
+          </a:prstGeom>
+          <a:noFill/>
+          <a:ln/>
+        </p:spPr>
+        <p:txBody>
+          <a:bodyPr wrap="square" lIns="0" tIns="0" rIns="0" bIns="0" rtlCol="0" anchor="ctr"/>
+          <a:lstStyle/>
+          <a:p>
+            <a:pPr algn="ctr" indent="0" marL="0">
+              <a:buNone/>
+            </a:pPr>
+            <a:r>
+              <a:rPr lang="en-US" sz="1100" b="1" dirty="0">
+                <a:solidFill>
+                  <a:srgbClr val="475569"/>
                 </a:solidFill>
                 <a:latin typeface="Trebuchet MS" pitchFamily="34" charset="0"/>
                 <a:ea typeface="Trebuchet MS" pitchFamily="34" charset="-122"/>
                 <a:cs typeface="Trebuchet MS" pitchFamily="34" charset="-120"/>
               </a:rPr>
-              <a:t>able</a:t>
-            </a:r>
-            <a:endParaRPr lang="en-US" sz="1300" dirty="0"/>
-          </a:p>
-        </p:txBody>
-      </p:sp>
-      <p:sp>
-        <p:nvSpPr>
-          <p:cNvPr id="24" name="Text 22"/>
-          <p:cNvSpPr/>
-          <p:nvPr/>
-        </p:nvSpPr>
-        <p:spPr>
-          <a:xfrm>
-            <a:off x="6519672" y="2569464"/>
-            <a:ext cx="1828800" cy="201168"/>
-          </a:xfrm>
-          <a:prstGeom prst="rect">
-            <a:avLst/>
-          </a:prstGeom>
-          <a:noFill/>
-          <a:ln/>
-        </p:spPr>
-        <p:txBody>
-          <a:bodyPr wrap="square" lIns="0" tIns="0" rIns="0" bIns="0" rtlCol="0" anchor="t"/>
-          <a:lstStyle/>
-          <a:p>
-            <a:pPr algn="ctr" indent="0" marL="0">
-              <a:buNone/>
-            </a:pPr>
-            <a:r>
-              <a:rPr lang="en-US" sz="850" dirty="0">
-                <a:solidFill>
-                  <a:srgbClr val="475569"/>
-                </a:solidFill>
-                <a:latin typeface="Calibri" pitchFamily="34" charset="0"/>
-                <a:ea typeface="Calibri" pitchFamily="34" charset="-122"/>
-                <a:cs typeface="Calibri" pitchFamily="34" charset="-120"/>
-              </a:rPr>
-              <a:t>able to be, capable of</a:t>
-            </a:r>
-            <a:endParaRPr lang="en-US" sz="850" dirty="0"/>
-          </a:p>
-        </p:txBody>
-      </p:sp>
-      <p:sp>
-        <p:nvSpPr>
-          <p:cNvPr id="25" name="Shape 23"/>
-          <p:cNvSpPr/>
-          <p:nvPr/>
-        </p:nvSpPr>
-        <p:spPr>
-          <a:xfrm>
-            <a:off x="365760" y="3273552"/>
-            <a:ext cx="1371600" cy="658368"/>
+              <a:t>Syllables</a:t>
+            </a:r>
+            <a:endParaRPr lang="en-US" sz="1100" dirty="0"/>
+          </a:p>
+        </p:txBody>
+      </p:sp>
+      <p:sp>
+        <p:nvSpPr>
+          <p:cNvPr id="24" name="Shape 22"/>
+          <p:cNvSpPr/>
+          <p:nvPr/>
+        </p:nvSpPr>
+        <p:spPr>
+          <a:xfrm>
+            <a:off x="1874520" y="3273552"/>
+            <a:ext cx="6903720" cy="658368"/>
           </a:xfrm>
           <a:prstGeom prst="rect">
             <a:avLst>
@@ -21050,11 +20861,38 @@
             </a:avLst>
           </a:prstGeom>
           <a:solidFill>
-            <a:srgbClr val="E2E8F0"/>
-          </a:solidFill>
-          <a:ln w="12700">
-            <a:solidFill>
-              <a:srgbClr val="E2E8F0"/>
+            <a:srgbClr val="CCFBF1"/>
+          </a:solidFill>
+          <a:ln w="12700">
+            <a:solidFill>
+              <a:srgbClr val="0D9488"/>
+            </a:solidFill>
+            <a:prstDash val="solid"/>
+          </a:ln>
+        </p:spPr>
+      </p:sp>
+      <p:sp>
+        <p:nvSpPr>
+          <p:cNvPr id="25" name="Shape 23"/>
+          <p:cNvSpPr/>
+          <p:nvPr/>
+        </p:nvSpPr>
+        <p:spPr>
+          <a:xfrm>
+            <a:off x="2313432" y="3364992"/>
+            <a:ext cx="1645920" cy="475488"/>
+          </a:xfrm>
+          <a:prstGeom prst="rect">
+            <a:avLst>
+              <a:gd name="adj" fmla="val 9615"/>
+            </a:avLst>
+          </a:prstGeom>
+          <a:solidFill>
+            <a:srgbClr val="FFFFFF"/>
+          </a:solidFill>
+          <a:ln w="12700">
+            <a:solidFill>
+              <a:srgbClr val="0D9488"/>
             </a:solidFill>
             <a:prstDash val="solid"/>
           </a:ln>
@@ -21068,63 +20906,75 @@
         </p:nvSpPr>
         <p:spPr>
           <a:xfrm>
-            <a:off x="365760" y="3273552"/>
-            <a:ext cx="1371600" cy="658368"/>
-          </a:xfrm>
-          <a:prstGeom prst="rect">
-            <a:avLst/>
-          </a:prstGeom>
-          <a:noFill/>
-          <a:ln/>
-        </p:spPr>
-        <p:txBody>
-          <a:bodyPr wrap="square" lIns="0" tIns="0" rIns="0" bIns="0" rtlCol="0" anchor="ctr"/>
-          <a:lstStyle/>
-          <a:p>
-            <a:pPr algn="ctr" indent="0" marL="0">
-              <a:buNone/>
-            </a:pPr>
-            <a:r>
-              <a:rPr lang="en-US" sz="1100" b="1" dirty="0">
-                <a:solidFill>
-                  <a:srgbClr val="475569"/>
+            <a:off x="2313432" y="3364992"/>
+            <a:ext cx="1645920" cy="475488"/>
+          </a:xfrm>
+          <a:prstGeom prst="rect">
+            <a:avLst/>
+          </a:prstGeom>
+          <a:noFill/>
+          <a:ln/>
+        </p:spPr>
+        <p:txBody>
+          <a:bodyPr wrap="square" lIns="0" tIns="0" rIns="0" bIns="0" rtlCol="0" anchor="ctr"/>
+          <a:lstStyle/>
+          <a:p>
+            <a:pPr algn="ctr" indent="0" marL="0">
+              <a:buNone/>
+            </a:pPr>
+            <a:r>
+              <a:rPr lang="en-US" sz="1400" b="1" dirty="0">
+                <a:solidFill>
+                  <a:srgbClr val="0D9488"/>
                 </a:solidFill>
                 <a:latin typeface="Trebuchet MS" pitchFamily="34" charset="0"/>
                 <a:ea typeface="Trebuchet MS" pitchFamily="34" charset="-122"/>
                 <a:cs typeface="Trebuchet MS" pitchFamily="34" charset="-120"/>
               </a:rPr>
-              <a:t>Syllables</a:t>
-            </a:r>
-            <a:endParaRPr lang="en-US" sz="1100" dirty="0"/>
-          </a:p>
-        </p:txBody>
-      </p:sp>
-      <p:sp>
-        <p:nvSpPr>
-          <p:cNvPr id="27" name="Shape 25"/>
-          <p:cNvSpPr/>
-          <p:nvPr/>
-        </p:nvSpPr>
-        <p:spPr>
-          <a:xfrm>
-            <a:off x="1874520" y="3273552"/>
-            <a:ext cx="6903720" cy="658368"/>
-          </a:xfrm>
-          <a:prstGeom prst="rect">
-            <a:avLst>
-              <a:gd name="adj" fmla="val 8333"/>
-            </a:avLst>
-          </a:prstGeom>
-          <a:solidFill>
-            <a:srgbClr val="CCFBF1"/>
-          </a:solidFill>
-          <a:ln w="12700">
-            <a:solidFill>
-              <a:srgbClr val="0D9488"/>
-            </a:solidFill>
-            <a:prstDash val="solid"/>
-          </a:ln>
-        </p:spPr>
+              <a:t>en</a:t>
+            </a:r>
+            <a:endParaRPr lang="en-US" sz="1400" dirty="0"/>
+          </a:p>
+        </p:txBody>
+      </p:sp>
+      <p:sp>
+        <p:nvSpPr>
+          <p:cNvPr id="27" name="Text 25"/>
+          <p:cNvSpPr/>
+          <p:nvPr/>
+        </p:nvSpPr>
+        <p:spPr>
+          <a:xfrm>
+            <a:off x="3959352" y="3364992"/>
+            <a:ext cx="411480" cy="475488"/>
+          </a:xfrm>
+          <a:prstGeom prst="rect">
+            <a:avLst/>
+          </a:prstGeom>
+          <a:noFill/>
+          <a:ln/>
+        </p:spPr>
+        <p:txBody>
+          <a:bodyPr wrap="square" lIns="0" tIns="0" rIns="0" bIns="0" rtlCol="0" anchor="ctr"/>
+          <a:lstStyle/>
+          <a:p>
+            <a:pPr algn="ctr" indent="0" marL="0">
+              <a:buNone/>
+            </a:pPr>
+            <a:r>
+              <a:rPr lang="en-US" sz="1600" b="1" dirty="0">
+                <a:solidFill>
+                  <a:srgbClr val="0D9488"/>
+                </a:solidFill>
+                <a:latin typeface="Trebuchet MS" pitchFamily="34" charset="0"/>
+                <a:ea typeface="Trebuchet MS" pitchFamily="34" charset="-122"/>
+                <a:cs typeface="Trebuchet MS" pitchFamily="34" charset="-120"/>
+              </a:rPr>
+              <a:t>·</a:t>
+            </a:r>
+            <a:endParaRPr lang="en-US" sz="1600" dirty="0"/>
+          </a:p>
+        </p:txBody>
       </p:sp>
       <p:sp>
         <p:nvSpPr>
@@ -21134,8 +20984,8 @@
         </p:nvSpPr>
         <p:spPr>
           <a:xfrm>
-            <a:off x="1978152" y="3364992"/>
-            <a:ext cx="1225296" cy="475488"/>
+            <a:off x="4370832" y="3364992"/>
+            <a:ext cx="1645920" cy="475488"/>
           </a:xfrm>
           <a:prstGeom prst="rect">
             <a:avLst>
@@ -21161,8 +21011,8 @@
         </p:nvSpPr>
         <p:spPr>
           <a:xfrm>
-            <a:off x="1978152" y="3364992"/>
-            <a:ext cx="1225296" cy="475488"/>
+            <a:off x="4370832" y="3364992"/>
+            <a:ext cx="1645920" cy="475488"/>
           </a:xfrm>
           <a:prstGeom prst="rect">
             <a:avLst/>
@@ -21186,7 +21036,7 @@
                 <a:ea typeface="Trebuchet MS" pitchFamily="34" charset="-122"/>
                 <a:cs typeface="Trebuchet MS" pitchFamily="34" charset="-120"/>
               </a:rPr>
-              <a:t>un</a:t>
+              <a:t>joy</a:t>
             </a:r>
             <a:endParaRPr lang="en-US" sz="1400" dirty="0"/>
           </a:p>
@@ -21200,8 +21050,8 @@
         </p:nvSpPr>
         <p:spPr>
           <a:xfrm>
-            <a:off x="3203448" y="3364992"/>
-            <a:ext cx="76200" cy="475488"/>
+            <a:off x="6016752" y="3364992"/>
+            <a:ext cx="411480" cy="475488"/>
           </a:xfrm>
           <a:prstGeom prst="rect">
             <a:avLst/>
@@ -21239,8 +21089,8 @@
         </p:nvSpPr>
         <p:spPr>
           <a:xfrm>
-            <a:off x="3279648" y="3364992"/>
-            <a:ext cx="1225296" cy="475488"/>
+            <a:off x="6428232" y="3364992"/>
+            <a:ext cx="1645920" cy="475488"/>
           </a:xfrm>
           <a:prstGeom prst="rect">
             <a:avLst>
@@ -21266,8 +21116,8 @@
         </p:nvSpPr>
         <p:spPr>
           <a:xfrm>
-            <a:off x="3279648" y="3364992"/>
-            <a:ext cx="1225296" cy="475488"/>
+            <a:off x="6428232" y="3364992"/>
+            <a:ext cx="1645920" cy="475488"/>
           </a:xfrm>
           <a:prstGeom prst="rect">
             <a:avLst/>
@@ -21291,7 +21141,7 @@
                 <a:ea typeface="Trebuchet MS" pitchFamily="34" charset="-122"/>
                 <a:cs typeface="Trebuchet MS" pitchFamily="34" charset="-120"/>
               </a:rPr>
-              <a:t>en</a:t>
+              <a:t>er</a:t>
             </a:r>
             <a:endParaRPr lang="en-US" sz="1400" dirty="0"/>
           </a:p>
@@ -21299,329 +21149,80 @@
       </p:sp>
       <p:sp>
         <p:nvSpPr>
-          <p:cNvPr id="33" name="Text 31"/>
-          <p:cNvSpPr/>
-          <p:nvPr/>
-        </p:nvSpPr>
-        <p:spPr>
-          <a:xfrm>
-            <a:off x="4504944" y="3364992"/>
-            <a:ext cx="76200" cy="475488"/>
-          </a:xfrm>
-          <a:prstGeom prst="rect">
-            <a:avLst/>
-          </a:prstGeom>
-          <a:noFill/>
-          <a:ln/>
-        </p:spPr>
-        <p:txBody>
-          <a:bodyPr wrap="square" lIns="0" tIns="0" rIns="0" bIns="0" rtlCol="0" anchor="ctr"/>
-          <a:lstStyle/>
-          <a:p>
-            <a:pPr algn="ctr" indent="0" marL="0">
-              <a:buNone/>
-            </a:pPr>
-            <a:r>
-              <a:rPr lang="en-US" sz="1600" b="1" dirty="0">
-                <a:solidFill>
-                  <a:srgbClr val="0D9488"/>
+          <p:cNvPr id="33" name="Shape 31"/>
+          <p:cNvSpPr/>
+          <p:nvPr/>
+        </p:nvSpPr>
+        <p:spPr>
+          <a:xfrm>
+            <a:off x="365760" y="4096512"/>
+            <a:ext cx="1371600" cy="804672"/>
+          </a:xfrm>
+          <a:prstGeom prst="rect">
+            <a:avLst>
+              <a:gd name="adj" fmla="val 6818"/>
+            </a:avLst>
+          </a:prstGeom>
+          <a:solidFill>
+            <a:srgbClr val="E2E8F0"/>
+          </a:solidFill>
+          <a:ln w="12700">
+            <a:solidFill>
+              <a:srgbClr val="E2E8F0"/>
+            </a:solidFill>
+            <a:prstDash val="solid"/>
+          </a:ln>
+        </p:spPr>
+      </p:sp>
+      <p:sp>
+        <p:nvSpPr>
+          <p:cNvPr id="34" name="Text 32"/>
+          <p:cNvSpPr/>
+          <p:nvPr/>
+        </p:nvSpPr>
+        <p:spPr>
+          <a:xfrm>
+            <a:off x="365760" y="4096512"/>
+            <a:ext cx="1371600" cy="804672"/>
+          </a:xfrm>
+          <a:prstGeom prst="rect">
+            <a:avLst/>
+          </a:prstGeom>
+          <a:noFill/>
+          <a:ln/>
+        </p:spPr>
+        <p:txBody>
+          <a:bodyPr wrap="square" lIns="0" tIns="0" rIns="0" bIns="0" rtlCol="0" anchor="ctr"/>
+          <a:lstStyle/>
+          <a:p>
+            <a:pPr algn="ctr" indent="0" marL="0">
+              <a:buNone/>
+            </a:pPr>
+            <a:r>
+              <a:rPr lang="en-US" sz="1100" b="1" dirty="0">
+                <a:solidFill>
+                  <a:srgbClr val="475569"/>
                 </a:solidFill>
                 <a:latin typeface="Trebuchet MS" pitchFamily="34" charset="0"/>
                 <a:ea typeface="Trebuchet MS" pitchFamily="34" charset="-122"/>
                 <a:cs typeface="Trebuchet MS" pitchFamily="34" charset="-120"/>
               </a:rPr>
-              <a:t>·</a:t>
-            </a:r>
-            <a:endParaRPr lang="en-US" sz="1600" dirty="0"/>
-          </a:p>
-        </p:txBody>
-      </p:sp>
-      <p:sp>
-        <p:nvSpPr>
-          <p:cNvPr id="34" name="Shape 32"/>
-          <p:cNvSpPr/>
-          <p:nvPr/>
-        </p:nvSpPr>
-        <p:spPr>
-          <a:xfrm>
-            <a:off x="4581144" y="3364992"/>
-            <a:ext cx="1225296" cy="475488"/>
-          </a:xfrm>
-          <a:prstGeom prst="rect">
-            <a:avLst>
-              <a:gd name="adj" fmla="val 9615"/>
-            </a:avLst>
-          </a:prstGeom>
-          <a:solidFill>
-            <a:srgbClr val="FFFFFF"/>
-          </a:solidFill>
-          <a:ln w="12700">
-            <a:solidFill>
-              <a:srgbClr val="0D9488"/>
-            </a:solidFill>
-            <a:prstDash val="solid"/>
-          </a:ln>
-        </p:spPr>
-      </p:sp>
-      <p:sp>
-        <p:nvSpPr>
-          <p:cNvPr id="35" name="Text 33"/>
-          <p:cNvSpPr/>
-          <p:nvPr/>
-        </p:nvSpPr>
-        <p:spPr>
-          <a:xfrm>
-            <a:off x="4581144" y="3364992"/>
-            <a:ext cx="1225296" cy="475488"/>
-          </a:xfrm>
-          <a:prstGeom prst="rect">
-            <a:avLst/>
-          </a:prstGeom>
-          <a:noFill/>
-          <a:ln/>
-        </p:spPr>
-        <p:txBody>
-          <a:bodyPr wrap="square" lIns="0" tIns="0" rIns="0" bIns="0" rtlCol="0" anchor="ctr"/>
-          <a:lstStyle/>
-          <a:p>
-            <a:pPr algn="ctr" indent="0" marL="0">
-              <a:buNone/>
-            </a:pPr>
-            <a:r>
-              <a:rPr lang="en-US" sz="1400" b="1" dirty="0">
-                <a:solidFill>
-                  <a:srgbClr val="0D9488"/>
-                </a:solidFill>
-                <a:latin typeface="Trebuchet MS" pitchFamily="34" charset="0"/>
-                <a:ea typeface="Trebuchet MS" pitchFamily="34" charset="-122"/>
-                <a:cs typeface="Trebuchet MS" pitchFamily="34" charset="-120"/>
-              </a:rPr>
-              <a:t>joy</a:t>
-            </a:r>
-            <a:endParaRPr lang="en-US" sz="1400" dirty="0"/>
-          </a:p>
-        </p:txBody>
-      </p:sp>
-      <p:sp>
-        <p:nvSpPr>
-          <p:cNvPr id="36" name="Text 34"/>
-          <p:cNvSpPr/>
-          <p:nvPr/>
-        </p:nvSpPr>
-        <p:spPr>
-          <a:xfrm>
-            <a:off x="5806440" y="3364992"/>
-            <a:ext cx="76200" cy="475488"/>
-          </a:xfrm>
-          <a:prstGeom prst="rect">
-            <a:avLst/>
-          </a:prstGeom>
-          <a:noFill/>
-          <a:ln/>
-        </p:spPr>
-        <p:txBody>
-          <a:bodyPr wrap="square" lIns="0" tIns="0" rIns="0" bIns="0" rtlCol="0" anchor="ctr"/>
-          <a:lstStyle/>
-          <a:p>
-            <a:pPr algn="ctr" indent="0" marL="0">
-              <a:buNone/>
-            </a:pPr>
-            <a:r>
-              <a:rPr lang="en-US" sz="1600" b="1" dirty="0">
-                <a:solidFill>
-                  <a:srgbClr val="0D9488"/>
-                </a:solidFill>
-                <a:latin typeface="Trebuchet MS" pitchFamily="34" charset="0"/>
-                <a:ea typeface="Trebuchet MS" pitchFamily="34" charset="-122"/>
-                <a:cs typeface="Trebuchet MS" pitchFamily="34" charset="-120"/>
-              </a:rPr>
-              <a:t>·</a:t>
-            </a:r>
-            <a:endParaRPr lang="en-US" sz="1600" dirty="0"/>
-          </a:p>
-        </p:txBody>
-      </p:sp>
-      <p:sp>
-        <p:nvSpPr>
-          <p:cNvPr id="37" name="Shape 35"/>
-          <p:cNvSpPr/>
-          <p:nvPr/>
-        </p:nvSpPr>
-        <p:spPr>
-          <a:xfrm>
-            <a:off x="5882640" y="3364992"/>
-            <a:ext cx="1225296" cy="475488"/>
-          </a:xfrm>
-          <a:prstGeom prst="rect">
-            <a:avLst>
-              <a:gd name="adj" fmla="val 9615"/>
-            </a:avLst>
-          </a:prstGeom>
-          <a:solidFill>
-            <a:srgbClr val="FFFFFF"/>
-          </a:solidFill>
-          <a:ln w="12700">
-            <a:solidFill>
-              <a:srgbClr val="0D9488"/>
-            </a:solidFill>
-            <a:prstDash val="solid"/>
-          </a:ln>
-        </p:spPr>
-      </p:sp>
-      <p:sp>
-        <p:nvSpPr>
-          <p:cNvPr id="38" name="Text 36"/>
-          <p:cNvSpPr/>
-          <p:nvPr/>
-        </p:nvSpPr>
-        <p:spPr>
-          <a:xfrm>
-            <a:off x="5882640" y="3364992"/>
-            <a:ext cx="1225296" cy="475488"/>
-          </a:xfrm>
-          <a:prstGeom prst="rect">
-            <a:avLst/>
-          </a:prstGeom>
-          <a:noFill/>
-          <a:ln/>
-        </p:spPr>
-        <p:txBody>
-          <a:bodyPr wrap="square" lIns="0" tIns="0" rIns="0" bIns="0" rtlCol="0" anchor="ctr"/>
-          <a:lstStyle/>
-          <a:p>
-            <a:pPr algn="ctr" indent="0" marL="0">
-              <a:buNone/>
-            </a:pPr>
-            <a:r>
-              <a:rPr lang="en-US" sz="1400" b="1" dirty="0">
-                <a:solidFill>
-                  <a:srgbClr val="0D9488"/>
-                </a:solidFill>
-                <a:latin typeface="Trebuchet MS" pitchFamily="34" charset="0"/>
-                <a:ea typeface="Trebuchet MS" pitchFamily="34" charset="-122"/>
-                <a:cs typeface="Trebuchet MS" pitchFamily="34" charset="-120"/>
-              </a:rPr>
-              <a:t>a</a:t>
-            </a:r>
-            <a:endParaRPr lang="en-US" sz="1400" dirty="0"/>
-          </a:p>
-        </p:txBody>
-      </p:sp>
-      <p:sp>
-        <p:nvSpPr>
-          <p:cNvPr id="39" name="Text 37"/>
-          <p:cNvSpPr/>
-          <p:nvPr/>
-        </p:nvSpPr>
-        <p:spPr>
-          <a:xfrm>
-            <a:off x="7107936" y="3364992"/>
-            <a:ext cx="76200" cy="475488"/>
-          </a:xfrm>
-          <a:prstGeom prst="rect">
-            <a:avLst/>
-          </a:prstGeom>
-          <a:noFill/>
-          <a:ln/>
-        </p:spPr>
-        <p:txBody>
-          <a:bodyPr wrap="square" lIns="0" tIns="0" rIns="0" bIns="0" rtlCol="0" anchor="ctr"/>
-          <a:lstStyle/>
-          <a:p>
-            <a:pPr algn="ctr" indent="0" marL="0">
-              <a:buNone/>
-            </a:pPr>
-            <a:r>
-              <a:rPr lang="en-US" sz="1600" b="1" dirty="0">
-                <a:solidFill>
-                  <a:srgbClr val="0D9488"/>
-                </a:solidFill>
-                <a:latin typeface="Trebuchet MS" pitchFamily="34" charset="0"/>
-                <a:ea typeface="Trebuchet MS" pitchFamily="34" charset="-122"/>
-                <a:cs typeface="Trebuchet MS" pitchFamily="34" charset="-120"/>
-              </a:rPr>
-              <a:t>·</a:t>
-            </a:r>
-            <a:endParaRPr lang="en-US" sz="1600" dirty="0"/>
-          </a:p>
-        </p:txBody>
-      </p:sp>
-      <p:sp>
-        <p:nvSpPr>
-          <p:cNvPr id="40" name="Shape 38"/>
-          <p:cNvSpPr/>
-          <p:nvPr/>
-        </p:nvSpPr>
-        <p:spPr>
-          <a:xfrm>
-            <a:off x="7184136" y="3364992"/>
-            <a:ext cx="1225296" cy="475488"/>
-          </a:xfrm>
-          <a:prstGeom prst="rect">
-            <a:avLst>
-              <a:gd name="adj" fmla="val 9615"/>
-            </a:avLst>
-          </a:prstGeom>
-          <a:solidFill>
-            <a:srgbClr val="FFFFFF"/>
-          </a:solidFill>
-          <a:ln w="12700">
-            <a:solidFill>
-              <a:srgbClr val="0D9488"/>
-            </a:solidFill>
-            <a:prstDash val="solid"/>
-          </a:ln>
-        </p:spPr>
-      </p:sp>
-      <p:sp>
-        <p:nvSpPr>
-          <p:cNvPr id="41" name="Text 39"/>
-          <p:cNvSpPr/>
-          <p:nvPr/>
-        </p:nvSpPr>
-        <p:spPr>
-          <a:xfrm>
-            <a:off x="7184136" y="3364992"/>
-            <a:ext cx="1225296" cy="475488"/>
-          </a:xfrm>
-          <a:prstGeom prst="rect">
-            <a:avLst/>
-          </a:prstGeom>
-          <a:noFill/>
-          <a:ln/>
-        </p:spPr>
-        <p:txBody>
-          <a:bodyPr wrap="square" lIns="0" tIns="0" rIns="0" bIns="0" rtlCol="0" anchor="ctr"/>
-          <a:lstStyle/>
-          <a:p>
-            <a:pPr algn="ctr" indent="0" marL="0">
-              <a:buNone/>
-            </a:pPr>
-            <a:r>
-              <a:rPr lang="en-US" sz="1400" b="1" dirty="0">
-                <a:solidFill>
-                  <a:srgbClr val="0D9488"/>
-                </a:solidFill>
-                <a:latin typeface="Trebuchet MS" pitchFamily="34" charset="0"/>
-                <a:ea typeface="Trebuchet MS" pitchFamily="34" charset="-122"/>
-                <a:cs typeface="Trebuchet MS" pitchFamily="34" charset="-120"/>
-              </a:rPr>
-              <a:t>ble</a:t>
-            </a:r>
-            <a:endParaRPr lang="en-US" sz="1400" dirty="0"/>
-          </a:p>
-        </p:txBody>
-      </p:sp>
-      <p:sp>
-        <p:nvSpPr>
-          <p:cNvPr id="42" name="Shape 40"/>
-          <p:cNvSpPr/>
-          <p:nvPr/>
-        </p:nvSpPr>
-        <p:spPr>
-          <a:xfrm>
-            <a:off x="365760" y="4096512"/>
-            <a:ext cx="1371600" cy="804672"/>
+              <a:t>Phonemes</a:t>
+            </a:r>
+            <a:endParaRPr lang="en-US" sz="1100" dirty="0"/>
+          </a:p>
+        </p:txBody>
+      </p:sp>
+      <p:sp>
+        <p:nvSpPr>
+          <p:cNvPr id="35" name="Shape 33"/>
+          <p:cNvSpPr/>
+          <p:nvPr/>
+        </p:nvSpPr>
+        <p:spPr>
+          <a:xfrm>
+            <a:off x="1874520" y="4096512"/>
+            <a:ext cx="6903720" cy="804672"/>
           </a:xfrm>
           <a:prstGeom prst="rect">
             <a:avLst>
@@ -21629,85 +21230,19 @@
             </a:avLst>
           </a:prstGeom>
           <a:solidFill>
-            <a:srgbClr val="E2E8F0"/>
+            <a:srgbClr val="F8FAFC"/>
           </a:solidFill>
           <a:ln w="12700">
             <a:solidFill>
               <a:srgbClr val="E2E8F0"/>
             </a:solidFill>
-            <a:prstDash val="solid"/>
-          </a:ln>
-        </p:spPr>
-      </p:sp>
-      <p:sp>
-        <p:nvSpPr>
-          <p:cNvPr id="43" name="Text 41"/>
-          <p:cNvSpPr/>
-          <p:nvPr/>
-        </p:nvSpPr>
-        <p:spPr>
-          <a:xfrm>
-            <a:off x="365760" y="4096512"/>
-            <a:ext cx="1371600" cy="804672"/>
-          </a:xfrm>
-          <a:prstGeom prst="rect">
-            <a:avLst/>
-          </a:prstGeom>
-          <a:noFill/>
-          <a:ln/>
-        </p:spPr>
-        <p:txBody>
-          <a:bodyPr wrap="square" lIns="0" tIns="0" rIns="0" bIns="0" rtlCol="0" anchor="ctr"/>
-          <a:lstStyle/>
-          <a:p>
-            <a:pPr algn="ctr" indent="0" marL="0">
-              <a:buNone/>
-            </a:pPr>
-            <a:r>
-              <a:rPr lang="en-US" sz="1100" b="1" dirty="0">
-                <a:solidFill>
-                  <a:srgbClr val="475569"/>
-                </a:solidFill>
-                <a:latin typeface="Trebuchet MS" pitchFamily="34" charset="0"/>
-                <a:ea typeface="Trebuchet MS" pitchFamily="34" charset="-122"/>
-                <a:cs typeface="Trebuchet MS" pitchFamily="34" charset="-120"/>
-              </a:rPr>
-              <a:t>Phonemes</a:t>
-            </a:r>
-            <a:endParaRPr lang="en-US" sz="1100" dirty="0"/>
-          </a:p>
-        </p:txBody>
-      </p:sp>
-      <p:sp>
-        <p:nvSpPr>
-          <p:cNvPr id="44" name="Shape 42"/>
-          <p:cNvSpPr/>
-          <p:nvPr/>
-        </p:nvSpPr>
-        <p:spPr>
-          <a:xfrm>
-            <a:off x="1874520" y="4096512"/>
-            <a:ext cx="6903720" cy="804672"/>
-          </a:xfrm>
-          <a:prstGeom prst="rect">
-            <a:avLst>
-              <a:gd name="adj" fmla="val 6818"/>
-            </a:avLst>
-          </a:prstGeom>
-          <a:solidFill>
-            <a:srgbClr val="F8FAFC"/>
-          </a:solidFill>
-          <a:ln w="12700">
-            <a:solidFill>
-              <a:srgbClr val="E2E8F0"/>
-            </a:solidFill>
             <a:prstDash val="dash"/>
           </a:ln>
         </p:spPr>
       </p:sp>
       <p:sp>
         <p:nvSpPr>
-          <p:cNvPr id="45" name="Text 43"/>
+          <p:cNvPr id="36" name="Text 34"/>
           <p:cNvSpPr/>
           <p:nvPr/>
         </p:nvSpPr>
@@ -22030,7 +21565,7 @@
                 <a:ea typeface="Calibri" pitchFamily="34" charset="-122"/>
                 <a:cs typeface="Calibri" pitchFamily="34" charset="-120"/>
               </a:rPr>
-              <a:t>Word Labs  •  wordlabs.app  •  Root: 'enjoy' = to take pleasure from</a:t>
+              <a:t>Word Labs  •  wordlabs.app  •  Root: 'enjoy' = to take pleasure in</a:t>
             </a:r>
             <a:endParaRPr lang="en-US" sz="800" dirty="0"/>
           </a:p>
@@ -22169,7 +21704,7 @@
                 <a:ea typeface="Trebuchet MS" pitchFamily="34" charset="-122"/>
                 <a:cs typeface="Trebuchet MS" pitchFamily="34" charset="-120"/>
               </a:rPr>
-              <a:t>unenjoyable</a:t>
+              <a:t>enjoyer</a:t>
             </a:r>
             <a:endParaRPr lang="en-US" sz="2800" dirty="0"/>
           </a:p>
@@ -22249,7 +21784,7 @@
         </p:nvSpPr>
         <p:spPr>
           <a:xfrm>
-            <a:off x="2221992" y="2258568"/>
+            <a:off x="2938272" y="2258568"/>
             <a:ext cx="1828800" cy="292608"/>
           </a:xfrm>
           <a:prstGeom prst="rect">
@@ -22258,11 +21793,11 @@
             </a:avLst>
           </a:prstGeom>
           <a:solidFill>
-            <a:srgbClr val="DDD6FE"/>
+            <a:srgbClr val="CCFBF1"/>
           </a:solidFill>
           <a:ln w="19050">
             <a:solidFill>
-              <a:srgbClr val="7C3AED"/>
+              <a:srgbClr val="0D9488"/>
             </a:solidFill>
             <a:prstDash val="solid"/>
           </a:ln>
@@ -22283,7 +21818,7 @@
         </p:nvSpPr>
         <p:spPr>
           <a:xfrm>
-            <a:off x="2221992" y="2258568"/>
+            <a:off x="2938272" y="2258568"/>
             <a:ext cx="1828800" cy="292608"/>
           </a:xfrm>
           <a:prstGeom prst="rect">
@@ -22302,13 +21837,13 @@
             <a:r>
               <a:rPr lang="en-US" sz="1300" b="1" dirty="0">
                 <a:solidFill>
-                  <a:srgbClr val="4C1D95"/>
+                  <a:srgbClr val="0F766E"/>
                 </a:solidFill>
                 <a:latin typeface="Trebuchet MS" pitchFamily="34" charset="0"/>
                 <a:ea typeface="Trebuchet MS" pitchFamily="34" charset="-122"/>
                 <a:cs typeface="Trebuchet MS" pitchFamily="34" charset="-120"/>
               </a:rPr>
-              <a:t>un</a:t>
+              <a:t>enjoy</a:t>
             </a:r>
             <a:endParaRPr lang="en-US" sz="1300" dirty="0"/>
           </a:p>
@@ -22322,7 +21857,7 @@
         </p:nvSpPr>
         <p:spPr>
           <a:xfrm>
-            <a:off x="2221992" y="2569464"/>
+            <a:off x="2938272" y="2569464"/>
             <a:ext cx="1828800" cy="201168"/>
           </a:xfrm>
           <a:prstGeom prst="rect">
@@ -22347,7 +21882,7 @@
                 <a:ea typeface="Calibri" pitchFamily="34" charset="-122"/>
                 <a:cs typeface="Calibri" pitchFamily="34" charset="-120"/>
               </a:rPr>
-              <a:t>not</a:t>
+              <a:t>to take pleasure in</a:t>
             </a:r>
             <a:endParaRPr lang="en-US" sz="850" dirty="0"/>
           </a:p>
@@ -22361,7 +21896,7 @@
         </p:nvSpPr>
         <p:spPr>
           <a:xfrm>
-            <a:off x="4370832" y="2258568"/>
+            <a:off x="5803392" y="2258568"/>
             <a:ext cx="1828800" cy="292608"/>
           </a:xfrm>
           <a:prstGeom prst="rect">
@@ -22370,11 +21905,11 @@
             </a:avLst>
           </a:prstGeom>
           <a:solidFill>
-            <a:srgbClr val="CCFBF1"/>
+            <a:srgbClr val="FCE7F3"/>
           </a:solidFill>
           <a:ln w="19050">
             <a:solidFill>
-              <a:srgbClr val="0D9488"/>
+              <a:srgbClr val="DB2777"/>
             </a:solidFill>
             <a:prstDash val="solid"/>
           </a:ln>
@@ -22395,7 +21930,7 @@
         </p:nvSpPr>
         <p:spPr>
           <a:xfrm>
-            <a:off x="4370832" y="2258568"/>
+            <a:off x="5803392" y="2258568"/>
             <a:ext cx="1828800" cy="292608"/>
           </a:xfrm>
           <a:prstGeom prst="rect">
@@ -22414,13 +21949,13 @@
             <a:r>
               <a:rPr lang="en-US" sz="1300" b="1" dirty="0">
                 <a:solidFill>
-                  <a:srgbClr val="0F766E"/>
+                  <a:srgbClr val="9D174D"/>
                 </a:solidFill>
                 <a:latin typeface="Trebuchet MS" pitchFamily="34" charset="0"/>
                 <a:ea typeface="Trebuchet MS" pitchFamily="34" charset="-122"/>
                 <a:cs typeface="Trebuchet MS" pitchFamily="34" charset="-120"/>
               </a:rPr>
-              <a:t>enjoy</a:t>
+              <a:t>er</a:t>
             </a:r>
             <a:endParaRPr lang="en-US" sz="1300" dirty="0"/>
           </a:p>
@@ -22434,7 +21969,7 @@
         </p:nvSpPr>
         <p:spPr>
           <a:xfrm>
-            <a:off x="4370832" y="2569464"/>
+            <a:off x="5803392" y="2569464"/>
             <a:ext cx="1828800" cy="201168"/>
           </a:xfrm>
           <a:prstGeom prst="rect">
@@ -22459,7 +21994,7 @@
                 <a:ea typeface="Calibri" pitchFamily="34" charset="-122"/>
                 <a:cs typeface="Calibri" pitchFamily="34" charset="-120"/>
               </a:rPr>
-              <a:t>to take pleasure from</a:t>
+              <a:t>a person who does something</a:t>
             </a:r>
             <a:endParaRPr lang="en-US" sz="850" dirty="0"/>
           </a:p>
@@ -22473,30 +22008,23 @@
         </p:nvSpPr>
         <p:spPr>
           <a:xfrm>
-            <a:off x="6519672" y="2258568"/>
-            <a:ext cx="1828800" cy="292608"/>
+            <a:off x="365760" y="3273552"/>
+            <a:ext cx="1371600" cy="658368"/>
           </a:xfrm>
           <a:prstGeom prst="rect">
             <a:avLst>
-              <a:gd name="adj" fmla="val 25000"/>
+              <a:gd name="adj" fmla="val 8333"/>
             </a:avLst>
           </a:prstGeom>
           <a:solidFill>
-            <a:srgbClr val="FCE7F3"/>
-          </a:solidFill>
-          <a:ln w="19050">
-            <a:solidFill>
-              <a:srgbClr val="DB2777"/>
-            </a:solidFill>
-            <a:prstDash val="solid"/>
-          </a:ln>
-          <a:effectLst>
-            <a:outerShdw sx="100000" sy="100000" kx="0" ky="0" algn="bl" rotWithShape="0" blurRad="101600" dist="38100" dir="8100000">
-              <a:srgbClr val="000000">
-                <a:alpha val="12000"/>
-              </a:srgbClr>
-            </a:outerShdw>
-          </a:effectLst>
+            <a:srgbClr val="E2E8F0"/>
+          </a:solidFill>
+          <a:ln w="12700">
+            <a:solidFill>
+              <a:srgbClr val="E2E8F0"/>
+            </a:solidFill>
+            <a:prstDash val="solid"/>
+          </a:ln>
         </p:spPr>
       </p:sp>
       <p:sp>
@@ -22507,47 +22035,641 @@
         </p:nvSpPr>
         <p:spPr>
           <a:xfrm>
-            <a:off x="6519672" y="2258568"/>
-            <a:ext cx="1828800" cy="292608"/>
-          </a:xfrm>
-          <a:prstGeom prst="rect">
-            <a:avLst/>
-          </a:prstGeom>
-          <a:noFill/>
-          <a:ln/>
-        </p:spPr>
-        <p:txBody>
-          <a:bodyPr wrap="square" lIns="0" tIns="0" rIns="0" bIns="0" rtlCol="0" anchor="ctr"/>
-          <a:lstStyle/>
-          <a:p>
-            <a:pPr algn="ctr" indent="0" marL="0">
-              <a:buNone/>
-            </a:pPr>
-            <a:r>
-              <a:rPr lang="en-US" sz="1300" b="1" dirty="0">
-                <a:solidFill>
-                  <a:srgbClr val="9D174D"/>
+            <a:off x="365760" y="3273552"/>
+            <a:ext cx="1371600" cy="658368"/>
+          </a:xfrm>
+          <a:prstGeom prst="rect">
+            <a:avLst/>
+          </a:prstGeom>
+          <a:noFill/>
+          <a:ln/>
+        </p:spPr>
+        <p:txBody>
+          <a:bodyPr wrap="square" lIns="0" tIns="0" rIns="0" bIns="0" rtlCol="0" anchor="ctr"/>
+          <a:lstStyle/>
+          <a:p>
+            <a:pPr algn="ctr" indent="0" marL="0">
+              <a:buNone/>
+            </a:pPr>
+            <a:r>
+              <a:rPr lang="en-US" sz="1100" b="1" dirty="0">
+                <a:solidFill>
+                  <a:srgbClr val="475569"/>
                 </a:solidFill>
                 <a:latin typeface="Trebuchet MS" pitchFamily="34" charset="0"/>
                 <a:ea typeface="Trebuchet MS" pitchFamily="34" charset="-122"/>
                 <a:cs typeface="Trebuchet MS" pitchFamily="34" charset="-120"/>
               </a:rPr>
-              <a:t>able</a:t>
-            </a:r>
-            <a:endParaRPr lang="en-US" sz="1300" dirty="0"/>
-          </a:p>
-        </p:txBody>
-      </p:sp>
-      <p:sp>
-        <p:nvSpPr>
-          <p:cNvPr id="24" name="Text 22"/>
-          <p:cNvSpPr/>
-          <p:nvPr/>
-        </p:nvSpPr>
-        <p:spPr>
-          <a:xfrm>
-            <a:off x="6519672" y="2569464"/>
-            <a:ext cx="1828800" cy="201168"/>
+              <a:t>Syllables</a:t>
+            </a:r>
+            <a:endParaRPr lang="en-US" sz="1100" dirty="0"/>
+          </a:p>
+        </p:txBody>
+      </p:sp>
+      <p:sp>
+        <p:nvSpPr>
+          <p:cNvPr id="24" name="Shape 22"/>
+          <p:cNvSpPr/>
+          <p:nvPr/>
+        </p:nvSpPr>
+        <p:spPr>
+          <a:xfrm>
+            <a:off x="1874520" y="3273552"/>
+            <a:ext cx="6903720" cy="658368"/>
+          </a:xfrm>
+          <a:prstGeom prst="rect">
+            <a:avLst>
+              <a:gd name="adj" fmla="val 8333"/>
+            </a:avLst>
+          </a:prstGeom>
+          <a:solidFill>
+            <a:srgbClr val="CCFBF1"/>
+          </a:solidFill>
+          <a:ln w="12700">
+            <a:solidFill>
+              <a:srgbClr val="0D9488"/>
+            </a:solidFill>
+            <a:prstDash val="solid"/>
+          </a:ln>
+        </p:spPr>
+      </p:sp>
+      <p:sp>
+        <p:nvSpPr>
+          <p:cNvPr id="25" name="Shape 23"/>
+          <p:cNvSpPr/>
+          <p:nvPr/>
+        </p:nvSpPr>
+        <p:spPr>
+          <a:xfrm>
+            <a:off x="2313432" y="3364992"/>
+            <a:ext cx="1645920" cy="475488"/>
+          </a:xfrm>
+          <a:prstGeom prst="rect">
+            <a:avLst>
+              <a:gd name="adj" fmla="val 9615"/>
+            </a:avLst>
+          </a:prstGeom>
+          <a:solidFill>
+            <a:srgbClr val="FFFFFF"/>
+          </a:solidFill>
+          <a:ln w="12700">
+            <a:solidFill>
+              <a:srgbClr val="0D9488"/>
+            </a:solidFill>
+            <a:prstDash val="solid"/>
+          </a:ln>
+        </p:spPr>
+      </p:sp>
+      <p:sp>
+        <p:nvSpPr>
+          <p:cNvPr id="26" name="Text 24"/>
+          <p:cNvSpPr/>
+          <p:nvPr/>
+        </p:nvSpPr>
+        <p:spPr>
+          <a:xfrm>
+            <a:off x="2313432" y="3364992"/>
+            <a:ext cx="1645920" cy="475488"/>
+          </a:xfrm>
+          <a:prstGeom prst="rect">
+            <a:avLst/>
+          </a:prstGeom>
+          <a:noFill/>
+          <a:ln/>
+        </p:spPr>
+        <p:txBody>
+          <a:bodyPr wrap="square" lIns="0" tIns="0" rIns="0" bIns="0" rtlCol="0" anchor="ctr"/>
+          <a:lstStyle/>
+          <a:p>
+            <a:pPr algn="ctr" indent="0" marL="0">
+              <a:buNone/>
+            </a:pPr>
+            <a:r>
+              <a:rPr lang="en-US" sz="1400" b="1" dirty="0">
+                <a:solidFill>
+                  <a:srgbClr val="0D9488"/>
+                </a:solidFill>
+                <a:latin typeface="Trebuchet MS" pitchFamily="34" charset="0"/>
+                <a:ea typeface="Trebuchet MS" pitchFamily="34" charset="-122"/>
+                <a:cs typeface="Trebuchet MS" pitchFamily="34" charset="-120"/>
+              </a:rPr>
+              <a:t>en</a:t>
+            </a:r>
+            <a:endParaRPr lang="en-US" sz="1400" dirty="0"/>
+          </a:p>
+        </p:txBody>
+      </p:sp>
+      <p:sp>
+        <p:nvSpPr>
+          <p:cNvPr id="27" name="Text 25"/>
+          <p:cNvSpPr/>
+          <p:nvPr/>
+        </p:nvSpPr>
+        <p:spPr>
+          <a:xfrm>
+            <a:off x="3959352" y="3364992"/>
+            <a:ext cx="411480" cy="475488"/>
+          </a:xfrm>
+          <a:prstGeom prst="rect">
+            <a:avLst/>
+          </a:prstGeom>
+          <a:noFill/>
+          <a:ln/>
+        </p:spPr>
+        <p:txBody>
+          <a:bodyPr wrap="square" lIns="0" tIns="0" rIns="0" bIns="0" rtlCol="0" anchor="ctr"/>
+          <a:lstStyle/>
+          <a:p>
+            <a:pPr algn="ctr" indent="0" marL="0">
+              <a:buNone/>
+            </a:pPr>
+            <a:r>
+              <a:rPr lang="en-US" sz="1600" b="1" dirty="0">
+                <a:solidFill>
+                  <a:srgbClr val="0D9488"/>
+                </a:solidFill>
+                <a:latin typeface="Trebuchet MS" pitchFamily="34" charset="0"/>
+                <a:ea typeface="Trebuchet MS" pitchFamily="34" charset="-122"/>
+                <a:cs typeface="Trebuchet MS" pitchFamily="34" charset="-120"/>
+              </a:rPr>
+              <a:t>·</a:t>
+            </a:r>
+            <a:endParaRPr lang="en-US" sz="1600" dirty="0"/>
+          </a:p>
+        </p:txBody>
+      </p:sp>
+      <p:sp>
+        <p:nvSpPr>
+          <p:cNvPr id="28" name="Shape 26"/>
+          <p:cNvSpPr/>
+          <p:nvPr/>
+        </p:nvSpPr>
+        <p:spPr>
+          <a:xfrm>
+            <a:off x="4370832" y="3364992"/>
+            <a:ext cx="1645920" cy="475488"/>
+          </a:xfrm>
+          <a:prstGeom prst="rect">
+            <a:avLst>
+              <a:gd name="adj" fmla="val 9615"/>
+            </a:avLst>
+          </a:prstGeom>
+          <a:solidFill>
+            <a:srgbClr val="FFFFFF"/>
+          </a:solidFill>
+          <a:ln w="12700">
+            <a:solidFill>
+              <a:srgbClr val="0D9488"/>
+            </a:solidFill>
+            <a:prstDash val="solid"/>
+          </a:ln>
+        </p:spPr>
+      </p:sp>
+      <p:sp>
+        <p:nvSpPr>
+          <p:cNvPr id="29" name="Text 27"/>
+          <p:cNvSpPr/>
+          <p:nvPr/>
+        </p:nvSpPr>
+        <p:spPr>
+          <a:xfrm>
+            <a:off x="4370832" y="3364992"/>
+            <a:ext cx="1645920" cy="475488"/>
+          </a:xfrm>
+          <a:prstGeom prst="rect">
+            <a:avLst/>
+          </a:prstGeom>
+          <a:noFill/>
+          <a:ln/>
+        </p:spPr>
+        <p:txBody>
+          <a:bodyPr wrap="square" lIns="0" tIns="0" rIns="0" bIns="0" rtlCol="0" anchor="ctr"/>
+          <a:lstStyle/>
+          <a:p>
+            <a:pPr algn="ctr" indent="0" marL="0">
+              <a:buNone/>
+            </a:pPr>
+            <a:r>
+              <a:rPr lang="en-US" sz="1400" b="1" dirty="0">
+                <a:solidFill>
+                  <a:srgbClr val="0D9488"/>
+                </a:solidFill>
+                <a:latin typeface="Trebuchet MS" pitchFamily="34" charset="0"/>
+                <a:ea typeface="Trebuchet MS" pitchFamily="34" charset="-122"/>
+                <a:cs typeface="Trebuchet MS" pitchFamily="34" charset="-120"/>
+              </a:rPr>
+              <a:t>joy</a:t>
+            </a:r>
+            <a:endParaRPr lang="en-US" sz="1400" dirty="0"/>
+          </a:p>
+        </p:txBody>
+      </p:sp>
+      <p:sp>
+        <p:nvSpPr>
+          <p:cNvPr id="30" name="Text 28"/>
+          <p:cNvSpPr/>
+          <p:nvPr/>
+        </p:nvSpPr>
+        <p:spPr>
+          <a:xfrm>
+            <a:off x="6016752" y="3364992"/>
+            <a:ext cx="411480" cy="475488"/>
+          </a:xfrm>
+          <a:prstGeom prst="rect">
+            <a:avLst/>
+          </a:prstGeom>
+          <a:noFill/>
+          <a:ln/>
+        </p:spPr>
+        <p:txBody>
+          <a:bodyPr wrap="square" lIns="0" tIns="0" rIns="0" bIns="0" rtlCol="0" anchor="ctr"/>
+          <a:lstStyle/>
+          <a:p>
+            <a:pPr algn="ctr" indent="0" marL="0">
+              <a:buNone/>
+            </a:pPr>
+            <a:r>
+              <a:rPr lang="en-US" sz="1600" b="1" dirty="0">
+                <a:solidFill>
+                  <a:srgbClr val="0D9488"/>
+                </a:solidFill>
+                <a:latin typeface="Trebuchet MS" pitchFamily="34" charset="0"/>
+                <a:ea typeface="Trebuchet MS" pitchFamily="34" charset="-122"/>
+                <a:cs typeface="Trebuchet MS" pitchFamily="34" charset="-120"/>
+              </a:rPr>
+              <a:t>·</a:t>
+            </a:r>
+            <a:endParaRPr lang="en-US" sz="1600" dirty="0"/>
+          </a:p>
+        </p:txBody>
+      </p:sp>
+      <p:sp>
+        <p:nvSpPr>
+          <p:cNvPr id="31" name="Shape 29"/>
+          <p:cNvSpPr/>
+          <p:nvPr/>
+        </p:nvSpPr>
+        <p:spPr>
+          <a:xfrm>
+            <a:off x="6428232" y="3364992"/>
+            <a:ext cx="1645920" cy="475488"/>
+          </a:xfrm>
+          <a:prstGeom prst="rect">
+            <a:avLst>
+              <a:gd name="adj" fmla="val 9615"/>
+            </a:avLst>
+          </a:prstGeom>
+          <a:solidFill>
+            <a:srgbClr val="FFFFFF"/>
+          </a:solidFill>
+          <a:ln w="12700">
+            <a:solidFill>
+              <a:srgbClr val="0D9488"/>
+            </a:solidFill>
+            <a:prstDash val="solid"/>
+          </a:ln>
+        </p:spPr>
+      </p:sp>
+      <p:sp>
+        <p:nvSpPr>
+          <p:cNvPr id="32" name="Text 30"/>
+          <p:cNvSpPr/>
+          <p:nvPr/>
+        </p:nvSpPr>
+        <p:spPr>
+          <a:xfrm>
+            <a:off x="6428232" y="3364992"/>
+            <a:ext cx="1645920" cy="475488"/>
+          </a:xfrm>
+          <a:prstGeom prst="rect">
+            <a:avLst/>
+          </a:prstGeom>
+          <a:noFill/>
+          <a:ln/>
+        </p:spPr>
+        <p:txBody>
+          <a:bodyPr wrap="square" lIns="0" tIns="0" rIns="0" bIns="0" rtlCol="0" anchor="ctr"/>
+          <a:lstStyle/>
+          <a:p>
+            <a:pPr algn="ctr" indent="0" marL="0">
+              <a:buNone/>
+            </a:pPr>
+            <a:r>
+              <a:rPr lang="en-US" sz="1400" b="1" dirty="0">
+                <a:solidFill>
+                  <a:srgbClr val="0D9488"/>
+                </a:solidFill>
+                <a:latin typeface="Trebuchet MS" pitchFamily="34" charset="0"/>
+                <a:ea typeface="Trebuchet MS" pitchFamily="34" charset="-122"/>
+                <a:cs typeface="Trebuchet MS" pitchFamily="34" charset="-120"/>
+              </a:rPr>
+              <a:t>er</a:t>
+            </a:r>
+            <a:endParaRPr lang="en-US" sz="1400" dirty="0"/>
+          </a:p>
+        </p:txBody>
+      </p:sp>
+      <p:sp>
+        <p:nvSpPr>
+          <p:cNvPr id="33" name="Shape 31"/>
+          <p:cNvSpPr/>
+          <p:nvPr/>
+        </p:nvSpPr>
+        <p:spPr>
+          <a:xfrm>
+            <a:off x="365760" y="4096512"/>
+            <a:ext cx="1371600" cy="804672"/>
+          </a:xfrm>
+          <a:prstGeom prst="rect">
+            <a:avLst>
+              <a:gd name="adj" fmla="val 6818"/>
+            </a:avLst>
+          </a:prstGeom>
+          <a:solidFill>
+            <a:srgbClr val="E2E8F0"/>
+          </a:solidFill>
+          <a:ln w="12700">
+            <a:solidFill>
+              <a:srgbClr val="E2E8F0"/>
+            </a:solidFill>
+            <a:prstDash val="solid"/>
+          </a:ln>
+        </p:spPr>
+      </p:sp>
+      <p:sp>
+        <p:nvSpPr>
+          <p:cNvPr id="34" name="Text 32"/>
+          <p:cNvSpPr/>
+          <p:nvPr/>
+        </p:nvSpPr>
+        <p:spPr>
+          <a:xfrm>
+            <a:off x="365760" y="4096512"/>
+            <a:ext cx="1371600" cy="804672"/>
+          </a:xfrm>
+          <a:prstGeom prst="rect">
+            <a:avLst/>
+          </a:prstGeom>
+          <a:noFill/>
+          <a:ln/>
+        </p:spPr>
+        <p:txBody>
+          <a:bodyPr wrap="square" lIns="0" tIns="0" rIns="0" bIns="0" rtlCol="0" anchor="ctr"/>
+          <a:lstStyle/>
+          <a:p>
+            <a:pPr algn="ctr" indent="0" marL="0">
+              <a:buNone/>
+            </a:pPr>
+            <a:r>
+              <a:rPr lang="en-US" sz="1100" b="1" dirty="0">
+                <a:solidFill>
+                  <a:srgbClr val="475569"/>
+                </a:solidFill>
+                <a:latin typeface="Trebuchet MS" pitchFamily="34" charset="0"/>
+                <a:ea typeface="Trebuchet MS" pitchFamily="34" charset="-122"/>
+                <a:cs typeface="Trebuchet MS" pitchFamily="34" charset="-120"/>
+              </a:rPr>
+              <a:t>Phonemes</a:t>
+            </a:r>
+            <a:endParaRPr lang="en-US" sz="1100" dirty="0"/>
+          </a:p>
+        </p:txBody>
+      </p:sp>
+      <p:sp>
+        <p:nvSpPr>
+          <p:cNvPr id="35" name="Shape 33"/>
+          <p:cNvSpPr/>
+          <p:nvPr/>
+        </p:nvSpPr>
+        <p:spPr>
+          <a:xfrm>
+            <a:off x="1874520" y="4096512"/>
+            <a:ext cx="6903720" cy="804672"/>
+          </a:xfrm>
+          <a:prstGeom prst="rect">
+            <a:avLst>
+              <a:gd name="adj" fmla="val 6818"/>
+            </a:avLst>
+          </a:prstGeom>
+          <a:solidFill>
+            <a:srgbClr val="FCE7F3"/>
+          </a:solidFill>
+          <a:ln w="12700">
+            <a:solidFill>
+              <a:srgbClr val="DB2777"/>
+            </a:solidFill>
+            <a:prstDash val="solid"/>
+          </a:ln>
+        </p:spPr>
+      </p:sp>
+      <p:sp>
+        <p:nvSpPr>
+          <p:cNvPr id="36" name="Shape 34"/>
+          <p:cNvSpPr/>
+          <p:nvPr/>
+        </p:nvSpPr>
+        <p:spPr>
+          <a:xfrm>
+            <a:off x="2427732" y="4169664"/>
+            <a:ext cx="685800" cy="384048"/>
+          </a:xfrm>
+          <a:prstGeom prst="rect">
+            <a:avLst>
+              <a:gd name="adj" fmla="val 9524"/>
+            </a:avLst>
+          </a:prstGeom>
+          <a:solidFill>
+            <a:srgbClr val="FFFFFF"/>
+          </a:solidFill>
+          <a:ln w="12700">
+            <a:solidFill>
+              <a:srgbClr val="DB2777"/>
+            </a:solidFill>
+            <a:prstDash val="solid"/>
+          </a:ln>
+        </p:spPr>
+      </p:sp>
+      <p:sp>
+        <p:nvSpPr>
+          <p:cNvPr id="37" name="Text 35"/>
+          <p:cNvSpPr/>
+          <p:nvPr/>
+        </p:nvSpPr>
+        <p:spPr>
+          <a:xfrm>
+            <a:off x="2427732" y="4169664"/>
+            <a:ext cx="685800" cy="384048"/>
+          </a:xfrm>
+          <a:prstGeom prst="rect">
+            <a:avLst/>
+          </a:prstGeom>
+          <a:noFill/>
+          <a:ln/>
+        </p:spPr>
+        <p:txBody>
+          <a:bodyPr wrap="square" lIns="0" tIns="0" rIns="0" bIns="0" rtlCol="0" anchor="ctr"/>
+          <a:lstStyle/>
+          <a:p>
+            <a:pPr algn="ctr" indent="0" marL="0">
+              <a:buNone/>
+            </a:pPr>
+            <a:r>
+              <a:rPr lang="en-US" sz="900" b="1" dirty="0">
+                <a:solidFill>
+                  <a:srgbClr val="9D174D"/>
+                </a:solidFill>
+                <a:latin typeface="Trebuchet MS" pitchFamily="34" charset="0"/>
+                <a:ea typeface="Trebuchet MS" pitchFamily="34" charset="-122"/>
+                <a:cs typeface="Trebuchet MS" pitchFamily="34" charset="-120"/>
+              </a:rPr>
+              <a:t>e</a:t>
+            </a:r>
+            <a:endParaRPr lang="en-US" sz="900" dirty="0"/>
+          </a:p>
+        </p:txBody>
+      </p:sp>
+      <p:sp>
+        <p:nvSpPr>
+          <p:cNvPr id="38" name="Shape 36"/>
+          <p:cNvSpPr/>
+          <p:nvPr/>
+        </p:nvSpPr>
+        <p:spPr>
+          <a:xfrm>
+            <a:off x="3639312" y="4169664"/>
+            <a:ext cx="685800" cy="384048"/>
+          </a:xfrm>
+          <a:prstGeom prst="rect">
+            <a:avLst>
+              <a:gd name="adj" fmla="val 9524"/>
+            </a:avLst>
+          </a:prstGeom>
+          <a:solidFill>
+            <a:srgbClr val="FFFFFF"/>
+          </a:solidFill>
+          <a:ln w="12700">
+            <a:solidFill>
+              <a:srgbClr val="DB2777"/>
+            </a:solidFill>
+            <a:prstDash val="solid"/>
+          </a:ln>
+        </p:spPr>
+      </p:sp>
+      <p:sp>
+        <p:nvSpPr>
+          <p:cNvPr id="39" name="Text 37"/>
+          <p:cNvSpPr/>
+          <p:nvPr/>
+        </p:nvSpPr>
+        <p:spPr>
+          <a:xfrm>
+            <a:off x="3639312" y="4169664"/>
+            <a:ext cx="685800" cy="384048"/>
+          </a:xfrm>
+          <a:prstGeom prst="rect">
+            <a:avLst/>
+          </a:prstGeom>
+          <a:noFill/>
+          <a:ln/>
+        </p:spPr>
+        <p:txBody>
+          <a:bodyPr wrap="square" lIns="0" tIns="0" rIns="0" bIns="0" rtlCol="0" anchor="ctr"/>
+          <a:lstStyle/>
+          <a:p>
+            <a:pPr algn="ctr" indent="0" marL="0">
+              <a:buNone/>
+            </a:pPr>
+            <a:r>
+              <a:rPr lang="en-US" sz="900" b="1" dirty="0">
+                <a:solidFill>
+                  <a:srgbClr val="9D174D"/>
+                </a:solidFill>
+                <a:latin typeface="Trebuchet MS" pitchFamily="34" charset="0"/>
+                <a:ea typeface="Trebuchet MS" pitchFamily="34" charset="-122"/>
+                <a:cs typeface="Trebuchet MS" pitchFamily="34" charset="-120"/>
+              </a:rPr>
+              <a:t>n</a:t>
+            </a:r>
+            <a:endParaRPr lang="en-US" sz="900" dirty="0"/>
+          </a:p>
+        </p:txBody>
+      </p:sp>
+      <p:sp>
+        <p:nvSpPr>
+          <p:cNvPr id="40" name="Shape 38"/>
+          <p:cNvSpPr/>
+          <p:nvPr/>
+        </p:nvSpPr>
+        <p:spPr>
+          <a:xfrm>
+            <a:off x="4850892" y="4169664"/>
+            <a:ext cx="685800" cy="384048"/>
+          </a:xfrm>
+          <a:prstGeom prst="rect">
+            <a:avLst>
+              <a:gd name="adj" fmla="val 9524"/>
+            </a:avLst>
+          </a:prstGeom>
+          <a:solidFill>
+            <a:srgbClr val="FFFFFF"/>
+          </a:solidFill>
+          <a:ln w="12700">
+            <a:solidFill>
+              <a:srgbClr val="DB2777"/>
+            </a:solidFill>
+            <a:prstDash val="solid"/>
+          </a:ln>
+        </p:spPr>
+      </p:sp>
+      <p:sp>
+        <p:nvSpPr>
+          <p:cNvPr id="41" name="Text 39"/>
+          <p:cNvSpPr/>
+          <p:nvPr/>
+        </p:nvSpPr>
+        <p:spPr>
+          <a:xfrm>
+            <a:off x="4850892" y="4169664"/>
+            <a:ext cx="685800" cy="384048"/>
+          </a:xfrm>
+          <a:prstGeom prst="rect">
+            <a:avLst/>
+          </a:prstGeom>
+          <a:noFill/>
+          <a:ln/>
+        </p:spPr>
+        <p:txBody>
+          <a:bodyPr wrap="square" lIns="0" tIns="0" rIns="0" bIns="0" rtlCol="0" anchor="ctr"/>
+          <a:lstStyle/>
+          <a:p>
+            <a:pPr algn="ctr" indent="0" marL="0">
+              <a:buNone/>
+            </a:pPr>
+            <a:r>
+              <a:rPr lang="en-US" sz="900" b="1" dirty="0">
+                <a:solidFill>
+                  <a:srgbClr val="9D174D"/>
+                </a:solidFill>
+                <a:latin typeface="Trebuchet MS" pitchFamily="34" charset="0"/>
+                <a:ea typeface="Trebuchet MS" pitchFamily="34" charset="-122"/>
+                <a:cs typeface="Trebuchet MS" pitchFamily="34" charset="-120"/>
+              </a:rPr>
+              <a:t>j</a:t>
+            </a:r>
+            <a:endParaRPr lang="en-US" sz="900" dirty="0"/>
+          </a:p>
+        </p:txBody>
+      </p:sp>
+      <p:sp>
+        <p:nvSpPr>
+          <p:cNvPr id="42" name="Text 40"/>
+          <p:cNvSpPr/>
+          <p:nvPr/>
+        </p:nvSpPr>
+        <p:spPr>
+          <a:xfrm>
+            <a:off x="4850892" y="4572000"/>
+            <a:ext cx="685800" cy="219456"/>
           </a:xfrm>
           <a:prstGeom prst="rect">
             <a:avLst/>
@@ -22563,1320 +22685,147 @@
               <a:buNone/>
             </a:pPr>
             <a:r>
-              <a:rPr lang="en-US" sz="850" dirty="0">
-                <a:solidFill>
-                  <a:srgbClr val="475569"/>
+              <a:rPr lang="en-US" sz="750" i="1" dirty="0">
+                <a:solidFill>
+                  <a:srgbClr val="94A3B8"/>
                 </a:solidFill>
                 <a:latin typeface="Calibri" pitchFamily="34" charset="0"/>
                 <a:ea typeface="Calibri" pitchFamily="34" charset="-122"/>
                 <a:cs typeface="Calibri" pitchFamily="34" charset="-120"/>
               </a:rPr>
-              <a:t>able to be, capable of</a:t>
-            </a:r>
-            <a:endParaRPr lang="en-US" sz="850" dirty="0"/>
-          </a:p>
-        </p:txBody>
-      </p:sp>
-      <p:sp>
-        <p:nvSpPr>
-          <p:cNvPr id="25" name="Shape 23"/>
-          <p:cNvSpPr/>
-          <p:nvPr/>
-        </p:nvSpPr>
-        <p:spPr>
-          <a:xfrm>
-            <a:off x="365760" y="3273552"/>
-            <a:ext cx="1371600" cy="658368"/>
+              <a:t>/j/</a:t>
+            </a:r>
+            <a:endParaRPr lang="en-US" sz="750" dirty="0"/>
+          </a:p>
+        </p:txBody>
+      </p:sp>
+      <p:sp>
+        <p:nvSpPr>
+          <p:cNvPr id="43" name="Shape 41"/>
+          <p:cNvSpPr/>
+          <p:nvPr/>
+        </p:nvSpPr>
+        <p:spPr>
+          <a:xfrm>
+            <a:off x="6062472" y="4169664"/>
+            <a:ext cx="685800" cy="384048"/>
           </a:xfrm>
           <a:prstGeom prst="rect">
             <a:avLst>
-              <a:gd name="adj" fmla="val 8333"/>
+              <a:gd name="adj" fmla="val 9524"/>
             </a:avLst>
           </a:prstGeom>
           <a:solidFill>
-            <a:srgbClr val="E2E8F0"/>
-          </a:solidFill>
-          <a:ln w="12700">
-            <a:solidFill>
-              <a:srgbClr val="E2E8F0"/>
-            </a:solidFill>
-            <a:prstDash val="solid"/>
-          </a:ln>
-        </p:spPr>
-      </p:sp>
-      <p:sp>
-        <p:nvSpPr>
-          <p:cNvPr id="26" name="Text 24"/>
-          <p:cNvSpPr/>
-          <p:nvPr/>
-        </p:nvSpPr>
-        <p:spPr>
-          <a:xfrm>
-            <a:off x="365760" y="3273552"/>
-            <a:ext cx="1371600" cy="658368"/>
-          </a:xfrm>
-          <a:prstGeom prst="rect">
-            <a:avLst/>
-          </a:prstGeom>
-          <a:noFill/>
-          <a:ln/>
-        </p:spPr>
-        <p:txBody>
-          <a:bodyPr wrap="square" lIns="0" tIns="0" rIns="0" bIns="0" rtlCol="0" anchor="ctr"/>
-          <a:lstStyle/>
-          <a:p>
-            <a:pPr algn="ctr" indent="0" marL="0">
-              <a:buNone/>
-            </a:pPr>
-            <a:r>
-              <a:rPr lang="en-US" sz="1100" b="1" dirty="0">
-                <a:solidFill>
-                  <a:srgbClr val="475569"/>
+            <a:srgbClr val="FFFFFF"/>
+          </a:solidFill>
+          <a:ln w="12700">
+            <a:solidFill>
+              <a:srgbClr val="DB2777"/>
+            </a:solidFill>
+            <a:prstDash val="solid"/>
+          </a:ln>
+        </p:spPr>
+      </p:sp>
+      <p:sp>
+        <p:nvSpPr>
+          <p:cNvPr id="44" name="Text 42"/>
+          <p:cNvSpPr/>
+          <p:nvPr/>
+        </p:nvSpPr>
+        <p:spPr>
+          <a:xfrm>
+            <a:off x="6062472" y="4169664"/>
+            <a:ext cx="685800" cy="384048"/>
+          </a:xfrm>
+          <a:prstGeom prst="rect">
+            <a:avLst/>
+          </a:prstGeom>
+          <a:noFill/>
+          <a:ln/>
+        </p:spPr>
+        <p:txBody>
+          <a:bodyPr wrap="square" lIns="0" tIns="0" rIns="0" bIns="0" rtlCol="0" anchor="ctr"/>
+          <a:lstStyle/>
+          <a:p>
+            <a:pPr algn="ctr" indent="0" marL="0">
+              <a:buNone/>
+            </a:pPr>
+            <a:r>
+              <a:rPr lang="en-US" sz="900" b="1" dirty="0">
+                <a:solidFill>
+                  <a:srgbClr val="9D174D"/>
                 </a:solidFill>
                 <a:latin typeface="Trebuchet MS" pitchFamily="34" charset="0"/>
                 <a:ea typeface="Trebuchet MS" pitchFamily="34" charset="-122"/>
                 <a:cs typeface="Trebuchet MS" pitchFamily="34" charset="-120"/>
               </a:rPr>
-              <a:t>Syllables</a:t>
-            </a:r>
-            <a:endParaRPr lang="en-US" sz="1100" dirty="0"/>
-          </a:p>
-        </p:txBody>
-      </p:sp>
-      <p:sp>
-        <p:nvSpPr>
-          <p:cNvPr id="27" name="Shape 25"/>
-          <p:cNvSpPr/>
-          <p:nvPr/>
-        </p:nvSpPr>
-        <p:spPr>
-          <a:xfrm>
-            <a:off x="1874520" y="3273552"/>
-            <a:ext cx="6903720" cy="658368"/>
+              <a:t>oy</a:t>
+            </a:r>
+            <a:endParaRPr lang="en-US" sz="900" dirty="0"/>
+          </a:p>
+        </p:txBody>
+      </p:sp>
+      <p:sp>
+        <p:nvSpPr>
+          <p:cNvPr id="45" name="Shape 43"/>
+          <p:cNvSpPr/>
+          <p:nvPr/>
+        </p:nvSpPr>
+        <p:spPr>
+          <a:xfrm>
+            <a:off x="7274052" y="4169664"/>
+            <a:ext cx="685800" cy="384048"/>
           </a:xfrm>
           <a:prstGeom prst="rect">
             <a:avLst>
-              <a:gd name="adj" fmla="val 8333"/>
+              <a:gd name="adj" fmla="val 9524"/>
             </a:avLst>
           </a:prstGeom>
           <a:solidFill>
-            <a:srgbClr val="CCFBF1"/>
-          </a:solidFill>
-          <a:ln w="12700">
-            <a:solidFill>
-              <a:srgbClr val="0D9488"/>
-            </a:solidFill>
-            <a:prstDash val="solid"/>
-          </a:ln>
-        </p:spPr>
-      </p:sp>
-      <p:sp>
-        <p:nvSpPr>
-          <p:cNvPr id="28" name="Shape 26"/>
-          <p:cNvSpPr/>
-          <p:nvPr/>
-        </p:nvSpPr>
-        <p:spPr>
-          <a:xfrm>
-            <a:off x="1978152" y="3364992"/>
-            <a:ext cx="1225296" cy="475488"/>
-          </a:xfrm>
-          <a:prstGeom prst="rect">
-            <a:avLst>
-              <a:gd name="adj" fmla="val 9615"/>
-            </a:avLst>
-          </a:prstGeom>
-          <a:solidFill>
             <a:srgbClr val="FFFFFF"/>
           </a:solidFill>
           <a:ln w="12700">
             <a:solidFill>
-              <a:srgbClr val="0D9488"/>
-            </a:solidFill>
-            <a:prstDash val="solid"/>
-          </a:ln>
-        </p:spPr>
-      </p:sp>
-      <p:sp>
-        <p:nvSpPr>
-          <p:cNvPr id="29" name="Text 27"/>
-          <p:cNvSpPr/>
-          <p:nvPr/>
-        </p:nvSpPr>
-        <p:spPr>
-          <a:xfrm>
-            <a:off x="1978152" y="3364992"/>
-            <a:ext cx="1225296" cy="475488"/>
-          </a:xfrm>
-          <a:prstGeom prst="rect">
-            <a:avLst/>
-          </a:prstGeom>
-          <a:noFill/>
-          <a:ln/>
-        </p:spPr>
-        <p:txBody>
-          <a:bodyPr wrap="square" lIns="0" tIns="0" rIns="0" bIns="0" rtlCol="0" anchor="ctr"/>
-          <a:lstStyle/>
-          <a:p>
-            <a:pPr algn="ctr" indent="0" marL="0">
-              <a:buNone/>
-            </a:pPr>
-            <a:r>
-              <a:rPr lang="en-US" sz="1400" b="1" dirty="0">
-                <a:solidFill>
-                  <a:srgbClr val="0D9488"/>
+              <a:srgbClr val="DB2777"/>
+            </a:solidFill>
+            <a:prstDash val="solid"/>
+          </a:ln>
+        </p:spPr>
+      </p:sp>
+      <p:sp>
+        <p:nvSpPr>
+          <p:cNvPr id="46" name="Text 44"/>
+          <p:cNvSpPr/>
+          <p:nvPr/>
+        </p:nvSpPr>
+        <p:spPr>
+          <a:xfrm>
+            <a:off x="7274052" y="4169664"/>
+            <a:ext cx="685800" cy="384048"/>
+          </a:xfrm>
+          <a:prstGeom prst="rect">
+            <a:avLst/>
+          </a:prstGeom>
+          <a:noFill/>
+          <a:ln/>
+        </p:spPr>
+        <p:txBody>
+          <a:bodyPr wrap="square" lIns="0" tIns="0" rIns="0" bIns="0" rtlCol="0" anchor="ctr"/>
+          <a:lstStyle/>
+          <a:p>
+            <a:pPr algn="ctr" indent="0" marL="0">
+              <a:buNone/>
+            </a:pPr>
+            <a:r>
+              <a:rPr lang="en-US" sz="900" b="1" dirty="0">
+                <a:solidFill>
+                  <a:srgbClr val="9D174D"/>
                 </a:solidFill>
                 <a:latin typeface="Trebuchet MS" pitchFamily="34" charset="0"/>
                 <a:ea typeface="Trebuchet MS" pitchFamily="34" charset="-122"/>
                 <a:cs typeface="Trebuchet MS" pitchFamily="34" charset="-120"/>
               </a:rPr>
-              <a:t>un</a:t>
-            </a:r>
-            <a:endParaRPr lang="en-US" sz="1400" dirty="0"/>
-          </a:p>
-        </p:txBody>
-      </p:sp>
-      <p:sp>
-        <p:nvSpPr>
-          <p:cNvPr id="30" name="Text 28"/>
-          <p:cNvSpPr/>
-          <p:nvPr/>
-        </p:nvSpPr>
-        <p:spPr>
-          <a:xfrm>
-            <a:off x="3203448" y="3364992"/>
-            <a:ext cx="76200" cy="475488"/>
-          </a:xfrm>
-          <a:prstGeom prst="rect">
-            <a:avLst/>
-          </a:prstGeom>
-          <a:noFill/>
-          <a:ln/>
-        </p:spPr>
-        <p:txBody>
-          <a:bodyPr wrap="square" lIns="0" tIns="0" rIns="0" bIns="0" rtlCol="0" anchor="ctr"/>
-          <a:lstStyle/>
-          <a:p>
-            <a:pPr algn="ctr" indent="0" marL="0">
-              <a:buNone/>
-            </a:pPr>
-            <a:r>
-              <a:rPr lang="en-US" sz="1600" b="1" dirty="0">
-                <a:solidFill>
-                  <a:srgbClr val="0D9488"/>
-                </a:solidFill>
-                <a:latin typeface="Trebuchet MS" pitchFamily="34" charset="0"/>
-                <a:ea typeface="Trebuchet MS" pitchFamily="34" charset="-122"/>
-                <a:cs typeface="Trebuchet MS" pitchFamily="34" charset="-120"/>
-              </a:rPr>
-              <a:t>·</a:t>
-            </a:r>
-            <a:endParaRPr lang="en-US" sz="1600" dirty="0"/>
-          </a:p>
-        </p:txBody>
-      </p:sp>
-      <p:sp>
-        <p:nvSpPr>
-          <p:cNvPr id="31" name="Shape 29"/>
-          <p:cNvSpPr/>
-          <p:nvPr/>
-        </p:nvSpPr>
-        <p:spPr>
-          <a:xfrm>
-            <a:off x="3279648" y="3364992"/>
-            <a:ext cx="1225296" cy="475488"/>
-          </a:xfrm>
-          <a:prstGeom prst="rect">
-            <a:avLst>
-              <a:gd name="adj" fmla="val 9615"/>
-            </a:avLst>
-          </a:prstGeom>
-          <a:solidFill>
-            <a:srgbClr val="FFFFFF"/>
-          </a:solidFill>
-          <a:ln w="12700">
-            <a:solidFill>
-              <a:srgbClr val="0D9488"/>
-            </a:solidFill>
-            <a:prstDash val="solid"/>
-          </a:ln>
-        </p:spPr>
-      </p:sp>
-      <p:sp>
-        <p:nvSpPr>
-          <p:cNvPr id="32" name="Text 30"/>
-          <p:cNvSpPr/>
-          <p:nvPr/>
-        </p:nvSpPr>
-        <p:spPr>
-          <a:xfrm>
-            <a:off x="3279648" y="3364992"/>
-            <a:ext cx="1225296" cy="475488"/>
-          </a:xfrm>
-          <a:prstGeom prst="rect">
-            <a:avLst/>
-          </a:prstGeom>
-          <a:noFill/>
-          <a:ln/>
-        </p:spPr>
-        <p:txBody>
-          <a:bodyPr wrap="square" lIns="0" tIns="0" rIns="0" bIns="0" rtlCol="0" anchor="ctr"/>
-          <a:lstStyle/>
-          <a:p>
-            <a:pPr algn="ctr" indent="0" marL="0">
-              <a:buNone/>
-            </a:pPr>
-            <a:r>
-              <a:rPr lang="en-US" sz="1400" b="1" dirty="0">
-                <a:solidFill>
-                  <a:srgbClr val="0D9488"/>
-                </a:solidFill>
-                <a:latin typeface="Trebuchet MS" pitchFamily="34" charset="0"/>
-                <a:ea typeface="Trebuchet MS" pitchFamily="34" charset="-122"/>
-                <a:cs typeface="Trebuchet MS" pitchFamily="34" charset="-120"/>
-              </a:rPr>
-              <a:t>en</a:t>
-            </a:r>
-            <a:endParaRPr lang="en-US" sz="1400" dirty="0"/>
-          </a:p>
-        </p:txBody>
-      </p:sp>
-      <p:sp>
-        <p:nvSpPr>
-          <p:cNvPr id="33" name="Text 31"/>
-          <p:cNvSpPr/>
-          <p:nvPr/>
-        </p:nvSpPr>
-        <p:spPr>
-          <a:xfrm>
-            <a:off x="4504944" y="3364992"/>
-            <a:ext cx="76200" cy="475488"/>
-          </a:xfrm>
-          <a:prstGeom prst="rect">
-            <a:avLst/>
-          </a:prstGeom>
-          <a:noFill/>
-          <a:ln/>
-        </p:spPr>
-        <p:txBody>
-          <a:bodyPr wrap="square" lIns="0" tIns="0" rIns="0" bIns="0" rtlCol="0" anchor="ctr"/>
-          <a:lstStyle/>
-          <a:p>
-            <a:pPr algn="ctr" indent="0" marL="0">
-              <a:buNone/>
-            </a:pPr>
-            <a:r>
-              <a:rPr lang="en-US" sz="1600" b="1" dirty="0">
-                <a:solidFill>
-                  <a:srgbClr val="0D9488"/>
-                </a:solidFill>
-                <a:latin typeface="Trebuchet MS" pitchFamily="34" charset="0"/>
-                <a:ea typeface="Trebuchet MS" pitchFamily="34" charset="-122"/>
-                <a:cs typeface="Trebuchet MS" pitchFamily="34" charset="-120"/>
-              </a:rPr>
-              <a:t>·</a:t>
-            </a:r>
-            <a:endParaRPr lang="en-US" sz="1600" dirty="0"/>
-          </a:p>
-        </p:txBody>
-      </p:sp>
-      <p:sp>
-        <p:nvSpPr>
-          <p:cNvPr id="34" name="Shape 32"/>
-          <p:cNvSpPr/>
-          <p:nvPr/>
-        </p:nvSpPr>
-        <p:spPr>
-          <a:xfrm>
-            <a:off x="4581144" y="3364992"/>
-            <a:ext cx="1225296" cy="475488"/>
-          </a:xfrm>
-          <a:prstGeom prst="rect">
-            <a:avLst>
-              <a:gd name="adj" fmla="val 9615"/>
-            </a:avLst>
-          </a:prstGeom>
-          <a:solidFill>
-            <a:srgbClr val="FFFFFF"/>
-          </a:solidFill>
-          <a:ln w="12700">
-            <a:solidFill>
-              <a:srgbClr val="0D9488"/>
-            </a:solidFill>
-            <a:prstDash val="solid"/>
-          </a:ln>
-        </p:spPr>
-      </p:sp>
-      <p:sp>
-        <p:nvSpPr>
-          <p:cNvPr id="35" name="Text 33"/>
-          <p:cNvSpPr/>
-          <p:nvPr/>
-        </p:nvSpPr>
-        <p:spPr>
-          <a:xfrm>
-            <a:off x="4581144" y="3364992"/>
-            <a:ext cx="1225296" cy="475488"/>
-          </a:xfrm>
-          <a:prstGeom prst="rect">
-            <a:avLst/>
-          </a:prstGeom>
-          <a:noFill/>
-          <a:ln/>
-        </p:spPr>
-        <p:txBody>
-          <a:bodyPr wrap="square" lIns="0" tIns="0" rIns="0" bIns="0" rtlCol="0" anchor="ctr"/>
-          <a:lstStyle/>
-          <a:p>
-            <a:pPr algn="ctr" indent="0" marL="0">
-              <a:buNone/>
-            </a:pPr>
-            <a:r>
-              <a:rPr lang="en-US" sz="1400" b="1" dirty="0">
-                <a:solidFill>
-                  <a:srgbClr val="0D9488"/>
-                </a:solidFill>
-                <a:latin typeface="Trebuchet MS" pitchFamily="34" charset="0"/>
-                <a:ea typeface="Trebuchet MS" pitchFamily="34" charset="-122"/>
-                <a:cs typeface="Trebuchet MS" pitchFamily="34" charset="-120"/>
-              </a:rPr>
-              <a:t>joy</a:t>
-            </a:r>
-            <a:endParaRPr lang="en-US" sz="1400" dirty="0"/>
-          </a:p>
-        </p:txBody>
-      </p:sp>
-      <p:sp>
-        <p:nvSpPr>
-          <p:cNvPr id="36" name="Text 34"/>
-          <p:cNvSpPr/>
-          <p:nvPr/>
-        </p:nvSpPr>
-        <p:spPr>
-          <a:xfrm>
-            <a:off x="5806440" y="3364992"/>
-            <a:ext cx="76200" cy="475488"/>
-          </a:xfrm>
-          <a:prstGeom prst="rect">
-            <a:avLst/>
-          </a:prstGeom>
-          <a:noFill/>
-          <a:ln/>
-        </p:spPr>
-        <p:txBody>
-          <a:bodyPr wrap="square" lIns="0" tIns="0" rIns="0" bIns="0" rtlCol="0" anchor="ctr"/>
-          <a:lstStyle/>
-          <a:p>
-            <a:pPr algn="ctr" indent="0" marL="0">
-              <a:buNone/>
-            </a:pPr>
-            <a:r>
-              <a:rPr lang="en-US" sz="1600" b="1" dirty="0">
-                <a:solidFill>
-                  <a:srgbClr val="0D9488"/>
-                </a:solidFill>
-                <a:latin typeface="Trebuchet MS" pitchFamily="34" charset="0"/>
-                <a:ea typeface="Trebuchet MS" pitchFamily="34" charset="-122"/>
-                <a:cs typeface="Trebuchet MS" pitchFamily="34" charset="-120"/>
-              </a:rPr>
-              <a:t>·</a:t>
-            </a:r>
-            <a:endParaRPr lang="en-US" sz="1600" dirty="0"/>
-          </a:p>
-        </p:txBody>
-      </p:sp>
-      <p:sp>
-        <p:nvSpPr>
-          <p:cNvPr id="37" name="Shape 35"/>
-          <p:cNvSpPr/>
-          <p:nvPr/>
-        </p:nvSpPr>
-        <p:spPr>
-          <a:xfrm>
-            <a:off x="5882640" y="3364992"/>
-            <a:ext cx="1225296" cy="475488"/>
-          </a:xfrm>
-          <a:prstGeom prst="rect">
-            <a:avLst>
-              <a:gd name="adj" fmla="val 9615"/>
-            </a:avLst>
-          </a:prstGeom>
-          <a:solidFill>
-            <a:srgbClr val="FFFFFF"/>
-          </a:solidFill>
-          <a:ln w="12700">
-            <a:solidFill>
-              <a:srgbClr val="0D9488"/>
-            </a:solidFill>
-            <a:prstDash val="solid"/>
-          </a:ln>
-        </p:spPr>
-      </p:sp>
-      <p:sp>
-        <p:nvSpPr>
-          <p:cNvPr id="38" name="Text 36"/>
-          <p:cNvSpPr/>
-          <p:nvPr/>
-        </p:nvSpPr>
-        <p:spPr>
-          <a:xfrm>
-            <a:off x="5882640" y="3364992"/>
-            <a:ext cx="1225296" cy="475488"/>
-          </a:xfrm>
-          <a:prstGeom prst="rect">
-            <a:avLst/>
-          </a:prstGeom>
-          <a:noFill/>
-          <a:ln/>
-        </p:spPr>
-        <p:txBody>
-          <a:bodyPr wrap="square" lIns="0" tIns="0" rIns="0" bIns="0" rtlCol="0" anchor="ctr"/>
-          <a:lstStyle/>
-          <a:p>
-            <a:pPr algn="ctr" indent="0" marL="0">
-              <a:buNone/>
-            </a:pPr>
-            <a:r>
-              <a:rPr lang="en-US" sz="1400" b="1" dirty="0">
-                <a:solidFill>
-                  <a:srgbClr val="0D9488"/>
-                </a:solidFill>
-                <a:latin typeface="Trebuchet MS" pitchFamily="34" charset="0"/>
-                <a:ea typeface="Trebuchet MS" pitchFamily="34" charset="-122"/>
-                <a:cs typeface="Trebuchet MS" pitchFamily="34" charset="-120"/>
-              </a:rPr>
-              <a:t>a</a:t>
-            </a:r>
-            <a:endParaRPr lang="en-US" sz="1400" dirty="0"/>
-          </a:p>
-        </p:txBody>
-      </p:sp>
-      <p:sp>
-        <p:nvSpPr>
-          <p:cNvPr id="39" name="Text 37"/>
-          <p:cNvSpPr/>
-          <p:nvPr/>
-        </p:nvSpPr>
-        <p:spPr>
-          <a:xfrm>
-            <a:off x="7107936" y="3364992"/>
-            <a:ext cx="76200" cy="475488"/>
-          </a:xfrm>
-          <a:prstGeom prst="rect">
-            <a:avLst/>
-          </a:prstGeom>
-          <a:noFill/>
-          <a:ln/>
-        </p:spPr>
-        <p:txBody>
-          <a:bodyPr wrap="square" lIns="0" tIns="0" rIns="0" bIns="0" rtlCol="0" anchor="ctr"/>
-          <a:lstStyle/>
-          <a:p>
-            <a:pPr algn="ctr" indent="0" marL="0">
-              <a:buNone/>
-            </a:pPr>
-            <a:r>
-              <a:rPr lang="en-US" sz="1600" b="1" dirty="0">
-                <a:solidFill>
-                  <a:srgbClr val="0D9488"/>
-                </a:solidFill>
-                <a:latin typeface="Trebuchet MS" pitchFamily="34" charset="0"/>
-                <a:ea typeface="Trebuchet MS" pitchFamily="34" charset="-122"/>
-                <a:cs typeface="Trebuchet MS" pitchFamily="34" charset="-120"/>
-              </a:rPr>
-              <a:t>·</a:t>
-            </a:r>
-            <a:endParaRPr lang="en-US" sz="1600" dirty="0"/>
-          </a:p>
-        </p:txBody>
-      </p:sp>
-      <p:sp>
-        <p:nvSpPr>
-          <p:cNvPr id="40" name="Shape 38"/>
-          <p:cNvSpPr/>
-          <p:nvPr/>
-        </p:nvSpPr>
-        <p:spPr>
-          <a:xfrm>
-            <a:off x="7184136" y="3364992"/>
-            <a:ext cx="1225296" cy="475488"/>
-          </a:xfrm>
-          <a:prstGeom prst="rect">
-            <a:avLst>
-              <a:gd name="adj" fmla="val 9615"/>
-            </a:avLst>
-          </a:prstGeom>
-          <a:solidFill>
-            <a:srgbClr val="FFFFFF"/>
-          </a:solidFill>
-          <a:ln w="12700">
-            <a:solidFill>
-              <a:srgbClr val="0D9488"/>
-            </a:solidFill>
-            <a:prstDash val="solid"/>
-          </a:ln>
-        </p:spPr>
-      </p:sp>
-      <p:sp>
-        <p:nvSpPr>
-          <p:cNvPr id="41" name="Text 39"/>
-          <p:cNvSpPr/>
-          <p:nvPr/>
-        </p:nvSpPr>
-        <p:spPr>
-          <a:xfrm>
-            <a:off x="7184136" y="3364992"/>
-            <a:ext cx="1225296" cy="475488"/>
-          </a:xfrm>
-          <a:prstGeom prst="rect">
-            <a:avLst/>
-          </a:prstGeom>
-          <a:noFill/>
-          <a:ln/>
-        </p:spPr>
-        <p:txBody>
-          <a:bodyPr wrap="square" lIns="0" tIns="0" rIns="0" bIns="0" rtlCol="0" anchor="ctr"/>
-          <a:lstStyle/>
-          <a:p>
-            <a:pPr algn="ctr" indent="0" marL="0">
-              <a:buNone/>
-            </a:pPr>
-            <a:r>
-              <a:rPr lang="en-US" sz="1400" b="1" dirty="0">
-                <a:solidFill>
-                  <a:srgbClr val="0D9488"/>
-                </a:solidFill>
-                <a:latin typeface="Trebuchet MS" pitchFamily="34" charset="0"/>
-                <a:ea typeface="Trebuchet MS" pitchFamily="34" charset="-122"/>
-                <a:cs typeface="Trebuchet MS" pitchFamily="34" charset="-120"/>
-              </a:rPr>
-              <a:t>ble</a:t>
-            </a:r>
-            <a:endParaRPr lang="en-US" sz="1400" dirty="0"/>
-          </a:p>
-        </p:txBody>
-      </p:sp>
-      <p:sp>
-        <p:nvSpPr>
-          <p:cNvPr id="42" name="Shape 40"/>
-          <p:cNvSpPr/>
-          <p:nvPr/>
-        </p:nvSpPr>
-        <p:spPr>
-          <a:xfrm>
-            <a:off x="365760" y="4096512"/>
-            <a:ext cx="1371600" cy="804672"/>
-          </a:xfrm>
-          <a:prstGeom prst="rect">
-            <a:avLst>
-              <a:gd name="adj" fmla="val 6818"/>
-            </a:avLst>
-          </a:prstGeom>
-          <a:solidFill>
-            <a:srgbClr val="E2E8F0"/>
-          </a:solidFill>
-          <a:ln w="12700">
-            <a:solidFill>
-              <a:srgbClr val="E2E8F0"/>
-            </a:solidFill>
-            <a:prstDash val="solid"/>
-          </a:ln>
-        </p:spPr>
-      </p:sp>
-      <p:sp>
-        <p:nvSpPr>
-          <p:cNvPr id="43" name="Text 41"/>
-          <p:cNvSpPr/>
-          <p:nvPr/>
-        </p:nvSpPr>
-        <p:spPr>
-          <a:xfrm>
-            <a:off x="365760" y="4096512"/>
-            <a:ext cx="1371600" cy="804672"/>
-          </a:xfrm>
-          <a:prstGeom prst="rect">
-            <a:avLst/>
-          </a:prstGeom>
-          <a:noFill/>
-          <a:ln/>
-        </p:spPr>
-        <p:txBody>
-          <a:bodyPr wrap="square" lIns="0" tIns="0" rIns="0" bIns="0" rtlCol="0" anchor="ctr"/>
-          <a:lstStyle/>
-          <a:p>
-            <a:pPr algn="ctr" indent="0" marL="0">
-              <a:buNone/>
-            </a:pPr>
-            <a:r>
-              <a:rPr lang="en-US" sz="1100" b="1" dirty="0">
-                <a:solidFill>
-                  <a:srgbClr val="475569"/>
-                </a:solidFill>
-                <a:latin typeface="Trebuchet MS" pitchFamily="34" charset="0"/>
-                <a:ea typeface="Trebuchet MS" pitchFamily="34" charset="-122"/>
-                <a:cs typeface="Trebuchet MS" pitchFamily="34" charset="-120"/>
-              </a:rPr>
-              <a:t>Phonemes</a:t>
-            </a:r>
-            <a:endParaRPr lang="en-US" sz="1100" dirty="0"/>
-          </a:p>
-        </p:txBody>
-      </p:sp>
-      <p:sp>
-        <p:nvSpPr>
-          <p:cNvPr id="44" name="Shape 42"/>
-          <p:cNvSpPr/>
-          <p:nvPr/>
-        </p:nvSpPr>
-        <p:spPr>
-          <a:xfrm>
-            <a:off x="1874520" y="4096512"/>
-            <a:ext cx="6903720" cy="804672"/>
-          </a:xfrm>
-          <a:prstGeom prst="rect">
-            <a:avLst>
-              <a:gd name="adj" fmla="val 6818"/>
-            </a:avLst>
-          </a:prstGeom>
-          <a:solidFill>
-            <a:srgbClr val="FCE7F3"/>
-          </a:solidFill>
-          <a:ln w="12700">
-            <a:solidFill>
-              <a:srgbClr val="DB2777"/>
-            </a:solidFill>
-            <a:prstDash val="solid"/>
-          </a:ln>
-        </p:spPr>
-      </p:sp>
-      <p:sp>
-        <p:nvSpPr>
-          <p:cNvPr id="45" name="Shape 43"/>
-          <p:cNvSpPr/>
-          <p:nvPr/>
-        </p:nvSpPr>
-        <p:spPr>
-          <a:xfrm>
-            <a:off x="1951330" y="4169664"/>
-            <a:ext cx="676656" cy="384048"/>
-          </a:xfrm>
-          <a:prstGeom prst="rect">
-            <a:avLst>
-              <a:gd name="adj" fmla="val 9524"/>
-            </a:avLst>
-          </a:prstGeom>
-          <a:solidFill>
-            <a:srgbClr val="FFFFFF"/>
-          </a:solidFill>
-          <a:ln w="12700">
-            <a:solidFill>
-              <a:srgbClr val="DB2777"/>
-            </a:solidFill>
-            <a:prstDash val="solid"/>
-          </a:ln>
-        </p:spPr>
-      </p:sp>
-      <p:sp>
-        <p:nvSpPr>
-          <p:cNvPr id="46" name="Text 44"/>
-          <p:cNvSpPr/>
-          <p:nvPr/>
-        </p:nvSpPr>
-        <p:spPr>
-          <a:xfrm>
-            <a:off x="1951330" y="4169664"/>
-            <a:ext cx="676656" cy="384048"/>
-          </a:xfrm>
-          <a:prstGeom prst="rect">
-            <a:avLst/>
-          </a:prstGeom>
-          <a:noFill/>
-          <a:ln/>
-        </p:spPr>
-        <p:txBody>
-          <a:bodyPr wrap="square" lIns="0" tIns="0" rIns="0" bIns="0" rtlCol="0" anchor="ctr"/>
-          <a:lstStyle/>
-          <a:p>
-            <a:pPr algn="ctr" indent="0" marL="0">
-              <a:buNone/>
-            </a:pPr>
-            <a:r>
-              <a:rPr lang="en-US" sz="900" b="1" dirty="0">
-                <a:solidFill>
-                  <a:srgbClr val="9D174D"/>
-                </a:solidFill>
-                <a:latin typeface="Trebuchet MS" pitchFamily="34" charset="0"/>
-                <a:ea typeface="Trebuchet MS" pitchFamily="34" charset="-122"/>
-                <a:cs typeface="Trebuchet MS" pitchFamily="34" charset="-120"/>
-              </a:rPr>
-              <a:t>u</a:t>
-            </a:r>
-            <a:endParaRPr lang="en-US" sz="900" dirty="0"/>
-          </a:p>
-        </p:txBody>
-      </p:sp>
-      <p:sp>
-        <p:nvSpPr>
-          <p:cNvPr id="47" name="Shape 45"/>
-          <p:cNvSpPr/>
-          <p:nvPr/>
-        </p:nvSpPr>
-        <p:spPr>
-          <a:xfrm>
-            <a:off x="2677363" y="4169664"/>
-            <a:ext cx="676656" cy="384048"/>
-          </a:xfrm>
-          <a:prstGeom prst="rect">
-            <a:avLst>
-              <a:gd name="adj" fmla="val 9524"/>
-            </a:avLst>
-          </a:prstGeom>
-          <a:solidFill>
-            <a:srgbClr val="FFFFFF"/>
-          </a:solidFill>
-          <a:ln w="12700">
-            <a:solidFill>
-              <a:srgbClr val="DB2777"/>
-            </a:solidFill>
-            <a:prstDash val="solid"/>
-          </a:ln>
-        </p:spPr>
-      </p:sp>
-      <p:sp>
-        <p:nvSpPr>
-          <p:cNvPr id="48" name="Text 46"/>
-          <p:cNvSpPr/>
-          <p:nvPr/>
-        </p:nvSpPr>
-        <p:spPr>
-          <a:xfrm>
-            <a:off x="2677363" y="4169664"/>
-            <a:ext cx="676656" cy="384048"/>
-          </a:xfrm>
-          <a:prstGeom prst="rect">
-            <a:avLst/>
-          </a:prstGeom>
-          <a:noFill/>
-          <a:ln/>
-        </p:spPr>
-        <p:txBody>
-          <a:bodyPr wrap="square" lIns="0" tIns="0" rIns="0" bIns="0" rtlCol="0" anchor="ctr"/>
-          <a:lstStyle/>
-          <a:p>
-            <a:pPr algn="ctr" indent="0" marL="0">
-              <a:buNone/>
-            </a:pPr>
-            <a:r>
-              <a:rPr lang="en-US" sz="900" b="1" dirty="0">
-                <a:solidFill>
-                  <a:srgbClr val="9D174D"/>
-                </a:solidFill>
-                <a:latin typeface="Trebuchet MS" pitchFamily="34" charset="0"/>
-                <a:ea typeface="Trebuchet MS" pitchFamily="34" charset="-122"/>
-                <a:cs typeface="Trebuchet MS" pitchFamily="34" charset="-120"/>
-              </a:rPr>
-              <a:t>n</a:t>
-            </a:r>
-            <a:endParaRPr lang="en-US" sz="900" dirty="0"/>
-          </a:p>
-        </p:txBody>
-      </p:sp>
-      <p:sp>
-        <p:nvSpPr>
-          <p:cNvPr id="49" name="Shape 47"/>
-          <p:cNvSpPr/>
-          <p:nvPr/>
-        </p:nvSpPr>
-        <p:spPr>
-          <a:xfrm>
-            <a:off x="3403397" y="4169664"/>
-            <a:ext cx="676656" cy="384048"/>
-          </a:xfrm>
-          <a:prstGeom prst="rect">
-            <a:avLst>
-              <a:gd name="adj" fmla="val 9524"/>
-            </a:avLst>
-          </a:prstGeom>
-          <a:solidFill>
-            <a:srgbClr val="FFFFFF"/>
-          </a:solidFill>
-          <a:ln w="12700">
-            <a:solidFill>
-              <a:srgbClr val="DB2777"/>
-            </a:solidFill>
-            <a:prstDash val="solid"/>
-          </a:ln>
-        </p:spPr>
-      </p:sp>
-      <p:sp>
-        <p:nvSpPr>
-          <p:cNvPr id="50" name="Text 48"/>
-          <p:cNvSpPr/>
-          <p:nvPr/>
-        </p:nvSpPr>
-        <p:spPr>
-          <a:xfrm>
-            <a:off x="3403397" y="4169664"/>
-            <a:ext cx="676656" cy="384048"/>
-          </a:xfrm>
-          <a:prstGeom prst="rect">
-            <a:avLst/>
-          </a:prstGeom>
-          <a:noFill/>
-          <a:ln/>
-        </p:spPr>
-        <p:txBody>
-          <a:bodyPr wrap="square" lIns="0" tIns="0" rIns="0" bIns="0" rtlCol="0" anchor="ctr"/>
-          <a:lstStyle/>
-          <a:p>
-            <a:pPr algn="ctr" indent="0" marL="0">
-              <a:buNone/>
-            </a:pPr>
-            <a:r>
-              <a:rPr lang="en-US" sz="900" b="1" dirty="0">
-                <a:solidFill>
-                  <a:srgbClr val="9D174D"/>
-                </a:solidFill>
-                <a:latin typeface="Trebuchet MS" pitchFamily="34" charset="0"/>
-                <a:ea typeface="Trebuchet MS" pitchFamily="34" charset="-122"/>
-                <a:cs typeface="Trebuchet MS" pitchFamily="34" charset="-120"/>
-              </a:rPr>
-              <a:t>e</a:t>
-            </a:r>
-            <a:endParaRPr lang="en-US" sz="900" dirty="0"/>
-          </a:p>
-        </p:txBody>
-      </p:sp>
-      <p:sp>
-        <p:nvSpPr>
-          <p:cNvPr id="51" name="Shape 49"/>
-          <p:cNvSpPr/>
-          <p:nvPr/>
-        </p:nvSpPr>
-        <p:spPr>
-          <a:xfrm>
-            <a:off x="4129430" y="4169664"/>
-            <a:ext cx="676656" cy="384048"/>
-          </a:xfrm>
-          <a:prstGeom prst="rect">
-            <a:avLst>
-              <a:gd name="adj" fmla="val 9524"/>
-            </a:avLst>
-          </a:prstGeom>
-          <a:solidFill>
-            <a:srgbClr val="FFFFFF"/>
-          </a:solidFill>
-          <a:ln w="12700">
-            <a:solidFill>
-              <a:srgbClr val="DB2777"/>
-            </a:solidFill>
-            <a:prstDash val="solid"/>
-          </a:ln>
-        </p:spPr>
-      </p:sp>
-      <p:sp>
-        <p:nvSpPr>
-          <p:cNvPr id="52" name="Text 50"/>
-          <p:cNvSpPr/>
-          <p:nvPr/>
-        </p:nvSpPr>
-        <p:spPr>
-          <a:xfrm>
-            <a:off x="4129430" y="4169664"/>
-            <a:ext cx="676656" cy="384048"/>
-          </a:xfrm>
-          <a:prstGeom prst="rect">
-            <a:avLst/>
-          </a:prstGeom>
-          <a:noFill/>
-          <a:ln/>
-        </p:spPr>
-        <p:txBody>
-          <a:bodyPr wrap="square" lIns="0" tIns="0" rIns="0" bIns="0" rtlCol="0" anchor="ctr"/>
-          <a:lstStyle/>
-          <a:p>
-            <a:pPr algn="ctr" indent="0" marL="0">
-              <a:buNone/>
-            </a:pPr>
-            <a:r>
-              <a:rPr lang="en-US" sz="900" b="1" dirty="0">
-                <a:solidFill>
-                  <a:srgbClr val="9D174D"/>
-                </a:solidFill>
-                <a:latin typeface="Trebuchet MS" pitchFamily="34" charset="0"/>
-                <a:ea typeface="Trebuchet MS" pitchFamily="34" charset="-122"/>
-                <a:cs typeface="Trebuchet MS" pitchFamily="34" charset="-120"/>
-              </a:rPr>
-              <a:t>n</a:t>
-            </a:r>
-            <a:endParaRPr lang="en-US" sz="900" dirty="0"/>
-          </a:p>
-        </p:txBody>
-      </p:sp>
-      <p:sp>
-        <p:nvSpPr>
-          <p:cNvPr id="53" name="Shape 51"/>
-          <p:cNvSpPr/>
-          <p:nvPr/>
-        </p:nvSpPr>
-        <p:spPr>
-          <a:xfrm>
-            <a:off x="4855464" y="4169664"/>
-            <a:ext cx="676656" cy="384048"/>
-          </a:xfrm>
-          <a:prstGeom prst="rect">
-            <a:avLst>
-              <a:gd name="adj" fmla="val 9524"/>
-            </a:avLst>
-          </a:prstGeom>
-          <a:solidFill>
-            <a:srgbClr val="FFFFFF"/>
-          </a:solidFill>
-          <a:ln w="12700">
-            <a:solidFill>
-              <a:srgbClr val="DB2777"/>
-            </a:solidFill>
-            <a:prstDash val="solid"/>
-          </a:ln>
-        </p:spPr>
-      </p:sp>
-      <p:sp>
-        <p:nvSpPr>
-          <p:cNvPr id="54" name="Text 52"/>
-          <p:cNvSpPr/>
-          <p:nvPr/>
-        </p:nvSpPr>
-        <p:spPr>
-          <a:xfrm>
-            <a:off x="4855464" y="4169664"/>
-            <a:ext cx="676656" cy="384048"/>
-          </a:xfrm>
-          <a:prstGeom prst="rect">
-            <a:avLst/>
-          </a:prstGeom>
-          <a:noFill/>
-          <a:ln/>
-        </p:spPr>
-        <p:txBody>
-          <a:bodyPr wrap="square" lIns="0" tIns="0" rIns="0" bIns="0" rtlCol="0" anchor="ctr"/>
-          <a:lstStyle/>
-          <a:p>
-            <a:pPr algn="ctr" indent="0" marL="0">
-              <a:buNone/>
-            </a:pPr>
-            <a:r>
-              <a:rPr lang="en-US" sz="900" b="1" dirty="0">
-                <a:solidFill>
-                  <a:srgbClr val="9D174D"/>
-                </a:solidFill>
-                <a:latin typeface="Trebuchet MS" pitchFamily="34" charset="0"/>
-                <a:ea typeface="Trebuchet MS" pitchFamily="34" charset="-122"/>
-                <a:cs typeface="Trebuchet MS" pitchFamily="34" charset="-120"/>
-              </a:rPr>
-              <a:t>j</a:t>
-            </a:r>
-            <a:endParaRPr lang="en-US" sz="900" dirty="0"/>
-          </a:p>
-        </p:txBody>
-      </p:sp>
-      <p:sp>
-        <p:nvSpPr>
-          <p:cNvPr id="55" name="Text 53"/>
-          <p:cNvSpPr/>
-          <p:nvPr/>
-        </p:nvSpPr>
-        <p:spPr>
-          <a:xfrm>
-            <a:off x="4855464" y="4572000"/>
-            <a:ext cx="676656" cy="219456"/>
-          </a:xfrm>
-          <a:prstGeom prst="rect">
-            <a:avLst/>
-          </a:prstGeom>
-          <a:noFill/>
-          <a:ln/>
-        </p:spPr>
-        <p:txBody>
-          <a:bodyPr wrap="square" lIns="0" tIns="0" rIns="0" bIns="0" rtlCol="0" anchor="t"/>
-          <a:lstStyle/>
-          <a:p>
-            <a:pPr algn="ctr" indent="0" marL="0">
-              <a:buNone/>
-            </a:pPr>
-            <a:r>
-              <a:rPr lang="en-US" sz="750" i="1" dirty="0">
-                <a:solidFill>
-                  <a:srgbClr val="94A3B8"/>
-                </a:solidFill>
-                <a:latin typeface="Calibri" pitchFamily="34" charset="0"/>
-                <a:ea typeface="Calibri" pitchFamily="34" charset="-122"/>
-                <a:cs typeface="Calibri" pitchFamily="34" charset="-120"/>
-              </a:rPr>
-              <a:t>/j/</a:t>
-            </a:r>
-            <a:endParaRPr lang="en-US" sz="750" dirty="0"/>
-          </a:p>
-        </p:txBody>
-      </p:sp>
-      <p:sp>
-        <p:nvSpPr>
-          <p:cNvPr id="56" name="Shape 54"/>
-          <p:cNvSpPr/>
-          <p:nvPr/>
-        </p:nvSpPr>
-        <p:spPr>
-          <a:xfrm>
-            <a:off x="5581498" y="4169664"/>
-            <a:ext cx="676656" cy="384048"/>
-          </a:xfrm>
-          <a:prstGeom prst="rect">
-            <a:avLst>
-              <a:gd name="adj" fmla="val 9524"/>
-            </a:avLst>
-          </a:prstGeom>
-          <a:solidFill>
-            <a:srgbClr val="FFFFFF"/>
-          </a:solidFill>
-          <a:ln w="12700">
-            <a:solidFill>
-              <a:srgbClr val="DB2777"/>
-            </a:solidFill>
-            <a:prstDash val="solid"/>
-          </a:ln>
-        </p:spPr>
-      </p:sp>
-      <p:sp>
-        <p:nvSpPr>
-          <p:cNvPr id="57" name="Text 55"/>
-          <p:cNvSpPr/>
-          <p:nvPr/>
-        </p:nvSpPr>
-        <p:spPr>
-          <a:xfrm>
-            <a:off x="5581498" y="4169664"/>
-            <a:ext cx="676656" cy="384048"/>
-          </a:xfrm>
-          <a:prstGeom prst="rect">
-            <a:avLst/>
-          </a:prstGeom>
-          <a:noFill/>
-          <a:ln/>
-        </p:spPr>
-        <p:txBody>
-          <a:bodyPr wrap="square" lIns="0" tIns="0" rIns="0" bIns="0" rtlCol="0" anchor="ctr"/>
-          <a:lstStyle/>
-          <a:p>
-            <a:pPr algn="ctr" indent="0" marL="0">
-              <a:buNone/>
-            </a:pPr>
-            <a:r>
-              <a:rPr lang="en-US" sz="900" b="1" dirty="0">
-                <a:solidFill>
-                  <a:srgbClr val="9D174D"/>
-                </a:solidFill>
-                <a:latin typeface="Trebuchet MS" pitchFamily="34" charset="0"/>
-                <a:ea typeface="Trebuchet MS" pitchFamily="34" charset="-122"/>
-                <a:cs typeface="Trebuchet MS" pitchFamily="34" charset="-120"/>
-              </a:rPr>
-              <a:t>oy</a:t>
-            </a:r>
-            <a:endParaRPr lang="en-US" sz="900" dirty="0"/>
-          </a:p>
-        </p:txBody>
-      </p:sp>
-      <p:sp>
-        <p:nvSpPr>
-          <p:cNvPr id="58" name="Shape 56"/>
-          <p:cNvSpPr/>
-          <p:nvPr/>
-        </p:nvSpPr>
-        <p:spPr>
-          <a:xfrm>
-            <a:off x="6307531" y="4169664"/>
-            <a:ext cx="676656" cy="384048"/>
-          </a:xfrm>
-          <a:prstGeom prst="rect">
-            <a:avLst>
-              <a:gd name="adj" fmla="val 9524"/>
-            </a:avLst>
-          </a:prstGeom>
-          <a:solidFill>
-            <a:srgbClr val="FFFFFF"/>
-          </a:solidFill>
-          <a:ln w="12700">
-            <a:solidFill>
-              <a:srgbClr val="DB2777"/>
-            </a:solidFill>
-            <a:prstDash val="solid"/>
-          </a:ln>
-        </p:spPr>
-      </p:sp>
-      <p:sp>
-        <p:nvSpPr>
-          <p:cNvPr id="59" name="Text 57"/>
-          <p:cNvSpPr/>
-          <p:nvPr/>
-        </p:nvSpPr>
-        <p:spPr>
-          <a:xfrm>
-            <a:off x="6307531" y="4169664"/>
-            <a:ext cx="676656" cy="384048"/>
-          </a:xfrm>
-          <a:prstGeom prst="rect">
-            <a:avLst/>
-          </a:prstGeom>
-          <a:noFill/>
-          <a:ln/>
-        </p:spPr>
-        <p:txBody>
-          <a:bodyPr wrap="square" lIns="0" tIns="0" rIns="0" bIns="0" rtlCol="0" anchor="ctr"/>
-          <a:lstStyle/>
-          <a:p>
-            <a:pPr algn="ctr" indent="0" marL="0">
-              <a:buNone/>
-            </a:pPr>
-            <a:r>
-              <a:rPr lang="en-US" sz="900" b="1" dirty="0">
-                <a:solidFill>
-                  <a:srgbClr val="9D174D"/>
-                </a:solidFill>
-                <a:latin typeface="Trebuchet MS" pitchFamily="34" charset="0"/>
-                <a:ea typeface="Trebuchet MS" pitchFamily="34" charset="-122"/>
-                <a:cs typeface="Trebuchet MS" pitchFamily="34" charset="-120"/>
-              </a:rPr>
-              <a:t>a</a:t>
-            </a:r>
-            <a:endParaRPr lang="en-US" sz="900" dirty="0"/>
-          </a:p>
-        </p:txBody>
-      </p:sp>
-      <p:sp>
-        <p:nvSpPr>
-          <p:cNvPr id="60" name="Shape 58"/>
-          <p:cNvSpPr/>
-          <p:nvPr/>
-        </p:nvSpPr>
-        <p:spPr>
-          <a:xfrm>
-            <a:off x="7033565" y="4169664"/>
-            <a:ext cx="676656" cy="384048"/>
-          </a:xfrm>
-          <a:prstGeom prst="rect">
-            <a:avLst>
-              <a:gd name="adj" fmla="val 9524"/>
-            </a:avLst>
-          </a:prstGeom>
-          <a:solidFill>
-            <a:srgbClr val="FFFFFF"/>
-          </a:solidFill>
-          <a:ln w="12700">
-            <a:solidFill>
-              <a:srgbClr val="DB2777"/>
-            </a:solidFill>
-            <a:prstDash val="solid"/>
-          </a:ln>
-        </p:spPr>
-      </p:sp>
-      <p:sp>
-        <p:nvSpPr>
-          <p:cNvPr id="61" name="Text 59"/>
-          <p:cNvSpPr/>
-          <p:nvPr/>
-        </p:nvSpPr>
-        <p:spPr>
-          <a:xfrm>
-            <a:off x="7033565" y="4169664"/>
-            <a:ext cx="676656" cy="384048"/>
-          </a:xfrm>
-          <a:prstGeom prst="rect">
-            <a:avLst/>
-          </a:prstGeom>
-          <a:noFill/>
-          <a:ln/>
-        </p:spPr>
-        <p:txBody>
-          <a:bodyPr wrap="square" lIns="0" tIns="0" rIns="0" bIns="0" rtlCol="0" anchor="ctr"/>
-          <a:lstStyle/>
-          <a:p>
-            <a:pPr algn="ctr" indent="0" marL="0">
-              <a:buNone/>
-            </a:pPr>
-            <a:r>
-              <a:rPr lang="en-US" sz="900" b="1" dirty="0">
-                <a:solidFill>
-                  <a:srgbClr val="9D174D"/>
-                </a:solidFill>
-                <a:latin typeface="Trebuchet MS" pitchFamily="34" charset="0"/>
-                <a:ea typeface="Trebuchet MS" pitchFamily="34" charset="-122"/>
-                <a:cs typeface="Trebuchet MS" pitchFamily="34" charset="-120"/>
-              </a:rPr>
-              <a:t>b</a:t>
-            </a:r>
-            <a:endParaRPr lang="en-US" sz="900" dirty="0"/>
-          </a:p>
-        </p:txBody>
-      </p:sp>
-      <p:sp>
-        <p:nvSpPr>
-          <p:cNvPr id="62" name="Shape 60"/>
-          <p:cNvSpPr/>
-          <p:nvPr/>
-        </p:nvSpPr>
-        <p:spPr>
-          <a:xfrm>
-            <a:off x="7759598" y="4169664"/>
-            <a:ext cx="676656" cy="384048"/>
-          </a:xfrm>
-          <a:prstGeom prst="rect">
-            <a:avLst>
-              <a:gd name="adj" fmla="val 9524"/>
-            </a:avLst>
-          </a:prstGeom>
-          <a:solidFill>
-            <a:srgbClr val="FFFFFF"/>
-          </a:solidFill>
-          <a:ln w="12700">
-            <a:solidFill>
-              <a:srgbClr val="DB2777"/>
-            </a:solidFill>
-            <a:prstDash val="solid"/>
-          </a:ln>
-        </p:spPr>
-      </p:sp>
-      <p:sp>
-        <p:nvSpPr>
-          <p:cNvPr id="63" name="Text 61"/>
-          <p:cNvSpPr/>
-          <p:nvPr/>
-        </p:nvSpPr>
-        <p:spPr>
-          <a:xfrm>
-            <a:off x="7759598" y="4169664"/>
-            <a:ext cx="676656" cy="384048"/>
-          </a:xfrm>
-          <a:prstGeom prst="rect">
-            <a:avLst/>
-          </a:prstGeom>
-          <a:noFill/>
-          <a:ln/>
-        </p:spPr>
-        <p:txBody>
-          <a:bodyPr wrap="square" lIns="0" tIns="0" rIns="0" bIns="0" rtlCol="0" anchor="ctr"/>
-          <a:lstStyle/>
-          <a:p>
-            <a:pPr algn="ctr" indent="0" marL="0">
-              <a:buNone/>
-            </a:pPr>
-            <a:r>
-              <a:rPr lang="en-US" sz="900" b="1" dirty="0">
-                <a:solidFill>
-                  <a:srgbClr val="9D174D"/>
-                </a:solidFill>
-                <a:latin typeface="Trebuchet MS" pitchFamily="34" charset="0"/>
-                <a:ea typeface="Trebuchet MS" pitchFamily="34" charset="-122"/>
-                <a:cs typeface="Trebuchet MS" pitchFamily="34" charset="-120"/>
-              </a:rPr>
-              <a:t>le</a:t>
+              <a:t>er</a:t>
             </a:r>
             <a:endParaRPr lang="en-US" sz="900" dirty="0"/>
           </a:p>
@@ -24168,7 +23117,7 @@
                 <a:ea typeface="Calibri" pitchFamily="34" charset="-122"/>
                 <a:cs typeface="Calibri" pitchFamily="34" charset="-120"/>
               </a:rPr>
-              <a:t>Word Labs  •  wordlabs.app  •  Root: 'enjoy' = to take pleasure from</a:t>
+              <a:t>Word Labs  •  wordlabs.app  •  Root: 'enjoy' = to take pleasure in</a:t>
             </a:r>
             <a:endParaRPr lang="en-US" sz="800" dirty="0"/>
           </a:p>
@@ -24307,7 +23256,7 @@
                 <a:ea typeface="Trebuchet MS" pitchFamily="34" charset="-122"/>
                 <a:cs typeface="Trebuchet MS" pitchFamily="34" charset="-120"/>
               </a:rPr>
-              <a:t>enjoyment</a:t>
+              <a:t>enjoyed</a:t>
             </a:r>
             <a:endParaRPr lang="en-US" sz="2800" dirty="0"/>
           </a:p>
@@ -24995,7 +23944,7 @@
                 <a:ea typeface="Calibri" pitchFamily="34" charset="-122"/>
                 <a:cs typeface="Calibri" pitchFamily="34" charset="-120"/>
               </a:rPr>
-              <a:t>Word Labs  •  wordlabs.app  •  Root: 'enjoy' = to take pleasure from</a:t>
+              <a:t>Word Labs  •  wordlabs.app  •  Root: 'enjoy' = to take pleasure in</a:t>
             </a:r>
             <a:endParaRPr lang="en-US" sz="800" dirty="0"/>
           </a:p>
@@ -25134,7 +24083,7 @@
                 <a:ea typeface="Trebuchet MS" pitchFamily="34" charset="-122"/>
                 <a:cs typeface="Trebuchet MS" pitchFamily="34" charset="-120"/>
               </a:rPr>
-              <a:t>enjoyment</a:t>
+              <a:t>enjoyed</a:t>
             </a:r>
             <a:endParaRPr lang="en-US" sz="2800" dirty="0"/>
           </a:p>
@@ -25312,7 +24261,7 @@
                 <a:ea typeface="Calibri" pitchFamily="34" charset="-122"/>
                 <a:cs typeface="Calibri" pitchFamily="34" charset="-120"/>
               </a:rPr>
-              <a:t>to take pleasure from</a:t>
+              <a:t>to take pleasure in</a:t>
             </a:r>
             <a:endParaRPr lang="en-US" sz="850" dirty="0"/>
           </a:p>
@@ -25385,7 +24334,7 @@
                 <a:ea typeface="Trebuchet MS" pitchFamily="34" charset="-122"/>
                 <a:cs typeface="Trebuchet MS" pitchFamily="34" charset="-120"/>
               </a:rPr>
-              <a:t>ment</a:t>
+              <a:t>ed</a:t>
             </a:r>
             <a:endParaRPr lang="en-US" sz="1300" dirty="0"/>
           </a:p>
@@ -25424,7 +24373,7 @@
                 <a:ea typeface="Calibri" pitchFamily="34" charset="-122"/>
                 <a:cs typeface="Calibri" pitchFamily="34" charset="-120"/>
               </a:rPr>
-              <a:t>state or result of</a:t>
+              <a:t>past tense</a:t>
             </a:r>
             <a:endParaRPr lang="en-US" sz="850" dirty="0"/>
           </a:p>
@@ -25980,7 +24929,7 @@
                 <a:ea typeface="Calibri" pitchFamily="34" charset="-122"/>
                 <a:cs typeface="Calibri" pitchFamily="34" charset="-120"/>
               </a:rPr>
-              <a:t>Word Labs  •  wordlabs.app  •  Root: 'enjoy' = to take pleasure from</a:t>
+              <a:t>Word Labs  •  wordlabs.app  •  Root: 'enjoy' = to take pleasure in</a:t>
             </a:r>
             <a:endParaRPr lang="en-US" sz="800" dirty="0"/>
           </a:p>
@@ -26053,7 +25002,7 @@
                 <a:ea typeface="Trebuchet MS" pitchFamily="34" charset="-122"/>
                 <a:cs typeface="Trebuchet MS" pitchFamily="34" charset="-120"/>
               </a:rPr>
-              <a:t>We are learning that the root 'enjoy' means 'to take pleasure from'.</a:t>
+              <a:t>We are learning that the root 'enjoy' means 'to take pleasure in'.</a:t>
             </a:r>
             <a:endParaRPr lang="en-US" sz="2000" dirty="0"/>
           </a:p>
@@ -26699,7 +25648,7 @@
                 <a:ea typeface="Calibri" pitchFamily="34" charset="-122"/>
                 <a:cs typeface="Calibri" pitchFamily="34" charset="-120"/>
               </a:rPr>
-              <a:t>Word Labs  •  wordlabs.app  •  Root: 'enjoy' = to take pleasure from</a:t>
+              <a:t>Word Labs  •  wordlabs.app  •  Root: 'enjoy' = to take pleasure in</a:t>
             </a:r>
             <a:endParaRPr lang="en-US" sz="800" dirty="0"/>
           </a:p>
@@ -26838,7 +25787,7 @@
                 <a:ea typeface="Trebuchet MS" pitchFamily="34" charset="-122"/>
                 <a:cs typeface="Trebuchet MS" pitchFamily="34" charset="-120"/>
               </a:rPr>
-              <a:t>enjoyment</a:t>
+              <a:t>enjoyed</a:t>
             </a:r>
             <a:endParaRPr lang="en-US" sz="2800" dirty="0"/>
           </a:p>
@@ -27016,7 +25965,7 @@
                 <a:ea typeface="Calibri" pitchFamily="34" charset="-122"/>
                 <a:cs typeface="Calibri" pitchFamily="34" charset="-120"/>
               </a:rPr>
-              <a:t>to take pleasure from</a:t>
+              <a:t>to take pleasure in</a:t>
             </a:r>
             <a:endParaRPr lang="en-US" sz="850" dirty="0"/>
           </a:p>
@@ -27089,7 +26038,7 @@
                 <a:ea typeface="Trebuchet MS" pitchFamily="34" charset="-122"/>
                 <a:cs typeface="Trebuchet MS" pitchFamily="34" charset="-120"/>
               </a:rPr>
-              <a:t>ment</a:t>
+              <a:t>ed</a:t>
             </a:r>
             <a:endParaRPr lang="en-US" sz="1300" dirty="0"/>
           </a:p>
@@ -27128,7 +26077,7 @@
                 <a:ea typeface="Calibri" pitchFamily="34" charset="-122"/>
                 <a:cs typeface="Calibri" pitchFamily="34" charset="-120"/>
               </a:rPr>
-              <a:t>state or result of</a:t>
+              <a:t>past tense</a:t>
             </a:r>
             <a:endParaRPr lang="en-US" sz="850" dirty="0"/>
           </a:p>
@@ -27235,7 +26184,7 @@
         </p:nvSpPr>
         <p:spPr>
           <a:xfrm>
-            <a:off x="2313432" y="3364992"/>
+            <a:off x="2999232" y="3364992"/>
             <a:ext cx="1645920" cy="475488"/>
           </a:xfrm>
           <a:prstGeom prst="rect">
@@ -27262,7 +26211,7 @@
         </p:nvSpPr>
         <p:spPr>
           <a:xfrm>
-            <a:off x="2313432" y="3364992"/>
+            <a:off x="2999232" y="3364992"/>
             <a:ext cx="1645920" cy="475488"/>
           </a:xfrm>
           <a:prstGeom prst="rect">
@@ -27301,8 +26250,8 @@
         </p:nvSpPr>
         <p:spPr>
           <a:xfrm>
-            <a:off x="3959352" y="3364992"/>
-            <a:ext cx="411480" cy="475488"/>
+            <a:off x="4645152" y="3364992"/>
+            <a:ext cx="1097280" cy="475488"/>
           </a:xfrm>
           <a:prstGeom prst="rect">
             <a:avLst/>
@@ -27340,7 +26289,7 @@
         </p:nvSpPr>
         <p:spPr>
           <a:xfrm>
-            <a:off x="4370832" y="3364992"/>
+            <a:off x="5742432" y="3364992"/>
             <a:ext cx="1645920" cy="475488"/>
           </a:xfrm>
           <a:prstGeom prst="rect">
@@ -27367,7 +26316,7 @@
         </p:nvSpPr>
         <p:spPr>
           <a:xfrm>
-            <a:off x="4370832" y="3364992"/>
+            <a:off x="5742432" y="3364992"/>
             <a:ext cx="1645920" cy="475488"/>
           </a:xfrm>
           <a:prstGeom prst="rect">
@@ -27392,7 +26341,7 @@
                 <a:ea typeface="Trebuchet MS" pitchFamily="34" charset="-122"/>
                 <a:cs typeface="Trebuchet MS" pitchFamily="34" charset="-120"/>
               </a:rPr>
-              <a:t>joy</a:t>
+              <a:t>joyed</a:t>
             </a:r>
             <a:endParaRPr lang="en-US" sz="1400" dirty="0"/>
           </a:p>
@@ -27400,119 +26349,80 @@
       </p:sp>
       <p:sp>
         <p:nvSpPr>
-          <p:cNvPr id="30" name="Text 28"/>
-          <p:cNvSpPr/>
-          <p:nvPr/>
-        </p:nvSpPr>
-        <p:spPr>
-          <a:xfrm>
-            <a:off x="6016752" y="3364992"/>
-            <a:ext cx="411480" cy="475488"/>
-          </a:xfrm>
-          <a:prstGeom prst="rect">
-            <a:avLst/>
-          </a:prstGeom>
-          <a:noFill/>
-          <a:ln/>
-        </p:spPr>
-        <p:txBody>
-          <a:bodyPr wrap="square" lIns="0" tIns="0" rIns="0" bIns="0" rtlCol="0" anchor="ctr"/>
-          <a:lstStyle/>
-          <a:p>
-            <a:pPr algn="ctr" indent="0" marL="0">
-              <a:buNone/>
-            </a:pPr>
-            <a:r>
-              <a:rPr lang="en-US" sz="1600" b="1" dirty="0">
-                <a:solidFill>
-                  <a:srgbClr val="0D9488"/>
+          <p:cNvPr id="30" name="Shape 28"/>
+          <p:cNvSpPr/>
+          <p:nvPr/>
+        </p:nvSpPr>
+        <p:spPr>
+          <a:xfrm>
+            <a:off x="365760" y="4096512"/>
+            <a:ext cx="1371600" cy="804672"/>
+          </a:xfrm>
+          <a:prstGeom prst="rect">
+            <a:avLst>
+              <a:gd name="adj" fmla="val 6818"/>
+            </a:avLst>
+          </a:prstGeom>
+          <a:solidFill>
+            <a:srgbClr val="E2E8F0"/>
+          </a:solidFill>
+          <a:ln w="12700">
+            <a:solidFill>
+              <a:srgbClr val="E2E8F0"/>
+            </a:solidFill>
+            <a:prstDash val="solid"/>
+          </a:ln>
+        </p:spPr>
+      </p:sp>
+      <p:sp>
+        <p:nvSpPr>
+          <p:cNvPr id="31" name="Text 29"/>
+          <p:cNvSpPr/>
+          <p:nvPr/>
+        </p:nvSpPr>
+        <p:spPr>
+          <a:xfrm>
+            <a:off x="365760" y="4096512"/>
+            <a:ext cx="1371600" cy="804672"/>
+          </a:xfrm>
+          <a:prstGeom prst="rect">
+            <a:avLst/>
+          </a:prstGeom>
+          <a:noFill/>
+          <a:ln/>
+        </p:spPr>
+        <p:txBody>
+          <a:bodyPr wrap="square" lIns="0" tIns="0" rIns="0" bIns="0" rtlCol="0" anchor="ctr"/>
+          <a:lstStyle/>
+          <a:p>
+            <a:pPr algn="ctr" indent="0" marL="0">
+              <a:buNone/>
+            </a:pPr>
+            <a:r>
+              <a:rPr lang="en-US" sz="1100" b="1" dirty="0">
+                <a:solidFill>
+                  <a:srgbClr val="475569"/>
                 </a:solidFill>
                 <a:latin typeface="Trebuchet MS" pitchFamily="34" charset="0"/>
                 <a:ea typeface="Trebuchet MS" pitchFamily="34" charset="-122"/>
                 <a:cs typeface="Trebuchet MS" pitchFamily="34" charset="-120"/>
               </a:rPr>
-              <a:t>·</a:t>
-            </a:r>
-            <a:endParaRPr lang="en-US" sz="1600" dirty="0"/>
-          </a:p>
-        </p:txBody>
-      </p:sp>
-      <p:sp>
-        <p:nvSpPr>
-          <p:cNvPr id="31" name="Shape 29"/>
-          <p:cNvSpPr/>
-          <p:nvPr/>
-        </p:nvSpPr>
-        <p:spPr>
-          <a:xfrm>
-            <a:off x="6428232" y="3364992"/>
-            <a:ext cx="1645920" cy="475488"/>
-          </a:xfrm>
-          <a:prstGeom prst="rect">
-            <a:avLst>
-              <a:gd name="adj" fmla="val 9615"/>
-            </a:avLst>
-          </a:prstGeom>
-          <a:solidFill>
-            <a:srgbClr val="FFFFFF"/>
-          </a:solidFill>
-          <a:ln w="12700">
-            <a:solidFill>
-              <a:srgbClr val="0D9488"/>
-            </a:solidFill>
-            <a:prstDash val="solid"/>
-          </a:ln>
-        </p:spPr>
-      </p:sp>
-      <p:sp>
-        <p:nvSpPr>
-          <p:cNvPr id="32" name="Text 30"/>
-          <p:cNvSpPr/>
-          <p:nvPr/>
-        </p:nvSpPr>
-        <p:spPr>
-          <a:xfrm>
-            <a:off x="6428232" y="3364992"/>
-            <a:ext cx="1645920" cy="475488"/>
-          </a:xfrm>
-          <a:prstGeom prst="rect">
-            <a:avLst/>
-          </a:prstGeom>
-          <a:noFill/>
-          <a:ln/>
-        </p:spPr>
-        <p:txBody>
-          <a:bodyPr wrap="square" lIns="0" tIns="0" rIns="0" bIns="0" rtlCol="0" anchor="ctr"/>
-          <a:lstStyle/>
-          <a:p>
-            <a:pPr algn="ctr" indent="0" marL="0">
-              <a:buNone/>
-            </a:pPr>
-            <a:r>
-              <a:rPr lang="en-US" sz="1400" b="1" dirty="0">
-                <a:solidFill>
-                  <a:srgbClr val="0D9488"/>
-                </a:solidFill>
-                <a:latin typeface="Trebuchet MS" pitchFamily="34" charset="0"/>
-                <a:ea typeface="Trebuchet MS" pitchFamily="34" charset="-122"/>
-                <a:cs typeface="Trebuchet MS" pitchFamily="34" charset="-120"/>
-              </a:rPr>
-              <a:t>ment</a:t>
-            </a:r>
-            <a:endParaRPr lang="en-US" sz="1400" dirty="0"/>
-          </a:p>
-        </p:txBody>
-      </p:sp>
-      <p:sp>
-        <p:nvSpPr>
-          <p:cNvPr id="33" name="Shape 31"/>
-          <p:cNvSpPr/>
-          <p:nvPr/>
-        </p:nvSpPr>
-        <p:spPr>
-          <a:xfrm>
-            <a:off x="365760" y="4096512"/>
-            <a:ext cx="1371600" cy="804672"/>
+              <a:t>Phonemes</a:t>
+            </a:r>
+            <a:endParaRPr lang="en-US" sz="1100" dirty="0"/>
+          </a:p>
+        </p:txBody>
+      </p:sp>
+      <p:sp>
+        <p:nvSpPr>
+          <p:cNvPr id="32" name="Shape 30"/>
+          <p:cNvSpPr/>
+          <p:nvPr/>
+        </p:nvSpPr>
+        <p:spPr>
+          <a:xfrm>
+            <a:off x="1874520" y="4096512"/>
+            <a:ext cx="6903720" cy="804672"/>
           </a:xfrm>
           <a:prstGeom prst="rect">
             <a:avLst>
@@ -27520,85 +26430,19 @@
             </a:avLst>
           </a:prstGeom>
           <a:solidFill>
-            <a:srgbClr val="E2E8F0"/>
+            <a:srgbClr val="F8FAFC"/>
           </a:solidFill>
           <a:ln w="12700">
             <a:solidFill>
               <a:srgbClr val="E2E8F0"/>
             </a:solidFill>
-            <a:prstDash val="solid"/>
-          </a:ln>
-        </p:spPr>
-      </p:sp>
-      <p:sp>
-        <p:nvSpPr>
-          <p:cNvPr id="34" name="Text 32"/>
-          <p:cNvSpPr/>
-          <p:nvPr/>
-        </p:nvSpPr>
-        <p:spPr>
-          <a:xfrm>
-            <a:off x="365760" y="4096512"/>
-            <a:ext cx="1371600" cy="804672"/>
-          </a:xfrm>
-          <a:prstGeom prst="rect">
-            <a:avLst/>
-          </a:prstGeom>
-          <a:noFill/>
-          <a:ln/>
-        </p:spPr>
-        <p:txBody>
-          <a:bodyPr wrap="square" lIns="0" tIns="0" rIns="0" bIns="0" rtlCol="0" anchor="ctr"/>
-          <a:lstStyle/>
-          <a:p>
-            <a:pPr algn="ctr" indent="0" marL="0">
-              <a:buNone/>
-            </a:pPr>
-            <a:r>
-              <a:rPr lang="en-US" sz="1100" b="1" dirty="0">
-                <a:solidFill>
-                  <a:srgbClr val="475569"/>
-                </a:solidFill>
-                <a:latin typeface="Trebuchet MS" pitchFamily="34" charset="0"/>
-                <a:ea typeface="Trebuchet MS" pitchFamily="34" charset="-122"/>
-                <a:cs typeface="Trebuchet MS" pitchFamily="34" charset="-120"/>
-              </a:rPr>
-              <a:t>Phonemes</a:t>
-            </a:r>
-            <a:endParaRPr lang="en-US" sz="1100" dirty="0"/>
-          </a:p>
-        </p:txBody>
-      </p:sp>
-      <p:sp>
-        <p:nvSpPr>
-          <p:cNvPr id="35" name="Shape 33"/>
-          <p:cNvSpPr/>
-          <p:nvPr/>
-        </p:nvSpPr>
-        <p:spPr>
-          <a:xfrm>
-            <a:off x="1874520" y="4096512"/>
-            <a:ext cx="6903720" cy="804672"/>
-          </a:xfrm>
-          <a:prstGeom prst="rect">
-            <a:avLst>
-              <a:gd name="adj" fmla="val 6818"/>
-            </a:avLst>
-          </a:prstGeom>
-          <a:solidFill>
-            <a:srgbClr val="F8FAFC"/>
-          </a:solidFill>
-          <a:ln w="12700">
-            <a:solidFill>
-              <a:srgbClr val="E2E8F0"/>
-            </a:solidFill>
             <a:prstDash val="dash"/>
           </a:ln>
         </p:spPr>
       </p:sp>
       <p:sp>
         <p:nvSpPr>
-          <p:cNvPr id="36" name="Text 34"/>
+          <p:cNvPr id="33" name="Text 31"/>
           <p:cNvSpPr/>
           <p:nvPr/>
         </p:nvSpPr>
@@ -27921,7 +26765,7 @@
                 <a:ea typeface="Calibri" pitchFamily="34" charset="-122"/>
                 <a:cs typeface="Calibri" pitchFamily="34" charset="-120"/>
               </a:rPr>
-              <a:t>Word Labs  •  wordlabs.app  •  Root: 'enjoy' = to take pleasure from</a:t>
+              <a:t>Word Labs  •  wordlabs.app  •  Root: 'enjoy' = to take pleasure in</a:t>
             </a:r>
             <a:endParaRPr lang="en-US" sz="800" dirty="0"/>
           </a:p>
@@ -28060,7 +26904,7 @@
                 <a:ea typeface="Trebuchet MS" pitchFamily="34" charset="-122"/>
                 <a:cs typeface="Trebuchet MS" pitchFamily="34" charset="-120"/>
               </a:rPr>
-              <a:t>enjoyment</a:t>
+              <a:t>enjoyed</a:t>
             </a:r>
             <a:endParaRPr lang="en-US" sz="2800" dirty="0"/>
           </a:p>
@@ -28238,7 +27082,7 @@
                 <a:ea typeface="Calibri" pitchFamily="34" charset="-122"/>
                 <a:cs typeface="Calibri" pitchFamily="34" charset="-120"/>
               </a:rPr>
-              <a:t>to take pleasure from</a:t>
+              <a:t>to take pleasure in</a:t>
             </a:r>
             <a:endParaRPr lang="en-US" sz="850" dirty="0"/>
           </a:p>
@@ -28311,7 +27155,7 @@
                 <a:ea typeface="Trebuchet MS" pitchFamily="34" charset="-122"/>
                 <a:cs typeface="Trebuchet MS" pitchFamily="34" charset="-120"/>
               </a:rPr>
-              <a:t>ment</a:t>
+              <a:t>ed</a:t>
             </a:r>
             <a:endParaRPr lang="en-US" sz="1300" dirty="0"/>
           </a:p>
@@ -28350,7 +27194,7 @@
                 <a:ea typeface="Calibri" pitchFamily="34" charset="-122"/>
                 <a:cs typeface="Calibri" pitchFamily="34" charset="-120"/>
               </a:rPr>
-              <a:t>state or result of</a:t>
+              <a:t>past tense</a:t>
             </a:r>
             <a:endParaRPr lang="en-US" sz="850" dirty="0"/>
           </a:p>
@@ -28457,7 +27301,7 @@
         </p:nvSpPr>
         <p:spPr>
           <a:xfrm>
-            <a:off x="2313432" y="3364992"/>
+            <a:off x="2999232" y="3364992"/>
             <a:ext cx="1645920" cy="475488"/>
           </a:xfrm>
           <a:prstGeom prst="rect">
@@ -28484,7 +27328,7 @@
         </p:nvSpPr>
         <p:spPr>
           <a:xfrm>
-            <a:off x="2313432" y="3364992"/>
+            <a:off x="2999232" y="3364992"/>
             <a:ext cx="1645920" cy="475488"/>
           </a:xfrm>
           <a:prstGeom prst="rect">
@@ -28523,8 +27367,8 @@
         </p:nvSpPr>
         <p:spPr>
           <a:xfrm>
-            <a:off x="3959352" y="3364992"/>
-            <a:ext cx="411480" cy="475488"/>
+            <a:off x="4645152" y="3364992"/>
+            <a:ext cx="1097280" cy="475488"/>
           </a:xfrm>
           <a:prstGeom prst="rect">
             <a:avLst/>
@@ -28562,7 +27406,7 @@
         </p:nvSpPr>
         <p:spPr>
           <a:xfrm>
-            <a:off x="4370832" y="3364992"/>
+            <a:off x="5742432" y="3364992"/>
             <a:ext cx="1645920" cy="475488"/>
           </a:xfrm>
           <a:prstGeom prst="rect">
@@ -28589,7 +27433,7 @@
         </p:nvSpPr>
         <p:spPr>
           <a:xfrm>
-            <a:off x="4370832" y="3364992"/>
+            <a:off x="5742432" y="3364992"/>
             <a:ext cx="1645920" cy="475488"/>
           </a:xfrm>
           <a:prstGeom prst="rect">
@@ -28614,7 +27458,7 @@
                 <a:ea typeface="Trebuchet MS" pitchFamily="34" charset="-122"/>
                 <a:cs typeface="Trebuchet MS" pitchFamily="34" charset="-120"/>
               </a:rPr>
-              <a:t>joy</a:t>
+              <a:t>joyed</a:t>
             </a:r>
             <a:endParaRPr lang="en-US" sz="1400" dirty="0"/>
           </a:p>
@@ -28622,211 +27466,238 @@
       </p:sp>
       <p:sp>
         <p:nvSpPr>
-          <p:cNvPr id="30" name="Text 28"/>
-          <p:cNvSpPr/>
-          <p:nvPr/>
-        </p:nvSpPr>
-        <p:spPr>
-          <a:xfrm>
-            <a:off x="6016752" y="3364992"/>
-            <a:ext cx="411480" cy="475488"/>
-          </a:xfrm>
-          <a:prstGeom prst="rect">
-            <a:avLst/>
-          </a:prstGeom>
-          <a:noFill/>
-          <a:ln/>
-        </p:spPr>
-        <p:txBody>
-          <a:bodyPr wrap="square" lIns="0" tIns="0" rIns="0" bIns="0" rtlCol="0" anchor="ctr"/>
-          <a:lstStyle/>
-          <a:p>
-            <a:pPr algn="ctr" indent="0" marL="0">
-              <a:buNone/>
-            </a:pPr>
-            <a:r>
-              <a:rPr lang="en-US" sz="1600" b="1" dirty="0">
-                <a:solidFill>
-                  <a:srgbClr val="0D9488"/>
+          <p:cNvPr id="30" name="Shape 28"/>
+          <p:cNvSpPr/>
+          <p:nvPr/>
+        </p:nvSpPr>
+        <p:spPr>
+          <a:xfrm>
+            <a:off x="365760" y="4096512"/>
+            <a:ext cx="1371600" cy="804672"/>
+          </a:xfrm>
+          <a:prstGeom prst="rect">
+            <a:avLst>
+              <a:gd name="adj" fmla="val 6818"/>
+            </a:avLst>
+          </a:prstGeom>
+          <a:solidFill>
+            <a:srgbClr val="E2E8F0"/>
+          </a:solidFill>
+          <a:ln w="12700">
+            <a:solidFill>
+              <a:srgbClr val="E2E8F0"/>
+            </a:solidFill>
+            <a:prstDash val="solid"/>
+          </a:ln>
+        </p:spPr>
+      </p:sp>
+      <p:sp>
+        <p:nvSpPr>
+          <p:cNvPr id="31" name="Text 29"/>
+          <p:cNvSpPr/>
+          <p:nvPr/>
+        </p:nvSpPr>
+        <p:spPr>
+          <a:xfrm>
+            <a:off x="365760" y="4096512"/>
+            <a:ext cx="1371600" cy="804672"/>
+          </a:xfrm>
+          <a:prstGeom prst="rect">
+            <a:avLst/>
+          </a:prstGeom>
+          <a:noFill/>
+          <a:ln/>
+        </p:spPr>
+        <p:txBody>
+          <a:bodyPr wrap="square" lIns="0" tIns="0" rIns="0" bIns="0" rtlCol="0" anchor="ctr"/>
+          <a:lstStyle/>
+          <a:p>
+            <a:pPr algn="ctr" indent="0" marL="0">
+              <a:buNone/>
+            </a:pPr>
+            <a:r>
+              <a:rPr lang="en-US" sz="1100" b="1" dirty="0">
+                <a:solidFill>
+                  <a:srgbClr val="475569"/>
                 </a:solidFill>
                 <a:latin typeface="Trebuchet MS" pitchFamily="34" charset="0"/>
                 <a:ea typeface="Trebuchet MS" pitchFamily="34" charset="-122"/>
                 <a:cs typeface="Trebuchet MS" pitchFamily="34" charset="-120"/>
               </a:rPr>
-              <a:t>·</a:t>
-            </a:r>
-            <a:endParaRPr lang="en-US" sz="1600" dirty="0"/>
-          </a:p>
-        </p:txBody>
-      </p:sp>
-      <p:sp>
-        <p:nvSpPr>
-          <p:cNvPr id="31" name="Shape 29"/>
-          <p:cNvSpPr/>
-          <p:nvPr/>
-        </p:nvSpPr>
-        <p:spPr>
-          <a:xfrm>
-            <a:off x="6428232" y="3364992"/>
-            <a:ext cx="1645920" cy="475488"/>
+              <a:t>Phonemes</a:t>
+            </a:r>
+            <a:endParaRPr lang="en-US" sz="1100" dirty="0"/>
+          </a:p>
+        </p:txBody>
+      </p:sp>
+      <p:sp>
+        <p:nvSpPr>
+          <p:cNvPr id="32" name="Shape 30"/>
+          <p:cNvSpPr/>
+          <p:nvPr/>
+        </p:nvSpPr>
+        <p:spPr>
+          <a:xfrm>
+            <a:off x="1874520" y="4096512"/>
+            <a:ext cx="6903720" cy="804672"/>
           </a:xfrm>
           <a:prstGeom prst="rect">
             <a:avLst>
-              <a:gd name="adj" fmla="val 9615"/>
+              <a:gd name="adj" fmla="val 6818"/>
             </a:avLst>
           </a:prstGeom>
           <a:solidFill>
+            <a:srgbClr val="FCE7F3"/>
+          </a:solidFill>
+          <a:ln w="12700">
+            <a:solidFill>
+              <a:srgbClr val="DB2777"/>
+            </a:solidFill>
+            <a:prstDash val="solid"/>
+          </a:ln>
+        </p:spPr>
+      </p:sp>
+      <p:sp>
+        <p:nvSpPr>
+          <p:cNvPr id="33" name="Shape 31"/>
+          <p:cNvSpPr/>
+          <p:nvPr/>
+        </p:nvSpPr>
+        <p:spPr>
+          <a:xfrm>
+            <a:off x="2427732" y="4169664"/>
+            <a:ext cx="685800" cy="384048"/>
+          </a:xfrm>
+          <a:prstGeom prst="rect">
+            <a:avLst>
+              <a:gd name="adj" fmla="val 9524"/>
+            </a:avLst>
+          </a:prstGeom>
+          <a:solidFill>
             <a:srgbClr val="FFFFFF"/>
           </a:solidFill>
           <a:ln w="12700">
             <a:solidFill>
-              <a:srgbClr val="0D9488"/>
-            </a:solidFill>
-            <a:prstDash val="solid"/>
-          </a:ln>
-        </p:spPr>
-      </p:sp>
-      <p:sp>
-        <p:nvSpPr>
-          <p:cNvPr id="32" name="Text 30"/>
-          <p:cNvSpPr/>
-          <p:nvPr/>
-        </p:nvSpPr>
-        <p:spPr>
-          <a:xfrm>
-            <a:off x="6428232" y="3364992"/>
-            <a:ext cx="1645920" cy="475488"/>
-          </a:xfrm>
-          <a:prstGeom prst="rect">
-            <a:avLst/>
-          </a:prstGeom>
-          <a:noFill/>
-          <a:ln/>
-        </p:spPr>
-        <p:txBody>
-          <a:bodyPr wrap="square" lIns="0" tIns="0" rIns="0" bIns="0" rtlCol="0" anchor="ctr"/>
-          <a:lstStyle/>
-          <a:p>
-            <a:pPr algn="ctr" indent="0" marL="0">
-              <a:buNone/>
-            </a:pPr>
-            <a:r>
-              <a:rPr lang="en-US" sz="1400" b="1" dirty="0">
-                <a:solidFill>
-                  <a:srgbClr val="0D9488"/>
+              <a:srgbClr val="DB2777"/>
+            </a:solidFill>
+            <a:prstDash val="solid"/>
+          </a:ln>
+        </p:spPr>
+      </p:sp>
+      <p:sp>
+        <p:nvSpPr>
+          <p:cNvPr id="34" name="Text 32"/>
+          <p:cNvSpPr/>
+          <p:nvPr/>
+        </p:nvSpPr>
+        <p:spPr>
+          <a:xfrm>
+            <a:off x="2427732" y="4169664"/>
+            <a:ext cx="685800" cy="384048"/>
+          </a:xfrm>
+          <a:prstGeom prst="rect">
+            <a:avLst/>
+          </a:prstGeom>
+          <a:noFill/>
+          <a:ln/>
+        </p:spPr>
+        <p:txBody>
+          <a:bodyPr wrap="square" lIns="0" tIns="0" rIns="0" bIns="0" rtlCol="0" anchor="ctr"/>
+          <a:lstStyle/>
+          <a:p>
+            <a:pPr algn="ctr" indent="0" marL="0">
+              <a:buNone/>
+            </a:pPr>
+            <a:r>
+              <a:rPr lang="en-US" sz="900" b="1" dirty="0">
+                <a:solidFill>
+                  <a:srgbClr val="9D174D"/>
                 </a:solidFill>
                 <a:latin typeface="Trebuchet MS" pitchFamily="34" charset="0"/>
                 <a:ea typeface="Trebuchet MS" pitchFamily="34" charset="-122"/>
                 <a:cs typeface="Trebuchet MS" pitchFamily="34" charset="-120"/>
               </a:rPr>
-              <a:t>ment</a:t>
-            </a:r>
-            <a:endParaRPr lang="en-US" sz="1400" dirty="0"/>
-          </a:p>
-        </p:txBody>
-      </p:sp>
-      <p:sp>
-        <p:nvSpPr>
-          <p:cNvPr id="33" name="Shape 31"/>
-          <p:cNvSpPr/>
-          <p:nvPr/>
-        </p:nvSpPr>
-        <p:spPr>
-          <a:xfrm>
-            <a:off x="365760" y="4096512"/>
-            <a:ext cx="1371600" cy="804672"/>
+              <a:t>e</a:t>
+            </a:r>
+            <a:endParaRPr lang="en-US" sz="900" dirty="0"/>
+          </a:p>
+        </p:txBody>
+      </p:sp>
+      <p:sp>
+        <p:nvSpPr>
+          <p:cNvPr id="35" name="Shape 33"/>
+          <p:cNvSpPr/>
+          <p:nvPr/>
+        </p:nvSpPr>
+        <p:spPr>
+          <a:xfrm>
+            <a:off x="3639312" y="4169664"/>
+            <a:ext cx="685800" cy="384048"/>
           </a:xfrm>
           <a:prstGeom prst="rect">
             <a:avLst>
-              <a:gd name="adj" fmla="val 6818"/>
+              <a:gd name="adj" fmla="val 9524"/>
             </a:avLst>
           </a:prstGeom>
           <a:solidFill>
-            <a:srgbClr val="E2E8F0"/>
-          </a:solidFill>
-          <a:ln w="12700">
-            <a:solidFill>
-              <a:srgbClr val="E2E8F0"/>
-            </a:solidFill>
-            <a:prstDash val="solid"/>
-          </a:ln>
-        </p:spPr>
-      </p:sp>
-      <p:sp>
-        <p:nvSpPr>
-          <p:cNvPr id="34" name="Text 32"/>
-          <p:cNvSpPr/>
-          <p:nvPr/>
-        </p:nvSpPr>
-        <p:spPr>
-          <a:xfrm>
-            <a:off x="365760" y="4096512"/>
-            <a:ext cx="1371600" cy="804672"/>
-          </a:xfrm>
-          <a:prstGeom prst="rect">
-            <a:avLst/>
-          </a:prstGeom>
-          <a:noFill/>
-          <a:ln/>
-        </p:spPr>
-        <p:txBody>
-          <a:bodyPr wrap="square" lIns="0" tIns="0" rIns="0" bIns="0" rtlCol="0" anchor="ctr"/>
-          <a:lstStyle/>
-          <a:p>
-            <a:pPr algn="ctr" indent="0" marL="0">
-              <a:buNone/>
-            </a:pPr>
-            <a:r>
-              <a:rPr lang="en-US" sz="1100" b="1" dirty="0">
-                <a:solidFill>
-                  <a:srgbClr val="475569"/>
+            <a:srgbClr val="FFFFFF"/>
+          </a:solidFill>
+          <a:ln w="12700">
+            <a:solidFill>
+              <a:srgbClr val="DB2777"/>
+            </a:solidFill>
+            <a:prstDash val="solid"/>
+          </a:ln>
+        </p:spPr>
+      </p:sp>
+      <p:sp>
+        <p:nvSpPr>
+          <p:cNvPr id="36" name="Text 34"/>
+          <p:cNvSpPr/>
+          <p:nvPr/>
+        </p:nvSpPr>
+        <p:spPr>
+          <a:xfrm>
+            <a:off x="3639312" y="4169664"/>
+            <a:ext cx="685800" cy="384048"/>
+          </a:xfrm>
+          <a:prstGeom prst="rect">
+            <a:avLst/>
+          </a:prstGeom>
+          <a:noFill/>
+          <a:ln/>
+        </p:spPr>
+        <p:txBody>
+          <a:bodyPr wrap="square" lIns="0" tIns="0" rIns="0" bIns="0" rtlCol="0" anchor="ctr"/>
+          <a:lstStyle/>
+          <a:p>
+            <a:pPr algn="ctr" indent="0" marL="0">
+              <a:buNone/>
+            </a:pPr>
+            <a:r>
+              <a:rPr lang="en-US" sz="900" b="1" dirty="0">
+                <a:solidFill>
+                  <a:srgbClr val="9D174D"/>
                 </a:solidFill>
                 <a:latin typeface="Trebuchet MS" pitchFamily="34" charset="0"/>
                 <a:ea typeface="Trebuchet MS" pitchFamily="34" charset="-122"/>
                 <a:cs typeface="Trebuchet MS" pitchFamily="34" charset="-120"/>
               </a:rPr>
-              <a:t>Phonemes</a:t>
-            </a:r>
-            <a:endParaRPr lang="en-US" sz="1100" dirty="0"/>
-          </a:p>
-        </p:txBody>
-      </p:sp>
-      <p:sp>
-        <p:nvSpPr>
-          <p:cNvPr id="35" name="Shape 33"/>
-          <p:cNvSpPr/>
-          <p:nvPr/>
-        </p:nvSpPr>
-        <p:spPr>
-          <a:xfrm>
-            <a:off x="1874520" y="4096512"/>
-            <a:ext cx="6903720" cy="804672"/>
-          </a:xfrm>
-          <a:prstGeom prst="rect">
-            <a:avLst>
-              <a:gd name="adj" fmla="val 6818"/>
-            </a:avLst>
-          </a:prstGeom>
-          <a:solidFill>
-            <a:srgbClr val="FCE7F3"/>
-          </a:solidFill>
-          <a:ln w="12700">
-            <a:solidFill>
-              <a:srgbClr val="DB2777"/>
-            </a:solidFill>
-            <a:prstDash val="solid"/>
-          </a:ln>
-        </p:spPr>
-      </p:sp>
-      <p:sp>
-        <p:nvSpPr>
-          <p:cNvPr id="36" name="Shape 34"/>
-          <p:cNvSpPr/>
-          <p:nvPr/>
-        </p:nvSpPr>
-        <p:spPr>
-          <a:xfrm>
-            <a:off x="2023872" y="4169664"/>
+              <a:t>n</a:t>
+            </a:r>
+            <a:endParaRPr lang="en-US" sz="900" dirty="0"/>
+          </a:p>
+        </p:txBody>
+      </p:sp>
+      <p:sp>
+        <p:nvSpPr>
+          <p:cNvPr id="37" name="Shape 35"/>
+          <p:cNvSpPr/>
+          <p:nvPr/>
+        </p:nvSpPr>
+        <p:spPr>
+          <a:xfrm>
+            <a:off x="4850892" y="4169664"/>
             <a:ext cx="685800" cy="384048"/>
           </a:xfrm>
           <a:prstGeom prst="rect">
@@ -28847,13 +27718,13 @@
       </p:sp>
       <p:sp>
         <p:nvSpPr>
-          <p:cNvPr id="37" name="Text 35"/>
-          <p:cNvSpPr/>
-          <p:nvPr/>
-        </p:nvSpPr>
-        <p:spPr>
-          <a:xfrm>
-            <a:off x="2023872" y="4169664"/>
+          <p:cNvPr id="38" name="Text 36"/>
+          <p:cNvSpPr/>
+          <p:nvPr/>
+        </p:nvSpPr>
+        <p:spPr>
+          <a:xfrm>
+            <a:off x="4850892" y="4169664"/>
             <a:ext cx="685800" cy="384048"/>
           </a:xfrm>
           <a:prstGeom prst="rect">
@@ -28878,7 +27749,7 @@
                 <a:ea typeface="Trebuchet MS" pitchFamily="34" charset="-122"/>
                 <a:cs typeface="Trebuchet MS" pitchFamily="34" charset="-120"/>
               </a:rPr>
-              <a:t>e</a:t>
+              <a:t>j</a:t>
             </a:r>
             <a:endParaRPr lang="en-US" sz="900" dirty="0"/>
           </a:p>
@@ -28886,13 +27757,52 @@
       </p:sp>
       <p:sp>
         <p:nvSpPr>
-          <p:cNvPr id="38" name="Shape 36"/>
-          <p:cNvSpPr/>
-          <p:nvPr/>
-        </p:nvSpPr>
-        <p:spPr>
-          <a:xfrm>
-            <a:off x="2831592" y="4169664"/>
+          <p:cNvPr id="39" name="Text 37"/>
+          <p:cNvSpPr/>
+          <p:nvPr/>
+        </p:nvSpPr>
+        <p:spPr>
+          <a:xfrm>
+            <a:off x="4850892" y="4572000"/>
+            <a:ext cx="685800" cy="219456"/>
+          </a:xfrm>
+          <a:prstGeom prst="rect">
+            <a:avLst/>
+          </a:prstGeom>
+          <a:noFill/>
+          <a:ln/>
+        </p:spPr>
+        <p:txBody>
+          <a:bodyPr wrap="square" lIns="0" tIns="0" rIns="0" bIns="0" rtlCol="0" anchor="t"/>
+          <a:lstStyle/>
+          <a:p>
+            <a:pPr algn="ctr" indent="0" marL="0">
+              <a:buNone/>
+            </a:pPr>
+            <a:r>
+              <a:rPr lang="en-US" sz="750" i="1" dirty="0">
+                <a:solidFill>
+                  <a:srgbClr val="94A3B8"/>
+                </a:solidFill>
+                <a:latin typeface="Calibri" pitchFamily="34" charset="0"/>
+                <a:ea typeface="Calibri" pitchFamily="34" charset="-122"/>
+                <a:cs typeface="Calibri" pitchFamily="34" charset="-120"/>
+              </a:rPr>
+              <a:t>/j/</a:t>
+            </a:r>
+            <a:endParaRPr lang="en-US" sz="750" dirty="0"/>
+          </a:p>
+        </p:txBody>
+      </p:sp>
+      <p:sp>
+        <p:nvSpPr>
+          <p:cNvPr id="40" name="Shape 38"/>
+          <p:cNvSpPr/>
+          <p:nvPr/>
+        </p:nvSpPr>
+        <p:spPr>
+          <a:xfrm>
+            <a:off x="6062472" y="4169664"/>
             <a:ext cx="685800" cy="384048"/>
           </a:xfrm>
           <a:prstGeom prst="rect">
@@ -28913,13 +27823,13 @@
       </p:sp>
       <p:sp>
         <p:nvSpPr>
-          <p:cNvPr id="39" name="Text 37"/>
-          <p:cNvSpPr/>
-          <p:nvPr/>
-        </p:nvSpPr>
-        <p:spPr>
-          <a:xfrm>
-            <a:off x="2831592" y="4169664"/>
+          <p:cNvPr id="41" name="Text 39"/>
+          <p:cNvSpPr/>
+          <p:nvPr/>
+        </p:nvSpPr>
+        <p:spPr>
+          <a:xfrm>
+            <a:off x="6062472" y="4169664"/>
             <a:ext cx="685800" cy="384048"/>
           </a:xfrm>
           <a:prstGeom prst="rect">
@@ -28944,7 +27854,7 @@
                 <a:ea typeface="Trebuchet MS" pitchFamily="34" charset="-122"/>
                 <a:cs typeface="Trebuchet MS" pitchFamily="34" charset="-120"/>
               </a:rPr>
-              <a:t>n</a:t>
+              <a:t>oy</a:t>
             </a:r>
             <a:endParaRPr lang="en-US" sz="900" dirty="0"/>
           </a:p>
@@ -28952,13 +27862,13 @@
       </p:sp>
       <p:sp>
         <p:nvSpPr>
-          <p:cNvPr id="40" name="Shape 38"/>
-          <p:cNvSpPr/>
-          <p:nvPr/>
-        </p:nvSpPr>
-        <p:spPr>
-          <a:xfrm>
-            <a:off x="3639312" y="4169664"/>
+          <p:cNvPr id="42" name="Shape 40"/>
+          <p:cNvSpPr/>
+          <p:nvPr/>
+        </p:nvSpPr>
+        <p:spPr>
+          <a:xfrm>
+            <a:off x="7274052" y="4169664"/>
             <a:ext cx="685800" cy="384048"/>
           </a:xfrm>
           <a:prstGeom prst="rect">
@@ -28979,13 +27889,13 @@
       </p:sp>
       <p:sp>
         <p:nvSpPr>
-          <p:cNvPr id="41" name="Text 39"/>
-          <p:cNvSpPr/>
-          <p:nvPr/>
-        </p:nvSpPr>
-        <p:spPr>
-          <a:xfrm>
-            <a:off x="3639312" y="4169664"/>
+          <p:cNvPr id="43" name="Text 41"/>
+          <p:cNvSpPr/>
+          <p:nvPr/>
+        </p:nvSpPr>
+        <p:spPr>
+          <a:xfrm>
+            <a:off x="7274052" y="4169664"/>
             <a:ext cx="685800" cy="384048"/>
           </a:xfrm>
           <a:prstGeom prst="rect">
@@ -29010,376 +27920,7 @@
                 <a:ea typeface="Trebuchet MS" pitchFamily="34" charset="-122"/>
                 <a:cs typeface="Trebuchet MS" pitchFamily="34" charset="-120"/>
               </a:rPr>
-              <a:t>j</a:t>
-            </a:r>
-            <a:endParaRPr lang="en-US" sz="900" dirty="0"/>
-          </a:p>
-        </p:txBody>
-      </p:sp>
-      <p:sp>
-        <p:nvSpPr>
-          <p:cNvPr id="42" name="Text 40"/>
-          <p:cNvSpPr/>
-          <p:nvPr/>
-        </p:nvSpPr>
-        <p:spPr>
-          <a:xfrm>
-            <a:off x="3639312" y="4572000"/>
-            <a:ext cx="685800" cy="219456"/>
-          </a:xfrm>
-          <a:prstGeom prst="rect">
-            <a:avLst/>
-          </a:prstGeom>
-          <a:noFill/>
-          <a:ln/>
-        </p:spPr>
-        <p:txBody>
-          <a:bodyPr wrap="square" lIns="0" tIns="0" rIns="0" bIns="0" rtlCol="0" anchor="t"/>
-          <a:lstStyle/>
-          <a:p>
-            <a:pPr algn="ctr" indent="0" marL="0">
-              <a:buNone/>
-            </a:pPr>
-            <a:r>
-              <a:rPr lang="en-US" sz="750" i="1" dirty="0">
-                <a:solidFill>
-                  <a:srgbClr val="94A3B8"/>
-                </a:solidFill>
-                <a:latin typeface="Calibri" pitchFamily="34" charset="0"/>
-                <a:ea typeface="Calibri" pitchFamily="34" charset="-122"/>
-                <a:cs typeface="Calibri" pitchFamily="34" charset="-120"/>
-              </a:rPr>
-              <a:t>/j/</a:t>
-            </a:r>
-            <a:endParaRPr lang="en-US" sz="750" dirty="0"/>
-          </a:p>
-        </p:txBody>
-      </p:sp>
-      <p:sp>
-        <p:nvSpPr>
-          <p:cNvPr id="43" name="Shape 41"/>
-          <p:cNvSpPr/>
-          <p:nvPr/>
-        </p:nvSpPr>
-        <p:spPr>
-          <a:xfrm>
-            <a:off x="4447032" y="4169664"/>
-            <a:ext cx="685800" cy="384048"/>
-          </a:xfrm>
-          <a:prstGeom prst="rect">
-            <a:avLst>
-              <a:gd name="adj" fmla="val 9524"/>
-            </a:avLst>
-          </a:prstGeom>
-          <a:solidFill>
-            <a:srgbClr val="FFFFFF"/>
-          </a:solidFill>
-          <a:ln w="12700">
-            <a:solidFill>
-              <a:srgbClr val="DB2777"/>
-            </a:solidFill>
-            <a:prstDash val="solid"/>
-          </a:ln>
-        </p:spPr>
-      </p:sp>
-      <p:sp>
-        <p:nvSpPr>
-          <p:cNvPr id="44" name="Text 42"/>
-          <p:cNvSpPr/>
-          <p:nvPr/>
-        </p:nvSpPr>
-        <p:spPr>
-          <a:xfrm>
-            <a:off x="4447032" y="4169664"/>
-            <a:ext cx="685800" cy="384048"/>
-          </a:xfrm>
-          <a:prstGeom prst="rect">
-            <a:avLst/>
-          </a:prstGeom>
-          <a:noFill/>
-          <a:ln/>
-        </p:spPr>
-        <p:txBody>
-          <a:bodyPr wrap="square" lIns="0" tIns="0" rIns="0" bIns="0" rtlCol="0" anchor="ctr"/>
-          <a:lstStyle/>
-          <a:p>
-            <a:pPr algn="ctr" indent="0" marL="0">
-              <a:buNone/>
-            </a:pPr>
-            <a:r>
-              <a:rPr lang="en-US" sz="900" b="1" dirty="0">
-                <a:solidFill>
-                  <a:srgbClr val="9D174D"/>
-                </a:solidFill>
-                <a:latin typeface="Trebuchet MS" pitchFamily="34" charset="0"/>
-                <a:ea typeface="Trebuchet MS" pitchFamily="34" charset="-122"/>
-                <a:cs typeface="Trebuchet MS" pitchFamily="34" charset="-120"/>
-              </a:rPr>
-              <a:t>oy</a:t>
-            </a:r>
-            <a:endParaRPr lang="en-US" sz="900" dirty="0"/>
-          </a:p>
-        </p:txBody>
-      </p:sp>
-      <p:sp>
-        <p:nvSpPr>
-          <p:cNvPr id="45" name="Shape 43"/>
-          <p:cNvSpPr/>
-          <p:nvPr/>
-        </p:nvSpPr>
-        <p:spPr>
-          <a:xfrm>
-            <a:off x="5254752" y="4169664"/>
-            <a:ext cx="685800" cy="384048"/>
-          </a:xfrm>
-          <a:prstGeom prst="rect">
-            <a:avLst>
-              <a:gd name="adj" fmla="val 9524"/>
-            </a:avLst>
-          </a:prstGeom>
-          <a:solidFill>
-            <a:srgbClr val="FFFFFF"/>
-          </a:solidFill>
-          <a:ln w="12700">
-            <a:solidFill>
-              <a:srgbClr val="DB2777"/>
-            </a:solidFill>
-            <a:prstDash val="solid"/>
-          </a:ln>
-        </p:spPr>
-      </p:sp>
-      <p:sp>
-        <p:nvSpPr>
-          <p:cNvPr id="46" name="Text 44"/>
-          <p:cNvSpPr/>
-          <p:nvPr/>
-        </p:nvSpPr>
-        <p:spPr>
-          <a:xfrm>
-            <a:off x="5254752" y="4169664"/>
-            <a:ext cx="685800" cy="384048"/>
-          </a:xfrm>
-          <a:prstGeom prst="rect">
-            <a:avLst/>
-          </a:prstGeom>
-          <a:noFill/>
-          <a:ln/>
-        </p:spPr>
-        <p:txBody>
-          <a:bodyPr wrap="square" lIns="0" tIns="0" rIns="0" bIns="0" rtlCol="0" anchor="ctr"/>
-          <a:lstStyle/>
-          <a:p>
-            <a:pPr algn="ctr" indent="0" marL="0">
-              <a:buNone/>
-            </a:pPr>
-            <a:r>
-              <a:rPr lang="en-US" sz="900" b="1" dirty="0">
-                <a:solidFill>
-                  <a:srgbClr val="9D174D"/>
-                </a:solidFill>
-                <a:latin typeface="Trebuchet MS" pitchFamily="34" charset="0"/>
-                <a:ea typeface="Trebuchet MS" pitchFamily="34" charset="-122"/>
-                <a:cs typeface="Trebuchet MS" pitchFamily="34" charset="-120"/>
-              </a:rPr>
-              <a:t>m</a:t>
-            </a:r>
-            <a:endParaRPr lang="en-US" sz="900" dirty="0"/>
-          </a:p>
-        </p:txBody>
-      </p:sp>
-      <p:sp>
-        <p:nvSpPr>
-          <p:cNvPr id="47" name="Shape 45"/>
-          <p:cNvSpPr/>
-          <p:nvPr/>
-        </p:nvSpPr>
-        <p:spPr>
-          <a:xfrm>
-            <a:off x="6062472" y="4169664"/>
-            <a:ext cx="685800" cy="384048"/>
-          </a:xfrm>
-          <a:prstGeom prst="rect">
-            <a:avLst>
-              <a:gd name="adj" fmla="val 9524"/>
-            </a:avLst>
-          </a:prstGeom>
-          <a:solidFill>
-            <a:srgbClr val="FFFFFF"/>
-          </a:solidFill>
-          <a:ln w="12700">
-            <a:solidFill>
-              <a:srgbClr val="DB2777"/>
-            </a:solidFill>
-            <a:prstDash val="solid"/>
-          </a:ln>
-        </p:spPr>
-      </p:sp>
-      <p:sp>
-        <p:nvSpPr>
-          <p:cNvPr id="48" name="Text 46"/>
-          <p:cNvSpPr/>
-          <p:nvPr/>
-        </p:nvSpPr>
-        <p:spPr>
-          <a:xfrm>
-            <a:off x="6062472" y="4169664"/>
-            <a:ext cx="685800" cy="384048"/>
-          </a:xfrm>
-          <a:prstGeom prst="rect">
-            <a:avLst/>
-          </a:prstGeom>
-          <a:noFill/>
-          <a:ln/>
-        </p:spPr>
-        <p:txBody>
-          <a:bodyPr wrap="square" lIns="0" tIns="0" rIns="0" bIns="0" rtlCol="0" anchor="ctr"/>
-          <a:lstStyle/>
-          <a:p>
-            <a:pPr algn="ctr" indent="0" marL="0">
-              <a:buNone/>
-            </a:pPr>
-            <a:r>
-              <a:rPr lang="en-US" sz="900" b="1" dirty="0">
-                <a:solidFill>
-                  <a:srgbClr val="9D174D"/>
-                </a:solidFill>
-                <a:latin typeface="Trebuchet MS" pitchFamily="34" charset="0"/>
-                <a:ea typeface="Trebuchet MS" pitchFamily="34" charset="-122"/>
-                <a:cs typeface="Trebuchet MS" pitchFamily="34" charset="-120"/>
-              </a:rPr>
-              <a:t>e</a:t>
-            </a:r>
-            <a:endParaRPr lang="en-US" sz="900" dirty="0"/>
-          </a:p>
-        </p:txBody>
-      </p:sp>
-      <p:sp>
-        <p:nvSpPr>
-          <p:cNvPr id="49" name="Shape 47"/>
-          <p:cNvSpPr/>
-          <p:nvPr/>
-        </p:nvSpPr>
-        <p:spPr>
-          <a:xfrm>
-            <a:off x="6870192" y="4169664"/>
-            <a:ext cx="685800" cy="384048"/>
-          </a:xfrm>
-          <a:prstGeom prst="rect">
-            <a:avLst>
-              <a:gd name="adj" fmla="val 9524"/>
-            </a:avLst>
-          </a:prstGeom>
-          <a:solidFill>
-            <a:srgbClr val="FFFFFF"/>
-          </a:solidFill>
-          <a:ln w="12700">
-            <a:solidFill>
-              <a:srgbClr val="DB2777"/>
-            </a:solidFill>
-            <a:prstDash val="solid"/>
-          </a:ln>
-        </p:spPr>
-      </p:sp>
-      <p:sp>
-        <p:nvSpPr>
-          <p:cNvPr id="50" name="Text 48"/>
-          <p:cNvSpPr/>
-          <p:nvPr/>
-        </p:nvSpPr>
-        <p:spPr>
-          <a:xfrm>
-            <a:off x="6870192" y="4169664"/>
-            <a:ext cx="685800" cy="384048"/>
-          </a:xfrm>
-          <a:prstGeom prst="rect">
-            <a:avLst/>
-          </a:prstGeom>
-          <a:noFill/>
-          <a:ln/>
-        </p:spPr>
-        <p:txBody>
-          <a:bodyPr wrap="square" lIns="0" tIns="0" rIns="0" bIns="0" rtlCol="0" anchor="ctr"/>
-          <a:lstStyle/>
-          <a:p>
-            <a:pPr algn="ctr" indent="0" marL="0">
-              <a:buNone/>
-            </a:pPr>
-            <a:r>
-              <a:rPr lang="en-US" sz="900" b="1" dirty="0">
-                <a:solidFill>
-                  <a:srgbClr val="9D174D"/>
-                </a:solidFill>
-                <a:latin typeface="Trebuchet MS" pitchFamily="34" charset="0"/>
-                <a:ea typeface="Trebuchet MS" pitchFamily="34" charset="-122"/>
-                <a:cs typeface="Trebuchet MS" pitchFamily="34" charset="-120"/>
-              </a:rPr>
-              <a:t>n</a:t>
-            </a:r>
-            <a:endParaRPr lang="en-US" sz="900" dirty="0"/>
-          </a:p>
-        </p:txBody>
-      </p:sp>
-      <p:sp>
-        <p:nvSpPr>
-          <p:cNvPr id="51" name="Shape 49"/>
-          <p:cNvSpPr/>
-          <p:nvPr/>
-        </p:nvSpPr>
-        <p:spPr>
-          <a:xfrm>
-            <a:off x="7677912" y="4169664"/>
-            <a:ext cx="685800" cy="384048"/>
-          </a:xfrm>
-          <a:prstGeom prst="rect">
-            <a:avLst>
-              <a:gd name="adj" fmla="val 9524"/>
-            </a:avLst>
-          </a:prstGeom>
-          <a:solidFill>
-            <a:srgbClr val="FFFFFF"/>
-          </a:solidFill>
-          <a:ln w="12700">
-            <a:solidFill>
-              <a:srgbClr val="DB2777"/>
-            </a:solidFill>
-            <a:prstDash val="solid"/>
-          </a:ln>
-        </p:spPr>
-      </p:sp>
-      <p:sp>
-        <p:nvSpPr>
-          <p:cNvPr id="52" name="Text 50"/>
-          <p:cNvSpPr/>
-          <p:nvPr/>
-        </p:nvSpPr>
-        <p:spPr>
-          <a:xfrm>
-            <a:off x="7677912" y="4169664"/>
-            <a:ext cx="685800" cy="384048"/>
-          </a:xfrm>
-          <a:prstGeom prst="rect">
-            <a:avLst/>
-          </a:prstGeom>
-          <a:noFill/>
-          <a:ln/>
-        </p:spPr>
-        <p:txBody>
-          <a:bodyPr wrap="square" lIns="0" tIns="0" rIns="0" bIns="0" rtlCol="0" anchor="ctr"/>
-          <a:lstStyle/>
-          <a:p>
-            <a:pPr algn="ctr" indent="0" marL="0">
-              <a:buNone/>
-            </a:pPr>
-            <a:r>
-              <a:rPr lang="en-US" sz="900" b="1" dirty="0">
-                <a:solidFill>
-                  <a:srgbClr val="9D174D"/>
-                </a:solidFill>
-                <a:latin typeface="Trebuchet MS" pitchFamily="34" charset="0"/>
-                <a:ea typeface="Trebuchet MS" pitchFamily="34" charset="-122"/>
-                <a:cs typeface="Trebuchet MS" pitchFamily="34" charset="-120"/>
-              </a:rPr>
-              <a:t>t</a:t>
+              <a:t>ed</a:t>
             </a:r>
             <a:endParaRPr lang="en-US" sz="900" dirty="0"/>
           </a:p>
@@ -29671,7 +28212,7 @@
                 <a:ea typeface="Calibri" pitchFamily="34" charset="-122"/>
                 <a:cs typeface="Calibri" pitchFamily="34" charset="-120"/>
               </a:rPr>
-              <a:t>Word Labs  •  wordlabs.app  •  Root: 'enjoy' = to take pleasure from</a:t>
+              <a:t>Word Labs  •  wordlabs.app  •  Root: 'enjoy' = to take pleasure in</a:t>
             </a:r>
             <a:endParaRPr lang="en-US" sz="800" dirty="0"/>
           </a:p>
@@ -30498,7 +29039,7 @@
                 <a:ea typeface="Calibri" pitchFamily="34" charset="-122"/>
                 <a:cs typeface="Calibri" pitchFamily="34" charset="-120"/>
               </a:rPr>
-              <a:t>Word Labs  •  wordlabs.app  •  Root: 'enjoy' = to take pleasure from</a:t>
+              <a:t>Word Labs  •  wordlabs.app  •  Root: 'enjoy' = to take pleasure in</a:t>
             </a:r>
             <a:endParaRPr lang="en-US" sz="800" dirty="0"/>
           </a:p>
@@ -30815,7 +29356,7 @@
                 <a:ea typeface="Calibri" pitchFamily="34" charset="-122"/>
                 <a:cs typeface="Calibri" pitchFamily="34" charset="-120"/>
               </a:rPr>
-              <a:t>to take pleasure from</a:t>
+              <a:t>to take pleasure in</a:t>
             </a:r>
             <a:endParaRPr lang="en-US" sz="850" dirty="0"/>
           </a:p>
@@ -30927,7 +29468,7 @@
                 <a:ea typeface="Calibri" pitchFamily="34" charset="-122"/>
                 <a:cs typeface="Calibri" pitchFamily="34" charset="-120"/>
               </a:rPr>
-              <a:t>action happening now</a:t>
+              <a:t>happening right now; present participle</a:t>
             </a:r>
             <a:endParaRPr lang="en-US" sz="850" dirty="0"/>
           </a:p>
@@ -31483,7 +30024,7 @@
                 <a:ea typeface="Calibri" pitchFamily="34" charset="-122"/>
                 <a:cs typeface="Calibri" pitchFamily="34" charset="-120"/>
               </a:rPr>
-              <a:t>Word Labs  •  wordlabs.app  •  Root: 'enjoy' = to take pleasure from</a:t>
+              <a:t>Word Labs  •  wordlabs.app  •  Root: 'enjoy' = to take pleasure in</a:t>
             </a:r>
             <a:endParaRPr lang="en-US" sz="800" dirty="0"/>
           </a:p>
@@ -31800,7 +30341,7 @@
                 <a:ea typeface="Calibri" pitchFamily="34" charset="-122"/>
                 <a:cs typeface="Calibri" pitchFamily="34" charset="-120"/>
               </a:rPr>
-              <a:t>to take pleasure from</a:t>
+              <a:t>to take pleasure in</a:t>
             </a:r>
             <a:endParaRPr lang="en-US" sz="850" dirty="0"/>
           </a:p>
@@ -31912,7 +30453,7 @@
                 <a:ea typeface="Calibri" pitchFamily="34" charset="-122"/>
                 <a:cs typeface="Calibri" pitchFamily="34" charset="-120"/>
               </a:rPr>
-              <a:t>action happening now</a:t>
+              <a:t>happening right now; present participle</a:t>
             </a:r>
             <a:endParaRPr lang="en-US" sz="850" dirty="0"/>
           </a:p>
@@ -32705,7 +31246,7 @@
                 <a:ea typeface="Calibri" pitchFamily="34" charset="-122"/>
                 <a:cs typeface="Calibri" pitchFamily="34" charset="-120"/>
               </a:rPr>
-              <a:t>Word Labs  •  wordlabs.app  •  Root: 'enjoy' = to take pleasure from</a:t>
+              <a:t>Word Labs  •  wordlabs.app  •  Root: 'enjoy' = to take pleasure in</a:t>
             </a:r>
             <a:endParaRPr lang="en-US" sz="800" dirty="0"/>
           </a:p>
@@ -33022,7 +31563,7 @@
                 <a:ea typeface="Calibri" pitchFamily="34" charset="-122"/>
                 <a:cs typeface="Calibri" pitchFamily="34" charset="-120"/>
               </a:rPr>
-              <a:t>to take pleasure from</a:t>
+              <a:t>to take pleasure in</a:t>
             </a:r>
             <a:endParaRPr lang="en-US" sz="850" dirty="0"/>
           </a:p>
@@ -33134,7 +31675,7 @@
                 <a:ea typeface="Calibri" pitchFamily="34" charset="-122"/>
                 <a:cs typeface="Calibri" pitchFamily="34" charset="-120"/>
               </a:rPr>
-              <a:t>action happening now</a:t>
+              <a:t>happening right now; present participle</a:t>
             </a:r>
             <a:endParaRPr lang="en-US" sz="850" dirty="0"/>
           </a:p>
@@ -34323,7 +32864,7 @@
                 <a:ea typeface="Calibri" pitchFamily="34" charset="-122"/>
                 <a:cs typeface="Calibri" pitchFamily="34" charset="-120"/>
               </a:rPr>
-              <a:t>Word Labs  •  wordlabs.app  •  Root: 'enjoy' = to take pleasure from</a:t>
+              <a:t>Word Labs  •  wordlabs.app  •  Root: 'enjoy' = to take pleasure in</a:t>
             </a:r>
             <a:endParaRPr lang="en-US" sz="800" dirty="0"/>
           </a:p>
@@ -35492,7 +34033,7 @@
                 <a:ea typeface="Calibri" pitchFamily="34" charset="-122"/>
                 <a:cs typeface="Calibri" pitchFamily="34" charset="-120"/>
               </a:rPr>
-              <a:t>Word Labs  •  wordlabs.app  •  Root: 'enjoy' = to take pleasure from</a:t>
+              <a:t>Word Labs  •  wordlabs.app  •  Root: 'enjoy' = to take pleasure in</a:t>
             </a:r>
             <a:endParaRPr lang="en-US" sz="800" dirty="0"/>
           </a:p>
@@ -36227,7 +34768,7 @@
                 <a:ea typeface="Trebuchet MS" pitchFamily="34" charset="-122"/>
                 <a:cs typeface="Trebuchet MS" pitchFamily="34" charset="-120"/>
               </a:rPr>
-              <a:t>-ed</a:t>
+              <a:t>-ing</a:t>
             </a:r>
             <a:endParaRPr lang="en-US" sz="1300" dirty="0"/>
           </a:p>
@@ -36291,7 +34832,7 @@
                 <a:ea typeface="Trebuchet MS" pitchFamily="34" charset="-122"/>
                 <a:cs typeface="Trebuchet MS" pitchFamily="34" charset="-120"/>
               </a:rPr>
-              <a:t>mis-</a:t>
+              <a:t>pre-</a:t>
             </a:r>
             <a:endParaRPr lang="en-US" sz="1300" dirty="0"/>
           </a:p>
@@ -36380,7 +34921,7 @@
                 <a:ea typeface="Trebuchet MS" pitchFamily="34" charset="-122"/>
                 <a:cs typeface="Trebuchet MS" pitchFamily="34" charset="-120"/>
               </a:rPr>
-              <a:t>-ing</a:t>
+              <a:t>-ed</a:t>
             </a:r>
             <a:endParaRPr lang="en-US" sz="1300" dirty="0"/>
           </a:p>
@@ -36444,7 +34985,7 @@
                 <a:ea typeface="Trebuchet MS" pitchFamily="34" charset="-122"/>
                 <a:cs typeface="Trebuchet MS" pitchFamily="34" charset="-120"/>
               </a:rPr>
-              <a:t>pre-</a:t>
+              <a:t>mis-</a:t>
             </a:r>
             <a:endParaRPr lang="en-US" sz="1300" dirty="0"/>
           </a:p>
@@ -37034,7 +35575,7 @@
                 <a:ea typeface="Trebuchet MS" pitchFamily="34" charset="-122"/>
                 <a:cs typeface="Trebuchet MS" pitchFamily="34" charset="-120"/>
               </a:rPr>
-              <a:t>unenjoyed</a:t>
+              <a:t>enjoyableness</a:t>
             </a:r>
             <a:endParaRPr lang="en-US" sz="1200" dirty="0"/>
           </a:p>
@@ -37100,7 +35641,7 @@
                 <a:ea typeface="Trebuchet MS" pitchFamily="34" charset="-122"/>
                 <a:cs typeface="Trebuchet MS" pitchFamily="34" charset="-120"/>
               </a:rPr>
-              <a:t>unenjoyable</a:t>
+              <a:t>enjoyer</a:t>
             </a:r>
             <a:endParaRPr lang="en-US" sz="1200" dirty="0"/>
           </a:p>
@@ -37392,7 +35933,7 @@
                 <a:ea typeface="Calibri" pitchFamily="34" charset="-122"/>
                 <a:cs typeface="Calibri" pitchFamily="34" charset="-120"/>
               </a:rPr>
-              <a:t>Word Labs  •  wordlabs.app  •  Root: 'enjoy' = to take pleasure from</a:t>
+              <a:t>Word Labs  •  wordlabs.app  •  Root: 'enjoy' = to take pleasure in</a:t>
             </a:r>
             <a:endParaRPr lang="en-US" sz="800" dirty="0"/>
           </a:p>
@@ -37556,7 +36097,7 @@
                 <a:ea typeface="Calibri" pitchFamily="34" charset="-122"/>
                 <a:cs typeface="Calibri" pitchFamily="34" charset="-120"/>
               </a:rPr>
-              <a:t>The core part of a word carrying its basic meaning. For example, 'enjoy' means 'to take pleasure from'.</a:t>
+              <a:t>The core part of a word carrying its basic meaning. For example, 'enjoy' means 'to take pleasure in'.</a:t>
             </a:r>
             <a:endParaRPr lang="en-US" sz="1350" dirty="0"/>
           </a:p>
@@ -38176,7 +36717,7 @@
                 <a:ea typeface="Calibri" pitchFamily="34" charset="-122"/>
                 <a:cs typeface="Calibri" pitchFamily="34" charset="-120"/>
               </a:rPr>
-              <a:t>Word Labs  •  wordlabs.app  •  Root: 'enjoy' = to take pleasure from</a:t>
+              <a:t>Word Labs  •  wordlabs.app  •  Root: 'enjoy' = to take pleasure in</a:t>
             </a:r>
             <a:endParaRPr lang="en-US" sz="800" dirty="0"/>
           </a:p>
@@ -38288,7 +36829,7 @@
                 <a:ea typeface="Calibri" pitchFamily="34" charset="-122"/>
                 <a:cs typeface="Calibri" pitchFamily="34" charset="-120"/>
               </a:rPr>
-              <a:t>1.  The word 'enjoyment' contains the root 'enjoy' plus the suffix '-ment'.</a:t>
+              <a:t>1.  The suffix '-able' in 'enjoyable' means 'without'.</a:t>
             </a:r>
             <a:endParaRPr lang="en-US" sz="1300" dirty="0"/>
           </a:p>
@@ -38311,11 +36852,11 @@
             </a:avLst>
           </a:prstGeom>
           <a:solidFill>
-            <a:srgbClr val="DCFCE7"/>
-          </a:solidFill>
-          <a:ln w="12700">
-            <a:solidFill>
-              <a:srgbClr val="16A34A"/>
+            <a:srgbClr val="FEE2E2"/>
+          </a:solidFill>
+          <a:ln w="12700">
+            <a:solidFill>
+              <a:srgbClr val="DC2626"/>
             </a:solidFill>
             <a:prstDash val="solid"/>
           </a:ln>
@@ -38348,13 +36889,13 @@
             <a:r>
               <a:rPr lang="en-US" sz="1100" b="1" dirty="0">
                 <a:solidFill>
-                  <a:srgbClr val="16A34A"/>
+                  <a:srgbClr val="DC2626"/>
                 </a:solidFill>
                 <a:latin typeface="Trebuchet MS" pitchFamily="34" charset="0"/>
                 <a:ea typeface="Trebuchet MS" pitchFamily="34" charset="-122"/>
                 <a:cs typeface="Trebuchet MS" pitchFamily="34" charset="-120"/>
               </a:rPr>
-              <a:t>TRUE</a:t>
+              <a:t>FALSE</a:t>
             </a:r>
             <a:endParaRPr lang="en-US" sz="1100" dirty="0"/>
           </a:p>
@@ -38427,7 +36968,7 @@
                 <a:ea typeface="Calibri" pitchFamily="34" charset="-122"/>
                 <a:cs typeface="Calibri" pitchFamily="34" charset="-120"/>
               </a:rPr>
-              <a:t>2.  The root 'enjoy' comes from Ancient Greek.</a:t>
+              <a:t>2.  Adding '-ment' to 'enjoy' changes it from a verb to a noun.</a:t>
             </a:r>
             <a:endParaRPr lang="en-US" sz="1300" dirty="0"/>
           </a:p>
@@ -38450,11 +36991,11 @@
             </a:avLst>
           </a:prstGeom>
           <a:solidFill>
-            <a:srgbClr val="FEE2E2"/>
-          </a:solidFill>
-          <a:ln w="12700">
-            <a:solidFill>
-              <a:srgbClr val="DC2626"/>
+            <a:srgbClr val="DCFCE7"/>
+          </a:solidFill>
+          <a:ln w="12700">
+            <a:solidFill>
+              <a:srgbClr val="16A34A"/>
             </a:solidFill>
             <a:prstDash val="solid"/>
           </a:ln>
@@ -38487,13 +37028,13 @@
             <a:r>
               <a:rPr lang="en-US" sz="1100" b="1" dirty="0">
                 <a:solidFill>
-                  <a:srgbClr val="DC2626"/>
+                  <a:srgbClr val="16A34A"/>
                 </a:solidFill>
                 <a:latin typeface="Trebuchet MS" pitchFamily="34" charset="0"/>
                 <a:ea typeface="Trebuchet MS" pitchFamily="34" charset="-122"/>
                 <a:cs typeface="Trebuchet MS" pitchFamily="34" charset="-120"/>
               </a:rPr>
-              <a:t>FALSE</a:t>
+              <a:t>TRUE</a:t>
             </a:r>
             <a:endParaRPr lang="en-US" sz="1100" dirty="0"/>
           </a:p>
@@ -38566,7 +37107,7 @@
                 <a:ea typeface="Calibri" pitchFamily="34" charset="-122"/>
                 <a:cs typeface="Calibri" pitchFamily="34" charset="-120"/>
               </a:rPr>
-              <a:t>3.  Adding the prefix 'un-' to 'enjoyable' creates a word meaning not pleasant.</a:t>
+              <a:t>3.  The word 'enjoyment' contains the root 'enjoy' plus a suffix.</a:t>
             </a:r>
             <a:endParaRPr lang="en-US" sz="1300" dirty="0"/>
           </a:p>
@@ -38705,7 +37246,7 @@
                 <a:ea typeface="Calibri" pitchFamily="34" charset="-122"/>
                 <a:cs typeface="Calibri" pitchFamily="34" charset="-120"/>
               </a:rPr>
-              <a:t>4.  The word 'enjoyable' means something that is fun and pleasant.</a:t>
+              <a:t>4.  The root 'enjoy' comes from the Greek language.</a:t>
             </a:r>
             <a:endParaRPr lang="en-US" sz="1300" dirty="0"/>
           </a:p>
@@ -38728,11 +37269,11 @@
             </a:avLst>
           </a:prstGeom>
           <a:solidFill>
-            <a:srgbClr val="DCFCE7"/>
-          </a:solidFill>
-          <a:ln w="12700">
-            <a:solidFill>
-              <a:srgbClr val="16A34A"/>
+            <a:srgbClr val="FEE2E2"/>
+          </a:solidFill>
+          <a:ln w="12700">
+            <a:solidFill>
+              <a:srgbClr val="DC2626"/>
             </a:solidFill>
             <a:prstDash val="solid"/>
           </a:ln>
@@ -38765,13 +37306,13 @@
             <a:r>
               <a:rPr lang="en-US" sz="1100" b="1" dirty="0">
                 <a:solidFill>
-                  <a:srgbClr val="16A34A"/>
+                  <a:srgbClr val="DC2626"/>
                 </a:solidFill>
                 <a:latin typeface="Trebuchet MS" pitchFamily="34" charset="0"/>
                 <a:ea typeface="Trebuchet MS" pitchFamily="34" charset="-122"/>
                 <a:cs typeface="Trebuchet MS" pitchFamily="34" charset="-120"/>
               </a:rPr>
-              <a:t>TRUE</a:t>
+              <a:t>FALSE</a:t>
             </a:r>
             <a:endParaRPr lang="en-US" sz="1100" dirty="0"/>
           </a:p>
@@ -38844,7 +37385,7 @@
                 <a:ea typeface="Calibri" pitchFamily="34" charset="-122"/>
                 <a:cs typeface="Calibri" pitchFamily="34" charset="-120"/>
               </a:rPr>
-              <a:t>5.  The suffix '-ment' in 'enjoyment' means the same as the prefix 'un-'.</a:t>
+              <a:t>5.  'Enjoyable' means something that gives pleasure or is fun to experience.</a:t>
             </a:r>
             <a:endParaRPr lang="en-US" sz="1300" dirty="0"/>
           </a:p>
@@ -38867,11 +37408,11 @@
             </a:avLst>
           </a:prstGeom>
           <a:solidFill>
-            <a:srgbClr val="FEE2E2"/>
-          </a:solidFill>
-          <a:ln w="12700">
-            <a:solidFill>
-              <a:srgbClr val="DC2626"/>
+            <a:srgbClr val="DCFCE7"/>
+          </a:solidFill>
+          <a:ln w="12700">
+            <a:solidFill>
+              <a:srgbClr val="16A34A"/>
             </a:solidFill>
             <a:prstDash val="solid"/>
           </a:ln>
@@ -38904,13 +37445,13 @@
             <a:r>
               <a:rPr lang="en-US" sz="1100" b="1" dirty="0">
                 <a:solidFill>
-                  <a:srgbClr val="DC2626"/>
+                  <a:srgbClr val="16A34A"/>
                 </a:solidFill>
                 <a:latin typeface="Trebuchet MS" pitchFamily="34" charset="0"/>
                 <a:ea typeface="Trebuchet MS" pitchFamily="34" charset="-122"/>
                 <a:cs typeface="Trebuchet MS" pitchFamily="34" charset="-120"/>
               </a:rPr>
-              <a:t>FALSE</a:t>
+              <a:t>TRUE</a:t>
             </a:r>
             <a:endParaRPr lang="en-US" sz="1100" dirty="0"/>
           </a:p>
@@ -39202,7 +37743,7 @@
                 <a:ea typeface="Calibri" pitchFamily="34" charset="-122"/>
                 <a:cs typeface="Calibri" pitchFamily="34" charset="-120"/>
               </a:rPr>
-              <a:t>Word Labs  •  wordlabs.app  •  Root: 'enjoy' = to take pleasure from</a:t>
+              <a:t>Word Labs  •  wordlabs.app  •  Root: 'enjoy' = to take pleasure in</a:t>
             </a:r>
             <a:endParaRPr lang="en-US" sz="800" dirty="0"/>
           </a:p>
@@ -39339,7 +37880,7 @@
                 <a:ea typeface="Trebuchet MS" pitchFamily="34" charset="-122"/>
                 <a:cs typeface="Trebuchet MS" pitchFamily="34" charset="-120"/>
               </a:rPr>
-              <a:t>to take pleasure from</a:t>
+              <a:t>to take pleasure in</a:t>
             </a:r>
             <a:endParaRPr lang="en-US" sz="2000" dirty="0"/>
           </a:p>
@@ -39879,7 +38420,7 @@
                 <a:ea typeface="Trebuchet MS" pitchFamily="34" charset="-122"/>
                 <a:cs typeface="Trebuchet MS" pitchFamily="34" charset="-120"/>
               </a:rPr>
-              <a:t>unenjoyed</a:t>
+              <a:t>enjoyableness</a:t>
             </a:r>
             <a:endParaRPr lang="en-US" sz="1300" dirty="0"/>
           </a:p>
@@ -40171,7 +38712,7 @@
                 <a:ea typeface="Calibri" pitchFamily="34" charset="-122"/>
                 <a:cs typeface="Calibri" pitchFamily="34" charset="-120"/>
               </a:rPr>
-              <a:t>Word Labs  •  wordlabs.app  •  Root: 'enjoy' = to take pleasure from</a:t>
+              <a:t>Word Labs  •  wordlabs.app  •  Root: 'enjoy' = to take pleasure in</a:t>
             </a:r>
             <a:endParaRPr lang="en-US" sz="800" dirty="0"/>
           </a:p>
@@ -40906,7 +39447,7 @@
                 <a:ea typeface="Trebuchet MS" pitchFamily="34" charset="-122"/>
                 <a:cs typeface="Trebuchet MS" pitchFamily="34" charset="-120"/>
               </a:rPr>
-              <a:t>-ed</a:t>
+              <a:t>-ing</a:t>
             </a:r>
             <a:endParaRPr lang="en-US" sz="1300" dirty="0"/>
           </a:p>
@@ -40970,7 +39511,7 @@
                 <a:ea typeface="Trebuchet MS" pitchFamily="34" charset="-122"/>
                 <a:cs typeface="Trebuchet MS" pitchFamily="34" charset="-120"/>
               </a:rPr>
-              <a:t>mis-</a:t>
+              <a:t>pre-</a:t>
             </a:r>
             <a:endParaRPr lang="en-US" sz="1300" dirty="0"/>
           </a:p>
@@ -41059,7 +39600,7 @@
                 <a:ea typeface="Trebuchet MS" pitchFamily="34" charset="-122"/>
                 <a:cs typeface="Trebuchet MS" pitchFamily="34" charset="-120"/>
               </a:rPr>
-              <a:t>-ing</a:t>
+              <a:t>-ed</a:t>
             </a:r>
             <a:endParaRPr lang="en-US" sz="1300" dirty="0"/>
           </a:p>
@@ -41123,7 +39664,7 @@
                 <a:ea typeface="Trebuchet MS" pitchFamily="34" charset="-122"/>
                 <a:cs typeface="Trebuchet MS" pitchFamily="34" charset="-120"/>
               </a:rPr>
-              <a:t>pre-</a:t>
+              <a:t>mis-</a:t>
             </a:r>
             <a:endParaRPr lang="en-US" sz="1300" dirty="0"/>
           </a:p>
@@ -41945,7 +40486,7 @@
                 <a:ea typeface="Calibri" pitchFamily="34" charset="-122"/>
                 <a:cs typeface="Calibri" pitchFamily="34" charset="-120"/>
               </a:rPr>
-              <a:t>Word Labs  •  wordlabs.app  •  Root: 'enjoy' = to take pleasure from</a:t>
+              <a:t>Word Labs  •  wordlabs.app  •  Root: 'enjoy' = to take pleasure in</a:t>
             </a:r>
             <a:endParaRPr lang="en-US" sz="800" dirty="0"/>
           </a:p>
@@ -42123,7 +40664,7 @@
                 <a:ea typeface="Calibri" pitchFamily="34" charset="-122"/>
                 <a:cs typeface="Calibri" pitchFamily="34" charset="-120"/>
               </a:rPr>
-              <a:t>The feeling of happiness or pleasure you get from something.</a:t>
+              <a:t>The feeling of pleasure or happiness you get from doing something fun.</a:t>
             </a:r>
             <a:endParaRPr lang="en-US" sz="1200" dirty="0"/>
           </a:p>
@@ -42262,7 +40803,7 @@
                 <a:ea typeface="Calibri" pitchFamily="34" charset="-122"/>
                 <a:cs typeface="Calibri" pitchFamily="34" charset="-120"/>
               </a:rPr>
-              <a:t>To get pleasure or happiness from something you are doing.</a:t>
+              <a:t>To get happiness or pleasure from something.</a:t>
             </a:r>
             <a:endParaRPr lang="en-US" sz="1200" dirty="0"/>
           </a:p>
@@ -42401,7 +40942,7 @@
                 <a:ea typeface="Calibri" pitchFamily="34" charset="-122"/>
                 <a:cs typeface="Calibri" pitchFamily="34" charset="-120"/>
               </a:rPr>
-              <a:t>Something that was not appreciated or found pleasurable.</a:t>
+              <a:t>The quality of being fun or pleasant to experience.</a:t>
             </a:r>
             <a:endParaRPr lang="en-US" sz="1200" dirty="0"/>
           </a:p>
@@ -42540,7 +41081,7 @@
                 <a:ea typeface="Calibri" pitchFamily="34" charset="-122"/>
                 <a:cs typeface="Calibri" pitchFamily="34" charset="-120"/>
               </a:rPr>
-              <a:t>Currently having a great time doing something right now.</a:t>
+              <a:t>Currently getting pleasure or happiness from something.</a:t>
             </a:r>
             <a:endParaRPr lang="en-US" sz="1200" dirty="0"/>
           </a:p>
@@ -42679,7 +41220,7 @@
                 <a:ea typeface="Calibri" pitchFamily="34" charset="-122"/>
                 <a:cs typeface="Calibri" pitchFamily="34" charset="-120"/>
               </a:rPr>
-              <a:t>Done in a way that is fun and pleasant.</a:t>
+              <a:t>Done in a way that is fun and gives pleasure.</a:t>
             </a:r>
             <a:endParaRPr lang="en-US" sz="1200" dirty="0"/>
           </a:p>
@@ -42818,7 +41359,7 @@
                 <a:ea typeface="Calibri" pitchFamily="34" charset="-122"/>
                 <a:cs typeface="Calibri" pitchFamily="34" charset="-120"/>
               </a:rPr>
-              <a:t>Something that is fun and pleasant to do or experience.</a:t>
+              <a:t>Something that gives you pleasure and is fun to do or experience.</a:t>
             </a:r>
             <a:endParaRPr lang="en-US" sz="1200" dirty="0"/>
           </a:p>
@@ -42891,7 +41432,7 @@
                 <a:ea typeface="Trebuchet MS" pitchFamily="34" charset="-122"/>
                 <a:cs typeface="Trebuchet MS" pitchFamily="34" charset="-120"/>
               </a:rPr>
-              <a:t>unenjoyed</a:t>
+              <a:t>enjoyableness</a:t>
             </a:r>
             <a:endParaRPr lang="en-US" sz="1200" dirty="0"/>
           </a:p>
@@ -42957,7 +41498,7 @@
                 <a:ea typeface="Calibri" pitchFamily="34" charset="-122"/>
                 <a:cs typeface="Calibri" pitchFamily="34" charset="-120"/>
               </a:rPr>
-              <a:t>When you had a good time doing something in the past.</a:t>
+              <a:t>Felt happy or pleased about something that happened in the past.</a:t>
             </a:r>
             <a:endParaRPr lang="en-US" sz="1200" dirty="0"/>
           </a:p>
@@ -43249,7 +41790,7 @@
                 <a:ea typeface="Calibri" pitchFamily="34" charset="-122"/>
                 <a:cs typeface="Calibri" pitchFamily="34" charset="-120"/>
               </a:rPr>
-              <a:t>Word Labs  •  wordlabs.app  •  Root: 'enjoy' = to take pleasure from</a:t>
+              <a:t>Word Labs  •  wordlabs.app  •  Root: 'enjoy' = to take pleasure in</a:t>
             </a:r>
             <a:endParaRPr lang="en-US" sz="800" dirty="0"/>
           </a:p>
@@ -43452,7 +41993,7 @@
                 <a:ea typeface="Calibri" pitchFamily="34" charset="-122"/>
                 <a:cs typeface="Calibri" pitchFamily="34" charset="-120"/>
               </a:rPr>
-              <a:t>We hope you will find this activity enjoyable and share your enjoyment with the class.</a:t>
+              <a:t>We really enjoyed the excursion to the museum last Friday.</a:t>
             </a:r>
             <a:endParaRPr lang="en-US" sz="1500" dirty="0"/>
           </a:p>
@@ -43616,7 +42157,7 @@
                 <a:ea typeface="Calibri" pitchFamily="34" charset="-122"/>
                 <a:cs typeface="Calibri" pitchFamily="34" charset="-120"/>
               </a:rPr>
-              <a:t>She was enjoying the book so much that she stayed up late to finish the last chapter.</a:t>
+              <a:t>Reading is more enjoyable when you choose a book that interests you.</a:t>
             </a:r>
             <a:endParaRPr lang="en-US" sz="1500" dirty="0"/>
           </a:p>
@@ -43780,7 +42321,7 @@
                 <a:ea typeface="Calibri" pitchFamily="34" charset="-122"/>
                 <a:cs typeface="Calibri" pitchFamily="34" charset="-120"/>
               </a:rPr>
-              <a:t>The enjoyment on the children's faces told us the excursion had been a great success.</a:t>
+              <a:t>The enjoyment on the children's faces showed how much they loved the show.</a:t>
             </a:r>
             <a:endParaRPr lang="en-US" sz="1500" dirty="0"/>
           </a:p>

--- a/output/wordlabs-enjoy-3day.pptx
+++ b/output/wordlabs-enjoy-3day.pptx
@@ -4240,7 +4240,7 @@
                 <a:ea typeface="Calibri" pitchFamily="34" charset="-122"/>
                 <a:cs typeface="Calibri" pitchFamily="34" charset="-120"/>
               </a:rPr>
-              <a:t>"to take pleasure in"</a:t>
+              <a:t>"like; take pleasure in"</a:t>
             </a:r>
             <a:endParaRPr lang="en-US" sz="2200" dirty="0"/>
           </a:p>
@@ -4279,7 +4279,7 @@
                 <a:ea typeface="Calibri" pitchFamily="34" charset="-122"/>
                 <a:cs typeface="Calibri" pitchFamily="34" charset="-120"/>
               </a:rPr>
-              <a:t>Origin: Latin: in + gaudere</a:t>
+              <a:t>Origin: Core English root</a:t>
             </a:r>
             <a:endParaRPr lang="en-US" sz="1300" dirty="0"/>
           </a:p>
@@ -5288,7 +5288,7 @@
                 <a:ea typeface="Calibri" pitchFamily="34" charset="-122"/>
                 <a:cs typeface="Calibri" pitchFamily="34" charset="-120"/>
               </a:rPr>
-              <a:t>Word Labs  •  wordlabs.app  •  Root: 'enjoy' = to take pleasure in</a:t>
+              <a:t>Word Labs  •  wordlabs.app  •  Root: 'enjoy' = like; take pleasure in</a:t>
             </a:r>
             <a:endParaRPr lang="en-US" sz="800" dirty="0"/>
           </a:p>
@@ -5622,7 +5622,7 @@
                 <a:ea typeface="Trebuchet MS" pitchFamily="34" charset="-122"/>
                 <a:cs typeface="Trebuchet MS" pitchFamily="34" charset="-120"/>
               </a:rPr>
-              <a:t>1</a:t>
+              <a:t>0</a:t>
             </a:r>
             <a:pPr algn="ctr" indent="0" marL="0">
               <a:buNone/>
@@ -5928,7 +5928,7 @@
                 <a:ea typeface="Calibri" pitchFamily="34" charset="-122"/>
                 <a:cs typeface="Calibri" pitchFamily="34" charset="-120"/>
               </a:rPr>
-              <a:t>Word Labs  •  wordlabs.app  •  Root: 'enjoy' = to take pleasure in</a:t>
+              <a:t>Word Labs  •  wordlabs.app  •  Root: 'enjoy' = like; take pleasure in</a:t>
             </a:r>
             <a:endParaRPr lang="en-US" sz="800" dirty="0"/>
           </a:p>
@@ -6040,7 +6040,7 @@
                 <a:ea typeface="Calibri" pitchFamily="34" charset="-122"/>
                 <a:cs typeface="Calibri" pitchFamily="34" charset="-120"/>
               </a:rPr>
-              <a:t>She found the excursion truly </a:t>
+              <a:t>She </a:t>
             </a:r>
             <a:pPr algn="l" indent="0" marL="0">
               <a:buNone/>
@@ -6057,7 +6057,7 @@
                 <a:ea typeface="Calibri" pitchFamily="34" charset="-122"/>
                 <a:cs typeface="Calibri" pitchFamily="34" charset="-120"/>
               </a:rPr>
-              <a:t>enjoyable</a:t>
+              <a:t>enjoyed</a:t>
             </a:r>
             <a:pPr algn="l" indent="0" marL="0">
               <a:buNone/>
@@ -6071,7 +6071,7 @@
                 <a:ea typeface="Calibri" pitchFamily="34" charset="-122"/>
                 <a:cs typeface="Calibri" pitchFamily="34" charset="-120"/>
               </a:rPr>
-              <a:t>, and her </a:t>
+              <a:t> the concert so much that she wanted to go again. She is a true </a:t>
             </a:r>
             <a:pPr algn="l" indent="0" marL="0">
               <a:buNone/>
@@ -6088,7 +6088,7 @@
                 <a:ea typeface="Calibri" pitchFamily="34" charset="-122"/>
                 <a:cs typeface="Calibri" pitchFamily="34" charset="-120"/>
               </a:rPr>
-              <a:t>enjoyment</a:t>
+              <a:t>enjoyer</a:t>
             </a:r>
             <a:pPr algn="l" indent="0" marL="0">
               <a:buNone/>
@@ -6102,7 +6102,7 @@
                 <a:ea typeface="Calibri" pitchFamily="34" charset="-122"/>
                 <a:cs typeface="Calibri" pitchFamily="34" charset="-120"/>
               </a:rPr>
-              <a:t> showed on her face.</a:t>
+              <a:t> of long walks on the beach.</a:t>
             </a:r>
             <a:endParaRPr lang="en-US" sz="1800" dirty="0"/>
           </a:p>
@@ -6257,7 +6257,7 @@
                 <a:ea typeface="Trebuchet MS" pitchFamily="34" charset="-122"/>
                 <a:cs typeface="Trebuchet MS" pitchFamily="34" charset="-120"/>
               </a:rPr>
-              <a:t>enjoyable</a:t>
+              <a:t>enjoyed</a:t>
             </a:r>
             <a:endParaRPr lang="en-US" sz="1400" dirty="0"/>
           </a:p>
@@ -6385,7 +6385,7 @@
                 <a:ea typeface="Trebuchet MS" pitchFamily="34" charset="-122"/>
                 <a:cs typeface="Trebuchet MS" pitchFamily="34" charset="-120"/>
               </a:rPr>
-              <a:t>enjoyment</a:t>
+              <a:t>enjoyer</a:t>
             </a:r>
             <a:endParaRPr lang="en-US" sz="1400" dirty="0"/>
           </a:p>
@@ -6716,7 +6716,7 @@
                 <a:ea typeface="Calibri" pitchFamily="34" charset="-122"/>
                 <a:cs typeface="Calibri" pitchFamily="34" charset="-120"/>
               </a:rPr>
-              <a:t>Word Labs  •  wordlabs.app  •  Root: 'enjoy' = to take pleasure in</a:t>
+              <a:t>Word Labs  •  wordlabs.app  •  Root: 'enjoy' = like; take pleasure in</a:t>
             </a:r>
             <a:endParaRPr lang="en-US" sz="800" dirty="0"/>
           </a:p>
@@ -6855,7 +6855,7 @@
                 <a:ea typeface="Trebuchet MS" pitchFamily="34" charset="-122"/>
                 <a:cs typeface="Trebuchet MS" pitchFamily="34" charset="-120"/>
               </a:rPr>
-              <a:t>enjoyable</a:t>
+              <a:t>enjoyed</a:t>
             </a:r>
             <a:endParaRPr lang="en-US" sz="2800" dirty="0"/>
           </a:p>
@@ -7543,7 +7543,7 @@
                 <a:ea typeface="Calibri" pitchFamily="34" charset="-122"/>
                 <a:cs typeface="Calibri" pitchFamily="34" charset="-120"/>
               </a:rPr>
-              <a:t>Word Labs  •  wordlabs.app  •  Root: 'enjoy' = to take pleasure in</a:t>
+              <a:t>Word Labs  •  wordlabs.app  •  Root: 'enjoy' = like; take pleasure in</a:t>
             </a:r>
             <a:endParaRPr lang="en-US" sz="800" dirty="0"/>
           </a:p>
@@ -7682,7 +7682,7 @@
                 <a:ea typeface="Trebuchet MS" pitchFamily="34" charset="-122"/>
                 <a:cs typeface="Trebuchet MS" pitchFamily="34" charset="-120"/>
               </a:rPr>
-              <a:t>enjoyable</a:t>
+              <a:t>enjoyed</a:t>
             </a:r>
             <a:endParaRPr lang="en-US" sz="2800" dirty="0"/>
           </a:p>
@@ -7860,7 +7860,7 @@
                 <a:ea typeface="Calibri" pitchFamily="34" charset="-122"/>
                 <a:cs typeface="Calibri" pitchFamily="34" charset="-120"/>
               </a:rPr>
-              <a:t>to take pleasure in</a:t>
+              <a:t>like; take pleasure in</a:t>
             </a:r>
             <a:endParaRPr lang="en-US" sz="850" dirty="0"/>
           </a:p>
@@ -7933,7 +7933,7 @@
                 <a:ea typeface="Trebuchet MS" pitchFamily="34" charset="-122"/>
                 <a:cs typeface="Trebuchet MS" pitchFamily="34" charset="-120"/>
               </a:rPr>
-              <a:t>able</a:t>
+              <a:t>ed</a:t>
             </a:r>
             <a:endParaRPr lang="en-US" sz="1300" dirty="0"/>
           </a:p>
@@ -7972,7 +7972,7 @@
                 <a:ea typeface="Calibri" pitchFamily="34" charset="-122"/>
                 <a:cs typeface="Calibri" pitchFamily="34" charset="-120"/>
               </a:rPr>
-              <a:t>able to be; having the quality of</a:t>
+              <a:t>past tense</a:t>
             </a:r>
             <a:endParaRPr lang="en-US" sz="850" dirty="0"/>
           </a:p>
@@ -8528,7 +8528,7 @@
                 <a:ea typeface="Calibri" pitchFamily="34" charset="-122"/>
                 <a:cs typeface="Calibri" pitchFamily="34" charset="-120"/>
               </a:rPr>
-              <a:t>Word Labs  •  wordlabs.app  •  Root: 'enjoy' = to take pleasure in</a:t>
+              <a:t>Word Labs  •  wordlabs.app  •  Root: 'enjoy' = like; take pleasure in</a:t>
             </a:r>
             <a:endParaRPr lang="en-US" sz="800" dirty="0"/>
           </a:p>
@@ -8667,7 +8667,7 @@
                 <a:ea typeface="Trebuchet MS" pitchFamily="34" charset="-122"/>
                 <a:cs typeface="Trebuchet MS" pitchFamily="34" charset="-120"/>
               </a:rPr>
-              <a:t>enjoyable</a:t>
+              <a:t>enjoyed</a:t>
             </a:r>
             <a:endParaRPr lang="en-US" sz="2800" dirty="0"/>
           </a:p>
@@ -8845,7 +8845,7 @@
                 <a:ea typeface="Calibri" pitchFamily="34" charset="-122"/>
                 <a:cs typeface="Calibri" pitchFamily="34" charset="-120"/>
               </a:rPr>
-              <a:t>to take pleasure in</a:t>
+              <a:t>like; take pleasure in</a:t>
             </a:r>
             <a:endParaRPr lang="en-US" sz="850" dirty="0"/>
           </a:p>
@@ -8918,7 +8918,7 @@
                 <a:ea typeface="Trebuchet MS" pitchFamily="34" charset="-122"/>
                 <a:cs typeface="Trebuchet MS" pitchFamily="34" charset="-120"/>
               </a:rPr>
-              <a:t>able</a:t>
+              <a:t>ed</a:t>
             </a:r>
             <a:endParaRPr lang="en-US" sz="1300" dirty="0"/>
           </a:p>
@@ -8957,7 +8957,7 @@
                 <a:ea typeface="Calibri" pitchFamily="34" charset="-122"/>
                 <a:cs typeface="Calibri" pitchFamily="34" charset="-120"/>
               </a:rPr>
-              <a:t>able to be; having the quality of</a:t>
+              <a:t>past tense</a:t>
             </a:r>
             <a:endParaRPr lang="en-US" sz="850" dirty="0"/>
           </a:p>
@@ -9064,8 +9064,8 @@
         </p:nvSpPr>
         <p:spPr>
           <a:xfrm>
-            <a:off x="1975104" y="3364992"/>
-            <a:ext cx="1554480" cy="475488"/>
+            <a:off x="2999232" y="3364992"/>
+            <a:ext cx="1645920" cy="475488"/>
           </a:xfrm>
           <a:prstGeom prst="rect">
             <a:avLst>
@@ -9091,8 +9091,8 @@
         </p:nvSpPr>
         <p:spPr>
           <a:xfrm>
-            <a:off x="1975104" y="3364992"/>
-            <a:ext cx="1554480" cy="475488"/>
+            <a:off x="2999232" y="3364992"/>
+            <a:ext cx="1645920" cy="475488"/>
           </a:xfrm>
           <a:prstGeom prst="rect">
             <a:avLst/>
@@ -9130,8 +9130,8 @@
         </p:nvSpPr>
         <p:spPr>
           <a:xfrm>
-            <a:off x="3529584" y="3364992"/>
-            <a:ext cx="73152" cy="475488"/>
+            <a:off x="4645152" y="3364992"/>
+            <a:ext cx="1097280" cy="475488"/>
           </a:xfrm>
           <a:prstGeom prst="rect">
             <a:avLst/>
@@ -9169,8 +9169,8 @@
         </p:nvSpPr>
         <p:spPr>
           <a:xfrm>
-            <a:off x="3602736" y="3364992"/>
-            <a:ext cx="1554480" cy="475488"/>
+            <a:off x="5742432" y="3364992"/>
+            <a:ext cx="1645920" cy="475488"/>
           </a:xfrm>
           <a:prstGeom prst="rect">
             <a:avLst>
@@ -9196,8 +9196,8 @@
         </p:nvSpPr>
         <p:spPr>
           <a:xfrm>
-            <a:off x="3602736" y="3364992"/>
-            <a:ext cx="1554480" cy="475488"/>
+            <a:off x="5742432" y="3364992"/>
+            <a:ext cx="1645920" cy="475488"/>
           </a:xfrm>
           <a:prstGeom prst="rect">
             <a:avLst/>
@@ -9221,7 +9221,7 @@
                 <a:ea typeface="Trebuchet MS" pitchFamily="34" charset="-122"/>
                 <a:cs typeface="Trebuchet MS" pitchFamily="34" charset="-120"/>
               </a:rPr>
-              <a:t>joy</a:t>
+              <a:t>joyed</a:t>
             </a:r>
             <a:endParaRPr lang="en-US" sz="1400" dirty="0"/>
           </a:p>
@@ -9229,14 +9229,41 @@
       </p:sp>
       <p:sp>
         <p:nvSpPr>
-          <p:cNvPr id="30" name="Text 28"/>
-          <p:cNvSpPr/>
-          <p:nvPr/>
-        </p:nvSpPr>
-        <p:spPr>
-          <a:xfrm>
-            <a:off x="5157216" y="3364992"/>
-            <a:ext cx="73152" cy="475488"/>
+          <p:cNvPr id="30" name="Shape 28"/>
+          <p:cNvSpPr/>
+          <p:nvPr/>
+        </p:nvSpPr>
+        <p:spPr>
+          <a:xfrm>
+            <a:off x="365760" y="4096512"/>
+            <a:ext cx="1371600" cy="804672"/>
+          </a:xfrm>
+          <a:prstGeom prst="rect">
+            <a:avLst>
+              <a:gd name="adj" fmla="val 6818"/>
+            </a:avLst>
+          </a:prstGeom>
+          <a:solidFill>
+            <a:srgbClr val="E2E8F0"/>
+          </a:solidFill>
+          <a:ln w="12700">
+            <a:solidFill>
+              <a:srgbClr val="E2E8F0"/>
+            </a:solidFill>
+            <a:prstDash val="solid"/>
+          </a:ln>
+        </p:spPr>
+      </p:sp>
+      <p:sp>
+        <p:nvSpPr>
+          <p:cNvPr id="31" name="Text 29"/>
+          <p:cNvSpPr/>
+          <p:nvPr/>
+        </p:nvSpPr>
+        <p:spPr>
+          <a:xfrm>
+            <a:off x="365760" y="4096512"/>
+            <a:ext cx="1371600" cy="804672"/>
           </a:xfrm>
           <a:prstGeom prst="rect">
             <a:avLst/>
@@ -9252,201 +9279,30 @@
               <a:buNone/>
             </a:pPr>
             <a:r>
-              <a:rPr lang="en-US" sz="1600" b="1" dirty="0">
-                <a:solidFill>
-                  <a:srgbClr val="0D9488"/>
+              <a:rPr lang="en-US" sz="1100" b="1" dirty="0">
+                <a:solidFill>
+                  <a:srgbClr val="475569"/>
                 </a:solidFill>
                 <a:latin typeface="Trebuchet MS" pitchFamily="34" charset="0"/>
                 <a:ea typeface="Trebuchet MS" pitchFamily="34" charset="-122"/>
                 <a:cs typeface="Trebuchet MS" pitchFamily="34" charset="-120"/>
               </a:rPr>
-              <a:t>·</a:t>
-            </a:r>
-            <a:endParaRPr lang="en-US" sz="1600" dirty="0"/>
-          </a:p>
-        </p:txBody>
-      </p:sp>
-      <p:sp>
-        <p:nvSpPr>
-          <p:cNvPr id="31" name="Shape 29"/>
-          <p:cNvSpPr/>
-          <p:nvPr/>
-        </p:nvSpPr>
-        <p:spPr>
-          <a:xfrm>
-            <a:off x="5230368" y="3364992"/>
-            <a:ext cx="1554480" cy="475488"/>
-          </a:xfrm>
-          <a:prstGeom prst="rect">
-            <a:avLst>
-              <a:gd name="adj" fmla="val 9615"/>
-            </a:avLst>
-          </a:prstGeom>
-          <a:solidFill>
-            <a:srgbClr val="FFFFFF"/>
-          </a:solidFill>
-          <a:ln w="12700">
-            <a:solidFill>
-              <a:srgbClr val="0D9488"/>
-            </a:solidFill>
-            <a:prstDash val="solid"/>
-          </a:ln>
-        </p:spPr>
-      </p:sp>
-      <p:sp>
-        <p:nvSpPr>
-          <p:cNvPr id="32" name="Text 30"/>
-          <p:cNvSpPr/>
-          <p:nvPr/>
-        </p:nvSpPr>
-        <p:spPr>
-          <a:xfrm>
-            <a:off x="5230368" y="3364992"/>
-            <a:ext cx="1554480" cy="475488"/>
-          </a:xfrm>
-          <a:prstGeom prst="rect">
-            <a:avLst/>
-          </a:prstGeom>
-          <a:noFill/>
-          <a:ln/>
-        </p:spPr>
-        <p:txBody>
-          <a:bodyPr wrap="square" lIns="0" tIns="0" rIns="0" bIns="0" rtlCol="0" anchor="ctr"/>
-          <a:lstStyle/>
-          <a:p>
-            <a:pPr algn="ctr" indent="0" marL="0">
-              <a:buNone/>
-            </a:pPr>
-            <a:r>
-              <a:rPr lang="en-US" sz="1400" b="1" dirty="0">
-                <a:solidFill>
-                  <a:srgbClr val="0D9488"/>
-                </a:solidFill>
-                <a:latin typeface="Trebuchet MS" pitchFamily="34" charset="0"/>
-                <a:ea typeface="Trebuchet MS" pitchFamily="34" charset="-122"/>
-                <a:cs typeface="Trebuchet MS" pitchFamily="34" charset="-120"/>
-              </a:rPr>
-              <a:t>a</a:t>
-            </a:r>
-            <a:endParaRPr lang="en-US" sz="1400" dirty="0"/>
-          </a:p>
-        </p:txBody>
-      </p:sp>
-      <p:sp>
-        <p:nvSpPr>
-          <p:cNvPr id="33" name="Text 31"/>
-          <p:cNvSpPr/>
-          <p:nvPr/>
-        </p:nvSpPr>
-        <p:spPr>
-          <a:xfrm>
-            <a:off x="6784848" y="3364992"/>
-            <a:ext cx="73152" cy="475488"/>
-          </a:xfrm>
-          <a:prstGeom prst="rect">
-            <a:avLst/>
-          </a:prstGeom>
-          <a:noFill/>
-          <a:ln/>
-        </p:spPr>
-        <p:txBody>
-          <a:bodyPr wrap="square" lIns="0" tIns="0" rIns="0" bIns="0" rtlCol="0" anchor="ctr"/>
-          <a:lstStyle/>
-          <a:p>
-            <a:pPr algn="ctr" indent="0" marL="0">
-              <a:buNone/>
-            </a:pPr>
-            <a:r>
-              <a:rPr lang="en-US" sz="1600" b="1" dirty="0">
-                <a:solidFill>
-                  <a:srgbClr val="0D9488"/>
-                </a:solidFill>
-                <a:latin typeface="Trebuchet MS" pitchFamily="34" charset="0"/>
-                <a:ea typeface="Trebuchet MS" pitchFamily="34" charset="-122"/>
-                <a:cs typeface="Trebuchet MS" pitchFamily="34" charset="-120"/>
-              </a:rPr>
-              <a:t>·</a:t>
-            </a:r>
-            <a:endParaRPr lang="en-US" sz="1600" dirty="0"/>
-          </a:p>
-        </p:txBody>
-      </p:sp>
-      <p:sp>
-        <p:nvSpPr>
-          <p:cNvPr id="34" name="Shape 32"/>
-          <p:cNvSpPr/>
-          <p:nvPr/>
-        </p:nvSpPr>
-        <p:spPr>
-          <a:xfrm>
-            <a:off x="6858000" y="3364992"/>
-            <a:ext cx="1554480" cy="475488"/>
-          </a:xfrm>
-          <a:prstGeom prst="rect">
-            <a:avLst>
-              <a:gd name="adj" fmla="val 9615"/>
-            </a:avLst>
-          </a:prstGeom>
-          <a:solidFill>
-            <a:srgbClr val="FFFFFF"/>
-          </a:solidFill>
-          <a:ln w="12700">
-            <a:solidFill>
-              <a:srgbClr val="0D9488"/>
-            </a:solidFill>
-            <a:prstDash val="solid"/>
-          </a:ln>
-        </p:spPr>
-      </p:sp>
-      <p:sp>
-        <p:nvSpPr>
-          <p:cNvPr id="35" name="Text 33"/>
-          <p:cNvSpPr/>
-          <p:nvPr/>
-        </p:nvSpPr>
-        <p:spPr>
-          <a:xfrm>
-            <a:off x="6858000" y="3364992"/>
-            <a:ext cx="1554480" cy="475488"/>
-          </a:xfrm>
-          <a:prstGeom prst="rect">
-            <a:avLst/>
-          </a:prstGeom>
-          <a:noFill/>
-          <a:ln/>
-        </p:spPr>
-        <p:txBody>
-          <a:bodyPr wrap="square" lIns="0" tIns="0" rIns="0" bIns="0" rtlCol="0" anchor="ctr"/>
-          <a:lstStyle/>
-          <a:p>
-            <a:pPr algn="ctr" indent="0" marL="0">
-              <a:buNone/>
-            </a:pPr>
-            <a:r>
-              <a:rPr lang="en-US" sz="1400" b="1" dirty="0">
-                <a:solidFill>
-                  <a:srgbClr val="0D9488"/>
-                </a:solidFill>
-                <a:latin typeface="Trebuchet MS" pitchFamily="34" charset="0"/>
-                <a:ea typeface="Trebuchet MS" pitchFamily="34" charset="-122"/>
-                <a:cs typeface="Trebuchet MS" pitchFamily="34" charset="-120"/>
-              </a:rPr>
-              <a:t>ble</a:t>
-            </a:r>
-            <a:endParaRPr lang="en-US" sz="1400" dirty="0"/>
-          </a:p>
-        </p:txBody>
-      </p:sp>
-      <p:sp>
-        <p:nvSpPr>
-          <p:cNvPr id="36" name="Shape 34"/>
-          <p:cNvSpPr/>
-          <p:nvPr/>
-        </p:nvSpPr>
-        <p:spPr>
-          <a:xfrm>
-            <a:off x="365760" y="4096512"/>
-            <a:ext cx="1371600" cy="804672"/>
+              <a:t>Phonemes</a:t>
+            </a:r>
+            <a:endParaRPr lang="en-US" sz="1100" dirty="0"/>
+          </a:p>
+        </p:txBody>
+      </p:sp>
+      <p:sp>
+        <p:nvSpPr>
+          <p:cNvPr id="32" name="Shape 30"/>
+          <p:cNvSpPr/>
+          <p:nvPr/>
+        </p:nvSpPr>
+        <p:spPr>
+          <a:xfrm>
+            <a:off x="1874520" y="4096512"/>
+            <a:ext cx="6903720" cy="804672"/>
           </a:xfrm>
           <a:prstGeom prst="rect">
             <a:avLst>
@@ -9454,85 +9310,19 @@
             </a:avLst>
           </a:prstGeom>
           <a:solidFill>
-            <a:srgbClr val="E2E8F0"/>
+            <a:srgbClr val="F8FAFC"/>
           </a:solidFill>
           <a:ln w="12700">
             <a:solidFill>
               <a:srgbClr val="E2E8F0"/>
             </a:solidFill>
-            <a:prstDash val="solid"/>
-          </a:ln>
-        </p:spPr>
-      </p:sp>
-      <p:sp>
-        <p:nvSpPr>
-          <p:cNvPr id="37" name="Text 35"/>
-          <p:cNvSpPr/>
-          <p:nvPr/>
-        </p:nvSpPr>
-        <p:spPr>
-          <a:xfrm>
-            <a:off x="365760" y="4096512"/>
-            <a:ext cx="1371600" cy="804672"/>
-          </a:xfrm>
-          <a:prstGeom prst="rect">
-            <a:avLst/>
-          </a:prstGeom>
-          <a:noFill/>
-          <a:ln/>
-        </p:spPr>
-        <p:txBody>
-          <a:bodyPr wrap="square" lIns="0" tIns="0" rIns="0" bIns="0" rtlCol="0" anchor="ctr"/>
-          <a:lstStyle/>
-          <a:p>
-            <a:pPr algn="ctr" indent="0" marL="0">
-              <a:buNone/>
-            </a:pPr>
-            <a:r>
-              <a:rPr lang="en-US" sz="1100" b="1" dirty="0">
-                <a:solidFill>
-                  <a:srgbClr val="475569"/>
-                </a:solidFill>
-                <a:latin typeface="Trebuchet MS" pitchFamily="34" charset="0"/>
-                <a:ea typeface="Trebuchet MS" pitchFamily="34" charset="-122"/>
-                <a:cs typeface="Trebuchet MS" pitchFamily="34" charset="-120"/>
-              </a:rPr>
-              <a:t>Phonemes</a:t>
-            </a:r>
-            <a:endParaRPr lang="en-US" sz="1100" dirty="0"/>
-          </a:p>
-        </p:txBody>
-      </p:sp>
-      <p:sp>
-        <p:nvSpPr>
-          <p:cNvPr id="38" name="Shape 36"/>
-          <p:cNvSpPr/>
-          <p:nvPr/>
-        </p:nvSpPr>
-        <p:spPr>
-          <a:xfrm>
-            <a:off x="1874520" y="4096512"/>
-            <a:ext cx="6903720" cy="804672"/>
-          </a:xfrm>
-          <a:prstGeom prst="rect">
-            <a:avLst>
-              <a:gd name="adj" fmla="val 6818"/>
-            </a:avLst>
-          </a:prstGeom>
-          <a:solidFill>
-            <a:srgbClr val="F8FAFC"/>
-          </a:solidFill>
-          <a:ln w="12700">
-            <a:solidFill>
-              <a:srgbClr val="E2E8F0"/>
-            </a:solidFill>
             <a:prstDash val="dash"/>
           </a:ln>
         </p:spPr>
       </p:sp>
       <p:sp>
         <p:nvSpPr>
-          <p:cNvPr id="39" name="Text 37"/>
+          <p:cNvPr id="33" name="Text 31"/>
           <p:cNvSpPr/>
           <p:nvPr/>
         </p:nvSpPr>
@@ -9855,7 +9645,7 @@
                 <a:ea typeface="Calibri" pitchFamily="34" charset="-122"/>
                 <a:cs typeface="Calibri" pitchFamily="34" charset="-120"/>
               </a:rPr>
-              <a:t>Word Labs  •  wordlabs.app  •  Root: 'enjoy' = to take pleasure in</a:t>
+              <a:t>Word Labs  •  wordlabs.app  •  Root: 'enjoy' = like; take pleasure in</a:t>
             </a:r>
             <a:endParaRPr lang="en-US" sz="800" dirty="0"/>
           </a:p>
@@ -9994,7 +9784,7 @@
                 <a:ea typeface="Trebuchet MS" pitchFamily="34" charset="-122"/>
                 <a:cs typeface="Trebuchet MS" pitchFamily="34" charset="-120"/>
               </a:rPr>
-              <a:t>enjoyable</a:t>
+              <a:t>enjoyed</a:t>
             </a:r>
             <a:endParaRPr lang="en-US" sz="2800" dirty="0"/>
           </a:p>
@@ -10172,7 +9962,7 @@
                 <a:ea typeface="Calibri" pitchFamily="34" charset="-122"/>
                 <a:cs typeface="Calibri" pitchFamily="34" charset="-120"/>
               </a:rPr>
-              <a:t>to take pleasure in</a:t>
+              <a:t>like; take pleasure in</a:t>
             </a:r>
             <a:endParaRPr lang="en-US" sz="850" dirty="0"/>
           </a:p>
@@ -10245,7 +10035,7 @@
                 <a:ea typeface="Trebuchet MS" pitchFamily="34" charset="-122"/>
                 <a:cs typeface="Trebuchet MS" pitchFamily="34" charset="-120"/>
               </a:rPr>
-              <a:t>able</a:t>
+              <a:t>ed</a:t>
             </a:r>
             <a:endParaRPr lang="en-US" sz="1300" dirty="0"/>
           </a:p>
@@ -10284,7 +10074,7 @@
                 <a:ea typeface="Calibri" pitchFamily="34" charset="-122"/>
                 <a:cs typeface="Calibri" pitchFamily="34" charset="-120"/>
               </a:rPr>
-              <a:t>able to be; having the quality of</a:t>
+              <a:t>past tense</a:t>
             </a:r>
             <a:endParaRPr lang="en-US" sz="850" dirty="0"/>
           </a:p>
@@ -10391,8 +10181,8 @@
         </p:nvSpPr>
         <p:spPr>
           <a:xfrm>
-            <a:off x="1975104" y="3364992"/>
-            <a:ext cx="1554480" cy="475488"/>
+            <a:off x="2999232" y="3364992"/>
+            <a:ext cx="1645920" cy="475488"/>
           </a:xfrm>
           <a:prstGeom prst="rect">
             <a:avLst>
@@ -10418,8 +10208,8 @@
         </p:nvSpPr>
         <p:spPr>
           <a:xfrm>
-            <a:off x="1975104" y="3364992"/>
-            <a:ext cx="1554480" cy="475488"/>
+            <a:off x="2999232" y="3364992"/>
+            <a:ext cx="1645920" cy="475488"/>
           </a:xfrm>
           <a:prstGeom prst="rect">
             <a:avLst/>
@@ -10457,8 +10247,8 @@
         </p:nvSpPr>
         <p:spPr>
           <a:xfrm>
-            <a:off x="3529584" y="3364992"/>
-            <a:ext cx="73152" cy="475488"/>
+            <a:off x="4645152" y="3364992"/>
+            <a:ext cx="1097280" cy="475488"/>
           </a:xfrm>
           <a:prstGeom prst="rect">
             <a:avLst/>
@@ -10496,8 +10286,8 @@
         </p:nvSpPr>
         <p:spPr>
           <a:xfrm>
-            <a:off x="3602736" y="3364992"/>
-            <a:ext cx="1554480" cy="475488"/>
+            <a:off x="5742432" y="3364992"/>
+            <a:ext cx="1645920" cy="475488"/>
           </a:xfrm>
           <a:prstGeom prst="rect">
             <a:avLst>
@@ -10523,8 +10313,8 @@
         </p:nvSpPr>
         <p:spPr>
           <a:xfrm>
-            <a:off x="3602736" y="3364992"/>
-            <a:ext cx="1554480" cy="475488"/>
+            <a:off x="5742432" y="3364992"/>
+            <a:ext cx="1645920" cy="475488"/>
           </a:xfrm>
           <a:prstGeom prst="rect">
             <a:avLst/>
@@ -10548,7 +10338,7 @@
                 <a:ea typeface="Trebuchet MS" pitchFamily="34" charset="-122"/>
                 <a:cs typeface="Trebuchet MS" pitchFamily="34" charset="-120"/>
               </a:rPr>
-              <a:t>joy</a:t>
+              <a:t>joyed</a:t>
             </a:r>
             <a:endParaRPr lang="en-US" sz="1400" dirty="0"/>
           </a:p>
@@ -10556,14 +10346,41 @@
       </p:sp>
       <p:sp>
         <p:nvSpPr>
-          <p:cNvPr id="30" name="Text 28"/>
-          <p:cNvSpPr/>
-          <p:nvPr/>
-        </p:nvSpPr>
-        <p:spPr>
-          <a:xfrm>
-            <a:off x="5157216" y="3364992"/>
-            <a:ext cx="73152" cy="475488"/>
+          <p:cNvPr id="30" name="Shape 28"/>
+          <p:cNvSpPr/>
+          <p:nvPr/>
+        </p:nvSpPr>
+        <p:spPr>
+          <a:xfrm>
+            <a:off x="365760" y="4096512"/>
+            <a:ext cx="1371600" cy="804672"/>
+          </a:xfrm>
+          <a:prstGeom prst="rect">
+            <a:avLst>
+              <a:gd name="adj" fmla="val 6818"/>
+            </a:avLst>
+          </a:prstGeom>
+          <a:solidFill>
+            <a:srgbClr val="E2E8F0"/>
+          </a:solidFill>
+          <a:ln w="12700">
+            <a:solidFill>
+              <a:srgbClr val="E2E8F0"/>
+            </a:solidFill>
+            <a:prstDash val="solid"/>
+          </a:ln>
+        </p:spPr>
+      </p:sp>
+      <p:sp>
+        <p:nvSpPr>
+          <p:cNvPr id="31" name="Text 29"/>
+          <p:cNvSpPr/>
+          <p:nvPr/>
+        </p:nvSpPr>
+        <p:spPr>
+          <a:xfrm>
+            <a:off x="365760" y="4096512"/>
+            <a:ext cx="1371600" cy="804672"/>
           </a:xfrm>
           <a:prstGeom prst="rect">
             <a:avLst/>
@@ -10579,57 +10396,84 @@
               <a:buNone/>
             </a:pPr>
             <a:r>
-              <a:rPr lang="en-US" sz="1600" b="1" dirty="0">
-                <a:solidFill>
-                  <a:srgbClr val="0D9488"/>
+              <a:rPr lang="en-US" sz="1100" b="1" dirty="0">
+                <a:solidFill>
+                  <a:srgbClr val="475569"/>
                 </a:solidFill>
                 <a:latin typeface="Trebuchet MS" pitchFamily="34" charset="0"/>
                 <a:ea typeface="Trebuchet MS" pitchFamily="34" charset="-122"/>
                 <a:cs typeface="Trebuchet MS" pitchFamily="34" charset="-120"/>
               </a:rPr>
-              <a:t>·</a:t>
-            </a:r>
-            <a:endParaRPr lang="en-US" sz="1600" dirty="0"/>
-          </a:p>
-        </p:txBody>
-      </p:sp>
-      <p:sp>
-        <p:nvSpPr>
-          <p:cNvPr id="31" name="Shape 29"/>
-          <p:cNvSpPr/>
-          <p:nvPr/>
-        </p:nvSpPr>
-        <p:spPr>
-          <a:xfrm>
-            <a:off x="5230368" y="3364992"/>
-            <a:ext cx="1554480" cy="475488"/>
+              <a:t>Phonemes</a:t>
+            </a:r>
+            <a:endParaRPr lang="en-US" sz="1100" dirty="0"/>
+          </a:p>
+        </p:txBody>
+      </p:sp>
+      <p:sp>
+        <p:nvSpPr>
+          <p:cNvPr id="32" name="Shape 30"/>
+          <p:cNvSpPr/>
+          <p:nvPr/>
+        </p:nvSpPr>
+        <p:spPr>
+          <a:xfrm>
+            <a:off x="1874520" y="4096512"/>
+            <a:ext cx="6903720" cy="658368"/>
           </a:xfrm>
           <a:prstGeom prst="rect">
             <a:avLst>
-              <a:gd name="adj" fmla="val 9615"/>
+              <a:gd name="adj" fmla="val 8333"/>
             </a:avLst>
           </a:prstGeom>
           <a:solidFill>
+            <a:srgbClr val="FCE7F3"/>
+          </a:solidFill>
+          <a:ln w="12700">
+            <a:solidFill>
+              <a:srgbClr val="DB2777"/>
+            </a:solidFill>
+            <a:prstDash val="solid"/>
+          </a:ln>
+        </p:spPr>
+      </p:sp>
+      <p:sp>
+        <p:nvSpPr>
+          <p:cNvPr id="33" name="Shape 31"/>
+          <p:cNvSpPr/>
+          <p:nvPr/>
+        </p:nvSpPr>
+        <p:spPr>
+          <a:xfrm>
+            <a:off x="2427732" y="4169664"/>
+            <a:ext cx="685800" cy="475488"/>
+          </a:xfrm>
+          <a:prstGeom prst="rect">
+            <a:avLst>
+              <a:gd name="adj" fmla="val 7692"/>
+            </a:avLst>
+          </a:prstGeom>
+          <a:solidFill>
             <a:srgbClr val="FFFFFF"/>
           </a:solidFill>
           <a:ln w="12700">
             <a:solidFill>
-              <a:srgbClr val="0D9488"/>
-            </a:solidFill>
-            <a:prstDash val="solid"/>
-          </a:ln>
-        </p:spPr>
-      </p:sp>
-      <p:sp>
-        <p:nvSpPr>
-          <p:cNvPr id="32" name="Text 30"/>
-          <p:cNvSpPr/>
-          <p:nvPr/>
-        </p:nvSpPr>
-        <p:spPr>
-          <a:xfrm>
-            <a:off x="5230368" y="3364992"/>
-            <a:ext cx="1554480" cy="475488"/>
+              <a:srgbClr val="DB2777"/>
+            </a:solidFill>
+            <a:prstDash val="solid"/>
+          </a:ln>
+        </p:spPr>
+      </p:sp>
+      <p:sp>
+        <p:nvSpPr>
+          <p:cNvPr id="34" name="Text 32"/>
+          <p:cNvSpPr/>
+          <p:nvPr/>
+        </p:nvSpPr>
+        <p:spPr>
+          <a:xfrm>
+            <a:off x="2427732" y="4169664"/>
+            <a:ext cx="685800" cy="475488"/>
           </a:xfrm>
           <a:prstGeom prst="rect">
             <a:avLst/>
@@ -10645,30 +10489,57 @@
               <a:buNone/>
             </a:pPr>
             <a:r>
-              <a:rPr lang="en-US" sz="1400" b="1" dirty="0">
-                <a:solidFill>
-                  <a:srgbClr val="0D9488"/>
+              <a:rPr lang="en-US" sz="900" b="1" dirty="0">
+                <a:solidFill>
+                  <a:srgbClr val="9D174D"/>
                 </a:solidFill>
                 <a:latin typeface="Trebuchet MS" pitchFamily="34" charset="0"/>
                 <a:ea typeface="Trebuchet MS" pitchFamily="34" charset="-122"/>
                 <a:cs typeface="Trebuchet MS" pitchFamily="34" charset="-120"/>
               </a:rPr>
-              <a:t>a</a:t>
-            </a:r>
-            <a:endParaRPr lang="en-US" sz="1400" dirty="0"/>
-          </a:p>
-        </p:txBody>
-      </p:sp>
-      <p:sp>
-        <p:nvSpPr>
-          <p:cNvPr id="33" name="Text 31"/>
-          <p:cNvSpPr/>
-          <p:nvPr/>
-        </p:nvSpPr>
-        <p:spPr>
-          <a:xfrm>
-            <a:off x="6784848" y="3364992"/>
-            <a:ext cx="73152" cy="475488"/>
+              <a:t>e</a:t>
+            </a:r>
+            <a:endParaRPr lang="en-US" sz="900" dirty="0"/>
+          </a:p>
+        </p:txBody>
+      </p:sp>
+      <p:sp>
+        <p:nvSpPr>
+          <p:cNvPr id="35" name="Shape 33"/>
+          <p:cNvSpPr/>
+          <p:nvPr/>
+        </p:nvSpPr>
+        <p:spPr>
+          <a:xfrm>
+            <a:off x="3639312" y="4169664"/>
+            <a:ext cx="685800" cy="475488"/>
+          </a:xfrm>
+          <a:prstGeom prst="rect">
+            <a:avLst>
+              <a:gd name="adj" fmla="val 7692"/>
+            </a:avLst>
+          </a:prstGeom>
+          <a:solidFill>
+            <a:srgbClr val="FFFFFF"/>
+          </a:solidFill>
+          <a:ln w="12700">
+            <a:solidFill>
+              <a:srgbClr val="DB2777"/>
+            </a:solidFill>
+            <a:prstDash val="solid"/>
+          </a:ln>
+        </p:spPr>
+      </p:sp>
+      <p:sp>
+        <p:nvSpPr>
+          <p:cNvPr id="36" name="Text 34"/>
+          <p:cNvSpPr/>
+          <p:nvPr/>
+        </p:nvSpPr>
+        <p:spPr>
+          <a:xfrm>
+            <a:off x="3639312" y="4169664"/>
+            <a:ext cx="685800" cy="475488"/>
           </a:xfrm>
           <a:prstGeom prst="rect">
             <a:avLst/>
@@ -10684,34 +10555,34 @@
               <a:buNone/>
             </a:pPr>
             <a:r>
-              <a:rPr lang="en-US" sz="1600" b="1" dirty="0">
-                <a:solidFill>
-                  <a:srgbClr val="0D9488"/>
+              <a:rPr lang="en-US" sz="900" b="1" dirty="0">
+                <a:solidFill>
+                  <a:srgbClr val="9D174D"/>
                 </a:solidFill>
                 <a:latin typeface="Trebuchet MS" pitchFamily="34" charset="0"/>
                 <a:ea typeface="Trebuchet MS" pitchFamily="34" charset="-122"/>
                 <a:cs typeface="Trebuchet MS" pitchFamily="34" charset="-120"/>
               </a:rPr>
-              <a:t>·</a:t>
-            </a:r>
-            <a:endParaRPr lang="en-US" sz="1600" dirty="0"/>
-          </a:p>
-        </p:txBody>
-      </p:sp>
-      <p:sp>
-        <p:nvSpPr>
-          <p:cNvPr id="34" name="Shape 32"/>
-          <p:cNvSpPr/>
-          <p:nvPr/>
-        </p:nvSpPr>
-        <p:spPr>
-          <a:xfrm>
-            <a:off x="6858000" y="3364992"/>
-            <a:ext cx="1554480" cy="475488"/>
+              <a:t>n</a:t>
+            </a:r>
+            <a:endParaRPr lang="en-US" sz="900" dirty="0"/>
+          </a:p>
+        </p:txBody>
+      </p:sp>
+      <p:sp>
+        <p:nvSpPr>
+          <p:cNvPr id="37" name="Shape 35"/>
+          <p:cNvSpPr/>
+          <p:nvPr/>
+        </p:nvSpPr>
+        <p:spPr>
+          <a:xfrm>
+            <a:off x="4850892" y="4169664"/>
+            <a:ext cx="685800" cy="475488"/>
           </a:xfrm>
           <a:prstGeom prst="rect">
             <a:avLst>
-              <a:gd name="adj" fmla="val 9615"/>
+              <a:gd name="adj" fmla="val 7692"/>
             </a:avLst>
           </a:prstGeom>
           <a:solidFill>
@@ -10719,22 +10590,22 @@
           </a:solidFill>
           <a:ln w="12700">
             <a:solidFill>
-              <a:srgbClr val="0D9488"/>
-            </a:solidFill>
-            <a:prstDash val="solid"/>
-          </a:ln>
-        </p:spPr>
-      </p:sp>
-      <p:sp>
-        <p:nvSpPr>
-          <p:cNvPr id="35" name="Text 33"/>
-          <p:cNvSpPr/>
-          <p:nvPr/>
-        </p:nvSpPr>
-        <p:spPr>
-          <a:xfrm>
-            <a:off x="6858000" y="3364992"/>
-            <a:ext cx="1554480" cy="475488"/>
+              <a:srgbClr val="DB2777"/>
+            </a:solidFill>
+            <a:prstDash val="solid"/>
+          </a:ln>
+        </p:spPr>
+      </p:sp>
+      <p:sp>
+        <p:nvSpPr>
+          <p:cNvPr id="38" name="Text 36"/>
+          <p:cNvSpPr/>
+          <p:nvPr/>
+        </p:nvSpPr>
+        <p:spPr>
+          <a:xfrm>
+            <a:off x="4850892" y="4169664"/>
+            <a:ext cx="685800" cy="475488"/>
           </a:xfrm>
           <a:prstGeom prst="rect">
             <a:avLst/>
@@ -10750,57 +10621,57 @@
               <a:buNone/>
             </a:pPr>
             <a:r>
-              <a:rPr lang="en-US" sz="1400" b="1" dirty="0">
-                <a:solidFill>
-                  <a:srgbClr val="0D9488"/>
+              <a:rPr lang="en-US" sz="900" b="1" dirty="0">
+                <a:solidFill>
+                  <a:srgbClr val="9D174D"/>
                 </a:solidFill>
                 <a:latin typeface="Trebuchet MS" pitchFamily="34" charset="0"/>
                 <a:ea typeface="Trebuchet MS" pitchFamily="34" charset="-122"/>
                 <a:cs typeface="Trebuchet MS" pitchFamily="34" charset="-120"/>
               </a:rPr>
-              <a:t>ble</a:t>
-            </a:r>
-            <a:endParaRPr lang="en-US" sz="1400" dirty="0"/>
-          </a:p>
-        </p:txBody>
-      </p:sp>
-      <p:sp>
-        <p:nvSpPr>
-          <p:cNvPr id="36" name="Shape 34"/>
-          <p:cNvSpPr/>
-          <p:nvPr/>
-        </p:nvSpPr>
-        <p:spPr>
-          <a:xfrm>
-            <a:off x="365760" y="4096512"/>
-            <a:ext cx="1371600" cy="804672"/>
+              <a:t>j</a:t>
+            </a:r>
+            <a:endParaRPr lang="en-US" sz="900" dirty="0"/>
+          </a:p>
+        </p:txBody>
+      </p:sp>
+      <p:sp>
+        <p:nvSpPr>
+          <p:cNvPr id="39" name="Shape 37"/>
+          <p:cNvSpPr/>
+          <p:nvPr/>
+        </p:nvSpPr>
+        <p:spPr>
+          <a:xfrm>
+            <a:off x="6062472" y="4169664"/>
+            <a:ext cx="685800" cy="475488"/>
           </a:xfrm>
           <a:prstGeom prst="rect">
             <a:avLst>
-              <a:gd name="adj" fmla="val 6818"/>
+              <a:gd name="adj" fmla="val 7692"/>
             </a:avLst>
           </a:prstGeom>
           <a:solidFill>
-            <a:srgbClr val="E2E8F0"/>
-          </a:solidFill>
-          <a:ln w="12700">
-            <a:solidFill>
-              <a:srgbClr val="E2E8F0"/>
-            </a:solidFill>
-            <a:prstDash val="solid"/>
-          </a:ln>
-        </p:spPr>
-      </p:sp>
-      <p:sp>
-        <p:nvSpPr>
-          <p:cNvPr id="37" name="Text 35"/>
-          <p:cNvSpPr/>
-          <p:nvPr/>
-        </p:nvSpPr>
-        <p:spPr>
-          <a:xfrm>
-            <a:off x="365760" y="4096512"/>
-            <a:ext cx="1371600" cy="804672"/>
+            <a:srgbClr val="FFFFFF"/>
+          </a:solidFill>
+          <a:ln w="12700">
+            <a:solidFill>
+              <a:srgbClr val="DB2777"/>
+            </a:solidFill>
+            <a:prstDash val="solid"/>
+          </a:ln>
+        </p:spPr>
+      </p:sp>
+      <p:sp>
+        <p:nvSpPr>
+          <p:cNvPr id="40" name="Text 38"/>
+          <p:cNvSpPr/>
+          <p:nvPr/>
+        </p:nvSpPr>
+        <p:spPr>
+          <a:xfrm>
+            <a:off x="6062472" y="4169664"/>
+            <a:ext cx="685800" cy="475488"/>
           </a:xfrm>
           <a:prstGeom prst="rect">
             <a:avLst/>
@@ -10816,38 +10687,38 @@
               <a:buNone/>
             </a:pPr>
             <a:r>
-              <a:rPr lang="en-US" sz="1100" b="1" dirty="0">
-                <a:solidFill>
-                  <a:srgbClr val="475569"/>
+              <a:rPr lang="en-US" sz="900" b="1" dirty="0">
+                <a:solidFill>
+                  <a:srgbClr val="9D174D"/>
                 </a:solidFill>
                 <a:latin typeface="Trebuchet MS" pitchFamily="34" charset="0"/>
                 <a:ea typeface="Trebuchet MS" pitchFamily="34" charset="-122"/>
                 <a:cs typeface="Trebuchet MS" pitchFamily="34" charset="-120"/>
               </a:rPr>
-              <a:t>Phonemes</a:t>
-            </a:r>
-            <a:endParaRPr lang="en-US" sz="1100" dirty="0"/>
-          </a:p>
-        </p:txBody>
-      </p:sp>
-      <p:sp>
-        <p:nvSpPr>
-          <p:cNvPr id="38" name="Shape 36"/>
-          <p:cNvSpPr/>
-          <p:nvPr/>
-        </p:nvSpPr>
-        <p:spPr>
-          <a:xfrm>
-            <a:off x="1874520" y="4096512"/>
-            <a:ext cx="6903720" cy="804672"/>
+              <a:t>oy</a:t>
+            </a:r>
+            <a:endParaRPr lang="en-US" sz="900" dirty="0"/>
+          </a:p>
+        </p:txBody>
+      </p:sp>
+      <p:sp>
+        <p:nvSpPr>
+          <p:cNvPr id="41" name="Shape 39"/>
+          <p:cNvSpPr/>
+          <p:nvPr/>
+        </p:nvSpPr>
+        <p:spPr>
+          <a:xfrm>
+            <a:off x="7274052" y="4169664"/>
+            <a:ext cx="685800" cy="475488"/>
           </a:xfrm>
           <a:prstGeom prst="rect">
             <a:avLst>
-              <a:gd name="adj" fmla="val 6818"/>
+              <a:gd name="adj" fmla="val 7692"/>
             </a:avLst>
           </a:prstGeom>
           <a:solidFill>
-            <a:srgbClr val="FCE7F3"/>
+            <a:srgbClr val="FFFFFF"/>
           </a:solidFill>
           <a:ln w="12700">
             <a:solidFill>
@@ -10859,41 +10730,14 @@
       </p:sp>
       <p:sp>
         <p:nvSpPr>
-          <p:cNvPr id="39" name="Shape 37"/>
-          <p:cNvSpPr/>
-          <p:nvPr/>
-        </p:nvSpPr>
-        <p:spPr>
-          <a:xfrm>
-            <a:off x="2124837" y="4169664"/>
-            <a:ext cx="685800" cy="384048"/>
-          </a:xfrm>
-          <a:prstGeom prst="rect">
-            <a:avLst>
-              <a:gd name="adj" fmla="val 9524"/>
-            </a:avLst>
-          </a:prstGeom>
-          <a:solidFill>
-            <a:srgbClr val="FFFFFF"/>
-          </a:solidFill>
-          <a:ln w="12700">
-            <a:solidFill>
-              <a:srgbClr val="DB2777"/>
-            </a:solidFill>
-            <a:prstDash val="solid"/>
-          </a:ln>
-        </p:spPr>
-      </p:sp>
-      <p:sp>
-        <p:nvSpPr>
-          <p:cNvPr id="40" name="Text 38"/>
-          <p:cNvSpPr/>
-          <p:nvPr/>
-        </p:nvSpPr>
-        <p:spPr>
-          <a:xfrm>
-            <a:off x="2124837" y="4169664"/>
-            <a:ext cx="685800" cy="384048"/>
+          <p:cNvPr id="42" name="Text 40"/>
+          <p:cNvSpPr/>
+          <p:nvPr/>
+        </p:nvSpPr>
+        <p:spPr>
+          <a:xfrm>
+            <a:off x="7274052" y="4169664"/>
+            <a:ext cx="685800" cy="475488"/>
           </a:xfrm>
           <a:prstGeom prst="rect">
             <a:avLst/>
@@ -10917,442 +10761,7 @@
                 <a:ea typeface="Trebuchet MS" pitchFamily="34" charset="-122"/>
                 <a:cs typeface="Trebuchet MS" pitchFamily="34" charset="-120"/>
               </a:rPr>
-              <a:t>e</a:t>
-            </a:r>
-            <a:endParaRPr lang="en-US" sz="900" dirty="0"/>
-          </a:p>
-        </p:txBody>
-      </p:sp>
-      <p:sp>
-        <p:nvSpPr>
-          <p:cNvPr id="41" name="Shape 39"/>
-          <p:cNvSpPr/>
-          <p:nvPr/>
-        </p:nvSpPr>
-        <p:spPr>
-          <a:xfrm>
-            <a:off x="3033522" y="4169664"/>
-            <a:ext cx="685800" cy="384048"/>
-          </a:xfrm>
-          <a:prstGeom prst="rect">
-            <a:avLst>
-              <a:gd name="adj" fmla="val 9524"/>
-            </a:avLst>
-          </a:prstGeom>
-          <a:solidFill>
-            <a:srgbClr val="FFFFFF"/>
-          </a:solidFill>
-          <a:ln w="12700">
-            <a:solidFill>
-              <a:srgbClr val="DB2777"/>
-            </a:solidFill>
-            <a:prstDash val="solid"/>
-          </a:ln>
-        </p:spPr>
-      </p:sp>
-      <p:sp>
-        <p:nvSpPr>
-          <p:cNvPr id="42" name="Text 40"/>
-          <p:cNvSpPr/>
-          <p:nvPr/>
-        </p:nvSpPr>
-        <p:spPr>
-          <a:xfrm>
-            <a:off x="3033522" y="4169664"/>
-            <a:ext cx="685800" cy="384048"/>
-          </a:xfrm>
-          <a:prstGeom prst="rect">
-            <a:avLst/>
-          </a:prstGeom>
-          <a:noFill/>
-          <a:ln/>
-        </p:spPr>
-        <p:txBody>
-          <a:bodyPr wrap="square" lIns="0" tIns="0" rIns="0" bIns="0" rtlCol="0" anchor="ctr"/>
-          <a:lstStyle/>
-          <a:p>
-            <a:pPr algn="ctr" indent="0" marL="0">
-              <a:buNone/>
-            </a:pPr>
-            <a:r>
-              <a:rPr lang="en-US" sz="900" b="1" dirty="0">
-                <a:solidFill>
-                  <a:srgbClr val="9D174D"/>
-                </a:solidFill>
-                <a:latin typeface="Trebuchet MS" pitchFamily="34" charset="0"/>
-                <a:ea typeface="Trebuchet MS" pitchFamily="34" charset="-122"/>
-                <a:cs typeface="Trebuchet MS" pitchFamily="34" charset="-120"/>
-              </a:rPr>
-              <a:t>n</a:t>
-            </a:r>
-            <a:endParaRPr lang="en-US" sz="900" dirty="0"/>
-          </a:p>
-        </p:txBody>
-      </p:sp>
-      <p:sp>
-        <p:nvSpPr>
-          <p:cNvPr id="43" name="Shape 41"/>
-          <p:cNvSpPr/>
-          <p:nvPr/>
-        </p:nvSpPr>
-        <p:spPr>
-          <a:xfrm>
-            <a:off x="3942207" y="4169664"/>
-            <a:ext cx="685800" cy="384048"/>
-          </a:xfrm>
-          <a:prstGeom prst="rect">
-            <a:avLst>
-              <a:gd name="adj" fmla="val 9524"/>
-            </a:avLst>
-          </a:prstGeom>
-          <a:solidFill>
-            <a:srgbClr val="FFFFFF"/>
-          </a:solidFill>
-          <a:ln w="12700">
-            <a:solidFill>
-              <a:srgbClr val="DB2777"/>
-            </a:solidFill>
-            <a:prstDash val="solid"/>
-          </a:ln>
-        </p:spPr>
-      </p:sp>
-      <p:sp>
-        <p:nvSpPr>
-          <p:cNvPr id="44" name="Text 42"/>
-          <p:cNvSpPr/>
-          <p:nvPr/>
-        </p:nvSpPr>
-        <p:spPr>
-          <a:xfrm>
-            <a:off x="3942207" y="4169664"/>
-            <a:ext cx="685800" cy="384048"/>
-          </a:xfrm>
-          <a:prstGeom prst="rect">
-            <a:avLst/>
-          </a:prstGeom>
-          <a:noFill/>
-          <a:ln/>
-        </p:spPr>
-        <p:txBody>
-          <a:bodyPr wrap="square" lIns="0" tIns="0" rIns="0" bIns="0" rtlCol="0" anchor="ctr"/>
-          <a:lstStyle/>
-          <a:p>
-            <a:pPr algn="ctr" indent="0" marL="0">
-              <a:buNone/>
-            </a:pPr>
-            <a:r>
-              <a:rPr lang="en-US" sz="900" b="1" dirty="0">
-                <a:solidFill>
-                  <a:srgbClr val="9D174D"/>
-                </a:solidFill>
-                <a:latin typeface="Trebuchet MS" pitchFamily="34" charset="0"/>
-                <a:ea typeface="Trebuchet MS" pitchFamily="34" charset="-122"/>
-                <a:cs typeface="Trebuchet MS" pitchFamily="34" charset="-120"/>
-              </a:rPr>
-              <a:t>j</a:t>
-            </a:r>
-            <a:endParaRPr lang="en-US" sz="900" dirty="0"/>
-          </a:p>
-        </p:txBody>
-      </p:sp>
-      <p:sp>
-        <p:nvSpPr>
-          <p:cNvPr id="45" name="Text 43"/>
-          <p:cNvSpPr/>
-          <p:nvPr/>
-        </p:nvSpPr>
-        <p:spPr>
-          <a:xfrm>
-            <a:off x="3942207" y="4572000"/>
-            <a:ext cx="685800" cy="219456"/>
-          </a:xfrm>
-          <a:prstGeom prst="rect">
-            <a:avLst/>
-          </a:prstGeom>
-          <a:noFill/>
-          <a:ln/>
-        </p:spPr>
-        <p:txBody>
-          <a:bodyPr wrap="square" lIns="0" tIns="0" rIns="0" bIns="0" rtlCol="0" anchor="t"/>
-          <a:lstStyle/>
-          <a:p>
-            <a:pPr algn="ctr" indent="0" marL="0">
-              <a:buNone/>
-            </a:pPr>
-            <a:r>
-              <a:rPr lang="en-US" sz="750" i="1" dirty="0">
-                <a:solidFill>
-                  <a:srgbClr val="94A3B8"/>
-                </a:solidFill>
-                <a:latin typeface="Calibri" pitchFamily="34" charset="0"/>
-                <a:ea typeface="Calibri" pitchFamily="34" charset="-122"/>
-                <a:cs typeface="Calibri" pitchFamily="34" charset="-120"/>
-              </a:rPr>
-              <a:t>/j/</a:t>
-            </a:r>
-            <a:endParaRPr lang="en-US" sz="750" dirty="0"/>
-          </a:p>
-        </p:txBody>
-      </p:sp>
-      <p:sp>
-        <p:nvSpPr>
-          <p:cNvPr id="46" name="Shape 44"/>
-          <p:cNvSpPr/>
-          <p:nvPr/>
-        </p:nvSpPr>
-        <p:spPr>
-          <a:xfrm>
-            <a:off x="4850892" y="4169664"/>
-            <a:ext cx="685800" cy="384048"/>
-          </a:xfrm>
-          <a:prstGeom prst="rect">
-            <a:avLst>
-              <a:gd name="adj" fmla="val 9524"/>
-            </a:avLst>
-          </a:prstGeom>
-          <a:solidFill>
-            <a:srgbClr val="FFFFFF"/>
-          </a:solidFill>
-          <a:ln w="12700">
-            <a:solidFill>
-              <a:srgbClr val="DB2777"/>
-            </a:solidFill>
-            <a:prstDash val="solid"/>
-          </a:ln>
-        </p:spPr>
-      </p:sp>
-      <p:sp>
-        <p:nvSpPr>
-          <p:cNvPr id="47" name="Text 45"/>
-          <p:cNvSpPr/>
-          <p:nvPr/>
-        </p:nvSpPr>
-        <p:spPr>
-          <a:xfrm>
-            <a:off x="4850892" y="4169664"/>
-            <a:ext cx="685800" cy="384048"/>
-          </a:xfrm>
-          <a:prstGeom prst="rect">
-            <a:avLst/>
-          </a:prstGeom>
-          <a:noFill/>
-          <a:ln/>
-        </p:spPr>
-        <p:txBody>
-          <a:bodyPr wrap="square" lIns="0" tIns="0" rIns="0" bIns="0" rtlCol="0" anchor="ctr"/>
-          <a:lstStyle/>
-          <a:p>
-            <a:pPr algn="ctr" indent="0" marL="0">
-              <a:buNone/>
-            </a:pPr>
-            <a:r>
-              <a:rPr lang="en-US" sz="900" b="1" dirty="0">
-                <a:solidFill>
-                  <a:srgbClr val="9D174D"/>
-                </a:solidFill>
-                <a:latin typeface="Trebuchet MS" pitchFamily="34" charset="0"/>
-                <a:ea typeface="Trebuchet MS" pitchFamily="34" charset="-122"/>
-                <a:cs typeface="Trebuchet MS" pitchFamily="34" charset="-120"/>
-              </a:rPr>
-              <a:t>oy</a:t>
-            </a:r>
-            <a:endParaRPr lang="en-US" sz="900" dirty="0"/>
-          </a:p>
-        </p:txBody>
-      </p:sp>
-      <p:sp>
-        <p:nvSpPr>
-          <p:cNvPr id="48" name="Shape 46"/>
-          <p:cNvSpPr/>
-          <p:nvPr/>
-        </p:nvSpPr>
-        <p:spPr>
-          <a:xfrm>
-            <a:off x="5759577" y="4169664"/>
-            <a:ext cx="685800" cy="384048"/>
-          </a:xfrm>
-          <a:prstGeom prst="rect">
-            <a:avLst>
-              <a:gd name="adj" fmla="val 9524"/>
-            </a:avLst>
-          </a:prstGeom>
-          <a:solidFill>
-            <a:srgbClr val="FFFFFF"/>
-          </a:solidFill>
-          <a:ln w="12700">
-            <a:solidFill>
-              <a:srgbClr val="DB2777"/>
-            </a:solidFill>
-            <a:prstDash val="solid"/>
-          </a:ln>
-        </p:spPr>
-      </p:sp>
-      <p:sp>
-        <p:nvSpPr>
-          <p:cNvPr id="49" name="Text 47"/>
-          <p:cNvSpPr/>
-          <p:nvPr/>
-        </p:nvSpPr>
-        <p:spPr>
-          <a:xfrm>
-            <a:off x="5759577" y="4169664"/>
-            <a:ext cx="685800" cy="384048"/>
-          </a:xfrm>
-          <a:prstGeom prst="rect">
-            <a:avLst/>
-          </a:prstGeom>
-          <a:noFill/>
-          <a:ln/>
-        </p:spPr>
-        <p:txBody>
-          <a:bodyPr wrap="square" lIns="0" tIns="0" rIns="0" bIns="0" rtlCol="0" anchor="ctr"/>
-          <a:lstStyle/>
-          <a:p>
-            <a:pPr algn="ctr" indent="0" marL="0">
-              <a:buNone/>
-            </a:pPr>
-            <a:r>
-              <a:rPr lang="en-US" sz="900" b="1" dirty="0">
-                <a:solidFill>
-                  <a:srgbClr val="9D174D"/>
-                </a:solidFill>
-                <a:latin typeface="Trebuchet MS" pitchFamily="34" charset="0"/>
-                <a:ea typeface="Trebuchet MS" pitchFamily="34" charset="-122"/>
-                <a:cs typeface="Trebuchet MS" pitchFamily="34" charset="-120"/>
-              </a:rPr>
-              <a:t>a</a:t>
-            </a:r>
-            <a:endParaRPr lang="en-US" sz="900" dirty="0"/>
-          </a:p>
-        </p:txBody>
-      </p:sp>
-      <p:sp>
-        <p:nvSpPr>
-          <p:cNvPr id="50" name="Shape 48"/>
-          <p:cNvSpPr/>
-          <p:nvPr/>
-        </p:nvSpPr>
-        <p:spPr>
-          <a:xfrm>
-            <a:off x="6668262" y="4169664"/>
-            <a:ext cx="685800" cy="384048"/>
-          </a:xfrm>
-          <a:prstGeom prst="rect">
-            <a:avLst>
-              <a:gd name="adj" fmla="val 9524"/>
-            </a:avLst>
-          </a:prstGeom>
-          <a:solidFill>
-            <a:srgbClr val="FFFFFF"/>
-          </a:solidFill>
-          <a:ln w="12700">
-            <a:solidFill>
-              <a:srgbClr val="DB2777"/>
-            </a:solidFill>
-            <a:prstDash val="solid"/>
-          </a:ln>
-        </p:spPr>
-      </p:sp>
-      <p:sp>
-        <p:nvSpPr>
-          <p:cNvPr id="51" name="Text 49"/>
-          <p:cNvSpPr/>
-          <p:nvPr/>
-        </p:nvSpPr>
-        <p:spPr>
-          <a:xfrm>
-            <a:off x="6668262" y="4169664"/>
-            <a:ext cx="685800" cy="384048"/>
-          </a:xfrm>
-          <a:prstGeom prst="rect">
-            <a:avLst/>
-          </a:prstGeom>
-          <a:noFill/>
-          <a:ln/>
-        </p:spPr>
-        <p:txBody>
-          <a:bodyPr wrap="square" lIns="0" tIns="0" rIns="0" bIns="0" rtlCol="0" anchor="ctr"/>
-          <a:lstStyle/>
-          <a:p>
-            <a:pPr algn="ctr" indent="0" marL="0">
-              <a:buNone/>
-            </a:pPr>
-            <a:r>
-              <a:rPr lang="en-US" sz="900" b="1" dirty="0">
-                <a:solidFill>
-                  <a:srgbClr val="9D174D"/>
-                </a:solidFill>
-                <a:latin typeface="Trebuchet MS" pitchFamily="34" charset="0"/>
-                <a:ea typeface="Trebuchet MS" pitchFamily="34" charset="-122"/>
-                <a:cs typeface="Trebuchet MS" pitchFamily="34" charset="-120"/>
-              </a:rPr>
-              <a:t>b</a:t>
-            </a:r>
-            <a:endParaRPr lang="en-US" sz="900" dirty="0"/>
-          </a:p>
-        </p:txBody>
-      </p:sp>
-      <p:sp>
-        <p:nvSpPr>
-          <p:cNvPr id="52" name="Shape 50"/>
-          <p:cNvSpPr/>
-          <p:nvPr/>
-        </p:nvSpPr>
-        <p:spPr>
-          <a:xfrm>
-            <a:off x="7576947" y="4169664"/>
-            <a:ext cx="685800" cy="384048"/>
-          </a:xfrm>
-          <a:prstGeom prst="rect">
-            <a:avLst>
-              <a:gd name="adj" fmla="val 9524"/>
-            </a:avLst>
-          </a:prstGeom>
-          <a:solidFill>
-            <a:srgbClr val="FFFFFF"/>
-          </a:solidFill>
-          <a:ln w="12700">
-            <a:solidFill>
-              <a:srgbClr val="DB2777"/>
-            </a:solidFill>
-            <a:prstDash val="solid"/>
-          </a:ln>
-        </p:spPr>
-      </p:sp>
-      <p:sp>
-        <p:nvSpPr>
-          <p:cNvPr id="53" name="Text 51"/>
-          <p:cNvSpPr/>
-          <p:nvPr/>
-        </p:nvSpPr>
-        <p:spPr>
-          <a:xfrm>
-            <a:off x="7576947" y="4169664"/>
-            <a:ext cx="685800" cy="384048"/>
-          </a:xfrm>
-          <a:prstGeom prst="rect">
-            <a:avLst/>
-          </a:prstGeom>
-          <a:noFill/>
-          <a:ln/>
-        </p:spPr>
-        <p:txBody>
-          <a:bodyPr wrap="square" lIns="0" tIns="0" rIns="0" bIns="0" rtlCol="0" anchor="ctr"/>
-          <a:lstStyle/>
-          <a:p>
-            <a:pPr algn="ctr" indent="0" marL="0">
-              <a:buNone/>
-            </a:pPr>
-            <a:r>
-              <a:rPr lang="en-US" sz="900" b="1" dirty="0">
-                <a:solidFill>
-                  <a:srgbClr val="9D174D"/>
-                </a:solidFill>
-                <a:latin typeface="Trebuchet MS" pitchFamily="34" charset="0"/>
-                <a:ea typeface="Trebuchet MS" pitchFamily="34" charset="-122"/>
-                <a:cs typeface="Trebuchet MS" pitchFamily="34" charset="-120"/>
-              </a:rPr>
-              <a:t>le</a:t>
+              <a:t>ed</a:t>
             </a:r>
             <a:endParaRPr lang="en-US" sz="900" dirty="0"/>
           </a:p>
@@ -11644,7 +11053,7 @@
                 <a:ea typeface="Calibri" pitchFamily="34" charset="-122"/>
                 <a:cs typeface="Calibri" pitchFamily="34" charset="-120"/>
               </a:rPr>
-              <a:t>Word Labs  •  wordlabs.app  •  Root: 'enjoy' = to take pleasure in</a:t>
+              <a:t>Word Labs  •  wordlabs.app  •  Root: 'enjoy' = like; take pleasure in</a:t>
             </a:r>
             <a:endParaRPr lang="en-US" sz="800" dirty="0"/>
           </a:p>
@@ -11783,7 +11192,7 @@
                 <a:ea typeface="Trebuchet MS" pitchFamily="34" charset="-122"/>
                 <a:cs typeface="Trebuchet MS" pitchFamily="34" charset="-120"/>
               </a:rPr>
-              <a:t>enjoyment</a:t>
+              <a:t>enjoyer</a:t>
             </a:r>
             <a:endParaRPr lang="en-US" sz="2800" dirty="0"/>
           </a:p>
@@ -12471,7 +11880,7 @@
                 <a:ea typeface="Calibri" pitchFamily="34" charset="-122"/>
                 <a:cs typeface="Calibri" pitchFamily="34" charset="-120"/>
               </a:rPr>
-              <a:t>Word Labs  •  wordlabs.app  •  Root: 'enjoy' = to take pleasure in</a:t>
+              <a:t>Word Labs  •  wordlabs.app  •  Root: 'enjoy' = like; take pleasure in</a:t>
             </a:r>
             <a:endParaRPr lang="en-US" sz="800" dirty="0"/>
           </a:p>
@@ -12610,7 +12019,7 @@
                 <a:ea typeface="Trebuchet MS" pitchFamily="34" charset="-122"/>
                 <a:cs typeface="Trebuchet MS" pitchFamily="34" charset="-120"/>
               </a:rPr>
-              <a:t>enjoyment</a:t>
+              <a:t>enjoyer</a:t>
             </a:r>
             <a:endParaRPr lang="en-US" sz="2800" dirty="0"/>
           </a:p>
@@ -12788,7 +12197,7 @@
                 <a:ea typeface="Calibri" pitchFamily="34" charset="-122"/>
                 <a:cs typeface="Calibri" pitchFamily="34" charset="-120"/>
               </a:rPr>
-              <a:t>to take pleasure in</a:t>
+              <a:t>like; take pleasure in</a:t>
             </a:r>
             <a:endParaRPr lang="en-US" sz="850" dirty="0"/>
           </a:p>
@@ -12861,7 +12270,7 @@
                 <a:ea typeface="Trebuchet MS" pitchFamily="34" charset="-122"/>
                 <a:cs typeface="Trebuchet MS" pitchFamily="34" charset="-120"/>
               </a:rPr>
-              <a:t>ment</a:t>
+              <a:t>er</a:t>
             </a:r>
             <a:endParaRPr lang="en-US" sz="1300" dirty="0"/>
           </a:p>
@@ -12900,7 +12309,7 @@
                 <a:ea typeface="Calibri" pitchFamily="34" charset="-122"/>
                 <a:cs typeface="Calibri" pitchFamily="34" charset="-120"/>
               </a:rPr>
-              <a:t>state or result of an action</a:t>
+              <a:t>person who; more</a:t>
             </a:r>
             <a:endParaRPr lang="en-US" sz="850" dirty="0"/>
           </a:p>
@@ -13456,7 +12865,7 @@
                 <a:ea typeface="Calibri" pitchFamily="34" charset="-122"/>
                 <a:cs typeface="Calibri" pitchFamily="34" charset="-120"/>
               </a:rPr>
-              <a:t>Word Labs  •  wordlabs.app  •  Root: 'enjoy' = to take pleasure in</a:t>
+              <a:t>Word Labs  •  wordlabs.app  •  Root: 'enjoy' = like; take pleasure in</a:t>
             </a:r>
             <a:endParaRPr lang="en-US" sz="800" dirty="0"/>
           </a:p>
@@ -13595,7 +13004,7 @@
                 <a:ea typeface="Trebuchet MS" pitchFamily="34" charset="-122"/>
                 <a:cs typeface="Trebuchet MS" pitchFamily="34" charset="-120"/>
               </a:rPr>
-              <a:t>enjoyment</a:t>
+              <a:t>enjoyer</a:t>
             </a:r>
             <a:endParaRPr lang="en-US" sz="2800" dirty="0"/>
           </a:p>
@@ -13773,7 +13182,7 @@
                 <a:ea typeface="Calibri" pitchFamily="34" charset="-122"/>
                 <a:cs typeface="Calibri" pitchFamily="34" charset="-120"/>
               </a:rPr>
-              <a:t>to take pleasure in</a:t>
+              <a:t>like; take pleasure in</a:t>
             </a:r>
             <a:endParaRPr lang="en-US" sz="850" dirty="0"/>
           </a:p>
@@ -13846,7 +13255,7 @@
                 <a:ea typeface="Trebuchet MS" pitchFamily="34" charset="-122"/>
                 <a:cs typeface="Trebuchet MS" pitchFamily="34" charset="-120"/>
               </a:rPr>
-              <a:t>ment</a:t>
+              <a:t>er</a:t>
             </a:r>
             <a:endParaRPr lang="en-US" sz="1300" dirty="0"/>
           </a:p>
@@ -13885,7 +13294,7 @@
                 <a:ea typeface="Calibri" pitchFamily="34" charset="-122"/>
                 <a:cs typeface="Calibri" pitchFamily="34" charset="-120"/>
               </a:rPr>
-              <a:t>state or result of an action</a:t>
+              <a:t>person who; more</a:t>
             </a:r>
             <a:endParaRPr lang="en-US" sz="850" dirty="0"/>
           </a:p>
@@ -14254,7 +13663,7 @@
                 <a:ea typeface="Trebuchet MS" pitchFamily="34" charset="-122"/>
                 <a:cs typeface="Trebuchet MS" pitchFamily="34" charset="-120"/>
               </a:rPr>
-              <a:t>ment</a:t>
+              <a:t>er</a:t>
             </a:r>
             <a:endParaRPr lang="en-US" sz="1400" dirty="0"/>
           </a:p>
@@ -14587,7 +13996,7 @@
                 <a:ea typeface="Calibri" pitchFamily="34" charset="-122"/>
                 <a:cs typeface="Calibri" pitchFamily="34" charset="-120"/>
               </a:rPr>
-              <a:t>Root 'enjoy' — to take pleasure in</a:t>
+              <a:t>Root 'enjoy' — like; take pleasure in</a:t>
             </a:r>
             <a:endParaRPr lang="en-US" sz="1600" dirty="0"/>
           </a:p>
@@ -14943,7 +14352,7 @@
                 <a:ea typeface="Calibri" pitchFamily="34" charset="-122"/>
                 <a:cs typeface="Calibri" pitchFamily="34" charset="-120"/>
               </a:rPr>
-              <a:t>Word Labs  •  wordlabs.app  •  Root: 'enjoy' = to take pleasure in</a:t>
+              <a:t>Word Labs  •  wordlabs.app  •  Root: 'enjoy' = like; take pleasure in</a:t>
             </a:r>
             <a:endParaRPr lang="en-US" sz="800" dirty="0"/>
           </a:p>
@@ -15082,7 +14491,7 @@
                 <a:ea typeface="Trebuchet MS" pitchFamily="34" charset="-122"/>
                 <a:cs typeface="Trebuchet MS" pitchFamily="34" charset="-120"/>
               </a:rPr>
-              <a:t>enjoyment</a:t>
+              <a:t>enjoyer</a:t>
             </a:r>
             <a:endParaRPr lang="en-US" sz="2800" dirty="0"/>
           </a:p>
@@ -15260,7 +14669,7 @@
                 <a:ea typeface="Calibri" pitchFamily="34" charset="-122"/>
                 <a:cs typeface="Calibri" pitchFamily="34" charset="-120"/>
               </a:rPr>
-              <a:t>to take pleasure in</a:t>
+              <a:t>like; take pleasure in</a:t>
             </a:r>
             <a:endParaRPr lang="en-US" sz="850" dirty="0"/>
           </a:p>
@@ -15333,7 +14742,7 @@
                 <a:ea typeface="Trebuchet MS" pitchFamily="34" charset="-122"/>
                 <a:cs typeface="Trebuchet MS" pitchFamily="34" charset="-120"/>
               </a:rPr>
-              <a:t>ment</a:t>
+              <a:t>er</a:t>
             </a:r>
             <a:endParaRPr lang="en-US" sz="1300" dirty="0"/>
           </a:p>
@@ -15372,7 +14781,7 @@
                 <a:ea typeface="Calibri" pitchFamily="34" charset="-122"/>
                 <a:cs typeface="Calibri" pitchFamily="34" charset="-120"/>
               </a:rPr>
-              <a:t>state or result of an action</a:t>
+              <a:t>person who; more</a:t>
             </a:r>
             <a:endParaRPr lang="en-US" sz="850" dirty="0"/>
           </a:p>
@@ -15741,7 +15150,7 @@
                 <a:ea typeface="Trebuchet MS" pitchFamily="34" charset="-122"/>
                 <a:cs typeface="Trebuchet MS" pitchFamily="34" charset="-120"/>
               </a:rPr>
-              <a:t>ment</a:t>
+              <a:t>er</a:t>
             </a:r>
             <a:endParaRPr lang="en-US" sz="1400" dirty="0"/>
           </a:p>
@@ -15822,11 +15231,11 @@
         <p:spPr>
           <a:xfrm>
             <a:off x="1874520" y="4096512"/>
-            <a:ext cx="6903720" cy="804672"/>
+            <a:ext cx="6903720" cy="658368"/>
           </a:xfrm>
           <a:prstGeom prst="rect">
             <a:avLst>
-              <a:gd name="adj" fmla="val 6818"/>
+              <a:gd name="adj" fmla="val 8333"/>
             </a:avLst>
           </a:prstGeom>
           <a:solidFill>
@@ -15848,12 +15257,12 @@
         </p:nvSpPr>
         <p:spPr>
           <a:xfrm>
-            <a:off x="2023872" y="4169664"/>
-            <a:ext cx="685800" cy="384048"/>
+            <a:off x="2427732" y="4169664"/>
+            <a:ext cx="685800" cy="475488"/>
           </a:xfrm>
           <a:prstGeom prst="rect">
             <a:avLst>
-              <a:gd name="adj" fmla="val 9524"/>
+              <a:gd name="adj" fmla="val 7692"/>
             </a:avLst>
           </a:prstGeom>
           <a:solidFill>
@@ -15875,8 +15284,8 @@
         </p:nvSpPr>
         <p:spPr>
           <a:xfrm>
-            <a:off x="2023872" y="4169664"/>
-            <a:ext cx="685800" cy="384048"/>
+            <a:off x="2427732" y="4169664"/>
+            <a:ext cx="685800" cy="475488"/>
           </a:xfrm>
           <a:prstGeom prst="rect">
             <a:avLst/>
@@ -15914,12 +15323,12 @@
         </p:nvSpPr>
         <p:spPr>
           <a:xfrm>
-            <a:off x="2831592" y="4169664"/>
-            <a:ext cx="685800" cy="384048"/>
+            <a:off x="3639312" y="4169664"/>
+            <a:ext cx="685800" cy="475488"/>
           </a:xfrm>
           <a:prstGeom prst="rect">
             <a:avLst>
-              <a:gd name="adj" fmla="val 9524"/>
+              <a:gd name="adj" fmla="val 7692"/>
             </a:avLst>
           </a:prstGeom>
           <a:solidFill>
@@ -15941,8 +15350,8 @@
         </p:nvSpPr>
         <p:spPr>
           <a:xfrm>
-            <a:off x="2831592" y="4169664"/>
-            <a:ext cx="685800" cy="384048"/>
+            <a:off x="3639312" y="4169664"/>
+            <a:ext cx="685800" cy="475488"/>
           </a:xfrm>
           <a:prstGeom prst="rect">
             <a:avLst/>
@@ -15980,12 +15389,12 @@
         </p:nvSpPr>
         <p:spPr>
           <a:xfrm>
-            <a:off x="3639312" y="4169664"/>
-            <a:ext cx="685800" cy="384048"/>
+            <a:off x="4850892" y="4169664"/>
+            <a:ext cx="685800" cy="475488"/>
           </a:xfrm>
           <a:prstGeom prst="rect">
             <a:avLst>
-              <a:gd name="adj" fmla="val 9524"/>
+              <a:gd name="adj" fmla="val 7692"/>
             </a:avLst>
           </a:prstGeom>
           <a:solidFill>
@@ -16007,8 +15416,8 @@
         </p:nvSpPr>
         <p:spPr>
           <a:xfrm>
-            <a:off x="3639312" y="4169664"/>
-            <a:ext cx="685800" cy="384048"/>
+            <a:off x="4850892" y="4169664"/>
+            <a:ext cx="685800" cy="475488"/>
           </a:xfrm>
           <a:prstGeom prst="rect">
             <a:avLst/>
@@ -16040,57 +15449,18 @@
       </p:sp>
       <p:sp>
         <p:nvSpPr>
-          <p:cNvPr id="42" name="Text 40"/>
-          <p:cNvSpPr/>
-          <p:nvPr/>
-        </p:nvSpPr>
-        <p:spPr>
-          <a:xfrm>
-            <a:off x="3639312" y="4572000"/>
-            <a:ext cx="685800" cy="219456"/>
-          </a:xfrm>
-          <a:prstGeom prst="rect">
-            <a:avLst/>
-          </a:prstGeom>
-          <a:noFill/>
-          <a:ln/>
-        </p:spPr>
-        <p:txBody>
-          <a:bodyPr wrap="square" lIns="0" tIns="0" rIns="0" bIns="0" rtlCol="0" anchor="t"/>
-          <a:lstStyle/>
-          <a:p>
-            <a:pPr algn="ctr" indent="0" marL="0">
-              <a:buNone/>
-            </a:pPr>
-            <a:r>
-              <a:rPr lang="en-US" sz="750" i="1" dirty="0">
-                <a:solidFill>
-                  <a:srgbClr val="94A3B8"/>
-                </a:solidFill>
-                <a:latin typeface="Calibri" pitchFamily="34" charset="0"/>
-                <a:ea typeface="Calibri" pitchFamily="34" charset="-122"/>
-                <a:cs typeface="Calibri" pitchFamily="34" charset="-120"/>
-              </a:rPr>
-              <a:t>/j/</a:t>
-            </a:r>
-            <a:endParaRPr lang="en-US" sz="750" dirty="0"/>
-          </a:p>
-        </p:txBody>
-      </p:sp>
-      <p:sp>
-        <p:nvSpPr>
-          <p:cNvPr id="43" name="Shape 41"/>
-          <p:cNvSpPr/>
-          <p:nvPr/>
-        </p:nvSpPr>
-        <p:spPr>
-          <a:xfrm>
-            <a:off x="4447032" y="4169664"/>
-            <a:ext cx="685800" cy="384048"/>
+          <p:cNvPr id="42" name="Shape 40"/>
+          <p:cNvSpPr/>
+          <p:nvPr/>
+        </p:nvSpPr>
+        <p:spPr>
+          <a:xfrm>
+            <a:off x="6062472" y="4169664"/>
+            <a:ext cx="685800" cy="475488"/>
           </a:xfrm>
           <a:prstGeom prst="rect">
             <a:avLst>
-              <a:gd name="adj" fmla="val 9524"/>
+              <a:gd name="adj" fmla="val 7692"/>
             </a:avLst>
           </a:prstGeom>
           <a:solidFill>
@@ -16106,14 +15476,14 @@
       </p:sp>
       <p:sp>
         <p:nvSpPr>
-          <p:cNvPr id="44" name="Text 42"/>
-          <p:cNvSpPr/>
-          <p:nvPr/>
-        </p:nvSpPr>
-        <p:spPr>
-          <a:xfrm>
-            <a:off x="4447032" y="4169664"/>
-            <a:ext cx="685800" cy="384048"/>
+          <p:cNvPr id="43" name="Text 41"/>
+          <p:cNvSpPr/>
+          <p:nvPr/>
+        </p:nvSpPr>
+        <p:spPr>
+          <a:xfrm>
+            <a:off x="6062472" y="4169664"/>
+            <a:ext cx="685800" cy="475488"/>
           </a:xfrm>
           <a:prstGeom prst="rect">
             <a:avLst/>
@@ -16145,18 +15515,18 @@
       </p:sp>
       <p:sp>
         <p:nvSpPr>
-          <p:cNvPr id="45" name="Shape 43"/>
-          <p:cNvSpPr/>
-          <p:nvPr/>
-        </p:nvSpPr>
-        <p:spPr>
-          <a:xfrm>
-            <a:off x="5254752" y="4169664"/>
-            <a:ext cx="685800" cy="384048"/>
+          <p:cNvPr id="44" name="Shape 42"/>
+          <p:cNvSpPr/>
+          <p:nvPr/>
+        </p:nvSpPr>
+        <p:spPr>
+          <a:xfrm>
+            <a:off x="7274052" y="4169664"/>
+            <a:ext cx="685800" cy="475488"/>
           </a:xfrm>
           <a:prstGeom prst="rect">
             <a:avLst>
-              <a:gd name="adj" fmla="val 9524"/>
+              <a:gd name="adj" fmla="val 7692"/>
             </a:avLst>
           </a:prstGeom>
           <a:solidFill>
@@ -16172,14 +15542,14 @@
       </p:sp>
       <p:sp>
         <p:nvSpPr>
-          <p:cNvPr id="46" name="Text 44"/>
-          <p:cNvSpPr/>
-          <p:nvPr/>
-        </p:nvSpPr>
-        <p:spPr>
-          <a:xfrm>
-            <a:off x="5254752" y="4169664"/>
-            <a:ext cx="685800" cy="384048"/>
+          <p:cNvPr id="45" name="Text 43"/>
+          <p:cNvSpPr/>
+          <p:nvPr/>
+        </p:nvSpPr>
+        <p:spPr>
+          <a:xfrm>
+            <a:off x="7274052" y="4169664"/>
+            <a:ext cx="685800" cy="475488"/>
           </a:xfrm>
           <a:prstGeom prst="rect">
             <a:avLst/>
@@ -16203,205 +15573,7 @@
                 <a:ea typeface="Trebuchet MS" pitchFamily="34" charset="-122"/>
                 <a:cs typeface="Trebuchet MS" pitchFamily="34" charset="-120"/>
               </a:rPr>
-              <a:t>m</a:t>
-            </a:r>
-            <a:endParaRPr lang="en-US" sz="900" dirty="0"/>
-          </a:p>
-        </p:txBody>
-      </p:sp>
-      <p:sp>
-        <p:nvSpPr>
-          <p:cNvPr id="47" name="Shape 45"/>
-          <p:cNvSpPr/>
-          <p:nvPr/>
-        </p:nvSpPr>
-        <p:spPr>
-          <a:xfrm>
-            <a:off x="6062472" y="4169664"/>
-            <a:ext cx="685800" cy="384048"/>
-          </a:xfrm>
-          <a:prstGeom prst="rect">
-            <a:avLst>
-              <a:gd name="adj" fmla="val 9524"/>
-            </a:avLst>
-          </a:prstGeom>
-          <a:solidFill>
-            <a:srgbClr val="FFFFFF"/>
-          </a:solidFill>
-          <a:ln w="12700">
-            <a:solidFill>
-              <a:srgbClr val="DB2777"/>
-            </a:solidFill>
-            <a:prstDash val="solid"/>
-          </a:ln>
-        </p:spPr>
-      </p:sp>
-      <p:sp>
-        <p:nvSpPr>
-          <p:cNvPr id="48" name="Text 46"/>
-          <p:cNvSpPr/>
-          <p:nvPr/>
-        </p:nvSpPr>
-        <p:spPr>
-          <a:xfrm>
-            <a:off x="6062472" y="4169664"/>
-            <a:ext cx="685800" cy="384048"/>
-          </a:xfrm>
-          <a:prstGeom prst="rect">
-            <a:avLst/>
-          </a:prstGeom>
-          <a:noFill/>
-          <a:ln/>
-        </p:spPr>
-        <p:txBody>
-          <a:bodyPr wrap="square" lIns="0" tIns="0" rIns="0" bIns="0" rtlCol="0" anchor="ctr"/>
-          <a:lstStyle/>
-          <a:p>
-            <a:pPr algn="ctr" indent="0" marL="0">
-              <a:buNone/>
-            </a:pPr>
-            <a:r>
-              <a:rPr lang="en-US" sz="900" b="1" dirty="0">
-                <a:solidFill>
-                  <a:srgbClr val="9D174D"/>
-                </a:solidFill>
-                <a:latin typeface="Trebuchet MS" pitchFamily="34" charset="0"/>
-                <a:ea typeface="Trebuchet MS" pitchFamily="34" charset="-122"/>
-                <a:cs typeface="Trebuchet MS" pitchFamily="34" charset="-120"/>
-              </a:rPr>
-              <a:t>e</a:t>
-            </a:r>
-            <a:endParaRPr lang="en-US" sz="900" dirty="0"/>
-          </a:p>
-        </p:txBody>
-      </p:sp>
-      <p:sp>
-        <p:nvSpPr>
-          <p:cNvPr id="49" name="Shape 47"/>
-          <p:cNvSpPr/>
-          <p:nvPr/>
-        </p:nvSpPr>
-        <p:spPr>
-          <a:xfrm>
-            <a:off x="6870192" y="4169664"/>
-            <a:ext cx="685800" cy="384048"/>
-          </a:xfrm>
-          <a:prstGeom prst="rect">
-            <a:avLst>
-              <a:gd name="adj" fmla="val 9524"/>
-            </a:avLst>
-          </a:prstGeom>
-          <a:solidFill>
-            <a:srgbClr val="FFFFFF"/>
-          </a:solidFill>
-          <a:ln w="12700">
-            <a:solidFill>
-              <a:srgbClr val="DB2777"/>
-            </a:solidFill>
-            <a:prstDash val="solid"/>
-          </a:ln>
-        </p:spPr>
-      </p:sp>
-      <p:sp>
-        <p:nvSpPr>
-          <p:cNvPr id="50" name="Text 48"/>
-          <p:cNvSpPr/>
-          <p:nvPr/>
-        </p:nvSpPr>
-        <p:spPr>
-          <a:xfrm>
-            <a:off x="6870192" y="4169664"/>
-            <a:ext cx="685800" cy="384048"/>
-          </a:xfrm>
-          <a:prstGeom prst="rect">
-            <a:avLst/>
-          </a:prstGeom>
-          <a:noFill/>
-          <a:ln/>
-        </p:spPr>
-        <p:txBody>
-          <a:bodyPr wrap="square" lIns="0" tIns="0" rIns="0" bIns="0" rtlCol="0" anchor="ctr"/>
-          <a:lstStyle/>
-          <a:p>
-            <a:pPr algn="ctr" indent="0" marL="0">
-              <a:buNone/>
-            </a:pPr>
-            <a:r>
-              <a:rPr lang="en-US" sz="900" b="1" dirty="0">
-                <a:solidFill>
-                  <a:srgbClr val="9D174D"/>
-                </a:solidFill>
-                <a:latin typeface="Trebuchet MS" pitchFamily="34" charset="0"/>
-                <a:ea typeface="Trebuchet MS" pitchFamily="34" charset="-122"/>
-                <a:cs typeface="Trebuchet MS" pitchFamily="34" charset="-120"/>
-              </a:rPr>
-              <a:t>n</a:t>
-            </a:r>
-            <a:endParaRPr lang="en-US" sz="900" dirty="0"/>
-          </a:p>
-        </p:txBody>
-      </p:sp>
-      <p:sp>
-        <p:nvSpPr>
-          <p:cNvPr id="51" name="Shape 49"/>
-          <p:cNvSpPr/>
-          <p:nvPr/>
-        </p:nvSpPr>
-        <p:spPr>
-          <a:xfrm>
-            <a:off x="7677912" y="4169664"/>
-            <a:ext cx="685800" cy="384048"/>
-          </a:xfrm>
-          <a:prstGeom prst="rect">
-            <a:avLst>
-              <a:gd name="adj" fmla="val 9524"/>
-            </a:avLst>
-          </a:prstGeom>
-          <a:solidFill>
-            <a:srgbClr val="FFFFFF"/>
-          </a:solidFill>
-          <a:ln w="12700">
-            <a:solidFill>
-              <a:srgbClr val="DB2777"/>
-            </a:solidFill>
-            <a:prstDash val="solid"/>
-          </a:ln>
-        </p:spPr>
-      </p:sp>
-      <p:sp>
-        <p:nvSpPr>
-          <p:cNvPr id="52" name="Text 50"/>
-          <p:cNvSpPr/>
-          <p:nvPr/>
-        </p:nvSpPr>
-        <p:spPr>
-          <a:xfrm>
-            <a:off x="7677912" y="4169664"/>
-            <a:ext cx="685800" cy="384048"/>
-          </a:xfrm>
-          <a:prstGeom prst="rect">
-            <a:avLst/>
-          </a:prstGeom>
-          <a:noFill/>
-          <a:ln/>
-        </p:spPr>
-        <p:txBody>
-          <a:bodyPr wrap="square" lIns="0" tIns="0" rIns="0" bIns="0" rtlCol="0" anchor="ctr"/>
-          <a:lstStyle/>
-          <a:p>
-            <a:pPr algn="ctr" indent="0" marL="0">
-              <a:buNone/>
-            </a:pPr>
-            <a:r>
-              <a:rPr lang="en-US" sz="900" b="1" dirty="0">
-                <a:solidFill>
-                  <a:srgbClr val="9D174D"/>
-                </a:solidFill>
-                <a:latin typeface="Trebuchet MS" pitchFamily="34" charset="0"/>
-                <a:ea typeface="Trebuchet MS" pitchFamily="34" charset="-122"/>
-                <a:cs typeface="Trebuchet MS" pitchFamily="34" charset="-120"/>
-              </a:rPr>
-              <a:t>t</a:t>
+              <a:t>er</a:t>
             </a:r>
             <a:endParaRPr lang="en-US" sz="900" dirty="0"/>
           </a:p>
@@ -16975,7 +16147,7 @@
                 <a:ea typeface="Calibri" pitchFamily="34" charset="-122"/>
                 <a:cs typeface="Calibri" pitchFamily="34" charset="-120"/>
               </a:rPr>
-              <a:t>Word Labs  •  wordlabs.app  •  Root: 'enjoy' = to take pleasure in</a:t>
+              <a:t>Word Labs  •  wordlabs.app  •  Root: 'enjoy' = like; take pleasure in</a:t>
             </a:r>
             <a:endParaRPr lang="en-US" sz="800" dirty="0"/>
           </a:p>
@@ -17309,7 +16481,7 @@
                 <a:ea typeface="Trebuchet MS" pitchFamily="34" charset="-122"/>
                 <a:cs typeface="Trebuchet MS" pitchFamily="34" charset="-120"/>
               </a:rPr>
-              <a:t>1</a:t>
+              <a:t>0</a:t>
             </a:r>
             <a:pPr algn="ctr" indent="0" marL="0">
               <a:buNone/>
@@ -17615,7 +16787,7 @@
                 <a:ea typeface="Calibri" pitchFamily="34" charset="-122"/>
                 <a:cs typeface="Calibri" pitchFamily="34" charset="-120"/>
               </a:rPr>
-              <a:t>Word Labs  •  wordlabs.app  •  Root: 'enjoy' = to take pleasure in</a:t>
+              <a:t>Word Labs  •  wordlabs.app  •  Root: 'enjoy' = like; take pleasure in</a:t>
             </a:r>
             <a:endParaRPr lang="en-US" sz="800" dirty="0"/>
           </a:p>
@@ -17727,7 +16899,7 @@
                 <a:ea typeface="Calibri" pitchFamily="34" charset="-122"/>
                 <a:cs typeface="Calibri" pitchFamily="34" charset="-120"/>
               </a:rPr>
-              <a:t>The </a:t>
+              <a:t>We are </a:t>
             </a:r>
             <a:pPr algn="l" indent="0" marL="0">
               <a:buNone/>
@@ -17744,7 +16916,7 @@
                 <a:ea typeface="Calibri" pitchFamily="34" charset="-122"/>
                 <a:cs typeface="Calibri" pitchFamily="34" charset="-120"/>
               </a:rPr>
-              <a:t>enjoyer</a:t>
+              <a:t>enjoying</a:t>
             </a:r>
             <a:pPr algn="l" indent="0" marL="0">
               <a:buNone/>
@@ -17758,7 +16930,7 @@
                 <a:ea typeface="Calibri" pitchFamily="34" charset="-122"/>
                 <a:cs typeface="Calibri" pitchFamily="34" charset="-120"/>
               </a:rPr>
-              <a:t> of music </a:t>
+              <a:t> the sunny weather today. Reading brings her great </a:t>
             </a:r>
             <a:pPr algn="l" indent="0" marL="0">
               <a:buNone/>
@@ -17775,7 +16947,7 @@
                 <a:ea typeface="Calibri" pitchFamily="34" charset="-122"/>
                 <a:cs typeface="Calibri" pitchFamily="34" charset="-120"/>
               </a:rPr>
-              <a:t>enjoyed</a:t>
+              <a:t>enjoyment</a:t>
             </a:r>
             <a:pPr algn="l" indent="0" marL="0">
               <a:buNone/>
@@ -17789,7 +16961,38 @@
                 <a:ea typeface="Calibri" pitchFamily="34" charset="-122"/>
                 <a:cs typeface="Calibri" pitchFamily="34" charset="-120"/>
               </a:rPr>
-              <a:t> every song, finding real enjoyment in the performance!</a:t>
+              <a:t>. We had an </a:t>
+            </a:r>
+            <a:pPr algn="l" indent="0" marL="0">
+              <a:buNone/>
+            </a:pPr>
+            <a:r>
+              <a:rPr lang="en-US" sz="1800" b="1" dirty="0">
+                <a:solidFill>
+                  <a:srgbClr val="0D9488"/>
+                </a:solidFill>
+                <a:highlight>
+                  <a:srgbClr val="CCFBF1"/>
+                </a:highlight>
+                <a:latin typeface="Calibri" pitchFamily="34" charset="0"/>
+                <a:ea typeface="Calibri" pitchFamily="34" charset="-122"/>
+                <a:cs typeface="Calibri" pitchFamily="34" charset="-120"/>
+              </a:rPr>
+              <a:t>enjoyable</a:t>
+            </a:r>
+            <a:pPr algn="l" indent="0" marL="0">
+              <a:buNone/>
+            </a:pPr>
+            <a:r>
+              <a:rPr lang="en-US" sz="1800" dirty="0">
+                <a:solidFill>
+                  <a:srgbClr val="0F172A"/>
+                </a:solidFill>
+                <a:latin typeface="Calibri" pitchFamily="34" charset="0"/>
+                <a:ea typeface="Calibri" pitchFamily="34" charset="-122"/>
+                <a:cs typeface="Calibri" pitchFamily="34" charset="-120"/>
+              </a:rPr>
+              <a:t> afternoon at the beach.</a:t>
             </a:r>
             <a:endParaRPr lang="en-US" sz="1800" dirty="0"/>
           </a:p>
@@ -17944,7 +17147,7 @@
                 <a:ea typeface="Trebuchet MS" pitchFamily="34" charset="-122"/>
                 <a:cs typeface="Trebuchet MS" pitchFamily="34" charset="-120"/>
               </a:rPr>
-              <a:t>enjoyer</a:t>
+              <a:t>enjoying</a:t>
             </a:r>
             <a:endParaRPr lang="en-US" sz="1400" dirty="0"/>
           </a:p>
@@ -18072,7 +17275,7 @@
                 <a:ea typeface="Trebuchet MS" pitchFamily="34" charset="-122"/>
                 <a:cs typeface="Trebuchet MS" pitchFamily="34" charset="-120"/>
               </a:rPr>
-              <a:t>enjoyed</a:t>
+              <a:t>enjoyment</a:t>
             </a:r>
             <a:endParaRPr lang="en-US" sz="1400" dirty="0"/>
           </a:p>
@@ -18200,7 +17403,7 @@
                 <a:ea typeface="Trebuchet MS" pitchFamily="34" charset="-122"/>
                 <a:cs typeface="Trebuchet MS" pitchFamily="34" charset="-120"/>
               </a:rPr>
-              <a:t>enjoying</a:t>
+              <a:t>enjoyable</a:t>
             </a:r>
             <a:endParaRPr lang="en-US" sz="1400" dirty="0"/>
           </a:p>
@@ -18531,7 +17734,7 @@
                 <a:ea typeface="Calibri" pitchFamily="34" charset="-122"/>
                 <a:cs typeface="Calibri" pitchFamily="34" charset="-120"/>
               </a:rPr>
-              <a:t>Word Labs  •  wordlabs.app  •  Root: 'enjoy' = to take pleasure in</a:t>
+              <a:t>Word Labs  •  wordlabs.app  •  Root: 'enjoy' = like; take pleasure in</a:t>
             </a:r>
             <a:endParaRPr lang="en-US" sz="800" dirty="0"/>
           </a:p>
@@ -18670,7 +17873,7 @@
                 <a:ea typeface="Trebuchet MS" pitchFamily="34" charset="-122"/>
                 <a:cs typeface="Trebuchet MS" pitchFamily="34" charset="-120"/>
               </a:rPr>
-              <a:t>enjoyer</a:t>
+              <a:t>enjoying</a:t>
             </a:r>
             <a:endParaRPr lang="en-US" sz="2800" dirty="0"/>
           </a:p>
@@ -19358,7 +18561,7 @@
                 <a:ea typeface="Calibri" pitchFamily="34" charset="-122"/>
                 <a:cs typeface="Calibri" pitchFamily="34" charset="-120"/>
               </a:rPr>
-              <a:t>Word Labs  •  wordlabs.app  •  Root: 'enjoy' = to take pleasure in</a:t>
+              <a:t>Word Labs  •  wordlabs.app  •  Root: 'enjoy' = like; take pleasure in</a:t>
             </a:r>
             <a:endParaRPr lang="en-US" sz="800" dirty="0"/>
           </a:p>
@@ -19497,7 +18700,7 @@
                 <a:ea typeface="Trebuchet MS" pitchFamily="34" charset="-122"/>
                 <a:cs typeface="Trebuchet MS" pitchFamily="34" charset="-120"/>
               </a:rPr>
-              <a:t>enjoyer</a:t>
+              <a:t>enjoying</a:t>
             </a:r>
             <a:endParaRPr lang="en-US" sz="2800" dirty="0"/>
           </a:p>
@@ -19675,7 +18878,7 @@
                 <a:ea typeface="Calibri" pitchFamily="34" charset="-122"/>
                 <a:cs typeface="Calibri" pitchFamily="34" charset="-120"/>
               </a:rPr>
-              <a:t>to take pleasure in</a:t>
+              <a:t>like; take pleasure in</a:t>
             </a:r>
             <a:endParaRPr lang="en-US" sz="850" dirty="0"/>
           </a:p>
@@ -19748,7 +18951,7 @@
                 <a:ea typeface="Trebuchet MS" pitchFamily="34" charset="-122"/>
                 <a:cs typeface="Trebuchet MS" pitchFamily="34" charset="-120"/>
               </a:rPr>
-              <a:t>er</a:t>
+              <a:t>ing</a:t>
             </a:r>
             <a:endParaRPr lang="en-US" sz="1300" dirty="0"/>
           </a:p>
@@ -19787,7 +18990,7 @@
                 <a:ea typeface="Calibri" pitchFamily="34" charset="-122"/>
                 <a:cs typeface="Calibri" pitchFamily="34" charset="-120"/>
               </a:rPr>
-              <a:t>a person who does something</a:t>
+              <a:t>happening now</a:t>
             </a:r>
             <a:endParaRPr lang="en-US" sz="850" dirty="0"/>
           </a:p>
@@ -20343,7 +19546,7 @@
                 <a:ea typeface="Calibri" pitchFamily="34" charset="-122"/>
                 <a:cs typeface="Calibri" pitchFamily="34" charset="-120"/>
               </a:rPr>
-              <a:t>Word Labs  •  wordlabs.app  •  Root: 'enjoy' = to take pleasure in</a:t>
+              <a:t>Word Labs  •  wordlabs.app  •  Root: 'enjoy' = like; take pleasure in</a:t>
             </a:r>
             <a:endParaRPr lang="en-US" sz="800" dirty="0"/>
           </a:p>
@@ -20482,7 +19685,7 @@
                 <a:ea typeface="Trebuchet MS" pitchFamily="34" charset="-122"/>
                 <a:cs typeface="Trebuchet MS" pitchFamily="34" charset="-120"/>
               </a:rPr>
-              <a:t>enjoyer</a:t>
+              <a:t>enjoying</a:t>
             </a:r>
             <a:endParaRPr lang="en-US" sz="2800" dirty="0"/>
           </a:p>
@@ -20660,7 +19863,7 @@
                 <a:ea typeface="Calibri" pitchFamily="34" charset="-122"/>
                 <a:cs typeface="Calibri" pitchFamily="34" charset="-120"/>
               </a:rPr>
-              <a:t>to take pleasure in</a:t>
+              <a:t>like; take pleasure in</a:t>
             </a:r>
             <a:endParaRPr lang="en-US" sz="850" dirty="0"/>
           </a:p>
@@ -20733,7 +19936,7 @@
                 <a:ea typeface="Trebuchet MS" pitchFamily="34" charset="-122"/>
                 <a:cs typeface="Trebuchet MS" pitchFamily="34" charset="-120"/>
               </a:rPr>
-              <a:t>er</a:t>
+              <a:t>ing</a:t>
             </a:r>
             <a:endParaRPr lang="en-US" sz="1300" dirty="0"/>
           </a:p>
@@ -20772,7 +19975,7 @@
                 <a:ea typeface="Calibri" pitchFamily="34" charset="-122"/>
                 <a:cs typeface="Calibri" pitchFamily="34" charset="-120"/>
               </a:rPr>
-              <a:t>a person who does something</a:t>
+              <a:t>happening now</a:t>
             </a:r>
             <a:endParaRPr lang="en-US" sz="850" dirty="0"/>
           </a:p>
@@ -21141,7 +20344,7 @@
                 <a:ea typeface="Trebuchet MS" pitchFamily="34" charset="-122"/>
                 <a:cs typeface="Trebuchet MS" pitchFamily="34" charset="-120"/>
               </a:rPr>
-              <a:t>er</a:t>
+              <a:t>ing</a:t>
             </a:r>
             <a:endParaRPr lang="en-US" sz="1400" dirty="0"/>
           </a:p>
@@ -21565,7 +20768,7 @@
                 <a:ea typeface="Calibri" pitchFamily="34" charset="-122"/>
                 <a:cs typeface="Calibri" pitchFamily="34" charset="-120"/>
               </a:rPr>
-              <a:t>Word Labs  •  wordlabs.app  •  Root: 'enjoy' = to take pleasure in</a:t>
+              <a:t>Word Labs  •  wordlabs.app  •  Root: 'enjoy' = like; take pleasure in</a:t>
             </a:r>
             <a:endParaRPr lang="en-US" sz="800" dirty="0"/>
           </a:p>
@@ -21704,7 +20907,7 @@
                 <a:ea typeface="Trebuchet MS" pitchFamily="34" charset="-122"/>
                 <a:cs typeface="Trebuchet MS" pitchFamily="34" charset="-120"/>
               </a:rPr>
-              <a:t>enjoyer</a:t>
+              <a:t>enjoying</a:t>
             </a:r>
             <a:endParaRPr lang="en-US" sz="2800" dirty="0"/>
           </a:p>
@@ -21882,7 +21085,7 @@
                 <a:ea typeface="Calibri" pitchFamily="34" charset="-122"/>
                 <a:cs typeface="Calibri" pitchFamily="34" charset="-120"/>
               </a:rPr>
-              <a:t>to take pleasure in</a:t>
+              <a:t>like; take pleasure in</a:t>
             </a:r>
             <a:endParaRPr lang="en-US" sz="850" dirty="0"/>
           </a:p>
@@ -21955,7 +21158,7 @@
                 <a:ea typeface="Trebuchet MS" pitchFamily="34" charset="-122"/>
                 <a:cs typeface="Trebuchet MS" pitchFamily="34" charset="-120"/>
               </a:rPr>
-              <a:t>er</a:t>
+              <a:t>ing</a:t>
             </a:r>
             <a:endParaRPr lang="en-US" sz="1300" dirty="0"/>
           </a:p>
@@ -21994,7 +21197,7 @@
                 <a:ea typeface="Calibri" pitchFamily="34" charset="-122"/>
                 <a:cs typeface="Calibri" pitchFamily="34" charset="-120"/>
               </a:rPr>
-              <a:t>a person who does something</a:t>
+              <a:t>happening now</a:t>
             </a:r>
             <a:endParaRPr lang="en-US" sz="850" dirty="0"/>
           </a:p>
@@ -22363,7 +21566,7 @@
                 <a:ea typeface="Trebuchet MS" pitchFamily="34" charset="-122"/>
                 <a:cs typeface="Trebuchet MS" pitchFamily="34" charset="-120"/>
               </a:rPr>
-              <a:t>er</a:t>
+              <a:t>ing</a:t>
             </a:r>
             <a:endParaRPr lang="en-US" sz="1400" dirty="0"/>
           </a:p>
@@ -22444,11 +21647,11 @@
         <p:spPr>
           <a:xfrm>
             <a:off x="1874520" y="4096512"/>
-            <a:ext cx="6903720" cy="804672"/>
+            <a:ext cx="6903720" cy="658368"/>
           </a:xfrm>
           <a:prstGeom prst="rect">
             <a:avLst>
-              <a:gd name="adj" fmla="val 6818"/>
+              <a:gd name="adj" fmla="val 8333"/>
             </a:avLst>
           </a:prstGeom>
           <a:solidFill>
@@ -22470,12 +21673,12 @@
         </p:nvSpPr>
         <p:spPr>
           <a:xfrm>
-            <a:off x="2427732" y="4169664"/>
-            <a:ext cx="685800" cy="384048"/>
+            <a:off x="2254649" y="4169664"/>
+            <a:ext cx="685800" cy="475488"/>
           </a:xfrm>
           <a:prstGeom prst="rect">
             <a:avLst>
-              <a:gd name="adj" fmla="val 9524"/>
+              <a:gd name="adj" fmla="val 7692"/>
             </a:avLst>
           </a:prstGeom>
           <a:solidFill>
@@ -22497,8 +21700,8 @@
         </p:nvSpPr>
         <p:spPr>
           <a:xfrm>
-            <a:off x="2427732" y="4169664"/>
-            <a:ext cx="685800" cy="384048"/>
+            <a:off x="2254649" y="4169664"/>
+            <a:ext cx="685800" cy="475488"/>
           </a:xfrm>
           <a:prstGeom prst="rect">
             <a:avLst/>
@@ -22536,12 +21739,12 @@
         </p:nvSpPr>
         <p:spPr>
           <a:xfrm>
-            <a:off x="3639312" y="4169664"/>
-            <a:ext cx="685800" cy="384048"/>
+            <a:off x="3293146" y="4169664"/>
+            <a:ext cx="685800" cy="475488"/>
           </a:xfrm>
           <a:prstGeom prst="rect">
             <a:avLst>
-              <a:gd name="adj" fmla="val 9524"/>
+              <a:gd name="adj" fmla="val 7692"/>
             </a:avLst>
           </a:prstGeom>
           <a:solidFill>
@@ -22563,8 +21766,8 @@
         </p:nvSpPr>
         <p:spPr>
           <a:xfrm>
-            <a:off x="3639312" y="4169664"/>
-            <a:ext cx="685800" cy="384048"/>
+            <a:off x="3293146" y="4169664"/>
+            <a:ext cx="685800" cy="475488"/>
           </a:xfrm>
           <a:prstGeom prst="rect">
             <a:avLst/>
@@ -22602,12 +21805,12 @@
         </p:nvSpPr>
         <p:spPr>
           <a:xfrm>
-            <a:off x="4850892" y="4169664"/>
-            <a:ext cx="685800" cy="384048"/>
+            <a:off x="4331643" y="4169664"/>
+            <a:ext cx="685800" cy="475488"/>
           </a:xfrm>
           <a:prstGeom prst="rect">
             <a:avLst>
-              <a:gd name="adj" fmla="val 9524"/>
+              <a:gd name="adj" fmla="val 7692"/>
             </a:avLst>
           </a:prstGeom>
           <a:solidFill>
@@ -22629,8 +21832,8 @@
         </p:nvSpPr>
         <p:spPr>
           <a:xfrm>
-            <a:off x="4850892" y="4169664"/>
-            <a:ext cx="685800" cy="384048"/>
+            <a:off x="4331643" y="4169664"/>
+            <a:ext cx="685800" cy="475488"/>
           </a:xfrm>
           <a:prstGeom prst="rect">
             <a:avLst/>
@@ -22662,57 +21865,18 @@
       </p:sp>
       <p:sp>
         <p:nvSpPr>
-          <p:cNvPr id="42" name="Text 40"/>
-          <p:cNvSpPr/>
-          <p:nvPr/>
-        </p:nvSpPr>
-        <p:spPr>
-          <a:xfrm>
-            <a:off x="4850892" y="4572000"/>
-            <a:ext cx="685800" cy="219456"/>
-          </a:xfrm>
-          <a:prstGeom prst="rect">
-            <a:avLst/>
-          </a:prstGeom>
-          <a:noFill/>
-          <a:ln/>
-        </p:spPr>
-        <p:txBody>
-          <a:bodyPr wrap="square" lIns="0" tIns="0" rIns="0" bIns="0" rtlCol="0" anchor="t"/>
-          <a:lstStyle/>
-          <a:p>
-            <a:pPr algn="ctr" indent="0" marL="0">
-              <a:buNone/>
-            </a:pPr>
-            <a:r>
-              <a:rPr lang="en-US" sz="750" i="1" dirty="0">
-                <a:solidFill>
-                  <a:srgbClr val="94A3B8"/>
-                </a:solidFill>
-                <a:latin typeface="Calibri" pitchFamily="34" charset="0"/>
-                <a:ea typeface="Calibri" pitchFamily="34" charset="-122"/>
-                <a:cs typeface="Calibri" pitchFamily="34" charset="-120"/>
-              </a:rPr>
-              <a:t>/j/</a:t>
-            </a:r>
-            <a:endParaRPr lang="en-US" sz="750" dirty="0"/>
-          </a:p>
-        </p:txBody>
-      </p:sp>
-      <p:sp>
-        <p:nvSpPr>
-          <p:cNvPr id="43" name="Shape 41"/>
-          <p:cNvSpPr/>
-          <p:nvPr/>
-        </p:nvSpPr>
-        <p:spPr>
-          <a:xfrm>
-            <a:off x="6062472" y="4169664"/>
-            <a:ext cx="685800" cy="384048"/>
+          <p:cNvPr id="42" name="Shape 40"/>
+          <p:cNvSpPr/>
+          <p:nvPr/>
+        </p:nvSpPr>
+        <p:spPr>
+          <a:xfrm>
+            <a:off x="5370141" y="4169664"/>
+            <a:ext cx="685800" cy="475488"/>
           </a:xfrm>
           <a:prstGeom prst="rect">
             <a:avLst>
-              <a:gd name="adj" fmla="val 9524"/>
+              <a:gd name="adj" fmla="val 7692"/>
             </a:avLst>
           </a:prstGeom>
           <a:solidFill>
@@ -22728,14 +21892,14 @@
       </p:sp>
       <p:sp>
         <p:nvSpPr>
-          <p:cNvPr id="44" name="Text 42"/>
-          <p:cNvSpPr/>
-          <p:nvPr/>
-        </p:nvSpPr>
-        <p:spPr>
-          <a:xfrm>
-            <a:off x="6062472" y="4169664"/>
-            <a:ext cx="685800" cy="384048"/>
+          <p:cNvPr id="43" name="Text 41"/>
+          <p:cNvSpPr/>
+          <p:nvPr/>
+        </p:nvSpPr>
+        <p:spPr>
+          <a:xfrm>
+            <a:off x="5370141" y="4169664"/>
+            <a:ext cx="685800" cy="475488"/>
           </a:xfrm>
           <a:prstGeom prst="rect">
             <a:avLst/>
@@ -22767,18 +21931,18 @@
       </p:sp>
       <p:sp>
         <p:nvSpPr>
-          <p:cNvPr id="45" name="Shape 43"/>
-          <p:cNvSpPr/>
-          <p:nvPr/>
-        </p:nvSpPr>
-        <p:spPr>
-          <a:xfrm>
-            <a:off x="7274052" y="4169664"/>
-            <a:ext cx="685800" cy="384048"/>
+          <p:cNvPr id="44" name="Shape 42"/>
+          <p:cNvSpPr/>
+          <p:nvPr/>
+        </p:nvSpPr>
+        <p:spPr>
+          <a:xfrm>
+            <a:off x="6408638" y="4169664"/>
+            <a:ext cx="685800" cy="475488"/>
           </a:xfrm>
           <a:prstGeom prst="rect">
             <a:avLst>
-              <a:gd name="adj" fmla="val 9524"/>
+              <a:gd name="adj" fmla="val 7692"/>
             </a:avLst>
           </a:prstGeom>
           <a:solidFill>
@@ -22794,14 +21958,14 @@
       </p:sp>
       <p:sp>
         <p:nvSpPr>
-          <p:cNvPr id="46" name="Text 44"/>
-          <p:cNvSpPr/>
-          <p:nvPr/>
-        </p:nvSpPr>
-        <p:spPr>
-          <a:xfrm>
-            <a:off x="7274052" y="4169664"/>
-            <a:ext cx="685800" cy="384048"/>
+          <p:cNvPr id="45" name="Text 43"/>
+          <p:cNvSpPr/>
+          <p:nvPr/>
+        </p:nvSpPr>
+        <p:spPr>
+          <a:xfrm>
+            <a:off x="6408638" y="4169664"/>
+            <a:ext cx="685800" cy="475488"/>
           </a:xfrm>
           <a:prstGeom prst="rect">
             <a:avLst/>
@@ -22825,7 +21989,73 @@
                 <a:ea typeface="Trebuchet MS" pitchFamily="34" charset="-122"/>
                 <a:cs typeface="Trebuchet MS" pitchFamily="34" charset="-120"/>
               </a:rPr>
-              <a:t>er</a:t>
+              <a:t>i</a:t>
+            </a:r>
+            <a:endParaRPr lang="en-US" sz="900" dirty="0"/>
+          </a:p>
+        </p:txBody>
+      </p:sp>
+      <p:sp>
+        <p:nvSpPr>
+          <p:cNvPr id="46" name="Shape 44"/>
+          <p:cNvSpPr/>
+          <p:nvPr/>
+        </p:nvSpPr>
+        <p:spPr>
+          <a:xfrm>
+            <a:off x="7447135" y="4169664"/>
+            <a:ext cx="685800" cy="475488"/>
+          </a:xfrm>
+          <a:prstGeom prst="rect">
+            <a:avLst>
+              <a:gd name="adj" fmla="val 7692"/>
+            </a:avLst>
+          </a:prstGeom>
+          <a:solidFill>
+            <a:srgbClr val="FFFFFF"/>
+          </a:solidFill>
+          <a:ln w="12700">
+            <a:solidFill>
+              <a:srgbClr val="DB2777"/>
+            </a:solidFill>
+            <a:prstDash val="solid"/>
+          </a:ln>
+        </p:spPr>
+      </p:sp>
+      <p:sp>
+        <p:nvSpPr>
+          <p:cNvPr id="47" name="Text 45"/>
+          <p:cNvSpPr/>
+          <p:nvPr/>
+        </p:nvSpPr>
+        <p:spPr>
+          <a:xfrm>
+            <a:off x="7447135" y="4169664"/>
+            <a:ext cx="685800" cy="475488"/>
+          </a:xfrm>
+          <a:prstGeom prst="rect">
+            <a:avLst/>
+          </a:prstGeom>
+          <a:noFill/>
+          <a:ln/>
+        </p:spPr>
+        <p:txBody>
+          <a:bodyPr wrap="square" lIns="0" tIns="0" rIns="0" bIns="0" rtlCol="0" anchor="ctr"/>
+          <a:lstStyle/>
+          <a:p>
+            <a:pPr algn="ctr" indent="0" marL="0">
+              <a:buNone/>
+            </a:pPr>
+            <a:r>
+              <a:rPr lang="en-US" sz="900" b="1" dirty="0">
+                <a:solidFill>
+                  <a:srgbClr val="9D174D"/>
+                </a:solidFill>
+                <a:latin typeface="Trebuchet MS" pitchFamily="34" charset="0"/>
+                <a:ea typeface="Trebuchet MS" pitchFamily="34" charset="-122"/>
+                <a:cs typeface="Trebuchet MS" pitchFamily="34" charset="-120"/>
+              </a:rPr>
+              <a:t>ng</a:t>
             </a:r>
             <a:endParaRPr lang="en-US" sz="900" dirty="0"/>
           </a:p>
@@ -23117,7 +22347,7 @@
                 <a:ea typeface="Calibri" pitchFamily="34" charset="-122"/>
                 <a:cs typeface="Calibri" pitchFamily="34" charset="-120"/>
               </a:rPr>
-              <a:t>Word Labs  •  wordlabs.app  •  Root: 'enjoy' = to take pleasure in</a:t>
+              <a:t>Word Labs  •  wordlabs.app  •  Root: 'enjoy' = like; take pleasure in</a:t>
             </a:r>
             <a:endParaRPr lang="en-US" sz="800" dirty="0"/>
           </a:p>
@@ -23256,7 +22486,7 @@
                 <a:ea typeface="Trebuchet MS" pitchFamily="34" charset="-122"/>
                 <a:cs typeface="Trebuchet MS" pitchFamily="34" charset="-120"/>
               </a:rPr>
-              <a:t>enjoyed</a:t>
+              <a:t>enjoyment</a:t>
             </a:r>
             <a:endParaRPr lang="en-US" sz="2800" dirty="0"/>
           </a:p>
@@ -23944,7 +23174,7 @@
                 <a:ea typeface="Calibri" pitchFamily="34" charset="-122"/>
                 <a:cs typeface="Calibri" pitchFamily="34" charset="-120"/>
               </a:rPr>
-              <a:t>Word Labs  •  wordlabs.app  •  Root: 'enjoy' = to take pleasure in</a:t>
+              <a:t>Word Labs  •  wordlabs.app  •  Root: 'enjoy' = like; take pleasure in</a:t>
             </a:r>
             <a:endParaRPr lang="en-US" sz="800" dirty="0"/>
           </a:p>
@@ -24083,7 +23313,7 @@
                 <a:ea typeface="Trebuchet MS" pitchFamily="34" charset="-122"/>
                 <a:cs typeface="Trebuchet MS" pitchFamily="34" charset="-120"/>
               </a:rPr>
-              <a:t>enjoyed</a:t>
+              <a:t>enjoyment</a:t>
             </a:r>
             <a:endParaRPr lang="en-US" sz="2800" dirty="0"/>
           </a:p>
@@ -24261,7 +23491,7 @@
                 <a:ea typeface="Calibri" pitchFamily="34" charset="-122"/>
                 <a:cs typeface="Calibri" pitchFamily="34" charset="-120"/>
               </a:rPr>
-              <a:t>to take pleasure in</a:t>
+              <a:t>like; take pleasure in</a:t>
             </a:r>
             <a:endParaRPr lang="en-US" sz="850" dirty="0"/>
           </a:p>
@@ -24334,7 +23564,7 @@
                 <a:ea typeface="Trebuchet MS" pitchFamily="34" charset="-122"/>
                 <a:cs typeface="Trebuchet MS" pitchFamily="34" charset="-120"/>
               </a:rPr>
-              <a:t>ed</a:t>
+              <a:t>ment</a:t>
             </a:r>
             <a:endParaRPr lang="en-US" sz="1300" dirty="0"/>
           </a:p>
@@ -24373,7 +23603,7 @@
                 <a:ea typeface="Calibri" pitchFamily="34" charset="-122"/>
                 <a:cs typeface="Calibri" pitchFamily="34" charset="-120"/>
               </a:rPr>
-              <a:t>past tense</a:t>
+              <a:t>result of action</a:t>
             </a:r>
             <a:endParaRPr lang="en-US" sz="850" dirty="0"/>
           </a:p>
@@ -24929,7 +24159,7 @@
                 <a:ea typeface="Calibri" pitchFamily="34" charset="-122"/>
                 <a:cs typeface="Calibri" pitchFamily="34" charset="-120"/>
               </a:rPr>
-              <a:t>Word Labs  •  wordlabs.app  •  Root: 'enjoy' = to take pleasure in</a:t>
+              <a:t>Word Labs  •  wordlabs.app  •  Root: 'enjoy' = like; take pleasure in</a:t>
             </a:r>
             <a:endParaRPr lang="en-US" sz="800" dirty="0"/>
           </a:p>
@@ -25002,7 +24232,7 @@
                 <a:ea typeface="Trebuchet MS" pitchFamily="34" charset="-122"/>
                 <a:cs typeface="Trebuchet MS" pitchFamily="34" charset="-120"/>
               </a:rPr>
-              <a:t>We are learning that the root 'enjoy' means 'to take pleasure in'.</a:t>
+              <a:t>We are learning that the root 'enjoy' means 'like; take pleasure in'.</a:t>
             </a:r>
             <a:endParaRPr lang="en-US" sz="2000" dirty="0"/>
           </a:p>
@@ -25648,7 +24878,7 @@
                 <a:ea typeface="Calibri" pitchFamily="34" charset="-122"/>
                 <a:cs typeface="Calibri" pitchFamily="34" charset="-120"/>
               </a:rPr>
-              <a:t>Word Labs  •  wordlabs.app  •  Root: 'enjoy' = to take pleasure in</a:t>
+              <a:t>Word Labs  •  wordlabs.app  •  Root: 'enjoy' = like; take pleasure in</a:t>
             </a:r>
             <a:endParaRPr lang="en-US" sz="800" dirty="0"/>
           </a:p>
@@ -25787,7 +25017,7 @@
                 <a:ea typeface="Trebuchet MS" pitchFamily="34" charset="-122"/>
                 <a:cs typeface="Trebuchet MS" pitchFamily="34" charset="-120"/>
               </a:rPr>
-              <a:t>enjoyed</a:t>
+              <a:t>enjoyment</a:t>
             </a:r>
             <a:endParaRPr lang="en-US" sz="2800" dirty="0"/>
           </a:p>
@@ -25965,7 +25195,7 @@
                 <a:ea typeface="Calibri" pitchFamily="34" charset="-122"/>
                 <a:cs typeface="Calibri" pitchFamily="34" charset="-120"/>
               </a:rPr>
-              <a:t>to take pleasure in</a:t>
+              <a:t>like; take pleasure in</a:t>
             </a:r>
             <a:endParaRPr lang="en-US" sz="850" dirty="0"/>
           </a:p>
@@ -26038,7 +25268,7 @@
                 <a:ea typeface="Trebuchet MS" pitchFamily="34" charset="-122"/>
                 <a:cs typeface="Trebuchet MS" pitchFamily="34" charset="-120"/>
               </a:rPr>
-              <a:t>ed</a:t>
+              <a:t>ment</a:t>
             </a:r>
             <a:endParaRPr lang="en-US" sz="1300" dirty="0"/>
           </a:p>
@@ -26077,7 +25307,7 @@
                 <a:ea typeface="Calibri" pitchFamily="34" charset="-122"/>
                 <a:cs typeface="Calibri" pitchFamily="34" charset="-120"/>
               </a:rPr>
-              <a:t>past tense</a:t>
+              <a:t>result of action</a:t>
             </a:r>
             <a:endParaRPr lang="en-US" sz="850" dirty="0"/>
           </a:p>
@@ -26184,7 +25414,7 @@
         </p:nvSpPr>
         <p:spPr>
           <a:xfrm>
-            <a:off x="2999232" y="3364992"/>
+            <a:off x="2313432" y="3364992"/>
             <a:ext cx="1645920" cy="475488"/>
           </a:xfrm>
           <a:prstGeom prst="rect">
@@ -26211,7 +25441,7 @@
         </p:nvSpPr>
         <p:spPr>
           <a:xfrm>
-            <a:off x="2999232" y="3364992"/>
+            <a:off x="2313432" y="3364992"/>
             <a:ext cx="1645920" cy="475488"/>
           </a:xfrm>
           <a:prstGeom prst="rect">
@@ -26250,8 +25480,8 @@
         </p:nvSpPr>
         <p:spPr>
           <a:xfrm>
-            <a:off x="4645152" y="3364992"/>
-            <a:ext cx="1097280" cy="475488"/>
+            <a:off x="3959352" y="3364992"/>
+            <a:ext cx="411480" cy="475488"/>
           </a:xfrm>
           <a:prstGeom prst="rect">
             <a:avLst/>
@@ -26289,7 +25519,7 @@
         </p:nvSpPr>
         <p:spPr>
           <a:xfrm>
-            <a:off x="5742432" y="3364992"/>
+            <a:off x="4370832" y="3364992"/>
             <a:ext cx="1645920" cy="475488"/>
           </a:xfrm>
           <a:prstGeom prst="rect">
@@ -26316,7 +25546,7 @@
         </p:nvSpPr>
         <p:spPr>
           <a:xfrm>
-            <a:off x="5742432" y="3364992"/>
+            <a:off x="4370832" y="3364992"/>
             <a:ext cx="1645920" cy="475488"/>
           </a:xfrm>
           <a:prstGeom prst="rect">
@@ -26341,7 +25571,7 @@
                 <a:ea typeface="Trebuchet MS" pitchFamily="34" charset="-122"/>
                 <a:cs typeface="Trebuchet MS" pitchFamily="34" charset="-120"/>
               </a:rPr>
-              <a:t>joyed</a:t>
+              <a:t>joy</a:t>
             </a:r>
             <a:endParaRPr lang="en-US" sz="1400" dirty="0"/>
           </a:p>
@@ -26349,7 +25579,112 @@
       </p:sp>
       <p:sp>
         <p:nvSpPr>
-          <p:cNvPr id="30" name="Shape 28"/>
+          <p:cNvPr id="30" name="Text 28"/>
+          <p:cNvSpPr/>
+          <p:nvPr/>
+        </p:nvSpPr>
+        <p:spPr>
+          <a:xfrm>
+            <a:off x="6016752" y="3364992"/>
+            <a:ext cx="411480" cy="475488"/>
+          </a:xfrm>
+          <a:prstGeom prst="rect">
+            <a:avLst/>
+          </a:prstGeom>
+          <a:noFill/>
+          <a:ln/>
+        </p:spPr>
+        <p:txBody>
+          <a:bodyPr wrap="square" lIns="0" tIns="0" rIns="0" bIns="0" rtlCol="0" anchor="ctr"/>
+          <a:lstStyle/>
+          <a:p>
+            <a:pPr algn="ctr" indent="0" marL="0">
+              <a:buNone/>
+            </a:pPr>
+            <a:r>
+              <a:rPr lang="en-US" sz="1600" b="1" dirty="0">
+                <a:solidFill>
+                  <a:srgbClr val="0D9488"/>
+                </a:solidFill>
+                <a:latin typeface="Trebuchet MS" pitchFamily="34" charset="0"/>
+                <a:ea typeface="Trebuchet MS" pitchFamily="34" charset="-122"/>
+                <a:cs typeface="Trebuchet MS" pitchFamily="34" charset="-120"/>
+              </a:rPr>
+              <a:t>·</a:t>
+            </a:r>
+            <a:endParaRPr lang="en-US" sz="1600" dirty="0"/>
+          </a:p>
+        </p:txBody>
+      </p:sp>
+      <p:sp>
+        <p:nvSpPr>
+          <p:cNvPr id="31" name="Shape 29"/>
+          <p:cNvSpPr/>
+          <p:nvPr/>
+        </p:nvSpPr>
+        <p:spPr>
+          <a:xfrm>
+            <a:off x="6428232" y="3364992"/>
+            <a:ext cx="1645920" cy="475488"/>
+          </a:xfrm>
+          <a:prstGeom prst="rect">
+            <a:avLst>
+              <a:gd name="adj" fmla="val 9615"/>
+            </a:avLst>
+          </a:prstGeom>
+          <a:solidFill>
+            <a:srgbClr val="FFFFFF"/>
+          </a:solidFill>
+          <a:ln w="12700">
+            <a:solidFill>
+              <a:srgbClr val="0D9488"/>
+            </a:solidFill>
+            <a:prstDash val="solid"/>
+          </a:ln>
+        </p:spPr>
+      </p:sp>
+      <p:sp>
+        <p:nvSpPr>
+          <p:cNvPr id="32" name="Text 30"/>
+          <p:cNvSpPr/>
+          <p:nvPr/>
+        </p:nvSpPr>
+        <p:spPr>
+          <a:xfrm>
+            <a:off x="6428232" y="3364992"/>
+            <a:ext cx="1645920" cy="475488"/>
+          </a:xfrm>
+          <a:prstGeom prst="rect">
+            <a:avLst/>
+          </a:prstGeom>
+          <a:noFill/>
+          <a:ln/>
+        </p:spPr>
+        <p:txBody>
+          <a:bodyPr wrap="square" lIns="0" tIns="0" rIns="0" bIns="0" rtlCol="0" anchor="ctr"/>
+          <a:lstStyle/>
+          <a:p>
+            <a:pPr algn="ctr" indent="0" marL="0">
+              <a:buNone/>
+            </a:pPr>
+            <a:r>
+              <a:rPr lang="en-US" sz="1400" b="1" dirty="0">
+                <a:solidFill>
+                  <a:srgbClr val="0D9488"/>
+                </a:solidFill>
+                <a:latin typeface="Trebuchet MS" pitchFamily="34" charset="0"/>
+                <a:ea typeface="Trebuchet MS" pitchFamily="34" charset="-122"/>
+                <a:cs typeface="Trebuchet MS" pitchFamily="34" charset="-120"/>
+              </a:rPr>
+              <a:t>ment</a:t>
+            </a:r>
+            <a:endParaRPr lang="en-US" sz="1400" dirty="0"/>
+          </a:p>
+        </p:txBody>
+      </p:sp>
+      <p:sp>
+        <p:nvSpPr>
+          <p:cNvPr id="33" name="Shape 31"/>
           <p:cNvSpPr/>
           <p:nvPr/>
         </p:nvSpPr>
@@ -26376,7 +25711,7 @@
       </p:sp>
       <p:sp>
         <p:nvSpPr>
-          <p:cNvPr id="31" name="Text 29"/>
+          <p:cNvPr id="34" name="Text 32"/>
           <p:cNvSpPr/>
           <p:nvPr/>
         </p:nvSpPr>
@@ -26415,7 +25750,7 @@
       </p:sp>
       <p:sp>
         <p:nvSpPr>
-          <p:cNvPr id="32" name="Shape 30"/>
+          <p:cNvPr id="35" name="Shape 33"/>
           <p:cNvSpPr/>
           <p:nvPr/>
         </p:nvSpPr>
@@ -26442,7 +25777,7 @@
       </p:sp>
       <p:sp>
         <p:nvSpPr>
-          <p:cNvPr id="33" name="Text 31"/>
+          <p:cNvPr id="36" name="Text 34"/>
           <p:cNvSpPr/>
           <p:nvPr/>
         </p:nvSpPr>
@@ -26765,7 +26100,7 @@
                 <a:ea typeface="Calibri" pitchFamily="34" charset="-122"/>
                 <a:cs typeface="Calibri" pitchFamily="34" charset="-120"/>
               </a:rPr>
-              <a:t>Word Labs  •  wordlabs.app  •  Root: 'enjoy' = to take pleasure in</a:t>
+              <a:t>Word Labs  •  wordlabs.app  •  Root: 'enjoy' = like; take pleasure in</a:t>
             </a:r>
             <a:endParaRPr lang="en-US" sz="800" dirty="0"/>
           </a:p>
@@ -26904,7 +26239,7 @@
                 <a:ea typeface="Trebuchet MS" pitchFamily="34" charset="-122"/>
                 <a:cs typeface="Trebuchet MS" pitchFamily="34" charset="-120"/>
               </a:rPr>
-              <a:t>enjoyed</a:t>
+              <a:t>enjoyment</a:t>
             </a:r>
             <a:endParaRPr lang="en-US" sz="2800" dirty="0"/>
           </a:p>
@@ -27082,7 +26417,7 @@
                 <a:ea typeface="Calibri" pitchFamily="34" charset="-122"/>
                 <a:cs typeface="Calibri" pitchFamily="34" charset="-120"/>
               </a:rPr>
-              <a:t>to take pleasure in</a:t>
+              <a:t>like; take pleasure in</a:t>
             </a:r>
             <a:endParaRPr lang="en-US" sz="850" dirty="0"/>
           </a:p>
@@ -27155,7 +26490,7 @@
                 <a:ea typeface="Trebuchet MS" pitchFamily="34" charset="-122"/>
                 <a:cs typeface="Trebuchet MS" pitchFamily="34" charset="-120"/>
               </a:rPr>
-              <a:t>ed</a:t>
+              <a:t>ment</a:t>
             </a:r>
             <a:endParaRPr lang="en-US" sz="1300" dirty="0"/>
           </a:p>
@@ -27194,7 +26529,7 @@
                 <a:ea typeface="Calibri" pitchFamily="34" charset="-122"/>
                 <a:cs typeface="Calibri" pitchFamily="34" charset="-120"/>
               </a:rPr>
-              <a:t>past tense</a:t>
+              <a:t>result of action</a:t>
             </a:r>
             <a:endParaRPr lang="en-US" sz="850" dirty="0"/>
           </a:p>
@@ -27301,7 +26636,7 @@
         </p:nvSpPr>
         <p:spPr>
           <a:xfrm>
-            <a:off x="2999232" y="3364992"/>
+            <a:off x="2313432" y="3364992"/>
             <a:ext cx="1645920" cy="475488"/>
           </a:xfrm>
           <a:prstGeom prst="rect">
@@ -27328,7 +26663,7 @@
         </p:nvSpPr>
         <p:spPr>
           <a:xfrm>
-            <a:off x="2999232" y="3364992"/>
+            <a:off x="2313432" y="3364992"/>
             <a:ext cx="1645920" cy="475488"/>
           </a:xfrm>
           <a:prstGeom prst="rect">
@@ -27367,8 +26702,8 @@
         </p:nvSpPr>
         <p:spPr>
           <a:xfrm>
-            <a:off x="4645152" y="3364992"/>
-            <a:ext cx="1097280" cy="475488"/>
+            <a:off x="3959352" y="3364992"/>
+            <a:ext cx="411480" cy="475488"/>
           </a:xfrm>
           <a:prstGeom prst="rect">
             <a:avLst/>
@@ -27406,7 +26741,7 @@
         </p:nvSpPr>
         <p:spPr>
           <a:xfrm>
-            <a:off x="5742432" y="3364992"/>
+            <a:off x="4370832" y="3364992"/>
             <a:ext cx="1645920" cy="475488"/>
           </a:xfrm>
           <a:prstGeom prst="rect">
@@ -27433,7 +26768,7 @@
         </p:nvSpPr>
         <p:spPr>
           <a:xfrm>
-            <a:off x="5742432" y="3364992"/>
+            <a:off x="4370832" y="3364992"/>
             <a:ext cx="1645920" cy="475488"/>
           </a:xfrm>
           <a:prstGeom prst="rect">
@@ -27458,7 +26793,7 @@
                 <a:ea typeface="Trebuchet MS" pitchFamily="34" charset="-122"/>
                 <a:cs typeface="Trebuchet MS" pitchFamily="34" charset="-120"/>
               </a:rPr>
-              <a:t>joyed</a:t>
+              <a:t>joy</a:t>
             </a:r>
             <a:endParaRPr lang="en-US" sz="1400" dirty="0"/>
           </a:p>
@@ -27466,7 +26801,112 @@
       </p:sp>
       <p:sp>
         <p:nvSpPr>
-          <p:cNvPr id="30" name="Shape 28"/>
+          <p:cNvPr id="30" name="Text 28"/>
+          <p:cNvSpPr/>
+          <p:nvPr/>
+        </p:nvSpPr>
+        <p:spPr>
+          <a:xfrm>
+            <a:off x="6016752" y="3364992"/>
+            <a:ext cx="411480" cy="475488"/>
+          </a:xfrm>
+          <a:prstGeom prst="rect">
+            <a:avLst/>
+          </a:prstGeom>
+          <a:noFill/>
+          <a:ln/>
+        </p:spPr>
+        <p:txBody>
+          <a:bodyPr wrap="square" lIns="0" tIns="0" rIns="0" bIns="0" rtlCol="0" anchor="ctr"/>
+          <a:lstStyle/>
+          <a:p>
+            <a:pPr algn="ctr" indent="0" marL="0">
+              <a:buNone/>
+            </a:pPr>
+            <a:r>
+              <a:rPr lang="en-US" sz="1600" b="1" dirty="0">
+                <a:solidFill>
+                  <a:srgbClr val="0D9488"/>
+                </a:solidFill>
+                <a:latin typeface="Trebuchet MS" pitchFamily="34" charset="0"/>
+                <a:ea typeface="Trebuchet MS" pitchFamily="34" charset="-122"/>
+                <a:cs typeface="Trebuchet MS" pitchFamily="34" charset="-120"/>
+              </a:rPr>
+              <a:t>·</a:t>
+            </a:r>
+            <a:endParaRPr lang="en-US" sz="1600" dirty="0"/>
+          </a:p>
+        </p:txBody>
+      </p:sp>
+      <p:sp>
+        <p:nvSpPr>
+          <p:cNvPr id="31" name="Shape 29"/>
+          <p:cNvSpPr/>
+          <p:nvPr/>
+        </p:nvSpPr>
+        <p:spPr>
+          <a:xfrm>
+            <a:off x="6428232" y="3364992"/>
+            <a:ext cx="1645920" cy="475488"/>
+          </a:xfrm>
+          <a:prstGeom prst="rect">
+            <a:avLst>
+              <a:gd name="adj" fmla="val 9615"/>
+            </a:avLst>
+          </a:prstGeom>
+          <a:solidFill>
+            <a:srgbClr val="FFFFFF"/>
+          </a:solidFill>
+          <a:ln w="12700">
+            <a:solidFill>
+              <a:srgbClr val="0D9488"/>
+            </a:solidFill>
+            <a:prstDash val="solid"/>
+          </a:ln>
+        </p:spPr>
+      </p:sp>
+      <p:sp>
+        <p:nvSpPr>
+          <p:cNvPr id="32" name="Text 30"/>
+          <p:cNvSpPr/>
+          <p:nvPr/>
+        </p:nvSpPr>
+        <p:spPr>
+          <a:xfrm>
+            <a:off x="6428232" y="3364992"/>
+            <a:ext cx="1645920" cy="475488"/>
+          </a:xfrm>
+          <a:prstGeom prst="rect">
+            <a:avLst/>
+          </a:prstGeom>
+          <a:noFill/>
+          <a:ln/>
+        </p:spPr>
+        <p:txBody>
+          <a:bodyPr wrap="square" lIns="0" tIns="0" rIns="0" bIns="0" rtlCol="0" anchor="ctr"/>
+          <a:lstStyle/>
+          <a:p>
+            <a:pPr algn="ctr" indent="0" marL="0">
+              <a:buNone/>
+            </a:pPr>
+            <a:r>
+              <a:rPr lang="en-US" sz="1400" b="1" dirty="0">
+                <a:solidFill>
+                  <a:srgbClr val="0D9488"/>
+                </a:solidFill>
+                <a:latin typeface="Trebuchet MS" pitchFamily="34" charset="0"/>
+                <a:ea typeface="Trebuchet MS" pitchFamily="34" charset="-122"/>
+                <a:cs typeface="Trebuchet MS" pitchFamily="34" charset="-120"/>
+              </a:rPr>
+              <a:t>ment</a:t>
+            </a:r>
+            <a:endParaRPr lang="en-US" sz="1400" dirty="0"/>
+          </a:p>
+        </p:txBody>
+      </p:sp>
+      <p:sp>
+        <p:nvSpPr>
+          <p:cNvPr id="33" name="Shape 31"/>
           <p:cNvSpPr/>
           <p:nvPr/>
         </p:nvSpPr>
@@ -27493,7 +26933,7 @@
       </p:sp>
       <p:sp>
         <p:nvSpPr>
-          <p:cNvPr id="31" name="Text 29"/>
+          <p:cNvPr id="34" name="Text 32"/>
           <p:cNvSpPr/>
           <p:nvPr/>
         </p:nvSpPr>
@@ -27532,18 +26972,18 @@
       </p:sp>
       <p:sp>
         <p:nvSpPr>
-          <p:cNvPr id="32" name="Shape 30"/>
+          <p:cNvPr id="35" name="Shape 33"/>
           <p:cNvSpPr/>
           <p:nvPr/>
         </p:nvSpPr>
         <p:spPr>
           <a:xfrm>
             <a:off x="1874520" y="4096512"/>
-            <a:ext cx="6903720" cy="804672"/>
+            <a:ext cx="6903720" cy="658368"/>
           </a:xfrm>
           <a:prstGeom prst="rect">
             <a:avLst>
-              <a:gd name="adj" fmla="val 6818"/>
+              <a:gd name="adj" fmla="val 8333"/>
             </a:avLst>
           </a:prstGeom>
           <a:solidFill>
@@ -27559,18 +26999,18 @@
       </p:sp>
       <p:sp>
         <p:nvSpPr>
-          <p:cNvPr id="33" name="Shape 31"/>
-          <p:cNvSpPr/>
-          <p:nvPr/>
-        </p:nvSpPr>
-        <p:spPr>
-          <a:xfrm>
-            <a:off x="2427732" y="4169664"/>
-            <a:ext cx="685800" cy="384048"/>
+          <p:cNvPr id="36" name="Shape 34"/>
+          <p:cNvSpPr/>
+          <p:nvPr/>
+        </p:nvSpPr>
+        <p:spPr>
+          <a:xfrm>
+            <a:off x="2023872" y="4169664"/>
+            <a:ext cx="685800" cy="475488"/>
           </a:xfrm>
           <a:prstGeom prst="rect">
             <a:avLst>
-              <a:gd name="adj" fmla="val 9524"/>
+              <a:gd name="adj" fmla="val 7692"/>
             </a:avLst>
           </a:prstGeom>
           <a:solidFill>
@@ -27586,14 +27026,14 @@
       </p:sp>
       <p:sp>
         <p:nvSpPr>
-          <p:cNvPr id="34" name="Text 32"/>
-          <p:cNvSpPr/>
-          <p:nvPr/>
-        </p:nvSpPr>
-        <p:spPr>
-          <a:xfrm>
-            <a:off x="2427732" y="4169664"/>
-            <a:ext cx="685800" cy="384048"/>
+          <p:cNvPr id="37" name="Text 35"/>
+          <p:cNvSpPr/>
+          <p:nvPr/>
+        </p:nvSpPr>
+        <p:spPr>
+          <a:xfrm>
+            <a:off x="2023872" y="4169664"/>
+            <a:ext cx="685800" cy="475488"/>
           </a:xfrm>
           <a:prstGeom prst="rect">
             <a:avLst/>
@@ -27625,18 +27065,18 @@
       </p:sp>
       <p:sp>
         <p:nvSpPr>
-          <p:cNvPr id="35" name="Shape 33"/>
-          <p:cNvSpPr/>
-          <p:nvPr/>
-        </p:nvSpPr>
-        <p:spPr>
-          <a:xfrm>
-            <a:off x="3639312" y="4169664"/>
-            <a:ext cx="685800" cy="384048"/>
+          <p:cNvPr id="38" name="Shape 36"/>
+          <p:cNvSpPr/>
+          <p:nvPr/>
+        </p:nvSpPr>
+        <p:spPr>
+          <a:xfrm>
+            <a:off x="2831592" y="4169664"/>
+            <a:ext cx="685800" cy="475488"/>
           </a:xfrm>
           <a:prstGeom prst="rect">
             <a:avLst>
-              <a:gd name="adj" fmla="val 9524"/>
+              <a:gd name="adj" fmla="val 7692"/>
             </a:avLst>
           </a:prstGeom>
           <a:solidFill>
@@ -27652,14 +27092,14 @@
       </p:sp>
       <p:sp>
         <p:nvSpPr>
-          <p:cNvPr id="36" name="Text 34"/>
-          <p:cNvSpPr/>
-          <p:nvPr/>
-        </p:nvSpPr>
-        <p:spPr>
-          <a:xfrm>
-            <a:off x="3639312" y="4169664"/>
-            <a:ext cx="685800" cy="384048"/>
+          <p:cNvPr id="39" name="Text 37"/>
+          <p:cNvSpPr/>
+          <p:nvPr/>
+        </p:nvSpPr>
+        <p:spPr>
+          <a:xfrm>
+            <a:off x="2831592" y="4169664"/>
+            <a:ext cx="685800" cy="475488"/>
           </a:xfrm>
           <a:prstGeom prst="rect">
             <a:avLst/>
@@ -27691,18 +27131,18 @@
       </p:sp>
       <p:sp>
         <p:nvSpPr>
-          <p:cNvPr id="37" name="Shape 35"/>
-          <p:cNvSpPr/>
-          <p:nvPr/>
-        </p:nvSpPr>
-        <p:spPr>
-          <a:xfrm>
-            <a:off x="4850892" y="4169664"/>
-            <a:ext cx="685800" cy="384048"/>
+          <p:cNvPr id="40" name="Shape 38"/>
+          <p:cNvSpPr/>
+          <p:nvPr/>
+        </p:nvSpPr>
+        <p:spPr>
+          <a:xfrm>
+            <a:off x="3639312" y="4169664"/>
+            <a:ext cx="685800" cy="475488"/>
           </a:xfrm>
           <a:prstGeom prst="rect">
             <a:avLst>
-              <a:gd name="adj" fmla="val 9524"/>
+              <a:gd name="adj" fmla="val 7692"/>
             </a:avLst>
           </a:prstGeom>
           <a:solidFill>
@@ -27718,14 +27158,14 @@
       </p:sp>
       <p:sp>
         <p:nvSpPr>
-          <p:cNvPr id="38" name="Text 36"/>
-          <p:cNvSpPr/>
-          <p:nvPr/>
-        </p:nvSpPr>
-        <p:spPr>
-          <a:xfrm>
-            <a:off x="4850892" y="4169664"/>
-            <a:ext cx="685800" cy="384048"/>
+          <p:cNvPr id="41" name="Text 39"/>
+          <p:cNvSpPr/>
+          <p:nvPr/>
+        </p:nvSpPr>
+        <p:spPr>
+          <a:xfrm>
+            <a:off x="3639312" y="4169664"/>
+            <a:ext cx="685800" cy="475488"/>
           </a:xfrm>
           <a:prstGeom prst="rect">
             <a:avLst/>
@@ -27757,57 +27197,18 @@
       </p:sp>
       <p:sp>
         <p:nvSpPr>
-          <p:cNvPr id="39" name="Text 37"/>
-          <p:cNvSpPr/>
-          <p:nvPr/>
-        </p:nvSpPr>
-        <p:spPr>
-          <a:xfrm>
-            <a:off x="4850892" y="4572000"/>
-            <a:ext cx="685800" cy="219456"/>
-          </a:xfrm>
-          <a:prstGeom prst="rect">
-            <a:avLst/>
-          </a:prstGeom>
-          <a:noFill/>
-          <a:ln/>
-        </p:spPr>
-        <p:txBody>
-          <a:bodyPr wrap="square" lIns="0" tIns="0" rIns="0" bIns="0" rtlCol="0" anchor="t"/>
-          <a:lstStyle/>
-          <a:p>
-            <a:pPr algn="ctr" indent="0" marL="0">
-              <a:buNone/>
-            </a:pPr>
-            <a:r>
-              <a:rPr lang="en-US" sz="750" i="1" dirty="0">
-                <a:solidFill>
-                  <a:srgbClr val="94A3B8"/>
-                </a:solidFill>
-                <a:latin typeface="Calibri" pitchFamily="34" charset="0"/>
-                <a:ea typeface="Calibri" pitchFamily="34" charset="-122"/>
-                <a:cs typeface="Calibri" pitchFamily="34" charset="-120"/>
-              </a:rPr>
-              <a:t>/j/</a:t>
-            </a:r>
-            <a:endParaRPr lang="en-US" sz="750" dirty="0"/>
-          </a:p>
-        </p:txBody>
-      </p:sp>
-      <p:sp>
-        <p:nvSpPr>
-          <p:cNvPr id="40" name="Shape 38"/>
-          <p:cNvSpPr/>
-          <p:nvPr/>
-        </p:nvSpPr>
-        <p:spPr>
-          <a:xfrm>
-            <a:off x="6062472" y="4169664"/>
-            <a:ext cx="685800" cy="384048"/>
+          <p:cNvPr id="42" name="Shape 40"/>
+          <p:cNvSpPr/>
+          <p:nvPr/>
+        </p:nvSpPr>
+        <p:spPr>
+          <a:xfrm>
+            <a:off x="4447032" y="4169664"/>
+            <a:ext cx="685800" cy="475488"/>
           </a:xfrm>
           <a:prstGeom prst="rect">
             <a:avLst>
-              <a:gd name="adj" fmla="val 9524"/>
+              <a:gd name="adj" fmla="val 7692"/>
             </a:avLst>
           </a:prstGeom>
           <a:solidFill>
@@ -27823,14 +27224,14 @@
       </p:sp>
       <p:sp>
         <p:nvSpPr>
-          <p:cNvPr id="41" name="Text 39"/>
-          <p:cNvSpPr/>
-          <p:nvPr/>
-        </p:nvSpPr>
-        <p:spPr>
-          <a:xfrm>
-            <a:off x="6062472" y="4169664"/>
-            <a:ext cx="685800" cy="384048"/>
+          <p:cNvPr id="43" name="Text 41"/>
+          <p:cNvSpPr/>
+          <p:nvPr/>
+        </p:nvSpPr>
+        <p:spPr>
+          <a:xfrm>
+            <a:off x="4447032" y="4169664"/>
+            <a:ext cx="685800" cy="475488"/>
           </a:xfrm>
           <a:prstGeom prst="rect">
             <a:avLst/>
@@ -27862,18 +27263,18 @@
       </p:sp>
       <p:sp>
         <p:nvSpPr>
-          <p:cNvPr id="42" name="Shape 40"/>
-          <p:cNvSpPr/>
-          <p:nvPr/>
-        </p:nvSpPr>
-        <p:spPr>
-          <a:xfrm>
-            <a:off x="7274052" y="4169664"/>
-            <a:ext cx="685800" cy="384048"/>
+          <p:cNvPr id="44" name="Shape 42"/>
+          <p:cNvSpPr/>
+          <p:nvPr/>
+        </p:nvSpPr>
+        <p:spPr>
+          <a:xfrm>
+            <a:off x="5254752" y="4169664"/>
+            <a:ext cx="685800" cy="475488"/>
           </a:xfrm>
           <a:prstGeom prst="rect">
             <a:avLst>
-              <a:gd name="adj" fmla="val 9524"/>
+              <a:gd name="adj" fmla="val 7692"/>
             </a:avLst>
           </a:prstGeom>
           <a:solidFill>
@@ -27889,14 +27290,14 @@
       </p:sp>
       <p:sp>
         <p:nvSpPr>
-          <p:cNvPr id="43" name="Text 41"/>
-          <p:cNvSpPr/>
-          <p:nvPr/>
-        </p:nvSpPr>
-        <p:spPr>
-          <a:xfrm>
-            <a:off x="7274052" y="4169664"/>
-            <a:ext cx="685800" cy="384048"/>
+          <p:cNvPr id="45" name="Text 43"/>
+          <p:cNvSpPr/>
+          <p:nvPr/>
+        </p:nvSpPr>
+        <p:spPr>
+          <a:xfrm>
+            <a:off x="5254752" y="4169664"/>
+            <a:ext cx="685800" cy="475488"/>
           </a:xfrm>
           <a:prstGeom prst="rect">
             <a:avLst/>
@@ -27920,7 +27321,205 @@
                 <a:ea typeface="Trebuchet MS" pitchFamily="34" charset="-122"/>
                 <a:cs typeface="Trebuchet MS" pitchFamily="34" charset="-120"/>
               </a:rPr>
-              <a:t>ed</a:t>
+              <a:t>m</a:t>
+            </a:r>
+            <a:endParaRPr lang="en-US" sz="900" dirty="0"/>
+          </a:p>
+        </p:txBody>
+      </p:sp>
+      <p:sp>
+        <p:nvSpPr>
+          <p:cNvPr id="46" name="Shape 44"/>
+          <p:cNvSpPr/>
+          <p:nvPr/>
+        </p:nvSpPr>
+        <p:spPr>
+          <a:xfrm>
+            <a:off x="6062472" y="4169664"/>
+            <a:ext cx="685800" cy="475488"/>
+          </a:xfrm>
+          <a:prstGeom prst="rect">
+            <a:avLst>
+              <a:gd name="adj" fmla="val 7692"/>
+            </a:avLst>
+          </a:prstGeom>
+          <a:solidFill>
+            <a:srgbClr val="FFFFFF"/>
+          </a:solidFill>
+          <a:ln w="12700">
+            <a:solidFill>
+              <a:srgbClr val="DB2777"/>
+            </a:solidFill>
+            <a:prstDash val="solid"/>
+          </a:ln>
+        </p:spPr>
+      </p:sp>
+      <p:sp>
+        <p:nvSpPr>
+          <p:cNvPr id="47" name="Text 45"/>
+          <p:cNvSpPr/>
+          <p:nvPr/>
+        </p:nvSpPr>
+        <p:spPr>
+          <a:xfrm>
+            <a:off x="6062472" y="4169664"/>
+            <a:ext cx="685800" cy="475488"/>
+          </a:xfrm>
+          <a:prstGeom prst="rect">
+            <a:avLst/>
+          </a:prstGeom>
+          <a:noFill/>
+          <a:ln/>
+        </p:spPr>
+        <p:txBody>
+          <a:bodyPr wrap="square" lIns="0" tIns="0" rIns="0" bIns="0" rtlCol="0" anchor="ctr"/>
+          <a:lstStyle/>
+          <a:p>
+            <a:pPr algn="ctr" indent="0" marL="0">
+              <a:buNone/>
+            </a:pPr>
+            <a:r>
+              <a:rPr lang="en-US" sz="900" b="1" dirty="0">
+                <a:solidFill>
+                  <a:srgbClr val="9D174D"/>
+                </a:solidFill>
+                <a:latin typeface="Trebuchet MS" pitchFamily="34" charset="0"/>
+                <a:ea typeface="Trebuchet MS" pitchFamily="34" charset="-122"/>
+                <a:cs typeface="Trebuchet MS" pitchFamily="34" charset="-120"/>
+              </a:rPr>
+              <a:t>e</a:t>
+            </a:r>
+            <a:endParaRPr lang="en-US" sz="900" dirty="0"/>
+          </a:p>
+        </p:txBody>
+      </p:sp>
+      <p:sp>
+        <p:nvSpPr>
+          <p:cNvPr id="48" name="Shape 46"/>
+          <p:cNvSpPr/>
+          <p:nvPr/>
+        </p:nvSpPr>
+        <p:spPr>
+          <a:xfrm>
+            <a:off x="6870192" y="4169664"/>
+            <a:ext cx="685800" cy="475488"/>
+          </a:xfrm>
+          <a:prstGeom prst="rect">
+            <a:avLst>
+              <a:gd name="adj" fmla="val 7692"/>
+            </a:avLst>
+          </a:prstGeom>
+          <a:solidFill>
+            <a:srgbClr val="FFFFFF"/>
+          </a:solidFill>
+          <a:ln w="12700">
+            <a:solidFill>
+              <a:srgbClr val="DB2777"/>
+            </a:solidFill>
+            <a:prstDash val="solid"/>
+          </a:ln>
+        </p:spPr>
+      </p:sp>
+      <p:sp>
+        <p:nvSpPr>
+          <p:cNvPr id="49" name="Text 47"/>
+          <p:cNvSpPr/>
+          <p:nvPr/>
+        </p:nvSpPr>
+        <p:spPr>
+          <a:xfrm>
+            <a:off x="6870192" y="4169664"/>
+            <a:ext cx="685800" cy="475488"/>
+          </a:xfrm>
+          <a:prstGeom prst="rect">
+            <a:avLst/>
+          </a:prstGeom>
+          <a:noFill/>
+          <a:ln/>
+        </p:spPr>
+        <p:txBody>
+          <a:bodyPr wrap="square" lIns="0" tIns="0" rIns="0" bIns="0" rtlCol="0" anchor="ctr"/>
+          <a:lstStyle/>
+          <a:p>
+            <a:pPr algn="ctr" indent="0" marL="0">
+              <a:buNone/>
+            </a:pPr>
+            <a:r>
+              <a:rPr lang="en-US" sz="900" b="1" dirty="0">
+                <a:solidFill>
+                  <a:srgbClr val="9D174D"/>
+                </a:solidFill>
+                <a:latin typeface="Trebuchet MS" pitchFamily="34" charset="0"/>
+                <a:ea typeface="Trebuchet MS" pitchFamily="34" charset="-122"/>
+                <a:cs typeface="Trebuchet MS" pitchFamily="34" charset="-120"/>
+              </a:rPr>
+              <a:t>n</a:t>
+            </a:r>
+            <a:endParaRPr lang="en-US" sz="900" dirty="0"/>
+          </a:p>
+        </p:txBody>
+      </p:sp>
+      <p:sp>
+        <p:nvSpPr>
+          <p:cNvPr id="50" name="Shape 48"/>
+          <p:cNvSpPr/>
+          <p:nvPr/>
+        </p:nvSpPr>
+        <p:spPr>
+          <a:xfrm>
+            <a:off x="7677912" y="4169664"/>
+            <a:ext cx="685800" cy="475488"/>
+          </a:xfrm>
+          <a:prstGeom prst="rect">
+            <a:avLst>
+              <a:gd name="adj" fmla="val 7692"/>
+            </a:avLst>
+          </a:prstGeom>
+          <a:solidFill>
+            <a:srgbClr val="FFFFFF"/>
+          </a:solidFill>
+          <a:ln w="12700">
+            <a:solidFill>
+              <a:srgbClr val="DB2777"/>
+            </a:solidFill>
+            <a:prstDash val="solid"/>
+          </a:ln>
+        </p:spPr>
+      </p:sp>
+      <p:sp>
+        <p:nvSpPr>
+          <p:cNvPr id="51" name="Text 49"/>
+          <p:cNvSpPr/>
+          <p:nvPr/>
+        </p:nvSpPr>
+        <p:spPr>
+          <a:xfrm>
+            <a:off x="7677912" y="4169664"/>
+            <a:ext cx="685800" cy="475488"/>
+          </a:xfrm>
+          <a:prstGeom prst="rect">
+            <a:avLst/>
+          </a:prstGeom>
+          <a:noFill/>
+          <a:ln/>
+        </p:spPr>
+        <p:txBody>
+          <a:bodyPr wrap="square" lIns="0" tIns="0" rIns="0" bIns="0" rtlCol="0" anchor="ctr"/>
+          <a:lstStyle/>
+          <a:p>
+            <a:pPr algn="ctr" indent="0" marL="0">
+              <a:buNone/>
+            </a:pPr>
+            <a:r>
+              <a:rPr lang="en-US" sz="900" b="1" dirty="0">
+                <a:solidFill>
+                  <a:srgbClr val="9D174D"/>
+                </a:solidFill>
+                <a:latin typeface="Trebuchet MS" pitchFamily="34" charset="0"/>
+                <a:ea typeface="Trebuchet MS" pitchFamily="34" charset="-122"/>
+                <a:cs typeface="Trebuchet MS" pitchFamily="34" charset="-120"/>
+              </a:rPr>
+              <a:t>t</a:t>
             </a:r>
             <a:endParaRPr lang="en-US" sz="900" dirty="0"/>
           </a:p>
@@ -28212,7 +27811,7 @@
                 <a:ea typeface="Calibri" pitchFamily="34" charset="-122"/>
                 <a:cs typeface="Calibri" pitchFamily="34" charset="-120"/>
               </a:rPr>
-              <a:t>Word Labs  •  wordlabs.app  •  Root: 'enjoy' = to take pleasure in</a:t>
+              <a:t>Word Labs  •  wordlabs.app  •  Root: 'enjoy' = like; take pleasure in</a:t>
             </a:r>
             <a:endParaRPr lang="en-US" sz="800" dirty="0"/>
           </a:p>
@@ -28351,7 +27950,7 @@
                 <a:ea typeface="Trebuchet MS" pitchFamily="34" charset="-122"/>
                 <a:cs typeface="Trebuchet MS" pitchFamily="34" charset="-120"/>
               </a:rPr>
-              <a:t>enjoying</a:t>
+              <a:t>enjoyable</a:t>
             </a:r>
             <a:endParaRPr lang="en-US" sz="2800" dirty="0"/>
           </a:p>
@@ -29039,7 +28638,7 @@
                 <a:ea typeface="Calibri" pitchFamily="34" charset="-122"/>
                 <a:cs typeface="Calibri" pitchFamily="34" charset="-120"/>
               </a:rPr>
-              <a:t>Word Labs  •  wordlabs.app  •  Root: 'enjoy' = to take pleasure in</a:t>
+              <a:t>Word Labs  •  wordlabs.app  •  Root: 'enjoy' = like; take pleasure in</a:t>
             </a:r>
             <a:endParaRPr lang="en-US" sz="800" dirty="0"/>
           </a:p>
@@ -29178,7 +28777,7 @@
                 <a:ea typeface="Trebuchet MS" pitchFamily="34" charset="-122"/>
                 <a:cs typeface="Trebuchet MS" pitchFamily="34" charset="-120"/>
               </a:rPr>
-              <a:t>enjoying</a:t>
+              <a:t>enjoyable</a:t>
             </a:r>
             <a:endParaRPr lang="en-US" sz="2800" dirty="0"/>
           </a:p>
@@ -29356,7 +28955,7 @@
                 <a:ea typeface="Calibri" pitchFamily="34" charset="-122"/>
                 <a:cs typeface="Calibri" pitchFamily="34" charset="-120"/>
               </a:rPr>
-              <a:t>to take pleasure in</a:t>
+              <a:t>like; take pleasure in</a:t>
             </a:r>
             <a:endParaRPr lang="en-US" sz="850" dirty="0"/>
           </a:p>
@@ -29429,7 +29028,7 @@
                 <a:ea typeface="Trebuchet MS" pitchFamily="34" charset="-122"/>
                 <a:cs typeface="Trebuchet MS" pitchFamily="34" charset="-120"/>
               </a:rPr>
-              <a:t>ing</a:t>
+              <a:t>able</a:t>
             </a:r>
             <a:endParaRPr lang="en-US" sz="1300" dirty="0"/>
           </a:p>
@@ -29468,7 +29067,7 @@
                 <a:ea typeface="Calibri" pitchFamily="34" charset="-122"/>
                 <a:cs typeface="Calibri" pitchFamily="34" charset="-120"/>
               </a:rPr>
-              <a:t>happening right now; present participle</a:t>
+              <a:t>able to</a:t>
             </a:r>
             <a:endParaRPr lang="en-US" sz="850" dirty="0"/>
           </a:p>
@@ -30024,7 +29623,7 @@
                 <a:ea typeface="Calibri" pitchFamily="34" charset="-122"/>
                 <a:cs typeface="Calibri" pitchFamily="34" charset="-120"/>
               </a:rPr>
-              <a:t>Word Labs  •  wordlabs.app  •  Root: 'enjoy' = to take pleasure in</a:t>
+              <a:t>Word Labs  •  wordlabs.app  •  Root: 'enjoy' = like; take pleasure in</a:t>
             </a:r>
             <a:endParaRPr lang="en-US" sz="800" dirty="0"/>
           </a:p>
@@ -30163,7 +29762,7 @@
                 <a:ea typeface="Trebuchet MS" pitchFamily="34" charset="-122"/>
                 <a:cs typeface="Trebuchet MS" pitchFamily="34" charset="-120"/>
               </a:rPr>
-              <a:t>enjoying</a:t>
+              <a:t>enjoyable</a:t>
             </a:r>
             <a:endParaRPr lang="en-US" sz="2800" dirty="0"/>
           </a:p>
@@ -30341,7 +29940,7 @@
                 <a:ea typeface="Calibri" pitchFamily="34" charset="-122"/>
                 <a:cs typeface="Calibri" pitchFamily="34" charset="-120"/>
               </a:rPr>
-              <a:t>to take pleasure in</a:t>
+              <a:t>like; take pleasure in</a:t>
             </a:r>
             <a:endParaRPr lang="en-US" sz="850" dirty="0"/>
           </a:p>
@@ -30414,7 +30013,7 @@
                 <a:ea typeface="Trebuchet MS" pitchFamily="34" charset="-122"/>
                 <a:cs typeface="Trebuchet MS" pitchFamily="34" charset="-120"/>
               </a:rPr>
-              <a:t>ing</a:t>
+              <a:t>able</a:t>
             </a:r>
             <a:endParaRPr lang="en-US" sz="1300" dirty="0"/>
           </a:p>
@@ -30453,7 +30052,7 @@
                 <a:ea typeface="Calibri" pitchFamily="34" charset="-122"/>
                 <a:cs typeface="Calibri" pitchFamily="34" charset="-120"/>
               </a:rPr>
-              <a:t>happening right now; present participle</a:t>
+              <a:t>able to</a:t>
             </a:r>
             <a:endParaRPr lang="en-US" sz="850" dirty="0"/>
           </a:p>
@@ -30560,8 +30159,8 @@
         </p:nvSpPr>
         <p:spPr>
           <a:xfrm>
-            <a:off x="2313432" y="3364992"/>
-            <a:ext cx="1645920" cy="475488"/>
+            <a:off x="1975104" y="3364992"/>
+            <a:ext cx="1554480" cy="475488"/>
           </a:xfrm>
           <a:prstGeom prst="rect">
             <a:avLst>
@@ -30587,8 +30186,8 @@
         </p:nvSpPr>
         <p:spPr>
           <a:xfrm>
-            <a:off x="2313432" y="3364992"/>
-            <a:ext cx="1645920" cy="475488"/>
+            <a:off x="1975104" y="3364992"/>
+            <a:ext cx="1554480" cy="475488"/>
           </a:xfrm>
           <a:prstGeom prst="rect">
             <a:avLst/>
@@ -30626,8 +30225,8 @@
         </p:nvSpPr>
         <p:spPr>
           <a:xfrm>
-            <a:off x="3959352" y="3364992"/>
-            <a:ext cx="411480" cy="475488"/>
+            <a:off x="3529584" y="3364992"/>
+            <a:ext cx="73152" cy="475488"/>
           </a:xfrm>
           <a:prstGeom prst="rect">
             <a:avLst/>
@@ -30665,8 +30264,8 @@
         </p:nvSpPr>
         <p:spPr>
           <a:xfrm>
-            <a:off x="4370832" y="3364992"/>
-            <a:ext cx="1645920" cy="475488"/>
+            <a:off x="3602736" y="3364992"/>
+            <a:ext cx="1554480" cy="475488"/>
           </a:xfrm>
           <a:prstGeom prst="rect">
             <a:avLst>
@@ -30692,8 +30291,8 @@
         </p:nvSpPr>
         <p:spPr>
           <a:xfrm>
-            <a:off x="4370832" y="3364992"/>
-            <a:ext cx="1645920" cy="475488"/>
+            <a:off x="3602736" y="3364992"/>
+            <a:ext cx="1554480" cy="475488"/>
           </a:xfrm>
           <a:prstGeom prst="rect">
             <a:avLst/>
@@ -30731,8 +30330,8 @@
         </p:nvSpPr>
         <p:spPr>
           <a:xfrm>
-            <a:off x="6016752" y="3364992"/>
-            <a:ext cx="411480" cy="475488"/>
+            <a:off x="5157216" y="3364992"/>
+            <a:ext cx="73152" cy="475488"/>
           </a:xfrm>
           <a:prstGeom prst="rect">
             <a:avLst/>
@@ -30770,8 +30369,8 @@
         </p:nvSpPr>
         <p:spPr>
           <a:xfrm>
-            <a:off x="6428232" y="3364992"/>
-            <a:ext cx="1645920" cy="475488"/>
+            <a:off x="5230368" y="3364992"/>
+            <a:ext cx="1554480" cy="475488"/>
           </a:xfrm>
           <a:prstGeom prst="rect">
             <a:avLst>
@@ -30797,8 +30396,8 @@
         </p:nvSpPr>
         <p:spPr>
           <a:xfrm>
-            <a:off x="6428232" y="3364992"/>
-            <a:ext cx="1645920" cy="475488"/>
+            <a:off x="5230368" y="3364992"/>
+            <a:ext cx="1554480" cy="475488"/>
           </a:xfrm>
           <a:prstGeom prst="rect">
             <a:avLst/>
@@ -30822,7 +30421,7 @@
                 <a:ea typeface="Trebuchet MS" pitchFamily="34" charset="-122"/>
                 <a:cs typeface="Trebuchet MS" pitchFamily="34" charset="-120"/>
               </a:rPr>
-              <a:t>ing</a:t>
+              <a:t>a</a:t>
             </a:r>
             <a:endParaRPr lang="en-US" sz="1400" dirty="0"/>
           </a:p>
@@ -30830,7 +30429,112 @@
       </p:sp>
       <p:sp>
         <p:nvSpPr>
-          <p:cNvPr id="33" name="Shape 31"/>
+          <p:cNvPr id="33" name="Text 31"/>
+          <p:cNvSpPr/>
+          <p:nvPr/>
+        </p:nvSpPr>
+        <p:spPr>
+          <a:xfrm>
+            <a:off x="6784848" y="3364992"/>
+            <a:ext cx="73152" cy="475488"/>
+          </a:xfrm>
+          <a:prstGeom prst="rect">
+            <a:avLst/>
+          </a:prstGeom>
+          <a:noFill/>
+          <a:ln/>
+        </p:spPr>
+        <p:txBody>
+          <a:bodyPr wrap="square" lIns="0" tIns="0" rIns="0" bIns="0" rtlCol="0" anchor="ctr"/>
+          <a:lstStyle/>
+          <a:p>
+            <a:pPr algn="ctr" indent="0" marL="0">
+              <a:buNone/>
+            </a:pPr>
+            <a:r>
+              <a:rPr lang="en-US" sz="1600" b="1" dirty="0">
+                <a:solidFill>
+                  <a:srgbClr val="0D9488"/>
+                </a:solidFill>
+                <a:latin typeface="Trebuchet MS" pitchFamily="34" charset="0"/>
+                <a:ea typeface="Trebuchet MS" pitchFamily="34" charset="-122"/>
+                <a:cs typeface="Trebuchet MS" pitchFamily="34" charset="-120"/>
+              </a:rPr>
+              <a:t>·</a:t>
+            </a:r>
+            <a:endParaRPr lang="en-US" sz="1600" dirty="0"/>
+          </a:p>
+        </p:txBody>
+      </p:sp>
+      <p:sp>
+        <p:nvSpPr>
+          <p:cNvPr id="34" name="Shape 32"/>
+          <p:cNvSpPr/>
+          <p:nvPr/>
+        </p:nvSpPr>
+        <p:spPr>
+          <a:xfrm>
+            <a:off x="6858000" y="3364992"/>
+            <a:ext cx="1554480" cy="475488"/>
+          </a:xfrm>
+          <a:prstGeom prst="rect">
+            <a:avLst>
+              <a:gd name="adj" fmla="val 9615"/>
+            </a:avLst>
+          </a:prstGeom>
+          <a:solidFill>
+            <a:srgbClr val="FFFFFF"/>
+          </a:solidFill>
+          <a:ln w="12700">
+            <a:solidFill>
+              <a:srgbClr val="0D9488"/>
+            </a:solidFill>
+            <a:prstDash val="solid"/>
+          </a:ln>
+        </p:spPr>
+      </p:sp>
+      <p:sp>
+        <p:nvSpPr>
+          <p:cNvPr id="35" name="Text 33"/>
+          <p:cNvSpPr/>
+          <p:nvPr/>
+        </p:nvSpPr>
+        <p:spPr>
+          <a:xfrm>
+            <a:off x="6858000" y="3364992"/>
+            <a:ext cx="1554480" cy="475488"/>
+          </a:xfrm>
+          <a:prstGeom prst="rect">
+            <a:avLst/>
+          </a:prstGeom>
+          <a:noFill/>
+          <a:ln/>
+        </p:spPr>
+        <p:txBody>
+          <a:bodyPr wrap="square" lIns="0" tIns="0" rIns="0" bIns="0" rtlCol="0" anchor="ctr"/>
+          <a:lstStyle/>
+          <a:p>
+            <a:pPr algn="ctr" indent="0" marL="0">
+              <a:buNone/>
+            </a:pPr>
+            <a:r>
+              <a:rPr lang="en-US" sz="1400" b="1" dirty="0">
+                <a:solidFill>
+                  <a:srgbClr val="0D9488"/>
+                </a:solidFill>
+                <a:latin typeface="Trebuchet MS" pitchFamily="34" charset="0"/>
+                <a:ea typeface="Trebuchet MS" pitchFamily="34" charset="-122"/>
+                <a:cs typeface="Trebuchet MS" pitchFamily="34" charset="-120"/>
+              </a:rPr>
+              <a:t>ble</a:t>
+            </a:r>
+            <a:endParaRPr lang="en-US" sz="1400" dirty="0"/>
+          </a:p>
+        </p:txBody>
+      </p:sp>
+      <p:sp>
+        <p:nvSpPr>
+          <p:cNvPr id="36" name="Shape 34"/>
           <p:cNvSpPr/>
           <p:nvPr/>
         </p:nvSpPr>
@@ -30857,7 +30561,7 @@
       </p:sp>
       <p:sp>
         <p:nvSpPr>
-          <p:cNvPr id="34" name="Text 32"/>
+          <p:cNvPr id="37" name="Text 35"/>
           <p:cNvSpPr/>
           <p:nvPr/>
         </p:nvSpPr>
@@ -30896,7 +30600,7 @@
       </p:sp>
       <p:sp>
         <p:nvSpPr>
-          <p:cNvPr id="35" name="Shape 33"/>
+          <p:cNvPr id="38" name="Shape 36"/>
           <p:cNvSpPr/>
           <p:nvPr/>
         </p:nvSpPr>
@@ -30923,7 +30627,7 @@
       </p:sp>
       <p:sp>
         <p:nvSpPr>
-          <p:cNvPr id="36" name="Text 34"/>
+          <p:cNvPr id="39" name="Text 37"/>
           <p:cNvSpPr/>
           <p:nvPr/>
         </p:nvSpPr>
@@ -31246,7 +30950,7 @@
                 <a:ea typeface="Calibri" pitchFamily="34" charset="-122"/>
                 <a:cs typeface="Calibri" pitchFamily="34" charset="-120"/>
               </a:rPr>
-              <a:t>Word Labs  •  wordlabs.app  •  Root: 'enjoy' = to take pleasure in</a:t>
+              <a:t>Word Labs  •  wordlabs.app  •  Root: 'enjoy' = like; take pleasure in</a:t>
             </a:r>
             <a:endParaRPr lang="en-US" sz="800" dirty="0"/>
           </a:p>
@@ -31385,7 +31089,7 @@
                 <a:ea typeface="Trebuchet MS" pitchFamily="34" charset="-122"/>
                 <a:cs typeface="Trebuchet MS" pitchFamily="34" charset="-120"/>
               </a:rPr>
-              <a:t>enjoying</a:t>
+              <a:t>enjoyable</a:t>
             </a:r>
             <a:endParaRPr lang="en-US" sz="2800" dirty="0"/>
           </a:p>
@@ -31563,7 +31267,7 @@
                 <a:ea typeface="Calibri" pitchFamily="34" charset="-122"/>
                 <a:cs typeface="Calibri" pitchFamily="34" charset="-120"/>
               </a:rPr>
-              <a:t>to take pleasure in</a:t>
+              <a:t>like; take pleasure in</a:t>
             </a:r>
             <a:endParaRPr lang="en-US" sz="850" dirty="0"/>
           </a:p>
@@ -31636,7 +31340,7 @@
                 <a:ea typeface="Trebuchet MS" pitchFamily="34" charset="-122"/>
                 <a:cs typeface="Trebuchet MS" pitchFamily="34" charset="-120"/>
               </a:rPr>
-              <a:t>ing</a:t>
+              <a:t>able</a:t>
             </a:r>
             <a:endParaRPr lang="en-US" sz="1300" dirty="0"/>
           </a:p>
@@ -31675,7 +31379,7 @@
                 <a:ea typeface="Calibri" pitchFamily="34" charset="-122"/>
                 <a:cs typeface="Calibri" pitchFamily="34" charset="-120"/>
               </a:rPr>
-              <a:t>happening right now; present participle</a:t>
+              <a:t>able to</a:t>
             </a:r>
             <a:endParaRPr lang="en-US" sz="850" dirty="0"/>
           </a:p>
@@ -31782,8 +31486,8 @@
         </p:nvSpPr>
         <p:spPr>
           <a:xfrm>
-            <a:off x="2313432" y="3364992"/>
-            <a:ext cx="1645920" cy="475488"/>
+            <a:off x="1975104" y="3364992"/>
+            <a:ext cx="1554480" cy="475488"/>
           </a:xfrm>
           <a:prstGeom prst="rect">
             <a:avLst>
@@ -31809,8 +31513,8 @@
         </p:nvSpPr>
         <p:spPr>
           <a:xfrm>
-            <a:off x="2313432" y="3364992"/>
-            <a:ext cx="1645920" cy="475488"/>
+            <a:off x="1975104" y="3364992"/>
+            <a:ext cx="1554480" cy="475488"/>
           </a:xfrm>
           <a:prstGeom prst="rect">
             <a:avLst/>
@@ -31848,8 +31552,8 @@
         </p:nvSpPr>
         <p:spPr>
           <a:xfrm>
-            <a:off x="3959352" y="3364992"/>
-            <a:ext cx="411480" cy="475488"/>
+            <a:off x="3529584" y="3364992"/>
+            <a:ext cx="73152" cy="475488"/>
           </a:xfrm>
           <a:prstGeom prst="rect">
             <a:avLst/>
@@ -31887,8 +31591,8 @@
         </p:nvSpPr>
         <p:spPr>
           <a:xfrm>
-            <a:off x="4370832" y="3364992"/>
-            <a:ext cx="1645920" cy="475488"/>
+            <a:off x="3602736" y="3364992"/>
+            <a:ext cx="1554480" cy="475488"/>
           </a:xfrm>
           <a:prstGeom prst="rect">
             <a:avLst>
@@ -31914,8 +31618,8 @@
         </p:nvSpPr>
         <p:spPr>
           <a:xfrm>
-            <a:off x="4370832" y="3364992"/>
-            <a:ext cx="1645920" cy="475488"/>
+            <a:off x="3602736" y="3364992"/>
+            <a:ext cx="1554480" cy="475488"/>
           </a:xfrm>
           <a:prstGeom prst="rect">
             <a:avLst/>
@@ -31953,8 +31657,8 @@
         </p:nvSpPr>
         <p:spPr>
           <a:xfrm>
-            <a:off x="6016752" y="3364992"/>
-            <a:ext cx="411480" cy="475488"/>
+            <a:off x="5157216" y="3364992"/>
+            <a:ext cx="73152" cy="475488"/>
           </a:xfrm>
           <a:prstGeom prst="rect">
             <a:avLst/>
@@ -31992,8 +31696,8 @@
         </p:nvSpPr>
         <p:spPr>
           <a:xfrm>
-            <a:off x="6428232" y="3364992"/>
-            <a:ext cx="1645920" cy="475488"/>
+            <a:off x="5230368" y="3364992"/>
+            <a:ext cx="1554480" cy="475488"/>
           </a:xfrm>
           <a:prstGeom prst="rect">
             <a:avLst>
@@ -32019,8 +31723,8 @@
         </p:nvSpPr>
         <p:spPr>
           <a:xfrm>
-            <a:off x="6428232" y="3364992"/>
-            <a:ext cx="1645920" cy="475488"/>
+            <a:off x="5230368" y="3364992"/>
+            <a:ext cx="1554480" cy="475488"/>
           </a:xfrm>
           <a:prstGeom prst="rect">
             <a:avLst/>
@@ -32044,7 +31748,7 @@
                 <a:ea typeface="Trebuchet MS" pitchFamily="34" charset="-122"/>
                 <a:cs typeface="Trebuchet MS" pitchFamily="34" charset="-120"/>
               </a:rPr>
-              <a:t>ing</a:t>
+              <a:t>a</a:t>
             </a:r>
             <a:endParaRPr lang="en-US" sz="1400" dirty="0"/>
           </a:p>
@@ -32052,7 +31756,112 @@
       </p:sp>
       <p:sp>
         <p:nvSpPr>
-          <p:cNvPr id="33" name="Shape 31"/>
+          <p:cNvPr id="33" name="Text 31"/>
+          <p:cNvSpPr/>
+          <p:nvPr/>
+        </p:nvSpPr>
+        <p:spPr>
+          <a:xfrm>
+            <a:off x="6784848" y="3364992"/>
+            <a:ext cx="73152" cy="475488"/>
+          </a:xfrm>
+          <a:prstGeom prst="rect">
+            <a:avLst/>
+          </a:prstGeom>
+          <a:noFill/>
+          <a:ln/>
+        </p:spPr>
+        <p:txBody>
+          <a:bodyPr wrap="square" lIns="0" tIns="0" rIns="0" bIns="0" rtlCol="0" anchor="ctr"/>
+          <a:lstStyle/>
+          <a:p>
+            <a:pPr algn="ctr" indent="0" marL="0">
+              <a:buNone/>
+            </a:pPr>
+            <a:r>
+              <a:rPr lang="en-US" sz="1600" b="1" dirty="0">
+                <a:solidFill>
+                  <a:srgbClr val="0D9488"/>
+                </a:solidFill>
+                <a:latin typeface="Trebuchet MS" pitchFamily="34" charset="0"/>
+                <a:ea typeface="Trebuchet MS" pitchFamily="34" charset="-122"/>
+                <a:cs typeface="Trebuchet MS" pitchFamily="34" charset="-120"/>
+              </a:rPr>
+              <a:t>·</a:t>
+            </a:r>
+            <a:endParaRPr lang="en-US" sz="1600" dirty="0"/>
+          </a:p>
+        </p:txBody>
+      </p:sp>
+      <p:sp>
+        <p:nvSpPr>
+          <p:cNvPr id="34" name="Shape 32"/>
+          <p:cNvSpPr/>
+          <p:nvPr/>
+        </p:nvSpPr>
+        <p:spPr>
+          <a:xfrm>
+            <a:off x="6858000" y="3364992"/>
+            <a:ext cx="1554480" cy="475488"/>
+          </a:xfrm>
+          <a:prstGeom prst="rect">
+            <a:avLst>
+              <a:gd name="adj" fmla="val 9615"/>
+            </a:avLst>
+          </a:prstGeom>
+          <a:solidFill>
+            <a:srgbClr val="FFFFFF"/>
+          </a:solidFill>
+          <a:ln w="12700">
+            <a:solidFill>
+              <a:srgbClr val="0D9488"/>
+            </a:solidFill>
+            <a:prstDash val="solid"/>
+          </a:ln>
+        </p:spPr>
+      </p:sp>
+      <p:sp>
+        <p:nvSpPr>
+          <p:cNvPr id="35" name="Text 33"/>
+          <p:cNvSpPr/>
+          <p:nvPr/>
+        </p:nvSpPr>
+        <p:spPr>
+          <a:xfrm>
+            <a:off x="6858000" y="3364992"/>
+            <a:ext cx="1554480" cy="475488"/>
+          </a:xfrm>
+          <a:prstGeom prst="rect">
+            <a:avLst/>
+          </a:prstGeom>
+          <a:noFill/>
+          <a:ln/>
+        </p:spPr>
+        <p:txBody>
+          <a:bodyPr wrap="square" lIns="0" tIns="0" rIns="0" bIns="0" rtlCol="0" anchor="ctr"/>
+          <a:lstStyle/>
+          <a:p>
+            <a:pPr algn="ctr" indent="0" marL="0">
+              <a:buNone/>
+            </a:pPr>
+            <a:r>
+              <a:rPr lang="en-US" sz="1400" b="1" dirty="0">
+                <a:solidFill>
+                  <a:srgbClr val="0D9488"/>
+                </a:solidFill>
+                <a:latin typeface="Trebuchet MS" pitchFamily="34" charset="0"/>
+                <a:ea typeface="Trebuchet MS" pitchFamily="34" charset="-122"/>
+                <a:cs typeface="Trebuchet MS" pitchFamily="34" charset="-120"/>
+              </a:rPr>
+              <a:t>ble</a:t>
+            </a:r>
+            <a:endParaRPr lang="en-US" sz="1400" dirty="0"/>
+          </a:p>
+        </p:txBody>
+      </p:sp>
+      <p:sp>
+        <p:nvSpPr>
+          <p:cNvPr id="36" name="Shape 34"/>
           <p:cNvSpPr/>
           <p:nvPr/>
         </p:nvSpPr>
@@ -32079,7 +31888,7 @@
       </p:sp>
       <p:sp>
         <p:nvSpPr>
-          <p:cNvPr id="34" name="Text 32"/>
+          <p:cNvPr id="37" name="Text 35"/>
           <p:cNvSpPr/>
           <p:nvPr/>
         </p:nvSpPr>
@@ -32118,18 +31927,18 @@
       </p:sp>
       <p:sp>
         <p:nvSpPr>
-          <p:cNvPr id="35" name="Shape 33"/>
+          <p:cNvPr id="38" name="Shape 36"/>
           <p:cNvSpPr/>
           <p:nvPr/>
         </p:nvSpPr>
         <p:spPr>
           <a:xfrm>
             <a:off x="1874520" y="4096512"/>
-            <a:ext cx="6903720" cy="804672"/>
+            <a:ext cx="6903720" cy="658368"/>
           </a:xfrm>
           <a:prstGeom prst="rect">
             <a:avLst>
-              <a:gd name="adj" fmla="val 6818"/>
+              <a:gd name="adj" fmla="val 8333"/>
             </a:avLst>
           </a:prstGeom>
           <a:solidFill>
@@ -32145,18 +31954,18 @@
       </p:sp>
       <p:sp>
         <p:nvSpPr>
-          <p:cNvPr id="36" name="Shape 34"/>
-          <p:cNvSpPr/>
-          <p:nvPr/>
-        </p:nvSpPr>
-        <p:spPr>
-          <a:xfrm>
-            <a:off x="2254649" y="4169664"/>
-            <a:ext cx="685800" cy="384048"/>
+          <p:cNvPr id="39" name="Shape 37"/>
+          <p:cNvSpPr/>
+          <p:nvPr/>
+        </p:nvSpPr>
+        <p:spPr>
+          <a:xfrm>
+            <a:off x="2124837" y="4169664"/>
+            <a:ext cx="685800" cy="475488"/>
           </a:xfrm>
           <a:prstGeom prst="rect">
             <a:avLst>
-              <a:gd name="adj" fmla="val 9524"/>
+              <a:gd name="adj" fmla="val 7692"/>
             </a:avLst>
           </a:prstGeom>
           <a:solidFill>
@@ -32172,14 +31981,14 @@
       </p:sp>
       <p:sp>
         <p:nvSpPr>
-          <p:cNvPr id="37" name="Text 35"/>
-          <p:cNvSpPr/>
-          <p:nvPr/>
-        </p:nvSpPr>
-        <p:spPr>
-          <a:xfrm>
-            <a:off x="2254649" y="4169664"/>
-            <a:ext cx="685800" cy="384048"/>
+          <p:cNvPr id="40" name="Text 38"/>
+          <p:cNvSpPr/>
+          <p:nvPr/>
+        </p:nvSpPr>
+        <p:spPr>
+          <a:xfrm>
+            <a:off x="2124837" y="4169664"/>
+            <a:ext cx="685800" cy="475488"/>
           </a:xfrm>
           <a:prstGeom prst="rect">
             <a:avLst/>
@@ -32211,18 +32020,18 @@
       </p:sp>
       <p:sp>
         <p:nvSpPr>
-          <p:cNvPr id="38" name="Shape 36"/>
-          <p:cNvSpPr/>
-          <p:nvPr/>
-        </p:nvSpPr>
-        <p:spPr>
-          <a:xfrm>
-            <a:off x="3293146" y="4169664"/>
-            <a:ext cx="685800" cy="384048"/>
+          <p:cNvPr id="41" name="Shape 39"/>
+          <p:cNvSpPr/>
+          <p:nvPr/>
+        </p:nvSpPr>
+        <p:spPr>
+          <a:xfrm>
+            <a:off x="3033522" y="4169664"/>
+            <a:ext cx="685800" cy="475488"/>
           </a:xfrm>
           <a:prstGeom prst="rect">
             <a:avLst>
-              <a:gd name="adj" fmla="val 9524"/>
+              <a:gd name="adj" fmla="val 7692"/>
             </a:avLst>
           </a:prstGeom>
           <a:solidFill>
@@ -32238,14 +32047,14 @@
       </p:sp>
       <p:sp>
         <p:nvSpPr>
-          <p:cNvPr id="39" name="Text 37"/>
-          <p:cNvSpPr/>
-          <p:nvPr/>
-        </p:nvSpPr>
-        <p:spPr>
-          <a:xfrm>
-            <a:off x="3293146" y="4169664"/>
-            <a:ext cx="685800" cy="384048"/>
+          <p:cNvPr id="42" name="Text 40"/>
+          <p:cNvSpPr/>
+          <p:nvPr/>
+        </p:nvSpPr>
+        <p:spPr>
+          <a:xfrm>
+            <a:off x="3033522" y="4169664"/>
+            <a:ext cx="685800" cy="475488"/>
           </a:xfrm>
           <a:prstGeom prst="rect">
             <a:avLst/>
@@ -32277,18 +32086,18 @@
       </p:sp>
       <p:sp>
         <p:nvSpPr>
-          <p:cNvPr id="40" name="Shape 38"/>
-          <p:cNvSpPr/>
-          <p:nvPr/>
-        </p:nvSpPr>
-        <p:spPr>
-          <a:xfrm>
-            <a:off x="4331643" y="4169664"/>
-            <a:ext cx="685800" cy="384048"/>
+          <p:cNvPr id="43" name="Shape 41"/>
+          <p:cNvSpPr/>
+          <p:nvPr/>
+        </p:nvSpPr>
+        <p:spPr>
+          <a:xfrm>
+            <a:off x="3942207" y="4169664"/>
+            <a:ext cx="685800" cy="475488"/>
           </a:xfrm>
           <a:prstGeom prst="rect">
             <a:avLst>
-              <a:gd name="adj" fmla="val 9524"/>
+              <a:gd name="adj" fmla="val 7692"/>
             </a:avLst>
           </a:prstGeom>
           <a:solidFill>
@@ -32304,14 +32113,14 @@
       </p:sp>
       <p:sp>
         <p:nvSpPr>
-          <p:cNvPr id="41" name="Text 39"/>
-          <p:cNvSpPr/>
-          <p:nvPr/>
-        </p:nvSpPr>
-        <p:spPr>
-          <a:xfrm>
-            <a:off x="4331643" y="4169664"/>
-            <a:ext cx="685800" cy="384048"/>
+          <p:cNvPr id="44" name="Text 42"/>
+          <p:cNvSpPr/>
+          <p:nvPr/>
+        </p:nvSpPr>
+        <p:spPr>
+          <a:xfrm>
+            <a:off x="3942207" y="4169664"/>
+            <a:ext cx="685800" cy="475488"/>
           </a:xfrm>
           <a:prstGeom prst="rect">
             <a:avLst/>
@@ -32343,57 +32152,18 @@
       </p:sp>
       <p:sp>
         <p:nvSpPr>
-          <p:cNvPr id="42" name="Text 40"/>
-          <p:cNvSpPr/>
-          <p:nvPr/>
-        </p:nvSpPr>
-        <p:spPr>
-          <a:xfrm>
-            <a:off x="4331643" y="4572000"/>
-            <a:ext cx="685800" cy="219456"/>
-          </a:xfrm>
-          <a:prstGeom prst="rect">
-            <a:avLst/>
-          </a:prstGeom>
-          <a:noFill/>
-          <a:ln/>
-        </p:spPr>
-        <p:txBody>
-          <a:bodyPr wrap="square" lIns="0" tIns="0" rIns="0" bIns="0" rtlCol="0" anchor="t"/>
-          <a:lstStyle/>
-          <a:p>
-            <a:pPr algn="ctr" indent="0" marL="0">
-              <a:buNone/>
-            </a:pPr>
-            <a:r>
-              <a:rPr lang="en-US" sz="750" i="1" dirty="0">
-                <a:solidFill>
-                  <a:srgbClr val="94A3B8"/>
-                </a:solidFill>
-                <a:latin typeface="Calibri" pitchFamily="34" charset="0"/>
-                <a:ea typeface="Calibri" pitchFamily="34" charset="-122"/>
-                <a:cs typeface="Calibri" pitchFamily="34" charset="-120"/>
-              </a:rPr>
-              <a:t>/j/</a:t>
-            </a:r>
-            <a:endParaRPr lang="en-US" sz="750" dirty="0"/>
-          </a:p>
-        </p:txBody>
-      </p:sp>
-      <p:sp>
-        <p:nvSpPr>
-          <p:cNvPr id="43" name="Shape 41"/>
-          <p:cNvSpPr/>
-          <p:nvPr/>
-        </p:nvSpPr>
-        <p:spPr>
-          <a:xfrm>
-            <a:off x="5370141" y="4169664"/>
-            <a:ext cx="685800" cy="384048"/>
+          <p:cNvPr id="45" name="Shape 43"/>
+          <p:cNvSpPr/>
+          <p:nvPr/>
+        </p:nvSpPr>
+        <p:spPr>
+          <a:xfrm>
+            <a:off x="4850892" y="4169664"/>
+            <a:ext cx="685800" cy="475488"/>
           </a:xfrm>
           <a:prstGeom prst="rect">
             <a:avLst>
-              <a:gd name="adj" fmla="val 9524"/>
+              <a:gd name="adj" fmla="val 7692"/>
             </a:avLst>
           </a:prstGeom>
           <a:solidFill>
@@ -32409,14 +32179,14 @@
       </p:sp>
       <p:sp>
         <p:nvSpPr>
-          <p:cNvPr id="44" name="Text 42"/>
-          <p:cNvSpPr/>
-          <p:nvPr/>
-        </p:nvSpPr>
-        <p:spPr>
-          <a:xfrm>
-            <a:off x="5370141" y="4169664"/>
-            <a:ext cx="685800" cy="384048"/>
+          <p:cNvPr id="46" name="Text 44"/>
+          <p:cNvSpPr/>
+          <p:nvPr/>
+        </p:nvSpPr>
+        <p:spPr>
+          <a:xfrm>
+            <a:off x="4850892" y="4169664"/>
+            <a:ext cx="685800" cy="475488"/>
           </a:xfrm>
           <a:prstGeom prst="rect">
             <a:avLst/>
@@ -32448,18 +32218,18 @@
       </p:sp>
       <p:sp>
         <p:nvSpPr>
-          <p:cNvPr id="45" name="Shape 43"/>
-          <p:cNvSpPr/>
-          <p:nvPr/>
-        </p:nvSpPr>
-        <p:spPr>
-          <a:xfrm>
-            <a:off x="6408638" y="4169664"/>
-            <a:ext cx="685800" cy="384048"/>
+          <p:cNvPr id="47" name="Shape 45"/>
+          <p:cNvSpPr/>
+          <p:nvPr/>
+        </p:nvSpPr>
+        <p:spPr>
+          <a:xfrm>
+            <a:off x="5759577" y="4169664"/>
+            <a:ext cx="685800" cy="475488"/>
           </a:xfrm>
           <a:prstGeom prst="rect">
             <a:avLst>
-              <a:gd name="adj" fmla="val 9524"/>
+              <a:gd name="adj" fmla="val 7692"/>
             </a:avLst>
           </a:prstGeom>
           <a:solidFill>
@@ -32475,14 +32245,14 @@
       </p:sp>
       <p:sp>
         <p:nvSpPr>
-          <p:cNvPr id="46" name="Text 44"/>
-          <p:cNvSpPr/>
-          <p:nvPr/>
-        </p:nvSpPr>
-        <p:spPr>
-          <a:xfrm>
-            <a:off x="6408638" y="4169664"/>
-            <a:ext cx="685800" cy="384048"/>
+          <p:cNvPr id="48" name="Text 46"/>
+          <p:cNvSpPr/>
+          <p:nvPr/>
+        </p:nvSpPr>
+        <p:spPr>
+          <a:xfrm>
+            <a:off x="5759577" y="4169664"/>
+            <a:ext cx="685800" cy="475488"/>
           </a:xfrm>
           <a:prstGeom prst="rect">
             <a:avLst/>
@@ -32506,7 +32276,7 @@
                 <a:ea typeface="Trebuchet MS" pitchFamily="34" charset="-122"/>
                 <a:cs typeface="Trebuchet MS" pitchFamily="34" charset="-120"/>
               </a:rPr>
-              <a:t>i</a:t>
+              <a:t>a</a:t>
             </a:r>
             <a:endParaRPr lang="en-US" sz="900" dirty="0"/>
           </a:p>
@@ -32514,18 +32284,18 @@
       </p:sp>
       <p:sp>
         <p:nvSpPr>
-          <p:cNvPr id="47" name="Shape 45"/>
-          <p:cNvSpPr/>
-          <p:nvPr/>
-        </p:nvSpPr>
-        <p:spPr>
-          <a:xfrm>
-            <a:off x="7447135" y="4169664"/>
-            <a:ext cx="685800" cy="384048"/>
+          <p:cNvPr id="49" name="Shape 47"/>
+          <p:cNvSpPr/>
+          <p:nvPr/>
+        </p:nvSpPr>
+        <p:spPr>
+          <a:xfrm>
+            <a:off x="6668262" y="4169664"/>
+            <a:ext cx="685800" cy="475488"/>
           </a:xfrm>
           <a:prstGeom prst="rect">
             <a:avLst>
-              <a:gd name="adj" fmla="val 9524"/>
+              <a:gd name="adj" fmla="val 7692"/>
             </a:avLst>
           </a:prstGeom>
           <a:solidFill>
@@ -32541,14 +32311,14 @@
       </p:sp>
       <p:sp>
         <p:nvSpPr>
-          <p:cNvPr id="48" name="Text 46"/>
-          <p:cNvSpPr/>
-          <p:nvPr/>
-        </p:nvSpPr>
-        <p:spPr>
-          <a:xfrm>
-            <a:off x="7447135" y="4169664"/>
-            <a:ext cx="685800" cy="384048"/>
+          <p:cNvPr id="50" name="Text 48"/>
+          <p:cNvSpPr/>
+          <p:nvPr/>
+        </p:nvSpPr>
+        <p:spPr>
+          <a:xfrm>
+            <a:off x="6668262" y="4169664"/>
+            <a:ext cx="685800" cy="475488"/>
           </a:xfrm>
           <a:prstGeom prst="rect">
             <a:avLst/>
@@ -32572,7 +32342,73 @@
                 <a:ea typeface="Trebuchet MS" pitchFamily="34" charset="-122"/>
                 <a:cs typeface="Trebuchet MS" pitchFamily="34" charset="-120"/>
               </a:rPr>
-              <a:t>ng</a:t>
+              <a:t>b</a:t>
+            </a:r>
+            <a:endParaRPr lang="en-US" sz="900" dirty="0"/>
+          </a:p>
+        </p:txBody>
+      </p:sp>
+      <p:sp>
+        <p:nvSpPr>
+          <p:cNvPr id="51" name="Shape 49"/>
+          <p:cNvSpPr/>
+          <p:nvPr/>
+        </p:nvSpPr>
+        <p:spPr>
+          <a:xfrm>
+            <a:off x="7576947" y="4169664"/>
+            <a:ext cx="685800" cy="475488"/>
+          </a:xfrm>
+          <a:prstGeom prst="rect">
+            <a:avLst>
+              <a:gd name="adj" fmla="val 7692"/>
+            </a:avLst>
+          </a:prstGeom>
+          <a:solidFill>
+            <a:srgbClr val="FFFFFF"/>
+          </a:solidFill>
+          <a:ln w="12700">
+            <a:solidFill>
+              <a:srgbClr val="DB2777"/>
+            </a:solidFill>
+            <a:prstDash val="solid"/>
+          </a:ln>
+        </p:spPr>
+      </p:sp>
+      <p:sp>
+        <p:nvSpPr>
+          <p:cNvPr id="52" name="Text 50"/>
+          <p:cNvSpPr/>
+          <p:nvPr/>
+        </p:nvSpPr>
+        <p:spPr>
+          <a:xfrm>
+            <a:off x="7576947" y="4169664"/>
+            <a:ext cx="685800" cy="475488"/>
+          </a:xfrm>
+          <a:prstGeom prst="rect">
+            <a:avLst/>
+          </a:prstGeom>
+          <a:noFill/>
+          <a:ln/>
+        </p:spPr>
+        <p:txBody>
+          <a:bodyPr wrap="square" lIns="0" tIns="0" rIns="0" bIns="0" rtlCol="0" anchor="ctr"/>
+          <a:lstStyle/>
+          <a:p>
+            <a:pPr algn="ctr" indent="0" marL="0">
+              <a:buNone/>
+            </a:pPr>
+            <a:r>
+              <a:rPr lang="en-US" sz="900" b="1" dirty="0">
+                <a:solidFill>
+                  <a:srgbClr val="9D174D"/>
+                </a:solidFill>
+                <a:latin typeface="Trebuchet MS" pitchFamily="34" charset="0"/>
+                <a:ea typeface="Trebuchet MS" pitchFamily="34" charset="-122"/>
+                <a:cs typeface="Trebuchet MS" pitchFamily="34" charset="-120"/>
+              </a:rPr>
+              <a:t>le</a:t>
             </a:r>
             <a:endParaRPr lang="en-US" sz="900" dirty="0"/>
           </a:p>
@@ -32864,7 +32700,7 @@
                 <a:ea typeface="Calibri" pitchFamily="34" charset="-122"/>
                 <a:cs typeface="Calibri" pitchFamily="34" charset="-120"/>
               </a:rPr>
-              <a:t>Word Labs  •  wordlabs.app  •  Root: 'enjoy' = to take pleasure in</a:t>
+              <a:t>Word Labs  •  wordlabs.app  •  Root: 'enjoy' = like; take pleasure in</a:t>
             </a:r>
             <a:endParaRPr lang="en-US" sz="800" dirty="0"/>
           </a:p>
@@ -34033,7 +33869,7 @@
                 <a:ea typeface="Calibri" pitchFamily="34" charset="-122"/>
                 <a:cs typeface="Calibri" pitchFamily="34" charset="-120"/>
               </a:rPr>
-              <a:t>Word Labs  •  wordlabs.app  •  Root: 'enjoy' = to take pleasure in</a:t>
+              <a:t>Word Labs  •  wordlabs.app  •  Root: 'enjoy' = like; take pleasure in</a:t>
             </a:r>
             <a:endParaRPr lang="en-US" sz="800" dirty="0"/>
           </a:p>
@@ -34291,7 +34127,7 @@
             <a:avLst/>
           </a:prstGeom>
           <a:solidFill>
-            <a:srgbClr val="DDD6FE"/>
+            <a:srgbClr val="F8FAFC"/>
           </a:solidFill>
           <a:ln w="12700">
             <a:solidFill>
@@ -34303,14 +34139,39 @@
       </p:sp>
       <p:sp>
         <p:nvSpPr>
-          <p:cNvPr id="18" name="Text 16"/>
-          <p:cNvSpPr/>
-          <p:nvPr/>
-        </p:nvSpPr>
-        <p:spPr>
-          <a:xfrm>
-            <a:off x="365760" y="1563624"/>
-            <a:ext cx="2468880" cy="402336"/>
+          <p:cNvPr id="18" name="Shape 16"/>
+          <p:cNvSpPr/>
+          <p:nvPr/>
+        </p:nvSpPr>
+        <p:spPr>
+          <a:xfrm>
+            <a:off x="2971800" y="1563624"/>
+            <a:ext cx="2834640" cy="402336"/>
+          </a:xfrm>
+          <a:prstGeom prst="rect">
+            <a:avLst/>
+          </a:prstGeom>
+          <a:solidFill>
+            <a:srgbClr val="CCFBF1"/>
+          </a:solidFill>
+          <a:ln w="12700">
+            <a:solidFill>
+              <a:srgbClr val="E2E8F0"/>
+            </a:solidFill>
+            <a:prstDash val="solid"/>
+          </a:ln>
+        </p:spPr>
+      </p:sp>
+      <p:sp>
+        <p:nvSpPr>
+          <p:cNvPr id="19" name="Text 17"/>
+          <p:cNvSpPr/>
+          <p:nvPr/>
+        </p:nvSpPr>
+        <p:spPr>
+          <a:xfrm>
+            <a:off x="2971800" y="1563624"/>
+            <a:ext cx="2834640" cy="402336"/>
           </a:xfrm>
           <a:prstGeom prst="rect">
             <a:avLst/>
@@ -34328,13 +34189,13 @@
             <a:r>
               <a:rPr lang="en-US" sz="1300" b="1" dirty="0">
                 <a:solidFill>
-                  <a:srgbClr val="4C1D95"/>
+                  <a:srgbClr val="0F766E"/>
                 </a:solidFill>
                 <a:latin typeface="Trebuchet MS" pitchFamily="34" charset="0"/>
                 <a:ea typeface="Trebuchet MS" pitchFamily="34" charset="-122"/>
                 <a:cs typeface="Trebuchet MS" pitchFamily="34" charset="-120"/>
               </a:rPr>
-              <a:t>un-</a:t>
+              <a:t>enjoy</a:t>
             </a:r>
             <a:endParaRPr lang="en-US" sz="1300" dirty="0"/>
           </a:p>
@@ -34342,20 +34203,20 @@
       </p:sp>
       <p:sp>
         <p:nvSpPr>
-          <p:cNvPr id="19" name="Shape 17"/>
-          <p:cNvSpPr/>
-          <p:nvPr/>
-        </p:nvSpPr>
-        <p:spPr>
-          <a:xfrm>
-            <a:off x="2971800" y="1563624"/>
+          <p:cNvPr id="20" name="Shape 18"/>
+          <p:cNvSpPr/>
+          <p:nvPr/>
+        </p:nvSpPr>
+        <p:spPr>
+          <a:xfrm>
+            <a:off x="5943600" y="1563624"/>
             <a:ext cx="2834640" cy="402336"/>
           </a:xfrm>
           <a:prstGeom prst="rect">
             <a:avLst/>
           </a:prstGeom>
           <a:solidFill>
-            <a:srgbClr val="CCFBF1"/>
+            <a:srgbClr val="FCE7F3"/>
           </a:solidFill>
           <a:ln w="12700">
             <a:solidFill>
@@ -34367,13 +34228,13 @@
       </p:sp>
       <p:sp>
         <p:nvSpPr>
-          <p:cNvPr id="20" name="Text 18"/>
-          <p:cNvSpPr/>
-          <p:nvPr/>
-        </p:nvSpPr>
-        <p:spPr>
-          <a:xfrm>
-            <a:off x="2971800" y="1563624"/>
+          <p:cNvPr id="21" name="Text 19"/>
+          <p:cNvSpPr/>
+          <p:nvPr/>
+        </p:nvSpPr>
+        <p:spPr>
+          <a:xfrm>
+            <a:off x="5943600" y="1563624"/>
             <a:ext cx="2834640" cy="402336"/>
           </a:xfrm>
           <a:prstGeom prst="rect">
@@ -34392,13 +34253,13 @@
             <a:r>
               <a:rPr lang="en-US" sz="1300" b="1" dirty="0">
                 <a:solidFill>
-                  <a:srgbClr val="0F766E"/>
+                  <a:srgbClr val="9D174D"/>
                 </a:solidFill>
                 <a:latin typeface="Trebuchet MS" pitchFamily="34" charset="0"/>
                 <a:ea typeface="Trebuchet MS" pitchFamily="34" charset="-122"/>
                 <a:cs typeface="Trebuchet MS" pitchFamily="34" charset="-120"/>
               </a:rPr>
-              <a:t>enjoy</a:t>
+              <a:t>-able</a:t>
             </a:r>
             <a:endParaRPr lang="en-US" sz="1300" dirty="0"/>
           </a:p>
@@ -34406,19 +34267,69 @@
       </p:sp>
       <p:sp>
         <p:nvSpPr>
-          <p:cNvPr id="21" name="Shape 19"/>
-          <p:cNvSpPr/>
-          <p:nvPr/>
-        </p:nvSpPr>
-        <p:spPr>
-          <a:xfrm>
-            <a:off x="5943600" y="1563624"/>
+          <p:cNvPr id="22" name="Shape 20"/>
+          <p:cNvSpPr/>
+          <p:nvPr/>
+        </p:nvSpPr>
+        <p:spPr>
+          <a:xfrm>
+            <a:off x="365760" y="1984248"/>
+            <a:ext cx="2468880" cy="402336"/>
+          </a:xfrm>
+          <a:prstGeom prst="rect">
+            <a:avLst/>
+          </a:prstGeom>
+          <a:solidFill>
+            <a:srgbClr val="F1F5F9"/>
+          </a:solidFill>
+          <a:ln w="12700">
+            <a:solidFill>
+              <a:srgbClr val="E2E8F0"/>
+            </a:solidFill>
+            <a:prstDash val="solid"/>
+          </a:ln>
+        </p:spPr>
+      </p:sp>
+      <p:sp>
+        <p:nvSpPr>
+          <p:cNvPr id="23" name="Shape 21"/>
+          <p:cNvSpPr/>
+          <p:nvPr/>
+        </p:nvSpPr>
+        <p:spPr>
+          <a:xfrm>
+            <a:off x="2971800" y="1984248"/>
             <a:ext cx="2834640" cy="402336"/>
           </a:xfrm>
           <a:prstGeom prst="rect">
             <a:avLst/>
           </a:prstGeom>
           <a:solidFill>
+            <a:srgbClr val="F1F5F9"/>
+          </a:solidFill>
+          <a:ln w="12700">
+            <a:solidFill>
+              <a:srgbClr val="E2E8F0"/>
+            </a:solidFill>
+            <a:prstDash val="solid"/>
+          </a:ln>
+        </p:spPr>
+      </p:sp>
+      <p:sp>
+        <p:nvSpPr>
+          <p:cNvPr id="24" name="Shape 22"/>
+          <p:cNvSpPr/>
+          <p:nvPr/>
+        </p:nvSpPr>
+        <p:spPr>
+          <a:xfrm>
+            <a:off x="5943600" y="1984248"/>
+            <a:ext cx="2834640" cy="402336"/>
+          </a:xfrm>
+          <a:prstGeom prst="rect">
+            <a:avLst/>
+          </a:prstGeom>
+          <a:solidFill>
             <a:srgbClr val="FCE7F3"/>
           </a:solidFill>
           <a:ln w="12700">
@@ -34431,13 +34342,13 @@
       </p:sp>
       <p:sp>
         <p:nvSpPr>
-          <p:cNvPr id="22" name="Text 20"/>
-          <p:cNvSpPr/>
-          <p:nvPr/>
-        </p:nvSpPr>
-        <p:spPr>
-          <a:xfrm>
-            <a:off x="5943600" y="1563624"/>
+          <p:cNvPr id="25" name="Text 23"/>
+          <p:cNvSpPr/>
+          <p:nvPr/>
+        </p:nvSpPr>
+        <p:spPr>
+          <a:xfrm>
+            <a:off x="5943600" y="1984248"/>
             <a:ext cx="2834640" cy="402336"/>
           </a:xfrm>
           <a:prstGeom prst="rect">
@@ -34462,7 +34373,7 @@
                 <a:ea typeface="Trebuchet MS" pitchFamily="34" charset="-122"/>
                 <a:cs typeface="Trebuchet MS" pitchFamily="34" charset="-120"/>
               </a:rPr>
-              <a:t>-ment</a:t>
+              <a:t>-ed</a:t>
             </a:r>
             <a:endParaRPr lang="en-US" sz="1300" dirty="0"/>
           </a:p>
@@ -34470,20 +34381,20 @@
       </p:sp>
       <p:sp>
         <p:nvSpPr>
-          <p:cNvPr id="23" name="Shape 21"/>
-          <p:cNvSpPr/>
-          <p:nvPr/>
-        </p:nvSpPr>
-        <p:spPr>
-          <a:xfrm>
-            <a:off x="365760" y="1984248"/>
+          <p:cNvPr id="26" name="Shape 24"/>
+          <p:cNvSpPr/>
+          <p:nvPr/>
+        </p:nvSpPr>
+        <p:spPr>
+          <a:xfrm>
+            <a:off x="365760" y="2404872"/>
             <a:ext cx="2468880" cy="402336"/>
           </a:xfrm>
           <a:prstGeom prst="rect">
             <a:avLst/>
           </a:prstGeom>
           <a:solidFill>
-            <a:srgbClr val="DDD6FE"/>
+            <a:srgbClr val="F8FAFC"/>
           </a:solidFill>
           <a:ln w="12700">
             <a:solidFill>
@@ -34495,14 +34406,64 @@
       </p:sp>
       <p:sp>
         <p:nvSpPr>
-          <p:cNvPr id="24" name="Text 22"/>
-          <p:cNvSpPr/>
-          <p:nvPr/>
-        </p:nvSpPr>
-        <p:spPr>
-          <a:xfrm>
-            <a:off x="365760" y="1984248"/>
-            <a:ext cx="2468880" cy="402336"/>
+          <p:cNvPr id="27" name="Shape 25"/>
+          <p:cNvSpPr/>
+          <p:nvPr/>
+        </p:nvSpPr>
+        <p:spPr>
+          <a:xfrm>
+            <a:off x="2971800" y="2404872"/>
+            <a:ext cx="2834640" cy="402336"/>
+          </a:xfrm>
+          <a:prstGeom prst="rect">
+            <a:avLst/>
+          </a:prstGeom>
+          <a:solidFill>
+            <a:srgbClr val="F8FAFC"/>
+          </a:solidFill>
+          <a:ln w="12700">
+            <a:solidFill>
+              <a:srgbClr val="E2E8F0"/>
+            </a:solidFill>
+            <a:prstDash val="solid"/>
+          </a:ln>
+        </p:spPr>
+      </p:sp>
+      <p:sp>
+        <p:nvSpPr>
+          <p:cNvPr id="28" name="Shape 26"/>
+          <p:cNvSpPr/>
+          <p:nvPr/>
+        </p:nvSpPr>
+        <p:spPr>
+          <a:xfrm>
+            <a:off x="5943600" y="2404872"/>
+            <a:ext cx="2834640" cy="402336"/>
+          </a:xfrm>
+          <a:prstGeom prst="rect">
+            <a:avLst/>
+          </a:prstGeom>
+          <a:solidFill>
+            <a:srgbClr val="FCE7F3"/>
+          </a:solidFill>
+          <a:ln w="12700">
+            <a:solidFill>
+              <a:srgbClr val="E2E8F0"/>
+            </a:solidFill>
+            <a:prstDash val="solid"/>
+          </a:ln>
+        </p:spPr>
+      </p:sp>
+      <p:sp>
+        <p:nvSpPr>
+          <p:cNvPr id="29" name="Text 27"/>
+          <p:cNvSpPr/>
+          <p:nvPr/>
+        </p:nvSpPr>
+        <p:spPr>
+          <a:xfrm>
+            <a:off x="5943600" y="2404872"/>
+            <a:ext cx="2834640" cy="402336"/>
           </a:xfrm>
           <a:prstGeom prst="rect">
             <a:avLst/>
@@ -34520,13 +34481,13 @@
             <a:r>
               <a:rPr lang="en-US" sz="1300" b="1" dirty="0">
                 <a:solidFill>
-                  <a:srgbClr val="4C1D95"/>
+                  <a:srgbClr val="9D174D"/>
                 </a:solidFill>
                 <a:latin typeface="Trebuchet MS" pitchFamily="34" charset="0"/>
                 <a:ea typeface="Trebuchet MS" pitchFamily="34" charset="-122"/>
                 <a:cs typeface="Trebuchet MS" pitchFamily="34" charset="-120"/>
               </a:rPr>
-              <a:t>re-</a:t>
+              <a:t>-er</a:t>
             </a:r>
             <a:endParaRPr lang="en-US" sz="1300" dirty="0"/>
           </a:p>
@@ -34534,13 +34495,38 @@
       </p:sp>
       <p:sp>
         <p:nvSpPr>
-          <p:cNvPr id="25" name="Shape 23"/>
-          <p:cNvSpPr/>
-          <p:nvPr/>
-        </p:nvSpPr>
-        <p:spPr>
-          <a:xfrm>
-            <a:off x="2971800" y="1984248"/>
+          <p:cNvPr id="30" name="Shape 28"/>
+          <p:cNvSpPr/>
+          <p:nvPr/>
+        </p:nvSpPr>
+        <p:spPr>
+          <a:xfrm>
+            <a:off x="365760" y="2825496"/>
+            <a:ext cx="2468880" cy="402336"/>
+          </a:xfrm>
+          <a:prstGeom prst="rect">
+            <a:avLst/>
+          </a:prstGeom>
+          <a:solidFill>
+            <a:srgbClr val="F1F5F9"/>
+          </a:solidFill>
+          <a:ln w="12700">
+            <a:solidFill>
+              <a:srgbClr val="E2E8F0"/>
+            </a:solidFill>
+            <a:prstDash val="solid"/>
+          </a:ln>
+        </p:spPr>
+      </p:sp>
+      <p:sp>
+        <p:nvSpPr>
+          <p:cNvPr id="31" name="Shape 29"/>
+          <p:cNvSpPr/>
+          <p:nvPr/>
+        </p:nvSpPr>
+        <p:spPr>
+          <a:xfrm>
+            <a:off x="2971800" y="2825496"/>
             <a:ext cx="2834640" cy="402336"/>
           </a:xfrm>
           <a:prstGeom prst="rect">
@@ -34559,13 +34545,13 @@
       </p:sp>
       <p:sp>
         <p:nvSpPr>
-          <p:cNvPr id="26" name="Shape 24"/>
-          <p:cNvSpPr/>
-          <p:nvPr/>
-        </p:nvSpPr>
-        <p:spPr>
-          <a:xfrm>
-            <a:off x="5943600" y="1984248"/>
+          <p:cNvPr id="32" name="Shape 30"/>
+          <p:cNvSpPr/>
+          <p:nvPr/>
+        </p:nvSpPr>
+        <p:spPr>
+          <a:xfrm>
+            <a:off x="5943600" y="2825496"/>
             <a:ext cx="2834640" cy="402336"/>
           </a:xfrm>
           <a:prstGeom prst="rect">
@@ -34584,13 +34570,13 @@
       </p:sp>
       <p:sp>
         <p:nvSpPr>
-          <p:cNvPr id="27" name="Text 25"/>
-          <p:cNvSpPr/>
-          <p:nvPr/>
-        </p:nvSpPr>
-        <p:spPr>
-          <a:xfrm>
-            <a:off x="5943600" y="1984248"/>
+          <p:cNvPr id="33" name="Text 31"/>
+          <p:cNvSpPr/>
+          <p:nvPr/>
+        </p:nvSpPr>
+        <p:spPr>
+          <a:xfrm>
+            <a:off x="5943600" y="2825496"/>
             <a:ext cx="2834640" cy="402336"/>
           </a:xfrm>
           <a:prstGeom prst="rect">
@@ -34615,7 +34601,7 @@
                 <a:ea typeface="Trebuchet MS" pitchFamily="34" charset="-122"/>
                 <a:cs typeface="Trebuchet MS" pitchFamily="34" charset="-120"/>
               </a:rPr>
-              <a:t>-able</a:t>
+              <a:t>-ing</a:t>
             </a:r>
             <a:endParaRPr lang="en-US" sz="1300" dirty="0"/>
           </a:p>
@@ -34623,20 +34609,20 @@
       </p:sp>
       <p:sp>
         <p:nvSpPr>
-          <p:cNvPr id="28" name="Shape 26"/>
-          <p:cNvSpPr/>
-          <p:nvPr/>
-        </p:nvSpPr>
-        <p:spPr>
-          <a:xfrm>
-            <a:off x="365760" y="2404872"/>
+          <p:cNvPr id="34" name="Shape 32"/>
+          <p:cNvSpPr/>
+          <p:nvPr/>
+        </p:nvSpPr>
+        <p:spPr>
+          <a:xfrm>
+            <a:off x="365760" y="3246120"/>
             <a:ext cx="2468880" cy="402336"/>
           </a:xfrm>
           <a:prstGeom prst="rect">
             <a:avLst/>
           </a:prstGeom>
           <a:solidFill>
-            <a:srgbClr val="DDD6FE"/>
+            <a:srgbClr val="F8FAFC"/>
           </a:solidFill>
           <a:ln w="12700">
             <a:solidFill>
@@ -34648,14 +34634,64 @@
       </p:sp>
       <p:sp>
         <p:nvSpPr>
-          <p:cNvPr id="29" name="Text 27"/>
-          <p:cNvSpPr/>
-          <p:nvPr/>
-        </p:nvSpPr>
-        <p:spPr>
-          <a:xfrm>
-            <a:off x="365760" y="2404872"/>
-            <a:ext cx="2468880" cy="402336"/>
+          <p:cNvPr id="35" name="Shape 33"/>
+          <p:cNvSpPr/>
+          <p:nvPr/>
+        </p:nvSpPr>
+        <p:spPr>
+          <a:xfrm>
+            <a:off x="2971800" y="3246120"/>
+            <a:ext cx="2834640" cy="402336"/>
+          </a:xfrm>
+          <a:prstGeom prst="rect">
+            <a:avLst/>
+          </a:prstGeom>
+          <a:solidFill>
+            <a:srgbClr val="F8FAFC"/>
+          </a:solidFill>
+          <a:ln w="12700">
+            <a:solidFill>
+              <a:srgbClr val="E2E8F0"/>
+            </a:solidFill>
+            <a:prstDash val="solid"/>
+          </a:ln>
+        </p:spPr>
+      </p:sp>
+      <p:sp>
+        <p:nvSpPr>
+          <p:cNvPr id="36" name="Shape 34"/>
+          <p:cNvSpPr/>
+          <p:nvPr/>
+        </p:nvSpPr>
+        <p:spPr>
+          <a:xfrm>
+            <a:off x="5943600" y="3246120"/>
+            <a:ext cx="2834640" cy="402336"/>
+          </a:xfrm>
+          <a:prstGeom prst="rect">
+            <a:avLst/>
+          </a:prstGeom>
+          <a:solidFill>
+            <a:srgbClr val="FCE7F3"/>
+          </a:solidFill>
+          <a:ln w="12700">
+            <a:solidFill>
+              <a:srgbClr val="E2E8F0"/>
+            </a:solidFill>
+            <a:prstDash val="solid"/>
+          </a:ln>
+        </p:spPr>
+      </p:sp>
+      <p:sp>
+        <p:nvSpPr>
+          <p:cNvPr id="37" name="Text 35"/>
+          <p:cNvSpPr/>
+          <p:nvPr/>
+        </p:nvSpPr>
+        <p:spPr>
+          <a:xfrm>
+            <a:off x="5943600" y="3246120"/>
+            <a:ext cx="2834640" cy="402336"/>
           </a:xfrm>
           <a:prstGeom prst="rect">
             <a:avLst/>
@@ -34673,13 +34709,13 @@
             <a:r>
               <a:rPr lang="en-US" sz="1300" b="1" dirty="0">
                 <a:solidFill>
-                  <a:srgbClr val="4C1D95"/>
+                  <a:srgbClr val="9D174D"/>
                 </a:solidFill>
                 <a:latin typeface="Trebuchet MS" pitchFamily="34" charset="0"/>
                 <a:ea typeface="Trebuchet MS" pitchFamily="34" charset="-122"/>
                 <a:cs typeface="Trebuchet MS" pitchFamily="34" charset="-120"/>
               </a:rPr>
-              <a:t>dis-</a:t>
+              <a:t>-ment</a:t>
             </a:r>
             <a:endParaRPr lang="en-US" sz="1300" dirty="0"/>
           </a:p>
@@ -34687,20 +34723,45 @@
       </p:sp>
       <p:sp>
         <p:nvSpPr>
-          <p:cNvPr id="30" name="Shape 28"/>
-          <p:cNvSpPr/>
-          <p:nvPr/>
-        </p:nvSpPr>
-        <p:spPr>
-          <a:xfrm>
-            <a:off x="2971800" y="2404872"/>
+          <p:cNvPr id="38" name="Shape 36"/>
+          <p:cNvSpPr/>
+          <p:nvPr/>
+        </p:nvSpPr>
+        <p:spPr>
+          <a:xfrm>
+            <a:off x="365760" y="3666744"/>
+            <a:ext cx="2468880" cy="402336"/>
+          </a:xfrm>
+          <a:prstGeom prst="rect">
+            <a:avLst/>
+          </a:prstGeom>
+          <a:solidFill>
+            <a:srgbClr val="F1F5F9"/>
+          </a:solidFill>
+          <a:ln w="12700">
+            <a:solidFill>
+              <a:srgbClr val="E2E8F0"/>
+            </a:solidFill>
+            <a:prstDash val="solid"/>
+          </a:ln>
+        </p:spPr>
+      </p:sp>
+      <p:sp>
+        <p:nvSpPr>
+          <p:cNvPr id="39" name="Shape 37"/>
+          <p:cNvSpPr/>
+          <p:nvPr/>
+        </p:nvSpPr>
+        <p:spPr>
+          <a:xfrm>
+            <a:off x="2971800" y="3666744"/>
             <a:ext cx="2834640" cy="402336"/>
           </a:xfrm>
           <a:prstGeom prst="rect">
             <a:avLst/>
           </a:prstGeom>
           <a:solidFill>
-            <a:srgbClr val="F8FAFC"/>
+            <a:srgbClr val="F1F5F9"/>
           </a:solidFill>
           <a:ln w="12700">
             <a:solidFill>
@@ -34712,13 +34773,13 @@
       </p:sp>
       <p:sp>
         <p:nvSpPr>
-          <p:cNvPr id="31" name="Shape 29"/>
-          <p:cNvSpPr/>
-          <p:nvPr/>
-        </p:nvSpPr>
-        <p:spPr>
-          <a:xfrm>
-            <a:off x="5943600" y="2404872"/>
+          <p:cNvPr id="40" name="Shape 38"/>
+          <p:cNvSpPr/>
+          <p:nvPr/>
+        </p:nvSpPr>
+        <p:spPr>
+          <a:xfrm>
+            <a:off x="5943600" y="3666744"/>
             <a:ext cx="2834640" cy="402336"/>
           </a:xfrm>
           <a:prstGeom prst="rect">
@@ -34737,13 +34798,13 @@
       </p:sp>
       <p:sp>
         <p:nvSpPr>
-          <p:cNvPr id="32" name="Text 30"/>
-          <p:cNvSpPr/>
-          <p:nvPr/>
-        </p:nvSpPr>
-        <p:spPr>
-          <a:xfrm>
-            <a:off x="5943600" y="2404872"/>
+          <p:cNvPr id="41" name="Text 39"/>
+          <p:cNvSpPr/>
+          <p:nvPr/>
+        </p:nvSpPr>
+        <p:spPr>
+          <a:xfrm>
+            <a:off x="5943600" y="3666744"/>
             <a:ext cx="2834640" cy="402336"/>
           </a:xfrm>
           <a:prstGeom prst="rect">
@@ -34768,7 +34829,7 @@
                 <a:ea typeface="Trebuchet MS" pitchFamily="34" charset="-122"/>
                 <a:cs typeface="Trebuchet MS" pitchFamily="34" charset="-120"/>
               </a:rPr>
-              <a:t>-ing</a:t>
+              <a:t>-s</a:t>
             </a:r>
             <a:endParaRPr lang="en-US" sz="1300" dirty="0"/>
           </a:p>
@@ -34776,39 +34837,14 @@
       </p:sp>
       <p:sp>
         <p:nvSpPr>
-          <p:cNvPr id="33" name="Shape 31"/>
-          <p:cNvSpPr/>
-          <p:nvPr/>
-        </p:nvSpPr>
-        <p:spPr>
-          <a:xfrm>
-            <a:off x="365760" y="2825496"/>
-            <a:ext cx="2468880" cy="402336"/>
-          </a:xfrm>
-          <a:prstGeom prst="rect">
-            <a:avLst/>
-          </a:prstGeom>
-          <a:solidFill>
-            <a:srgbClr val="DDD6FE"/>
-          </a:solidFill>
-          <a:ln w="12700">
-            <a:solidFill>
-              <a:srgbClr val="E2E8F0"/>
-            </a:solidFill>
-            <a:prstDash val="solid"/>
-          </a:ln>
-        </p:spPr>
-      </p:sp>
-      <p:sp>
-        <p:nvSpPr>
-          <p:cNvPr id="34" name="Text 32"/>
-          <p:cNvSpPr/>
-          <p:nvPr/>
-        </p:nvSpPr>
-        <p:spPr>
-          <a:xfrm>
-            <a:off x="365760" y="2825496"/>
-            <a:ext cx="2468880" cy="402336"/>
+          <p:cNvPr id="42" name="Text 40"/>
+          <p:cNvSpPr/>
+          <p:nvPr/>
+        </p:nvSpPr>
+        <p:spPr>
+          <a:xfrm>
+            <a:off x="365760" y="3611880"/>
+            <a:ext cx="1828800" cy="347472"/>
           </a:xfrm>
           <a:prstGeom prst="rect">
             <a:avLst/>
@@ -34820,84 +34856,61 @@
           <a:bodyPr wrap="square" lIns="0" tIns="0" rIns="0" bIns="0" rtlCol="0" anchor="ctr"/>
           <a:lstStyle/>
           <a:p>
-            <a:pPr algn="ctr" indent="0" marL="0">
-              <a:buNone/>
-            </a:pPr>
-            <a:r>
-              <a:rPr lang="en-US" sz="1300" b="1" dirty="0">
-                <a:solidFill>
-                  <a:srgbClr val="4C1D95"/>
+            <a:pPr algn="l" indent="0" marL="0">
+              <a:buNone/>
+            </a:pPr>
+            <a:r>
+              <a:rPr lang="en-US" sz="1200" b="1" dirty="0">
+                <a:solidFill>
+                  <a:srgbClr val="0F172A"/>
                 </a:solidFill>
                 <a:latin typeface="Trebuchet MS" pitchFamily="34" charset="0"/>
                 <a:ea typeface="Trebuchet MS" pitchFamily="34" charset="-122"/>
                 <a:cs typeface="Trebuchet MS" pitchFamily="34" charset="-120"/>
               </a:rPr>
-              <a:t>pre-</a:t>
-            </a:r>
-            <a:endParaRPr lang="en-US" sz="1300" dirty="0"/>
-          </a:p>
-        </p:txBody>
-      </p:sp>
-      <p:sp>
-        <p:nvSpPr>
-          <p:cNvPr id="35" name="Shape 33"/>
-          <p:cNvSpPr/>
-          <p:nvPr/>
-        </p:nvSpPr>
-        <p:spPr>
-          <a:xfrm>
-            <a:off x="2971800" y="2825496"/>
-            <a:ext cx="2834640" cy="402336"/>
-          </a:xfrm>
-          <a:prstGeom prst="rect">
-            <a:avLst/>
-          </a:prstGeom>
-          <a:solidFill>
-            <a:srgbClr val="F1F5F9"/>
-          </a:solidFill>
-          <a:ln w="12700">
-            <a:solidFill>
-              <a:srgbClr val="E2E8F0"/>
-            </a:solidFill>
-            <a:prstDash val="solid"/>
-          </a:ln>
-        </p:spPr>
-      </p:sp>
-      <p:sp>
-        <p:nvSpPr>
-          <p:cNvPr id="36" name="Shape 34"/>
-          <p:cNvSpPr/>
-          <p:nvPr/>
-        </p:nvSpPr>
-        <p:spPr>
-          <a:xfrm>
-            <a:off x="5943600" y="2825496"/>
-            <a:ext cx="2834640" cy="402336"/>
-          </a:xfrm>
-          <a:prstGeom prst="rect">
-            <a:avLst/>
-          </a:prstGeom>
-          <a:solidFill>
-            <a:srgbClr val="FCE7F3"/>
-          </a:solidFill>
-          <a:ln w="12700">
-            <a:solidFill>
-              <a:srgbClr val="E2E8F0"/>
-            </a:solidFill>
-            <a:prstDash val="solid"/>
-          </a:ln>
-        </p:spPr>
-      </p:sp>
-      <p:sp>
-        <p:nvSpPr>
-          <p:cNvPr id="37" name="Text 35"/>
-          <p:cNvSpPr/>
-          <p:nvPr/>
-        </p:nvSpPr>
-        <p:spPr>
-          <a:xfrm>
-            <a:off x="5943600" y="2825496"/>
-            <a:ext cx="2834640" cy="402336"/>
+              <a:t>Sample words:</a:t>
+            </a:r>
+            <a:endParaRPr lang="en-US" sz="1200" dirty="0"/>
+          </a:p>
+        </p:txBody>
+      </p:sp>
+      <p:sp>
+        <p:nvSpPr>
+          <p:cNvPr id="43" name="Shape 41"/>
+          <p:cNvSpPr/>
+          <p:nvPr/>
+        </p:nvSpPr>
+        <p:spPr>
+          <a:xfrm>
+            <a:off x="365760" y="4023360"/>
+            <a:ext cx="2011680" cy="402336"/>
+          </a:xfrm>
+          <a:prstGeom prst="rect">
+            <a:avLst>
+              <a:gd name="adj" fmla="val 13636"/>
+            </a:avLst>
+          </a:prstGeom>
+          <a:solidFill>
+            <a:srgbClr val="EEF2FF"/>
+          </a:solidFill>
+          <a:ln w="12700">
+            <a:solidFill>
+              <a:srgbClr val="6366F1"/>
+            </a:solidFill>
+            <a:prstDash val="solid"/>
+          </a:ln>
+        </p:spPr>
+      </p:sp>
+      <p:sp>
+        <p:nvSpPr>
+          <p:cNvPr id="44" name="Text 42"/>
+          <p:cNvSpPr/>
+          <p:nvPr/>
+        </p:nvSpPr>
+        <p:spPr>
+          <a:xfrm>
+            <a:off x="365760" y="4023360"/>
+            <a:ext cx="2011680" cy="402336"/>
           </a:xfrm>
           <a:prstGeom prst="rect">
             <a:avLst/>
@@ -34913,55 +34926,57 @@
               <a:buNone/>
             </a:pPr>
             <a:r>
-              <a:rPr lang="en-US" sz="1300" b="1" dirty="0">
-                <a:solidFill>
-                  <a:srgbClr val="9D174D"/>
+              <a:rPr lang="en-US" sz="1200" b="1" dirty="0">
+                <a:solidFill>
+                  <a:srgbClr val="4338CA"/>
                 </a:solidFill>
                 <a:latin typeface="Trebuchet MS" pitchFamily="34" charset="0"/>
                 <a:ea typeface="Trebuchet MS" pitchFamily="34" charset="-122"/>
                 <a:cs typeface="Trebuchet MS" pitchFamily="34" charset="-120"/>
               </a:rPr>
-              <a:t>-ed</a:t>
-            </a:r>
-            <a:endParaRPr lang="en-US" sz="1300" dirty="0"/>
-          </a:p>
-        </p:txBody>
-      </p:sp>
-      <p:sp>
-        <p:nvSpPr>
-          <p:cNvPr id="38" name="Shape 36"/>
-          <p:cNvSpPr/>
-          <p:nvPr/>
-        </p:nvSpPr>
-        <p:spPr>
-          <a:xfrm>
-            <a:off x="365760" y="3246120"/>
-            <a:ext cx="2468880" cy="402336"/>
-          </a:xfrm>
-          <a:prstGeom prst="rect">
-            <a:avLst/>
-          </a:prstGeom>
-          <a:solidFill>
-            <a:srgbClr val="DDD6FE"/>
-          </a:solidFill>
-          <a:ln w="12700">
-            <a:solidFill>
-              <a:srgbClr val="E2E8F0"/>
-            </a:solidFill>
-            <a:prstDash val="solid"/>
-          </a:ln>
-        </p:spPr>
-      </p:sp>
-      <p:sp>
-        <p:nvSpPr>
-          <p:cNvPr id="39" name="Text 37"/>
-          <p:cNvSpPr/>
-          <p:nvPr/>
-        </p:nvSpPr>
-        <p:spPr>
-          <a:xfrm>
-            <a:off x="365760" y="3246120"/>
-            <a:ext cx="2468880" cy="402336"/>
+              <a:t>enjoy</a:t>
+            </a:r>
+            <a:endParaRPr lang="en-US" sz="1200" dirty="0"/>
+          </a:p>
+        </p:txBody>
+      </p:sp>
+      <p:sp>
+        <p:nvSpPr>
+          <p:cNvPr id="45" name="Shape 43"/>
+          <p:cNvSpPr/>
+          <p:nvPr/>
+        </p:nvSpPr>
+        <p:spPr>
+          <a:xfrm>
+            <a:off x="2542032" y="4023360"/>
+            <a:ext cx="2011680" cy="402336"/>
+          </a:xfrm>
+          <a:prstGeom prst="rect">
+            <a:avLst>
+              <a:gd name="adj" fmla="val 13636"/>
+            </a:avLst>
+          </a:prstGeom>
+          <a:solidFill>
+            <a:srgbClr val="EEF2FF"/>
+          </a:solidFill>
+          <a:ln w="12700">
+            <a:solidFill>
+              <a:srgbClr val="6366F1"/>
+            </a:solidFill>
+            <a:prstDash val="solid"/>
+          </a:ln>
+        </p:spPr>
+      </p:sp>
+      <p:sp>
+        <p:nvSpPr>
+          <p:cNvPr id="46" name="Text 44"/>
+          <p:cNvSpPr/>
+          <p:nvPr/>
+        </p:nvSpPr>
+        <p:spPr>
+          <a:xfrm>
+            <a:off x="2542032" y="4023360"/>
+            <a:ext cx="2011680" cy="402336"/>
           </a:xfrm>
           <a:prstGeom prst="rect">
             <a:avLst/>
@@ -34977,671 +34992,15 @@
               <a:buNone/>
             </a:pPr>
             <a:r>
-              <a:rPr lang="en-US" sz="1300" b="1" dirty="0">
-                <a:solidFill>
-                  <a:srgbClr val="4C1D95"/>
+              <a:rPr lang="en-US" sz="1200" b="1" dirty="0">
+                <a:solidFill>
+                  <a:srgbClr val="4338CA"/>
                 </a:solidFill>
                 <a:latin typeface="Trebuchet MS" pitchFamily="34" charset="0"/>
                 <a:ea typeface="Trebuchet MS" pitchFamily="34" charset="-122"/>
                 <a:cs typeface="Trebuchet MS" pitchFamily="34" charset="-120"/>
               </a:rPr>
-              <a:t>mis-</a:t>
-            </a:r>
-            <a:endParaRPr lang="en-US" sz="1300" dirty="0"/>
-          </a:p>
-        </p:txBody>
-      </p:sp>
-      <p:sp>
-        <p:nvSpPr>
-          <p:cNvPr id="40" name="Shape 38"/>
-          <p:cNvSpPr/>
-          <p:nvPr/>
-        </p:nvSpPr>
-        <p:spPr>
-          <a:xfrm>
-            <a:off x="2971800" y="3246120"/>
-            <a:ext cx="2834640" cy="402336"/>
-          </a:xfrm>
-          <a:prstGeom prst="rect">
-            <a:avLst/>
-          </a:prstGeom>
-          <a:solidFill>
-            <a:srgbClr val="F8FAFC"/>
-          </a:solidFill>
-          <a:ln w="12700">
-            <a:solidFill>
-              <a:srgbClr val="E2E8F0"/>
-            </a:solidFill>
-            <a:prstDash val="solid"/>
-          </a:ln>
-        </p:spPr>
-      </p:sp>
-      <p:sp>
-        <p:nvSpPr>
-          <p:cNvPr id="41" name="Shape 39"/>
-          <p:cNvSpPr/>
-          <p:nvPr/>
-        </p:nvSpPr>
-        <p:spPr>
-          <a:xfrm>
-            <a:off x="5943600" y="3246120"/>
-            <a:ext cx="2834640" cy="402336"/>
-          </a:xfrm>
-          <a:prstGeom prst="rect">
-            <a:avLst/>
-          </a:prstGeom>
-          <a:solidFill>
-            <a:srgbClr val="FCE7F3"/>
-          </a:solidFill>
-          <a:ln w="12700">
-            <a:solidFill>
-              <a:srgbClr val="E2E8F0"/>
-            </a:solidFill>
-            <a:prstDash val="solid"/>
-          </a:ln>
-        </p:spPr>
-      </p:sp>
-      <p:sp>
-        <p:nvSpPr>
-          <p:cNvPr id="42" name="Text 40"/>
-          <p:cNvSpPr/>
-          <p:nvPr/>
-        </p:nvSpPr>
-        <p:spPr>
-          <a:xfrm>
-            <a:off x="5943600" y="3246120"/>
-            <a:ext cx="2834640" cy="402336"/>
-          </a:xfrm>
-          <a:prstGeom prst="rect">
-            <a:avLst/>
-          </a:prstGeom>
-          <a:noFill/>
-          <a:ln/>
-        </p:spPr>
-        <p:txBody>
-          <a:bodyPr wrap="square" lIns="0" tIns="0" rIns="0" bIns="0" rtlCol="0" anchor="ctr"/>
-          <a:lstStyle/>
-          <a:p>
-            <a:pPr algn="ctr" indent="0" marL="0">
-              <a:buNone/>
-            </a:pPr>
-            <a:r>
-              <a:rPr lang="en-US" sz="1300" b="1" dirty="0">
-                <a:solidFill>
-                  <a:srgbClr val="9D174D"/>
-                </a:solidFill>
-                <a:latin typeface="Trebuchet MS" pitchFamily="34" charset="0"/>
-                <a:ea typeface="Trebuchet MS" pitchFamily="34" charset="-122"/>
-                <a:cs typeface="Trebuchet MS" pitchFamily="34" charset="-120"/>
-              </a:rPr>
-              <a:t>-er</a:t>
-            </a:r>
-            <a:endParaRPr lang="en-US" sz="1300" dirty="0"/>
-          </a:p>
-        </p:txBody>
-      </p:sp>
-      <p:sp>
-        <p:nvSpPr>
-          <p:cNvPr id="43" name="Text 41"/>
-          <p:cNvSpPr/>
-          <p:nvPr/>
-        </p:nvSpPr>
-        <p:spPr>
-          <a:xfrm>
-            <a:off x="365760" y="3611880"/>
-            <a:ext cx="1828800" cy="347472"/>
-          </a:xfrm>
-          <a:prstGeom prst="rect">
-            <a:avLst/>
-          </a:prstGeom>
-          <a:noFill/>
-          <a:ln/>
-        </p:spPr>
-        <p:txBody>
-          <a:bodyPr wrap="square" lIns="0" tIns="0" rIns="0" bIns="0" rtlCol="0" anchor="ctr"/>
-          <a:lstStyle/>
-          <a:p>
-            <a:pPr algn="l" indent="0" marL="0">
-              <a:buNone/>
-            </a:pPr>
-            <a:r>
-              <a:rPr lang="en-US" sz="1200" b="1" dirty="0">
-                <a:solidFill>
-                  <a:srgbClr val="0F172A"/>
-                </a:solidFill>
-                <a:latin typeface="Trebuchet MS" pitchFamily="34" charset="0"/>
-                <a:ea typeface="Trebuchet MS" pitchFamily="34" charset="-122"/>
-                <a:cs typeface="Trebuchet MS" pitchFamily="34" charset="-120"/>
-              </a:rPr>
-              <a:t>Sample words:</a:t>
-            </a:r>
-            <a:endParaRPr lang="en-US" sz="1200" dirty="0"/>
-          </a:p>
-        </p:txBody>
-      </p:sp>
-      <p:sp>
-        <p:nvSpPr>
-          <p:cNvPr id="44" name="Shape 42"/>
-          <p:cNvSpPr/>
-          <p:nvPr/>
-        </p:nvSpPr>
-        <p:spPr>
-          <a:xfrm>
-            <a:off x="365760" y="4023360"/>
-            <a:ext cx="2011680" cy="402336"/>
-          </a:xfrm>
-          <a:prstGeom prst="rect">
-            <a:avLst>
-              <a:gd name="adj" fmla="val 13636"/>
-            </a:avLst>
-          </a:prstGeom>
-          <a:solidFill>
-            <a:srgbClr val="EEF2FF"/>
-          </a:solidFill>
-          <a:ln w="12700">
-            <a:solidFill>
-              <a:srgbClr val="6366F1"/>
-            </a:solidFill>
-            <a:prstDash val="solid"/>
-          </a:ln>
-        </p:spPr>
-      </p:sp>
-      <p:sp>
-        <p:nvSpPr>
-          <p:cNvPr id="45" name="Text 43"/>
-          <p:cNvSpPr/>
-          <p:nvPr/>
-        </p:nvSpPr>
-        <p:spPr>
-          <a:xfrm>
-            <a:off x="365760" y="4023360"/>
-            <a:ext cx="2011680" cy="402336"/>
-          </a:xfrm>
-          <a:prstGeom prst="rect">
-            <a:avLst/>
-          </a:prstGeom>
-          <a:noFill/>
-          <a:ln/>
-        </p:spPr>
-        <p:txBody>
-          <a:bodyPr wrap="square" lIns="0" tIns="0" rIns="0" bIns="0" rtlCol="0" anchor="ctr"/>
-          <a:lstStyle/>
-          <a:p>
-            <a:pPr algn="ctr" indent="0" marL="0">
-              <a:buNone/>
-            </a:pPr>
-            <a:r>
-              <a:rPr lang="en-US" sz="1200" b="1" dirty="0">
-                <a:solidFill>
-                  <a:srgbClr val="4338CA"/>
-                </a:solidFill>
-                <a:latin typeface="Trebuchet MS" pitchFamily="34" charset="0"/>
-                <a:ea typeface="Trebuchet MS" pitchFamily="34" charset="-122"/>
-                <a:cs typeface="Trebuchet MS" pitchFamily="34" charset="-120"/>
-              </a:rPr>
-              <a:t>enjoy</a:t>
-            </a:r>
-            <a:endParaRPr lang="en-US" sz="1200" dirty="0"/>
-          </a:p>
-        </p:txBody>
-      </p:sp>
-      <p:sp>
-        <p:nvSpPr>
-          <p:cNvPr id="46" name="Shape 44"/>
-          <p:cNvSpPr/>
-          <p:nvPr/>
-        </p:nvSpPr>
-        <p:spPr>
-          <a:xfrm>
-            <a:off x="2542032" y="4023360"/>
-            <a:ext cx="2011680" cy="402336"/>
-          </a:xfrm>
-          <a:prstGeom prst="rect">
-            <a:avLst>
-              <a:gd name="adj" fmla="val 13636"/>
-            </a:avLst>
-          </a:prstGeom>
-          <a:solidFill>
-            <a:srgbClr val="EEF2FF"/>
-          </a:solidFill>
-          <a:ln w="12700">
-            <a:solidFill>
-              <a:srgbClr val="6366F1"/>
-            </a:solidFill>
-            <a:prstDash val="solid"/>
-          </a:ln>
-        </p:spPr>
-      </p:sp>
-      <p:sp>
-        <p:nvSpPr>
-          <p:cNvPr id="47" name="Text 45"/>
-          <p:cNvSpPr/>
-          <p:nvPr/>
-        </p:nvSpPr>
-        <p:spPr>
-          <a:xfrm>
-            <a:off x="2542032" y="4023360"/>
-            <a:ext cx="2011680" cy="402336"/>
-          </a:xfrm>
-          <a:prstGeom prst="rect">
-            <a:avLst/>
-          </a:prstGeom>
-          <a:noFill/>
-          <a:ln/>
-        </p:spPr>
-        <p:txBody>
-          <a:bodyPr wrap="square" lIns="0" tIns="0" rIns="0" bIns="0" rtlCol="0" anchor="ctr"/>
-          <a:lstStyle/>
-          <a:p>
-            <a:pPr algn="ctr" indent="0" marL="0">
-              <a:buNone/>
-            </a:pPr>
-            <a:r>
-              <a:rPr lang="en-US" sz="1200" b="1" dirty="0">
-                <a:solidFill>
-                  <a:srgbClr val="4338CA"/>
-                </a:solidFill>
-                <a:latin typeface="Trebuchet MS" pitchFamily="34" charset="0"/>
-                <a:ea typeface="Trebuchet MS" pitchFamily="34" charset="-122"/>
-                <a:cs typeface="Trebuchet MS" pitchFamily="34" charset="-120"/>
-              </a:rPr>
-              <a:t>enjoyed</a:t>
-            </a:r>
-            <a:endParaRPr lang="en-US" sz="1200" dirty="0"/>
-          </a:p>
-        </p:txBody>
-      </p:sp>
-      <p:sp>
-        <p:nvSpPr>
-          <p:cNvPr id="48" name="Shape 46"/>
-          <p:cNvSpPr/>
-          <p:nvPr/>
-        </p:nvSpPr>
-        <p:spPr>
-          <a:xfrm>
-            <a:off x="4718304" y="4023360"/>
-            <a:ext cx="2011680" cy="402336"/>
-          </a:xfrm>
-          <a:prstGeom prst="rect">
-            <a:avLst>
-              <a:gd name="adj" fmla="val 13636"/>
-            </a:avLst>
-          </a:prstGeom>
-          <a:solidFill>
-            <a:srgbClr val="EEF2FF"/>
-          </a:solidFill>
-          <a:ln w="12700">
-            <a:solidFill>
-              <a:srgbClr val="6366F1"/>
-            </a:solidFill>
-            <a:prstDash val="solid"/>
-          </a:ln>
-        </p:spPr>
-      </p:sp>
-      <p:sp>
-        <p:nvSpPr>
-          <p:cNvPr id="49" name="Text 47"/>
-          <p:cNvSpPr/>
-          <p:nvPr/>
-        </p:nvSpPr>
-        <p:spPr>
-          <a:xfrm>
-            <a:off x="4718304" y="4023360"/>
-            <a:ext cx="2011680" cy="402336"/>
-          </a:xfrm>
-          <a:prstGeom prst="rect">
-            <a:avLst/>
-          </a:prstGeom>
-          <a:noFill/>
-          <a:ln/>
-        </p:spPr>
-        <p:txBody>
-          <a:bodyPr wrap="square" lIns="0" tIns="0" rIns="0" bIns="0" rtlCol="0" anchor="ctr"/>
-          <a:lstStyle/>
-          <a:p>
-            <a:pPr algn="ctr" indent="0" marL="0">
-              <a:buNone/>
-            </a:pPr>
-            <a:r>
-              <a:rPr lang="en-US" sz="1200" b="1" dirty="0">
-                <a:solidFill>
-                  <a:srgbClr val="4338CA"/>
-                </a:solidFill>
-                <a:latin typeface="Trebuchet MS" pitchFamily="34" charset="0"/>
-                <a:ea typeface="Trebuchet MS" pitchFamily="34" charset="-122"/>
-                <a:cs typeface="Trebuchet MS" pitchFamily="34" charset="-120"/>
-              </a:rPr>
-              <a:t>enjoying</a:t>
-            </a:r>
-            <a:endParaRPr lang="en-US" sz="1200" dirty="0"/>
-          </a:p>
-        </p:txBody>
-      </p:sp>
-      <p:sp>
-        <p:nvSpPr>
-          <p:cNvPr id="50" name="Shape 48"/>
-          <p:cNvSpPr/>
-          <p:nvPr/>
-        </p:nvSpPr>
-        <p:spPr>
-          <a:xfrm>
-            <a:off x="6894576" y="4023360"/>
-            <a:ext cx="2011680" cy="402336"/>
-          </a:xfrm>
-          <a:prstGeom prst="rect">
-            <a:avLst>
-              <a:gd name="adj" fmla="val 13636"/>
-            </a:avLst>
-          </a:prstGeom>
-          <a:solidFill>
-            <a:srgbClr val="EEF2FF"/>
-          </a:solidFill>
-          <a:ln w="12700">
-            <a:solidFill>
-              <a:srgbClr val="6366F1"/>
-            </a:solidFill>
-            <a:prstDash val="solid"/>
-          </a:ln>
-        </p:spPr>
-      </p:sp>
-      <p:sp>
-        <p:nvSpPr>
-          <p:cNvPr id="51" name="Text 49"/>
-          <p:cNvSpPr/>
-          <p:nvPr/>
-        </p:nvSpPr>
-        <p:spPr>
-          <a:xfrm>
-            <a:off x="6894576" y="4023360"/>
-            <a:ext cx="2011680" cy="402336"/>
-          </a:xfrm>
-          <a:prstGeom prst="rect">
-            <a:avLst/>
-          </a:prstGeom>
-          <a:noFill/>
-          <a:ln/>
-        </p:spPr>
-        <p:txBody>
-          <a:bodyPr wrap="square" lIns="0" tIns="0" rIns="0" bIns="0" rtlCol="0" anchor="ctr"/>
-          <a:lstStyle/>
-          <a:p>
-            <a:pPr algn="ctr" indent="0" marL="0">
-              <a:buNone/>
-            </a:pPr>
-            <a:r>
-              <a:rPr lang="en-US" sz="1200" b="1" dirty="0">
-                <a:solidFill>
-                  <a:srgbClr val="4338CA"/>
-                </a:solidFill>
-                <a:latin typeface="Trebuchet MS" pitchFamily="34" charset="0"/>
-                <a:ea typeface="Trebuchet MS" pitchFamily="34" charset="-122"/>
-                <a:cs typeface="Trebuchet MS" pitchFamily="34" charset="-120"/>
-              </a:rPr>
-              <a:t>enjoyment</a:t>
-            </a:r>
-            <a:endParaRPr lang="en-US" sz="1200" dirty="0"/>
-          </a:p>
-        </p:txBody>
-      </p:sp>
-      <p:sp>
-        <p:nvSpPr>
-          <p:cNvPr id="52" name="Shape 50"/>
-          <p:cNvSpPr/>
-          <p:nvPr/>
-        </p:nvSpPr>
-        <p:spPr>
-          <a:xfrm>
-            <a:off x="365760" y="4498848"/>
-            <a:ext cx="2011680" cy="402336"/>
-          </a:xfrm>
-          <a:prstGeom prst="rect">
-            <a:avLst>
-              <a:gd name="adj" fmla="val 13636"/>
-            </a:avLst>
-          </a:prstGeom>
-          <a:solidFill>
-            <a:srgbClr val="EEF2FF"/>
-          </a:solidFill>
-          <a:ln w="12700">
-            <a:solidFill>
-              <a:srgbClr val="6366F1"/>
-            </a:solidFill>
-            <a:prstDash val="solid"/>
-          </a:ln>
-        </p:spPr>
-      </p:sp>
-      <p:sp>
-        <p:nvSpPr>
-          <p:cNvPr id="53" name="Text 51"/>
-          <p:cNvSpPr/>
-          <p:nvPr/>
-        </p:nvSpPr>
-        <p:spPr>
-          <a:xfrm>
-            <a:off x="365760" y="4498848"/>
-            <a:ext cx="2011680" cy="402336"/>
-          </a:xfrm>
-          <a:prstGeom prst="rect">
-            <a:avLst/>
-          </a:prstGeom>
-          <a:noFill/>
-          <a:ln/>
-        </p:spPr>
-        <p:txBody>
-          <a:bodyPr wrap="square" lIns="0" tIns="0" rIns="0" bIns="0" rtlCol="0" anchor="ctr"/>
-          <a:lstStyle/>
-          <a:p>
-            <a:pPr algn="ctr" indent="0" marL="0">
-              <a:buNone/>
-            </a:pPr>
-            <a:r>
-              <a:rPr lang="en-US" sz="1200" b="1" dirty="0">
-                <a:solidFill>
-                  <a:srgbClr val="4338CA"/>
-                </a:solidFill>
-                <a:latin typeface="Trebuchet MS" pitchFamily="34" charset="0"/>
-                <a:ea typeface="Trebuchet MS" pitchFamily="34" charset="-122"/>
-                <a:cs typeface="Trebuchet MS" pitchFamily="34" charset="-120"/>
-              </a:rPr>
-              <a:t>enjoyable</a:t>
-            </a:r>
-            <a:endParaRPr lang="en-US" sz="1200" dirty="0"/>
-          </a:p>
-        </p:txBody>
-      </p:sp>
-      <p:sp>
-        <p:nvSpPr>
-          <p:cNvPr id="54" name="Shape 52"/>
-          <p:cNvSpPr/>
-          <p:nvPr/>
-        </p:nvSpPr>
-        <p:spPr>
-          <a:xfrm>
-            <a:off x="2542032" y="4498848"/>
-            <a:ext cx="2011680" cy="402336"/>
-          </a:xfrm>
-          <a:prstGeom prst="rect">
-            <a:avLst>
-              <a:gd name="adj" fmla="val 13636"/>
-            </a:avLst>
-          </a:prstGeom>
-          <a:solidFill>
-            <a:srgbClr val="EEF2FF"/>
-          </a:solidFill>
-          <a:ln w="12700">
-            <a:solidFill>
-              <a:srgbClr val="6366F1"/>
-            </a:solidFill>
-            <a:prstDash val="solid"/>
-          </a:ln>
-        </p:spPr>
-      </p:sp>
-      <p:sp>
-        <p:nvSpPr>
-          <p:cNvPr id="55" name="Text 53"/>
-          <p:cNvSpPr/>
-          <p:nvPr/>
-        </p:nvSpPr>
-        <p:spPr>
-          <a:xfrm>
-            <a:off x="2542032" y="4498848"/>
-            <a:ext cx="2011680" cy="402336"/>
-          </a:xfrm>
-          <a:prstGeom prst="rect">
-            <a:avLst/>
-          </a:prstGeom>
-          <a:noFill/>
-          <a:ln/>
-        </p:spPr>
-        <p:txBody>
-          <a:bodyPr wrap="square" lIns="0" tIns="0" rIns="0" bIns="0" rtlCol="0" anchor="ctr"/>
-          <a:lstStyle/>
-          <a:p>
-            <a:pPr algn="ctr" indent="0" marL="0">
-              <a:buNone/>
-            </a:pPr>
-            <a:r>
-              <a:rPr lang="en-US" sz="1200" b="1" dirty="0">
-                <a:solidFill>
-                  <a:srgbClr val="4338CA"/>
-                </a:solidFill>
-                <a:latin typeface="Trebuchet MS" pitchFamily="34" charset="0"/>
-                <a:ea typeface="Trebuchet MS" pitchFamily="34" charset="-122"/>
-                <a:cs typeface="Trebuchet MS" pitchFamily="34" charset="-120"/>
-              </a:rPr>
-              <a:t>enjoyably</a:t>
-            </a:r>
-            <a:endParaRPr lang="en-US" sz="1200" dirty="0"/>
-          </a:p>
-        </p:txBody>
-      </p:sp>
-      <p:sp>
-        <p:nvSpPr>
-          <p:cNvPr id="56" name="Shape 54"/>
-          <p:cNvSpPr/>
-          <p:nvPr/>
-        </p:nvSpPr>
-        <p:spPr>
-          <a:xfrm>
-            <a:off x="4718304" y="4498848"/>
-            <a:ext cx="2011680" cy="402336"/>
-          </a:xfrm>
-          <a:prstGeom prst="rect">
-            <a:avLst>
-              <a:gd name="adj" fmla="val 13636"/>
-            </a:avLst>
-          </a:prstGeom>
-          <a:solidFill>
-            <a:srgbClr val="EEF2FF"/>
-          </a:solidFill>
-          <a:ln w="12700">
-            <a:solidFill>
-              <a:srgbClr val="6366F1"/>
-            </a:solidFill>
-            <a:prstDash val="solid"/>
-          </a:ln>
-        </p:spPr>
-      </p:sp>
-      <p:sp>
-        <p:nvSpPr>
-          <p:cNvPr id="57" name="Text 55"/>
-          <p:cNvSpPr/>
-          <p:nvPr/>
-        </p:nvSpPr>
-        <p:spPr>
-          <a:xfrm>
-            <a:off x="4718304" y="4498848"/>
-            <a:ext cx="2011680" cy="402336"/>
-          </a:xfrm>
-          <a:prstGeom prst="rect">
-            <a:avLst/>
-          </a:prstGeom>
-          <a:noFill/>
-          <a:ln/>
-        </p:spPr>
-        <p:txBody>
-          <a:bodyPr wrap="square" lIns="0" tIns="0" rIns="0" bIns="0" rtlCol="0" anchor="ctr"/>
-          <a:lstStyle/>
-          <a:p>
-            <a:pPr algn="ctr" indent="0" marL="0">
-              <a:buNone/>
-            </a:pPr>
-            <a:r>
-              <a:rPr lang="en-US" sz="1200" b="1" dirty="0">
-                <a:solidFill>
-                  <a:srgbClr val="4338CA"/>
-                </a:solidFill>
-                <a:latin typeface="Trebuchet MS" pitchFamily="34" charset="0"/>
-                <a:ea typeface="Trebuchet MS" pitchFamily="34" charset="-122"/>
-                <a:cs typeface="Trebuchet MS" pitchFamily="34" charset="-120"/>
-              </a:rPr>
-              <a:t>enjoyableness</a:t>
-            </a:r>
-            <a:endParaRPr lang="en-US" sz="1200" dirty="0"/>
-          </a:p>
-        </p:txBody>
-      </p:sp>
-      <p:sp>
-        <p:nvSpPr>
-          <p:cNvPr id="58" name="Shape 56"/>
-          <p:cNvSpPr/>
-          <p:nvPr/>
-        </p:nvSpPr>
-        <p:spPr>
-          <a:xfrm>
-            <a:off x="6894576" y="4498848"/>
-            <a:ext cx="2011680" cy="402336"/>
-          </a:xfrm>
-          <a:prstGeom prst="rect">
-            <a:avLst>
-              <a:gd name="adj" fmla="val 13636"/>
-            </a:avLst>
-          </a:prstGeom>
-          <a:solidFill>
-            <a:srgbClr val="EEF2FF"/>
-          </a:solidFill>
-          <a:ln w="12700">
-            <a:solidFill>
-              <a:srgbClr val="6366F1"/>
-            </a:solidFill>
-            <a:prstDash val="solid"/>
-          </a:ln>
-        </p:spPr>
-      </p:sp>
-      <p:sp>
-        <p:nvSpPr>
-          <p:cNvPr id="59" name="Text 57"/>
-          <p:cNvSpPr/>
-          <p:nvPr/>
-        </p:nvSpPr>
-        <p:spPr>
-          <a:xfrm>
-            <a:off x="6894576" y="4498848"/>
-            <a:ext cx="2011680" cy="402336"/>
-          </a:xfrm>
-          <a:prstGeom prst="rect">
-            <a:avLst/>
-          </a:prstGeom>
-          <a:noFill/>
-          <a:ln/>
-        </p:spPr>
-        <p:txBody>
-          <a:bodyPr wrap="square" lIns="0" tIns="0" rIns="0" bIns="0" rtlCol="0" anchor="ctr"/>
-          <a:lstStyle/>
-          <a:p>
-            <a:pPr algn="ctr" indent="0" marL="0">
-              <a:buNone/>
-            </a:pPr>
-            <a:r>
-              <a:rPr lang="en-US" sz="1200" b="1" dirty="0">
-                <a:solidFill>
-                  <a:srgbClr val="4338CA"/>
-                </a:solidFill>
-                <a:latin typeface="Trebuchet MS" pitchFamily="34" charset="0"/>
-                <a:ea typeface="Trebuchet MS" pitchFamily="34" charset="-122"/>
-                <a:cs typeface="Trebuchet MS" pitchFamily="34" charset="-120"/>
-              </a:rPr>
-              <a:t>enjoyer</a:t>
+              <a:t>enjoys</a:t>
             </a:r>
             <a:endParaRPr lang="en-US" sz="1200" dirty="0"/>
           </a:p>
@@ -35933,7 +35292,7 @@
                 <a:ea typeface="Calibri" pitchFamily="34" charset="-122"/>
                 <a:cs typeface="Calibri" pitchFamily="34" charset="-120"/>
               </a:rPr>
-              <a:t>Word Labs  •  wordlabs.app  •  Root: 'enjoy' = to take pleasure in</a:t>
+              <a:t>Word Labs  •  wordlabs.app  •  Root: 'enjoy' = like; take pleasure in</a:t>
             </a:r>
             <a:endParaRPr lang="en-US" sz="800" dirty="0"/>
           </a:p>
@@ -36097,7 +35456,7 @@
                 <a:ea typeface="Calibri" pitchFamily="34" charset="-122"/>
                 <a:cs typeface="Calibri" pitchFamily="34" charset="-120"/>
               </a:rPr>
-              <a:t>The core part of a word carrying its basic meaning. For example, 'enjoy' means 'to take pleasure in'.</a:t>
+              <a:t>The core part of a word carrying its basic meaning. For example, 'enjoy' means 'like; take pleasure in'.</a:t>
             </a:r>
             <a:endParaRPr lang="en-US" sz="1350" dirty="0"/>
           </a:p>
@@ -36717,7 +36076,7 @@
                 <a:ea typeface="Calibri" pitchFamily="34" charset="-122"/>
                 <a:cs typeface="Calibri" pitchFamily="34" charset="-120"/>
               </a:rPr>
-              <a:t>Word Labs  •  wordlabs.app  •  Root: 'enjoy' = to take pleasure in</a:t>
+              <a:t>Word Labs  •  wordlabs.app  •  Root: 'enjoy' = like; take pleasure in</a:t>
             </a:r>
             <a:endParaRPr lang="en-US" sz="800" dirty="0"/>
           </a:p>
@@ -36829,7 +36188,7 @@
                 <a:ea typeface="Calibri" pitchFamily="34" charset="-122"/>
                 <a:cs typeface="Calibri" pitchFamily="34" charset="-120"/>
               </a:rPr>
-              <a:t>1.  The suffix '-able' in 'enjoyable' means 'without'.</a:t>
+              <a:t>1.  'enjoy' means 'like; take pleasure in'.</a:t>
             </a:r>
             <a:endParaRPr lang="en-US" sz="1300" dirty="0"/>
           </a:p>
@@ -36852,11 +36211,11 @@
             </a:avLst>
           </a:prstGeom>
           <a:solidFill>
-            <a:srgbClr val="FEE2E2"/>
-          </a:solidFill>
-          <a:ln w="12700">
-            <a:solidFill>
-              <a:srgbClr val="DC2626"/>
+            <a:srgbClr val="DCFCE7"/>
+          </a:solidFill>
+          <a:ln w="12700">
+            <a:solidFill>
+              <a:srgbClr val="16A34A"/>
             </a:solidFill>
             <a:prstDash val="solid"/>
           </a:ln>
@@ -36889,13 +36248,13 @@
             <a:r>
               <a:rPr lang="en-US" sz="1100" b="1" dirty="0">
                 <a:solidFill>
-                  <a:srgbClr val="DC2626"/>
+                  <a:srgbClr val="16A34A"/>
                 </a:solidFill>
                 <a:latin typeface="Trebuchet MS" pitchFamily="34" charset="0"/>
                 <a:ea typeface="Trebuchet MS" pitchFamily="34" charset="-122"/>
                 <a:cs typeface="Trebuchet MS" pitchFamily="34" charset="-120"/>
               </a:rPr>
-              <a:t>FALSE</a:t>
+              <a:t>TRUE</a:t>
             </a:r>
             <a:endParaRPr lang="en-US" sz="1100" dirty="0"/>
           </a:p>
@@ -36968,7 +36327,7 @@
                 <a:ea typeface="Calibri" pitchFamily="34" charset="-122"/>
                 <a:cs typeface="Calibri" pitchFamily="34" charset="-120"/>
               </a:rPr>
-              <a:t>2.  Adding '-ment' to 'enjoy' changes it from a verb to a noun.</a:t>
+              <a:t>2.  'enjoys' means 'measures the length of something'.</a:t>
             </a:r>
             <a:endParaRPr lang="en-US" sz="1300" dirty="0"/>
           </a:p>
@@ -36991,11 +36350,11 @@
             </a:avLst>
           </a:prstGeom>
           <a:solidFill>
-            <a:srgbClr val="DCFCE7"/>
-          </a:solidFill>
-          <a:ln w="12700">
-            <a:solidFill>
-              <a:srgbClr val="16A34A"/>
+            <a:srgbClr val="FEE2E2"/>
+          </a:solidFill>
+          <a:ln w="12700">
+            <a:solidFill>
+              <a:srgbClr val="DC2626"/>
             </a:solidFill>
             <a:prstDash val="solid"/>
           </a:ln>
@@ -37028,13 +36387,13 @@
             <a:r>
               <a:rPr lang="en-US" sz="1100" b="1" dirty="0">
                 <a:solidFill>
-                  <a:srgbClr val="16A34A"/>
+                  <a:srgbClr val="DC2626"/>
                 </a:solidFill>
                 <a:latin typeface="Trebuchet MS" pitchFamily="34" charset="0"/>
                 <a:ea typeface="Trebuchet MS" pitchFamily="34" charset="-122"/>
                 <a:cs typeface="Trebuchet MS" pitchFamily="34" charset="-120"/>
               </a:rPr>
-              <a:t>TRUE</a:t>
+              <a:t>FALSE</a:t>
             </a:r>
             <a:endParaRPr lang="en-US" sz="1100" dirty="0"/>
           </a:p>
@@ -37107,7 +36466,7 @@
                 <a:ea typeface="Calibri" pitchFamily="34" charset="-122"/>
                 <a:cs typeface="Calibri" pitchFamily="34" charset="-120"/>
               </a:rPr>
-              <a:t>3.  The word 'enjoyment' contains the root 'enjoy' plus a suffix.</a:t>
+              <a:t>3.  'enjoys' means 'gets pleasure from something, present tense of enjoy'.</a:t>
             </a:r>
             <a:endParaRPr lang="en-US" sz="1300" dirty="0"/>
           </a:p>
@@ -37246,7 +36605,7 @@
                 <a:ea typeface="Calibri" pitchFamily="34" charset="-122"/>
                 <a:cs typeface="Calibri" pitchFamily="34" charset="-120"/>
               </a:rPr>
-              <a:t>4.  The root 'enjoy' comes from the Greek language.</a:t>
+              <a:t>4.  'enjoy' means 'to get pleasure or satisfaction from something'.</a:t>
             </a:r>
             <a:endParaRPr lang="en-US" sz="1300" dirty="0"/>
           </a:p>
@@ -37269,11 +36628,11 @@
             </a:avLst>
           </a:prstGeom>
           <a:solidFill>
-            <a:srgbClr val="FEE2E2"/>
-          </a:solidFill>
-          <a:ln w="12700">
-            <a:solidFill>
-              <a:srgbClr val="DC2626"/>
+            <a:srgbClr val="DCFCE7"/>
+          </a:solidFill>
+          <a:ln w="12700">
+            <a:solidFill>
+              <a:srgbClr val="16A34A"/>
             </a:solidFill>
             <a:prstDash val="solid"/>
           </a:ln>
@@ -37306,13 +36665,13 @@
             <a:r>
               <a:rPr lang="en-US" sz="1100" b="1" dirty="0">
                 <a:solidFill>
-                  <a:srgbClr val="DC2626"/>
+                  <a:srgbClr val="16A34A"/>
                 </a:solidFill>
                 <a:latin typeface="Trebuchet MS" pitchFamily="34" charset="0"/>
                 <a:ea typeface="Trebuchet MS" pitchFamily="34" charset="-122"/>
                 <a:cs typeface="Trebuchet MS" pitchFamily="34" charset="-120"/>
               </a:rPr>
-              <a:t>FALSE</a:t>
+              <a:t>TRUE</a:t>
             </a:r>
             <a:endParaRPr lang="en-US" sz="1100" dirty="0"/>
           </a:p>
@@ -37385,7 +36744,7 @@
                 <a:ea typeface="Calibri" pitchFamily="34" charset="-122"/>
                 <a:cs typeface="Calibri" pitchFamily="34" charset="-120"/>
               </a:rPr>
-              <a:t>5.  'Enjoyable' means something that gives pleasure or is fun to experience.</a:t>
+              <a:t>5.  'enjoy' means 'to feel annoyed by something'.</a:t>
             </a:r>
             <a:endParaRPr lang="en-US" sz="1300" dirty="0"/>
           </a:p>
@@ -37408,11 +36767,11 @@
             </a:avLst>
           </a:prstGeom>
           <a:solidFill>
-            <a:srgbClr val="DCFCE7"/>
-          </a:solidFill>
-          <a:ln w="12700">
-            <a:solidFill>
-              <a:srgbClr val="16A34A"/>
+            <a:srgbClr val="FEE2E2"/>
+          </a:solidFill>
+          <a:ln w="12700">
+            <a:solidFill>
+              <a:srgbClr val="DC2626"/>
             </a:solidFill>
             <a:prstDash val="solid"/>
           </a:ln>
@@ -37445,13 +36804,13 @@
             <a:r>
               <a:rPr lang="en-US" sz="1100" b="1" dirty="0">
                 <a:solidFill>
-                  <a:srgbClr val="16A34A"/>
+                  <a:srgbClr val="DC2626"/>
                 </a:solidFill>
                 <a:latin typeface="Trebuchet MS" pitchFamily="34" charset="0"/>
                 <a:ea typeface="Trebuchet MS" pitchFamily="34" charset="-122"/>
                 <a:cs typeface="Trebuchet MS" pitchFamily="34" charset="-120"/>
               </a:rPr>
-              <a:t>TRUE</a:t>
+              <a:t>FALSE</a:t>
             </a:r>
             <a:endParaRPr lang="en-US" sz="1100" dirty="0"/>
           </a:p>
@@ -37743,7 +37102,7 @@
                 <a:ea typeface="Calibri" pitchFamily="34" charset="-122"/>
                 <a:cs typeface="Calibri" pitchFamily="34" charset="-120"/>
               </a:rPr>
-              <a:t>Word Labs  •  wordlabs.app  •  Root: 'enjoy' = to take pleasure in</a:t>
+              <a:t>Word Labs  •  wordlabs.app  •  Root: 'enjoy' = like; take pleasure in</a:t>
             </a:r>
             <a:endParaRPr lang="en-US" sz="800" dirty="0"/>
           </a:p>
@@ -37880,7 +37239,7 @@
                 <a:ea typeface="Trebuchet MS" pitchFamily="34" charset="-122"/>
                 <a:cs typeface="Trebuchet MS" pitchFamily="34" charset="-120"/>
               </a:rPr>
-              <a:t>to take pleasure in</a:t>
+              <a:t>like; take pleasure in</a:t>
             </a:r>
             <a:endParaRPr lang="en-US" sz="2000" dirty="0"/>
           </a:p>
@@ -37919,7 +37278,7 @@
                 <a:ea typeface="Calibri" pitchFamily="34" charset="-122"/>
                 <a:cs typeface="Calibri" pitchFamily="34" charset="-120"/>
               </a:rPr>
-              <a:t>Origin: Latin: in + gaudere</a:t>
+              <a:t>Origin: Core English root</a:t>
             </a:r>
             <a:endParaRPr lang="en-US" sz="1100" dirty="0"/>
           </a:p>
@@ -38090,337 +37449,7 @@
                 <a:ea typeface="Trebuchet MS" pitchFamily="34" charset="-122"/>
                 <a:cs typeface="Trebuchet MS" pitchFamily="34" charset="-120"/>
               </a:rPr>
-              <a:t>enjoyed</a:t>
-            </a:r>
-            <a:endParaRPr lang="en-US" sz="1300" dirty="0"/>
-          </a:p>
-        </p:txBody>
-      </p:sp>
-      <p:sp>
-        <p:nvSpPr>
-          <p:cNvPr id="20" name="Shape 18"/>
-          <p:cNvSpPr/>
-          <p:nvPr/>
-        </p:nvSpPr>
-        <p:spPr>
-          <a:xfrm>
-            <a:off x="4663440" y="2743200"/>
-            <a:ext cx="2011680" cy="502920"/>
-          </a:xfrm>
-          <a:prstGeom prst="rect">
-            <a:avLst>
-              <a:gd name="adj" fmla="val 14545"/>
-            </a:avLst>
-          </a:prstGeom>
-          <a:solidFill>
-            <a:srgbClr val="EEF2FF"/>
-          </a:solidFill>
-          <a:ln w="12700">
-            <a:solidFill>
-              <a:srgbClr val="6366F1"/>
-            </a:solidFill>
-            <a:prstDash val="solid"/>
-          </a:ln>
-        </p:spPr>
-      </p:sp>
-      <p:sp>
-        <p:nvSpPr>
-          <p:cNvPr id="21" name="Text 19"/>
-          <p:cNvSpPr/>
-          <p:nvPr/>
-        </p:nvSpPr>
-        <p:spPr>
-          <a:xfrm>
-            <a:off x="4663440" y="2743200"/>
-            <a:ext cx="2011680" cy="502920"/>
-          </a:xfrm>
-          <a:prstGeom prst="rect">
-            <a:avLst/>
-          </a:prstGeom>
-          <a:noFill/>
-          <a:ln/>
-        </p:spPr>
-        <p:txBody>
-          <a:bodyPr wrap="square" lIns="0" tIns="0" rIns="0" bIns="0" rtlCol="0" anchor="ctr"/>
-          <a:lstStyle/>
-          <a:p>
-            <a:pPr algn="ctr" indent="0" marL="0">
-              <a:buNone/>
-            </a:pPr>
-            <a:r>
-              <a:rPr lang="en-US" sz="1300" b="1" dirty="0">
-                <a:solidFill>
-                  <a:srgbClr val="4338CA"/>
-                </a:solidFill>
-                <a:latin typeface="Trebuchet MS" pitchFamily="34" charset="0"/>
-                <a:ea typeface="Trebuchet MS" pitchFamily="34" charset="-122"/>
-                <a:cs typeface="Trebuchet MS" pitchFamily="34" charset="-120"/>
-              </a:rPr>
-              <a:t>enjoying</a:t>
-            </a:r>
-            <a:endParaRPr lang="en-US" sz="1300" dirty="0"/>
-          </a:p>
-        </p:txBody>
-      </p:sp>
-      <p:sp>
-        <p:nvSpPr>
-          <p:cNvPr id="22" name="Shape 20"/>
-          <p:cNvSpPr/>
-          <p:nvPr/>
-        </p:nvSpPr>
-        <p:spPr>
-          <a:xfrm>
-            <a:off x="6812280" y="2743200"/>
-            <a:ext cx="2011680" cy="502920"/>
-          </a:xfrm>
-          <a:prstGeom prst="rect">
-            <a:avLst>
-              <a:gd name="adj" fmla="val 14545"/>
-            </a:avLst>
-          </a:prstGeom>
-          <a:solidFill>
-            <a:srgbClr val="EEF2FF"/>
-          </a:solidFill>
-          <a:ln w="12700">
-            <a:solidFill>
-              <a:srgbClr val="6366F1"/>
-            </a:solidFill>
-            <a:prstDash val="solid"/>
-          </a:ln>
-        </p:spPr>
-      </p:sp>
-      <p:sp>
-        <p:nvSpPr>
-          <p:cNvPr id="23" name="Text 21"/>
-          <p:cNvSpPr/>
-          <p:nvPr/>
-        </p:nvSpPr>
-        <p:spPr>
-          <a:xfrm>
-            <a:off x="6812280" y="2743200"/>
-            <a:ext cx="2011680" cy="502920"/>
-          </a:xfrm>
-          <a:prstGeom prst="rect">
-            <a:avLst/>
-          </a:prstGeom>
-          <a:noFill/>
-          <a:ln/>
-        </p:spPr>
-        <p:txBody>
-          <a:bodyPr wrap="square" lIns="0" tIns="0" rIns="0" bIns="0" rtlCol="0" anchor="ctr"/>
-          <a:lstStyle/>
-          <a:p>
-            <a:pPr algn="ctr" indent="0" marL="0">
-              <a:buNone/>
-            </a:pPr>
-            <a:r>
-              <a:rPr lang="en-US" sz="1300" b="1" dirty="0">
-                <a:solidFill>
-                  <a:srgbClr val="4338CA"/>
-                </a:solidFill>
-                <a:latin typeface="Trebuchet MS" pitchFamily="34" charset="0"/>
-                <a:ea typeface="Trebuchet MS" pitchFamily="34" charset="-122"/>
-                <a:cs typeface="Trebuchet MS" pitchFamily="34" charset="-120"/>
-              </a:rPr>
-              <a:t>enjoyment</a:t>
-            </a:r>
-            <a:endParaRPr lang="en-US" sz="1300" dirty="0"/>
-          </a:p>
-        </p:txBody>
-      </p:sp>
-      <p:sp>
-        <p:nvSpPr>
-          <p:cNvPr id="24" name="Shape 22"/>
-          <p:cNvSpPr/>
-          <p:nvPr/>
-        </p:nvSpPr>
-        <p:spPr>
-          <a:xfrm>
-            <a:off x="365760" y="3401568"/>
-            <a:ext cx="2011680" cy="502920"/>
-          </a:xfrm>
-          <a:prstGeom prst="rect">
-            <a:avLst>
-              <a:gd name="adj" fmla="val 14545"/>
-            </a:avLst>
-          </a:prstGeom>
-          <a:solidFill>
-            <a:srgbClr val="EEF2FF"/>
-          </a:solidFill>
-          <a:ln w="12700">
-            <a:solidFill>
-              <a:srgbClr val="6366F1"/>
-            </a:solidFill>
-            <a:prstDash val="solid"/>
-          </a:ln>
-        </p:spPr>
-      </p:sp>
-      <p:sp>
-        <p:nvSpPr>
-          <p:cNvPr id="25" name="Text 23"/>
-          <p:cNvSpPr/>
-          <p:nvPr/>
-        </p:nvSpPr>
-        <p:spPr>
-          <a:xfrm>
-            <a:off x="365760" y="3401568"/>
-            <a:ext cx="2011680" cy="502920"/>
-          </a:xfrm>
-          <a:prstGeom prst="rect">
-            <a:avLst/>
-          </a:prstGeom>
-          <a:noFill/>
-          <a:ln/>
-        </p:spPr>
-        <p:txBody>
-          <a:bodyPr wrap="square" lIns="0" tIns="0" rIns="0" bIns="0" rtlCol="0" anchor="ctr"/>
-          <a:lstStyle/>
-          <a:p>
-            <a:pPr algn="ctr" indent="0" marL="0">
-              <a:buNone/>
-            </a:pPr>
-            <a:r>
-              <a:rPr lang="en-US" sz="1300" b="1" dirty="0">
-                <a:solidFill>
-                  <a:srgbClr val="4338CA"/>
-                </a:solidFill>
-                <a:latin typeface="Trebuchet MS" pitchFamily="34" charset="0"/>
-                <a:ea typeface="Trebuchet MS" pitchFamily="34" charset="-122"/>
-                <a:cs typeface="Trebuchet MS" pitchFamily="34" charset="-120"/>
-              </a:rPr>
-              <a:t>enjoyable</a:t>
-            </a:r>
-            <a:endParaRPr lang="en-US" sz="1300" dirty="0"/>
-          </a:p>
-        </p:txBody>
-      </p:sp>
-      <p:sp>
-        <p:nvSpPr>
-          <p:cNvPr id="26" name="Shape 24"/>
-          <p:cNvSpPr/>
-          <p:nvPr/>
-        </p:nvSpPr>
-        <p:spPr>
-          <a:xfrm>
-            <a:off x="2514600" y="3401568"/>
-            <a:ext cx="2011680" cy="502920"/>
-          </a:xfrm>
-          <a:prstGeom prst="rect">
-            <a:avLst>
-              <a:gd name="adj" fmla="val 14545"/>
-            </a:avLst>
-          </a:prstGeom>
-          <a:solidFill>
-            <a:srgbClr val="EEF2FF"/>
-          </a:solidFill>
-          <a:ln w="12700">
-            <a:solidFill>
-              <a:srgbClr val="6366F1"/>
-            </a:solidFill>
-            <a:prstDash val="solid"/>
-          </a:ln>
-        </p:spPr>
-      </p:sp>
-      <p:sp>
-        <p:nvSpPr>
-          <p:cNvPr id="27" name="Text 25"/>
-          <p:cNvSpPr/>
-          <p:nvPr/>
-        </p:nvSpPr>
-        <p:spPr>
-          <a:xfrm>
-            <a:off x="2514600" y="3401568"/>
-            <a:ext cx="2011680" cy="502920"/>
-          </a:xfrm>
-          <a:prstGeom prst="rect">
-            <a:avLst/>
-          </a:prstGeom>
-          <a:noFill/>
-          <a:ln/>
-        </p:spPr>
-        <p:txBody>
-          <a:bodyPr wrap="square" lIns="0" tIns="0" rIns="0" bIns="0" rtlCol="0" anchor="ctr"/>
-          <a:lstStyle/>
-          <a:p>
-            <a:pPr algn="ctr" indent="0" marL="0">
-              <a:buNone/>
-            </a:pPr>
-            <a:r>
-              <a:rPr lang="en-US" sz="1300" b="1" dirty="0">
-                <a:solidFill>
-                  <a:srgbClr val="4338CA"/>
-                </a:solidFill>
-                <a:latin typeface="Trebuchet MS" pitchFamily="34" charset="0"/>
-                <a:ea typeface="Trebuchet MS" pitchFamily="34" charset="-122"/>
-                <a:cs typeface="Trebuchet MS" pitchFamily="34" charset="-120"/>
-              </a:rPr>
-              <a:t>enjoyably</a:t>
-            </a:r>
-            <a:endParaRPr lang="en-US" sz="1300" dirty="0"/>
-          </a:p>
-        </p:txBody>
-      </p:sp>
-      <p:sp>
-        <p:nvSpPr>
-          <p:cNvPr id="28" name="Shape 26"/>
-          <p:cNvSpPr/>
-          <p:nvPr/>
-        </p:nvSpPr>
-        <p:spPr>
-          <a:xfrm>
-            <a:off x="4663440" y="3401568"/>
-            <a:ext cx="2011680" cy="502920"/>
-          </a:xfrm>
-          <a:prstGeom prst="rect">
-            <a:avLst>
-              <a:gd name="adj" fmla="val 14545"/>
-            </a:avLst>
-          </a:prstGeom>
-          <a:solidFill>
-            <a:srgbClr val="EEF2FF"/>
-          </a:solidFill>
-          <a:ln w="12700">
-            <a:solidFill>
-              <a:srgbClr val="6366F1"/>
-            </a:solidFill>
-            <a:prstDash val="solid"/>
-          </a:ln>
-        </p:spPr>
-      </p:sp>
-      <p:sp>
-        <p:nvSpPr>
-          <p:cNvPr id="29" name="Text 27"/>
-          <p:cNvSpPr/>
-          <p:nvPr/>
-        </p:nvSpPr>
-        <p:spPr>
-          <a:xfrm>
-            <a:off x="4663440" y="3401568"/>
-            <a:ext cx="2011680" cy="502920"/>
-          </a:xfrm>
-          <a:prstGeom prst="rect">
-            <a:avLst/>
-          </a:prstGeom>
-          <a:noFill/>
-          <a:ln/>
-        </p:spPr>
-        <p:txBody>
-          <a:bodyPr wrap="square" lIns="0" tIns="0" rIns="0" bIns="0" rtlCol="0" anchor="ctr"/>
-          <a:lstStyle/>
-          <a:p>
-            <a:pPr algn="ctr" indent="0" marL="0">
-              <a:buNone/>
-            </a:pPr>
-            <a:r>
-              <a:rPr lang="en-US" sz="1300" b="1" dirty="0">
-                <a:solidFill>
-                  <a:srgbClr val="4338CA"/>
-                </a:solidFill>
-                <a:latin typeface="Trebuchet MS" pitchFamily="34" charset="0"/>
-                <a:ea typeface="Trebuchet MS" pitchFamily="34" charset="-122"/>
-                <a:cs typeface="Trebuchet MS" pitchFamily="34" charset="-120"/>
-              </a:rPr>
-              <a:t>enjoyableness</a:t>
+              <a:t>enjoys</a:t>
             </a:r>
             <a:endParaRPr lang="en-US" sz="1300" dirty="0"/>
           </a:p>
@@ -38712,7 +37741,7 @@
                 <a:ea typeface="Calibri" pitchFamily="34" charset="-122"/>
                 <a:cs typeface="Calibri" pitchFamily="34" charset="-120"/>
               </a:rPr>
-              <a:t>Word Labs  •  wordlabs.app  •  Root: 'enjoy' = to take pleasure in</a:t>
+              <a:t>Word Labs  •  wordlabs.app  •  Root: 'enjoy' = like; take pleasure in</a:t>
             </a:r>
             <a:endParaRPr lang="en-US" sz="800" dirty="0"/>
           </a:p>
@@ -38970,7 +37999,7 @@
             <a:avLst/>
           </a:prstGeom>
           <a:solidFill>
-            <a:srgbClr val="DDD6FE"/>
+            <a:srgbClr val="F8FAFC"/>
           </a:solidFill>
           <a:ln w="12700">
             <a:solidFill>
@@ -38982,14 +38011,39 @@
       </p:sp>
       <p:sp>
         <p:nvSpPr>
-          <p:cNvPr id="18" name="Text 16"/>
-          <p:cNvSpPr/>
-          <p:nvPr/>
-        </p:nvSpPr>
-        <p:spPr>
-          <a:xfrm>
-            <a:off x="640080" y="1755648"/>
-            <a:ext cx="1463040" cy="420624"/>
+          <p:cNvPr id="18" name="Shape 16"/>
+          <p:cNvSpPr/>
+          <p:nvPr/>
+        </p:nvSpPr>
+        <p:spPr>
+          <a:xfrm>
+            <a:off x="3291840" y="1755648"/>
+            <a:ext cx="1645920" cy="420624"/>
+          </a:xfrm>
+          <a:prstGeom prst="rect">
+            <a:avLst/>
+          </a:prstGeom>
+          <a:solidFill>
+            <a:srgbClr val="CCFBF1"/>
+          </a:solidFill>
+          <a:ln w="12700">
+            <a:solidFill>
+              <a:srgbClr val="E5E7EB"/>
+            </a:solidFill>
+            <a:prstDash val="solid"/>
+          </a:ln>
+        </p:spPr>
+      </p:sp>
+      <p:sp>
+        <p:nvSpPr>
+          <p:cNvPr id="19" name="Text 17"/>
+          <p:cNvSpPr/>
+          <p:nvPr/>
+        </p:nvSpPr>
+        <p:spPr>
+          <a:xfrm>
+            <a:off x="3291840" y="1755648"/>
+            <a:ext cx="1645920" cy="420624"/>
           </a:xfrm>
           <a:prstGeom prst="rect">
             <a:avLst/>
@@ -39007,13 +38061,13 @@
             <a:r>
               <a:rPr lang="en-US" sz="1300" b="1" dirty="0">
                 <a:solidFill>
-                  <a:srgbClr val="4C1D95"/>
+                  <a:srgbClr val="0F766E"/>
                 </a:solidFill>
                 <a:latin typeface="Trebuchet MS" pitchFamily="34" charset="0"/>
                 <a:ea typeface="Trebuchet MS" pitchFamily="34" charset="-122"/>
                 <a:cs typeface="Trebuchet MS" pitchFamily="34" charset="-120"/>
               </a:rPr>
-              <a:t>un-</a:t>
+              <a:t>enjoy</a:t>
             </a:r>
             <a:endParaRPr lang="en-US" sz="1300" dirty="0"/>
           </a:p>
@@ -39021,20 +38075,20 @@
       </p:sp>
       <p:sp>
         <p:nvSpPr>
-          <p:cNvPr id="19" name="Shape 17"/>
-          <p:cNvSpPr/>
-          <p:nvPr/>
-        </p:nvSpPr>
-        <p:spPr>
-          <a:xfrm>
-            <a:off x="3291840" y="1755648"/>
-            <a:ext cx="1645920" cy="420624"/>
-          </a:xfrm>
-          <a:prstGeom prst="rect">
-            <a:avLst/>
-          </a:prstGeom>
-          <a:solidFill>
-            <a:srgbClr val="CCFBF1"/>
+          <p:cNvPr id="20" name="Shape 18"/>
+          <p:cNvSpPr/>
+          <p:nvPr/>
+        </p:nvSpPr>
+        <p:spPr>
+          <a:xfrm>
+            <a:off x="5943600" y="1755648"/>
+            <a:ext cx="1463040" cy="420624"/>
+          </a:xfrm>
+          <a:prstGeom prst="rect">
+            <a:avLst/>
+          </a:prstGeom>
+          <a:solidFill>
+            <a:srgbClr val="FCE7F3"/>
           </a:solidFill>
           <a:ln w="12700">
             <a:solidFill>
@@ -39046,14 +38100,14 @@
       </p:sp>
       <p:sp>
         <p:nvSpPr>
-          <p:cNvPr id="20" name="Text 18"/>
-          <p:cNvSpPr/>
-          <p:nvPr/>
-        </p:nvSpPr>
-        <p:spPr>
-          <a:xfrm>
-            <a:off x="3291840" y="1755648"/>
-            <a:ext cx="1645920" cy="420624"/>
+          <p:cNvPr id="21" name="Text 19"/>
+          <p:cNvSpPr/>
+          <p:nvPr/>
+        </p:nvSpPr>
+        <p:spPr>
+          <a:xfrm>
+            <a:off x="5943600" y="1755648"/>
+            <a:ext cx="1463040" cy="420624"/>
           </a:xfrm>
           <a:prstGeom prst="rect">
             <a:avLst/>
@@ -39071,13 +38125,13 @@
             <a:r>
               <a:rPr lang="en-US" sz="1300" b="1" dirty="0">
                 <a:solidFill>
-                  <a:srgbClr val="0F766E"/>
+                  <a:srgbClr val="9D174D"/>
                 </a:solidFill>
                 <a:latin typeface="Trebuchet MS" pitchFamily="34" charset="0"/>
                 <a:ea typeface="Trebuchet MS" pitchFamily="34" charset="-122"/>
                 <a:cs typeface="Trebuchet MS" pitchFamily="34" charset="-120"/>
               </a:rPr>
-              <a:t>enjoy</a:t>
+              <a:t>-able</a:t>
             </a:r>
             <a:endParaRPr lang="en-US" sz="1300" dirty="0"/>
           </a:p>
@@ -39085,19 +38139,69 @@
       </p:sp>
       <p:sp>
         <p:nvSpPr>
-          <p:cNvPr id="21" name="Shape 19"/>
-          <p:cNvSpPr/>
-          <p:nvPr/>
-        </p:nvSpPr>
-        <p:spPr>
-          <a:xfrm>
-            <a:off x="5943600" y="1755648"/>
+          <p:cNvPr id="22" name="Shape 20"/>
+          <p:cNvSpPr/>
+          <p:nvPr/>
+        </p:nvSpPr>
+        <p:spPr>
+          <a:xfrm>
+            <a:off x="640080" y="2212848"/>
             <a:ext cx="1463040" cy="420624"/>
           </a:xfrm>
           <a:prstGeom prst="rect">
             <a:avLst/>
           </a:prstGeom>
           <a:solidFill>
+            <a:srgbClr val="F1F5F9"/>
+          </a:solidFill>
+          <a:ln w="12700">
+            <a:solidFill>
+              <a:srgbClr val="E5E7EB"/>
+            </a:solidFill>
+            <a:prstDash val="solid"/>
+          </a:ln>
+        </p:spPr>
+      </p:sp>
+      <p:sp>
+        <p:nvSpPr>
+          <p:cNvPr id="23" name="Shape 21"/>
+          <p:cNvSpPr/>
+          <p:nvPr/>
+        </p:nvSpPr>
+        <p:spPr>
+          <a:xfrm>
+            <a:off x="3291840" y="2212848"/>
+            <a:ext cx="1645920" cy="420624"/>
+          </a:xfrm>
+          <a:prstGeom prst="rect">
+            <a:avLst/>
+          </a:prstGeom>
+          <a:solidFill>
+            <a:srgbClr val="F1F5F9"/>
+          </a:solidFill>
+          <a:ln w="12700">
+            <a:solidFill>
+              <a:srgbClr val="E5E7EB"/>
+            </a:solidFill>
+            <a:prstDash val="solid"/>
+          </a:ln>
+        </p:spPr>
+      </p:sp>
+      <p:sp>
+        <p:nvSpPr>
+          <p:cNvPr id="24" name="Shape 22"/>
+          <p:cNvSpPr/>
+          <p:nvPr/>
+        </p:nvSpPr>
+        <p:spPr>
+          <a:xfrm>
+            <a:off x="5943600" y="2212848"/>
+            <a:ext cx="1463040" cy="420624"/>
+          </a:xfrm>
+          <a:prstGeom prst="rect">
+            <a:avLst/>
+          </a:prstGeom>
+          <a:solidFill>
             <a:srgbClr val="FCE7F3"/>
           </a:solidFill>
           <a:ln w="12700">
@@ -39110,13 +38214,13 @@
       </p:sp>
       <p:sp>
         <p:nvSpPr>
-          <p:cNvPr id="22" name="Text 20"/>
-          <p:cNvSpPr/>
-          <p:nvPr/>
-        </p:nvSpPr>
-        <p:spPr>
-          <a:xfrm>
-            <a:off x="5943600" y="1755648"/>
+          <p:cNvPr id="25" name="Text 23"/>
+          <p:cNvSpPr/>
+          <p:nvPr/>
+        </p:nvSpPr>
+        <p:spPr>
+          <a:xfrm>
+            <a:off x="5943600" y="2212848"/>
             <a:ext cx="1463040" cy="420624"/>
           </a:xfrm>
           <a:prstGeom prst="rect">
@@ -39141,7 +38245,7 @@
                 <a:ea typeface="Trebuchet MS" pitchFamily="34" charset="-122"/>
                 <a:cs typeface="Trebuchet MS" pitchFamily="34" charset="-120"/>
               </a:rPr>
-              <a:t>-ment</a:t>
+              <a:t>-ed</a:t>
             </a:r>
             <a:endParaRPr lang="en-US" sz="1300" dirty="0"/>
           </a:p>
@@ -39149,20 +38253,20 @@
       </p:sp>
       <p:sp>
         <p:nvSpPr>
-          <p:cNvPr id="23" name="Shape 21"/>
-          <p:cNvSpPr/>
-          <p:nvPr/>
-        </p:nvSpPr>
-        <p:spPr>
-          <a:xfrm>
-            <a:off x="640080" y="2212848"/>
+          <p:cNvPr id="26" name="Shape 24"/>
+          <p:cNvSpPr/>
+          <p:nvPr/>
+        </p:nvSpPr>
+        <p:spPr>
+          <a:xfrm>
+            <a:off x="640080" y="2670048"/>
             <a:ext cx="1463040" cy="420624"/>
           </a:xfrm>
           <a:prstGeom prst="rect">
             <a:avLst/>
           </a:prstGeom>
           <a:solidFill>
-            <a:srgbClr val="DDD6FE"/>
+            <a:srgbClr val="F8FAFC"/>
           </a:solidFill>
           <a:ln w="12700">
             <a:solidFill>
@@ -39174,18 +38278,68 @@
       </p:sp>
       <p:sp>
         <p:nvSpPr>
-          <p:cNvPr id="24" name="Text 22"/>
-          <p:cNvSpPr/>
-          <p:nvPr/>
-        </p:nvSpPr>
-        <p:spPr>
-          <a:xfrm>
-            <a:off x="640080" y="2212848"/>
+          <p:cNvPr id="27" name="Shape 25"/>
+          <p:cNvSpPr/>
+          <p:nvPr/>
+        </p:nvSpPr>
+        <p:spPr>
+          <a:xfrm>
+            <a:off x="3291840" y="2670048"/>
+            <a:ext cx="1645920" cy="420624"/>
+          </a:xfrm>
+          <a:prstGeom prst="rect">
+            <a:avLst/>
+          </a:prstGeom>
+          <a:solidFill>
+            <a:srgbClr val="F8FAFC"/>
+          </a:solidFill>
+          <a:ln w="12700">
+            <a:solidFill>
+              <a:srgbClr val="E5E7EB"/>
+            </a:solidFill>
+            <a:prstDash val="solid"/>
+          </a:ln>
+        </p:spPr>
+      </p:sp>
+      <p:sp>
+        <p:nvSpPr>
+          <p:cNvPr id="28" name="Shape 26"/>
+          <p:cNvSpPr/>
+          <p:nvPr/>
+        </p:nvSpPr>
+        <p:spPr>
+          <a:xfrm>
+            <a:off x="5943600" y="2670048"/>
             <a:ext cx="1463040" cy="420624"/>
           </a:xfrm>
           <a:prstGeom prst="rect">
             <a:avLst/>
           </a:prstGeom>
+          <a:solidFill>
+            <a:srgbClr val="FCE7F3"/>
+          </a:solidFill>
+          <a:ln w="12700">
+            <a:solidFill>
+              <a:srgbClr val="E5E7EB"/>
+            </a:solidFill>
+            <a:prstDash val="solid"/>
+          </a:ln>
+        </p:spPr>
+      </p:sp>
+      <p:sp>
+        <p:nvSpPr>
+          <p:cNvPr id="29" name="Text 27"/>
+          <p:cNvSpPr/>
+          <p:nvPr/>
+        </p:nvSpPr>
+        <p:spPr>
+          <a:xfrm>
+            <a:off x="5943600" y="2670048"/>
+            <a:ext cx="1463040" cy="420624"/>
+          </a:xfrm>
+          <a:prstGeom prst="rect">
+            <a:avLst/>
+          </a:prstGeom>
           <a:noFill/>
           <a:ln/>
         </p:spPr>
@@ -39199,13 +38353,13 @@
             <a:r>
               <a:rPr lang="en-US" sz="1300" b="1" dirty="0">
                 <a:solidFill>
-                  <a:srgbClr val="4C1D95"/>
+                  <a:srgbClr val="9D174D"/>
                 </a:solidFill>
                 <a:latin typeface="Trebuchet MS" pitchFamily="34" charset="0"/>
                 <a:ea typeface="Trebuchet MS" pitchFamily="34" charset="-122"/>
                 <a:cs typeface="Trebuchet MS" pitchFamily="34" charset="-120"/>
               </a:rPr>
-              <a:t>re-</a:t>
+              <a:t>-er</a:t>
             </a:r>
             <a:endParaRPr lang="en-US" sz="1300" dirty="0"/>
           </a:p>
@@ -39213,13 +38367,38 @@
       </p:sp>
       <p:sp>
         <p:nvSpPr>
-          <p:cNvPr id="25" name="Shape 23"/>
-          <p:cNvSpPr/>
-          <p:nvPr/>
-        </p:nvSpPr>
-        <p:spPr>
-          <a:xfrm>
-            <a:off x="3291840" y="2212848"/>
+          <p:cNvPr id="30" name="Shape 28"/>
+          <p:cNvSpPr/>
+          <p:nvPr/>
+        </p:nvSpPr>
+        <p:spPr>
+          <a:xfrm>
+            <a:off x="640080" y="3127248"/>
+            <a:ext cx="1463040" cy="420624"/>
+          </a:xfrm>
+          <a:prstGeom prst="rect">
+            <a:avLst/>
+          </a:prstGeom>
+          <a:solidFill>
+            <a:srgbClr val="F1F5F9"/>
+          </a:solidFill>
+          <a:ln w="12700">
+            <a:solidFill>
+              <a:srgbClr val="E5E7EB"/>
+            </a:solidFill>
+            <a:prstDash val="solid"/>
+          </a:ln>
+        </p:spPr>
+      </p:sp>
+      <p:sp>
+        <p:nvSpPr>
+          <p:cNvPr id="31" name="Shape 29"/>
+          <p:cNvSpPr/>
+          <p:nvPr/>
+        </p:nvSpPr>
+        <p:spPr>
+          <a:xfrm>
+            <a:off x="3291840" y="3127248"/>
             <a:ext cx="1645920" cy="420624"/>
           </a:xfrm>
           <a:prstGeom prst="rect">
@@ -39238,13 +38417,13 @@
       </p:sp>
       <p:sp>
         <p:nvSpPr>
-          <p:cNvPr id="26" name="Shape 24"/>
-          <p:cNvSpPr/>
-          <p:nvPr/>
-        </p:nvSpPr>
-        <p:spPr>
-          <a:xfrm>
-            <a:off x="5943600" y="2212848"/>
+          <p:cNvPr id="32" name="Shape 30"/>
+          <p:cNvSpPr/>
+          <p:nvPr/>
+        </p:nvSpPr>
+        <p:spPr>
+          <a:xfrm>
+            <a:off x="5943600" y="3127248"/>
             <a:ext cx="1463040" cy="420624"/>
           </a:xfrm>
           <a:prstGeom prst="rect">
@@ -39263,13 +38442,13 @@
       </p:sp>
       <p:sp>
         <p:nvSpPr>
-          <p:cNvPr id="27" name="Text 25"/>
-          <p:cNvSpPr/>
-          <p:nvPr/>
-        </p:nvSpPr>
-        <p:spPr>
-          <a:xfrm>
-            <a:off x="5943600" y="2212848"/>
+          <p:cNvPr id="33" name="Text 31"/>
+          <p:cNvSpPr/>
+          <p:nvPr/>
+        </p:nvSpPr>
+        <p:spPr>
+          <a:xfrm>
+            <a:off x="5943600" y="3127248"/>
             <a:ext cx="1463040" cy="420624"/>
           </a:xfrm>
           <a:prstGeom prst="rect">
@@ -39294,7 +38473,7 @@
                 <a:ea typeface="Trebuchet MS" pitchFamily="34" charset="-122"/>
                 <a:cs typeface="Trebuchet MS" pitchFamily="34" charset="-120"/>
               </a:rPr>
-              <a:t>-able</a:t>
+              <a:t>-ing</a:t>
             </a:r>
             <a:endParaRPr lang="en-US" sz="1300" dirty="0"/>
           </a:p>
@@ -39302,20 +38481,20 @@
       </p:sp>
       <p:sp>
         <p:nvSpPr>
-          <p:cNvPr id="28" name="Shape 26"/>
-          <p:cNvSpPr/>
-          <p:nvPr/>
-        </p:nvSpPr>
-        <p:spPr>
-          <a:xfrm>
-            <a:off x="640080" y="2670048"/>
+          <p:cNvPr id="34" name="Shape 32"/>
+          <p:cNvSpPr/>
+          <p:nvPr/>
+        </p:nvSpPr>
+        <p:spPr>
+          <a:xfrm>
+            <a:off x="640080" y="3584448"/>
             <a:ext cx="1463040" cy="420624"/>
           </a:xfrm>
           <a:prstGeom prst="rect">
             <a:avLst/>
           </a:prstGeom>
           <a:solidFill>
-            <a:srgbClr val="DDD6FE"/>
+            <a:srgbClr val="F8FAFC"/>
           </a:solidFill>
           <a:ln w="12700">
             <a:solidFill>
@@ -39327,18 +38506,68 @@
       </p:sp>
       <p:sp>
         <p:nvSpPr>
-          <p:cNvPr id="29" name="Text 27"/>
-          <p:cNvSpPr/>
-          <p:nvPr/>
-        </p:nvSpPr>
-        <p:spPr>
-          <a:xfrm>
-            <a:off x="640080" y="2670048"/>
+          <p:cNvPr id="35" name="Shape 33"/>
+          <p:cNvSpPr/>
+          <p:nvPr/>
+        </p:nvSpPr>
+        <p:spPr>
+          <a:xfrm>
+            <a:off x="3291840" y="3584448"/>
+            <a:ext cx="1645920" cy="420624"/>
+          </a:xfrm>
+          <a:prstGeom prst="rect">
+            <a:avLst/>
+          </a:prstGeom>
+          <a:solidFill>
+            <a:srgbClr val="F8FAFC"/>
+          </a:solidFill>
+          <a:ln w="12700">
+            <a:solidFill>
+              <a:srgbClr val="E5E7EB"/>
+            </a:solidFill>
+            <a:prstDash val="solid"/>
+          </a:ln>
+        </p:spPr>
+      </p:sp>
+      <p:sp>
+        <p:nvSpPr>
+          <p:cNvPr id="36" name="Shape 34"/>
+          <p:cNvSpPr/>
+          <p:nvPr/>
+        </p:nvSpPr>
+        <p:spPr>
+          <a:xfrm>
+            <a:off x="5943600" y="3584448"/>
             <a:ext cx="1463040" cy="420624"/>
           </a:xfrm>
           <a:prstGeom prst="rect">
             <a:avLst/>
           </a:prstGeom>
+          <a:solidFill>
+            <a:srgbClr val="FCE7F3"/>
+          </a:solidFill>
+          <a:ln w="12700">
+            <a:solidFill>
+              <a:srgbClr val="E5E7EB"/>
+            </a:solidFill>
+            <a:prstDash val="solid"/>
+          </a:ln>
+        </p:spPr>
+      </p:sp>
+      <p:sp>
+        <p:nvSpPr>
+          <p:cNvPr id="37" name="Text 35"/>
+          <p:cNvSpPr/>
+          <p:nvPr/>
+        </p:nvSpPr>
+        <p:spPr>
+          <a:xfrm>
+            <a:off x="5943600" y="3584448"/>
+            <a:ext cx="1463040" cy="420624"/>
+          </a:xfrm>
+          <a:prstGeom prst="rect">
+            <a:avLst/>
+          </a:prstGeom>
           <a:noFill/>
           <a:ln/>
         </p:spPr>
@@ -39352,13 +38581,13 @@
             <a:r>
               <a:rPr lang="en-US" sz="1300" b="1" dirty="0">
                 <a:solidFill>
-                  <a:srgbClr val="4C1D95"/>
+                  <a:srgbClr val="9D174D"/>
                 </a:solidFill>
                 <a:latin typeface="Trebuchet MS" pitchFamily="34" charset="0"/>
                 <a:ea typeface="Trebuchet MS" pitchFamily="34" charset="-122"/>
                 <a:cs typeface="Trebuchet MS" pitchFamily="34" charset="-120"/>
               </a:rPr>
-              <a:t>dis-</a:t>
+              <a:t>-ment</a:t>
             </a:r>
             <a:endParaRPr lang="en-US" sz="1300" dirty="0"/>
           </a:p>
@@ -39366,20 +38595,45 @@
       </p:sp>
       <p:sp>
         <p:nvSpPr>
-          <p:cNvPr id="30" name="Shape 28"/>
-          <p:cNvSpPr/>
-          <p:nvPr/>
-        </p:nvSpPr>
-        <p:spPr>
-          <a:xfrm>
-            <a:off x="3291840" y="2670048"/>
+          <p:cNvPr id="38" name="Shape 36"/>
+          <p:cNvSpPr/>
+          <p:nvPr/>
+        </p:nvSpPr>
+        <p:spPr>
+          <a:xfrm>
+            <a:off x="640080" y="4041648"/>
+            <a:ext cx="1463040" cy="420624"/>
+          </a:xfrm>
+          <a:prstGeom prst="rect">
+            <a:avLst/>
+          </a:prstGeom>
+          <a:solidFill>
+            <a:srgbClr val="F1F5F9"/>
+          </a:solidFill>
+          <a:ln w="12700">
+            <a:solidFill>
+              <a:srgbClr val="E5E7EB"/>
+            </a:solidFill>
+            <a:prstDash val="solid"/>
+          </a:ln>
+        </p:spPr>
+      </p:sp>
+      <p:sp>
+        <p:nvSpPr>
+          <p:cNvPr id="39" name="Shape 37"/>
+          <p:cNvSpPr/>
+          <p:nvPr/>
+        </p:nvSpPr>
+        <p:spPr>
+          <a:xfrm>
+            <a:off x="3291840" y="4041648"/>
             <a:ext cx="1645920" cy="420624"/>
           </a:xfrm>
           <a:prstGeom prst="rect">
             <a:avLst/>
           </a:prstGeom>
           <a:solidFill>
-            <a:srgbClr val="F8FAFC"/>
+            <a:srgbClr val="F1F5F9"/>
           </a:solidFill>
           <a:ln w="12700">
             <a:solidFill>
@@ -39391,13 +38645,13 @@
       </p:sp>
       <p:sp>
         <p:nvSpPr>
-          <p:cNvPr id="31" name="Shape 29"/>
-          <p:cNvSpPr/>
-          <p:nvPr/>
-        </p:nvSpPr>
-        <p:spPr>
-          <a:xfrm>
-            <a:off x="5943600" y="2670048"/>
+          <p:cNvPr id="40" name="Shape 38"/>
+          <p:cNvSpPr/>
+          <p:nvPr/>
+        </p:nvSpPr>
+        <p:spPr>
+          <a:xfrm>
+            <a:off x="5943600" y="4041648"/>
             <a:ext cx="1463040" cy="420624"/>
           </a:xfrm>
           <a:prstGeom prst="rect">
@@ -39416,13 +38670,13 @@
       </p:sp>
       <p:sp>
         <p:nvSpPr>
-          <p:cNvPr id="32" name="Text 30"/>
-          <p:cNvSpPr/>
-          <p:nvPr/>
-        </p:nvSpPr>
-        <p:spPr>
-          <a:xfrm>
-            <a:off x="5943600" y="2670048"/>
+          <p:cNvPr id="41" name="Text 39"/>
+          <p:cNvSpPr/>
+          <p:nvPr/>
+        </p:nvSpPr>
+        <p:spPr>
+          <a:xfrm>
+            <a:off x="5943600" y="4041648"/>
             <a:ext cx="1463040" cy="420624"/>
           </a:xfrm>
           <a:prstGeom prst="rect">
@@ -39447,7 +38701,7 @@
                 <a:ea typeface="Trebuchet MS" pitchFamily="34" charset="-122"/>
                 <a:cs typeface="Trebuchet MS" pitchFamily="34" charset="-120"/>
               </a:rPr>
-              <a:t>-ing</a:t>
+              <a:t>-s</a:t>
             </a:r>
             <a:endParaRPr lang="en-US" sz="1300" dirty="0"/>
           </a:p>
@@ -39455,319 +38709,13 @@
       </p:sp>
       <p:sp>
         <p:nvSpPr>
-          <p:cNvPr id="33" name="Shape 31"/>
-          <p:cNvSpPr/>
-          <p:nvPr/>
-        </p:nvSpPr>
-        <p:spPr>
-          <a:xfrm>
-            <a:off x="640080" y="3127248"/>
-            <a:ext cx="1463040" cy="420624"/>
-          </a:xfrm>
-          <a:prstGeom prst="rect">
-            <a:avLst/>
-          </a:prstGeom>
-          <a:solidFill>
-            <a:srgbClr val="DDD6FE"/>
-          </a:solidFill>
-          <a:ln w="12700">
-            <a:solidFill>
-              <a:srgbClr val="E5E7EB"/>
-            </a:solidFill>
-            <a:prstDash val="solid"/>
-          </a:ln>
-        </p:spPr>
-      </p:sp>
-      <p:sp>
-        <p:nvSpPr>
-          <p:cNvPr id="34" name="Text 32"/>
-          <p:cNvSpPr/>
-          <p:nvPr/>
-        </p:nvSpPr>
-        <p:spPr>
-          <a:xfrm>
-            <a:off x="640080" y="3127248"/>
-            <a:ext cx="1463040" cy="420624"/>
-          </a:xfrm>
-          <a:prstGeom prst="rect">
-            <a:avLst/>
-          </a:prstGeom>
-          <a:noFill/>
-          <a:ln/>
-        </p:spPr>
-        <p:txBody>
-          <a:bodyPr wrap="square" lIns="0" tIns="0" rIns="0" bIns="0" rtlCol="0" anchor="ctr"/>
-          <a:lstStyle/>
-          <a:p>
-            <a:pPr algn="ctr" indent="0" marL="0">
-              <a:buNone/>
-            </a:pPr>
-            <a:r>
-              <a:rPr lang="en-US" sz="1300" b="1" dirty="0">
-                <a:solidFill>
-                  <a:srgbClr val="4C1D95"/>
-                </a:solidFill>
-                <a:latin typeface="Trebuchet MS" pitchFamily="34" charset="0"/>
-                <a:ea typeface="Trebuchet MS" pitchFamily="34" charset="-122"/>
-                <a:cs typeface="Trebuchet MS" pitchFamily="34" charset="-120"/>
-              </a:rPr>
-              <a:t>pre-</a:t>
-            </a:r>
-            <a:endParaRPr lang="en-US" sz="1300" dirty="0"/>
-          </a:p>
-        </p:txBody>
-      </p:sp>
-      <p:sp>
-        <p:nvSpPr>
-          <p:cNvPr id="35" name="Shape 33"/>
-          <p:cNvSpPr/>
-          <p:nvPr/>
-        </p:nvSpPr>
-        <p:spPr>
-          <a:xfrm>
-            <a:off x="3291840" y="3127248"/>
-            <a:ext cx="1645920" cy="420624"/>
-          </a:xfrm>
-          <a:prstGeom prst="rect">
-            <a:avLst/>
-          </a:prstGeom>
-          <a:solidFill>
-            <a:srgbClr val="F1F5F9"/>
-          </a:solidFill>
-          <a:ln w="12700">
-            <a:solidFill>
-              <a:srgbClr val="E5E7EB"/>
-            </a:solidFill>
-            <a:prstDash val="solid"/>
-          </a:ln>
-        </p:spPr>
-      </p:sp>
-      <p:sp>
-        <p:nvSpPr>
-          <p:cNvPr id="36" name="Shape 34"/>
-          <p:cNvSpPr/>
-          <p:nvPr/>
-        </p:nvSpPr>
-        <p:spPr>
-          <a:xfrm>
-            <a:off x="5943600" y="3127248"/>
-            <a:ext cx="1463040" cy="420624"/>
-          </a:xfrm>
-          <a:prstGeom prst="rect">
-            <a:avLst/>
-          </a:prstGeom>
-          <a:solidFill>
-            <a:srgbClr val="FCE7F3"/>
-          </a:solidFill>
-          <a:ln w="12700">
-            <a:solidFill>
-              <a:srgbClr val="E5E7EB"/>
-            </a:solidFill>
-            <a:prstDash val="solid"/>
-          </a:ln>
-        </p:spPr>
-      </p:sp>
-      <p:sp>
-        <p:nvSpPr>
-          <p:cNvPr id="37" name="Text 35"/>
-          <p:cNvSpPr/>
-          <p:nvPr/>
-        </p:nvSpPr>
-        <p:spPr>
-          <a:xfrm>
-            <a:off x="5943600" y="3127248"/>
-            <a:ext cx="1463040" cy="420624"/>
-          </a:xfrm>
-          <a:prstGeom prst="rect">
-            <a:avLst/>
-          </a:prstGeom>
-          <a:noFill/>
-          <a:ln/>
-        </p:spPr>
-        <p:txBody>
-          <a:bodyPr wrap="square" lIns="0" tIns="0" rIns="0" bIns="0" rtlCol="0" anchor="ctr"/>
-          <a:lstStyle/>
-          <a:p>
-            <a:pPr algn="ctr" indent="0" marL="0">
-              <a:buNone/>
-            </a:pPr>
-            <a:r>
-              <a:rPr lang="en-US" sz="1300" b="1" dirty="0">
-                <a:solidFill>
-                  <a:srgbClr val="9D174D"/>
-                </a:solidFill>
-                <a:latin typeface="Trebuchet MS" pitchFamily="34" charset="0"/>
-                <a:ea typeface="Trebuchet MS" pitchFamily="34" charset="-122"/>
-                <a:cs typeface="Trebuchet MS" pitchFamily="34" charset="-120"/>
-              </a:rPr>
-              <a:t>-ed</a:t>
-            </a:r>
-            <a:endParaRPr lang="en-US" sz="1300" dirty="0"/>
-          </a:p>
-        </p:txBody>
-      </p:sp>
-      <p:sp>
-        <p:nvSpPr>
-          <p:cNvPr id="38" name="Shape 36"/>
-          <p:cNvSpPr/>
-          <p:nvPr/>
-        </p:nvSpPr>
-        <p:spPr>
-          <a:xfrm>
-            <a:off x="640080" y="3584448"/>
-            <a:ext cx="1463040" cy="420624"/>
-          </a:xfrm>
-          <a:prstGeom prst="rect">
-            <a:avLst/>
-          </a:prstGeom>
-          <a:solidFill>
-            <a:srgbClr val="DDD6FE"/>
-          </a:solidFill>
-          <a:ln w="12700">
-            <a:solidFill>
-              <a:srgbClr val="E5E7EB"/>
-            </a:solidFill>
-            <a:prstDash val="solid"/>
-          </a:ln>
-        </p:spPr>
-      </p:sp>
-      <p:sp>
-        <p:nvSpPr>
-          <p:cNvPr id="39" name="Text 37"/>
-          <p:cNvSpPr/>
-          <p:nvPr/>
-        </p:nvSpPr>
-        <p:spPr>
-          <a:xfrm>
-            <a:off x="640080" y="3584448"/>
-            <a:ext cx="1463040" cy="420624"/>
-          </a:xfrm>
-          <a:prstGeom prst="rect">
-            <a:avLst/>
-          </a:prstGeom>
-          <a:noFill/>
-          <a:ln/>
-        </p:spPr>
-        <p:txBody>
-          <a:bodyPr wrap="square" lIns="0" tIns="0" rIns="0" bIns="0" rtlCol="0" anchor="ctr"/>
-          <a:lstStyle/>
-          <a:p>
-            <a:pPr algn="ctr" indent="0" marL="0">
-              <a:buNone/>
-            </a:pPr>
-            <a:r>
-              <a:rPr lang="en-US" sz="1300" b="1" dirty="0">
-                <a:solidFill>
-                  <a:srgbClr val="4C1D95"/>
-                </a:solidFill>
-                <a:latin typeface="Trebuchet MS" pitchFamily="34" charset="0"/>
-                <a:ea typeface="Trebuchet MS" pitchFamily="34" charset="-122"/>
-                <a:cs typeface="Trebuchet MS" pitchFamily="34" charset="-120"/>
-              </a:rPr>
-              <a:t>mis-</a:t>
-            </a:r>
-            <a:endParaRPr lang="en-US" sz="1300" dirty="0"/>
-          </a:p>
-        </p:txBody>
-      </p:sp>
-      <p:sp>
-        <p:nvSpPr>
-          <p:cNvPr id="40" name="Shape 38"/>
-          <p:cNvSpPr/>
-          <p:nvPr/>
-        </p:nvSpPr>
-        <p:spPr>
-          <a:xfrm>
-            <a:off x="3291840" y="3584448"/>
-            <a:ext cx="1645920" cy="420624"/>
-          </a:xfrm>
-          <a:prstGeom prst="rect">
-            <a:avLst/>
-          </a:prstGeom>
-          <a:solidFill>
-            <a:srgbClr val="F8FAFC"/>
-          </a:solidFill>
-          <a:ln w="12700">
-            <a:solidFill>
-              <a:srgbClr val="E5E7EB"/>
-            </a:solidFill>
-            <a:prstDash val="solid"/>
-          </a:ln>
-        </p:spPr>
-      </p:sp>
-      <p:sp>
-        <p:nvSpPr>
-          <p:cNvPr id="41" name="Shape 39"/>
-          <p:cNvSpPr/>
-          <p:nvPr/>
-        </p:nvSpPr>
-        <p:spPr>
-          <a:xfrm>
-            <a:off x="5943600" y="3584448"/>
-            <a:ext cx="1463040" cy="420624"/>
-          </a:xfrm>
-          <a:prstGeom prst="rect">
-            <a:avLst/>
-          </a:prstGeom>
-          <a:solidFill>
-            <a:srgbClr val="FCE7F3"/>
-          </a:solidFill>
-          <a:ln w="12700">
-            <a:solidFill>
-              <a:srgbClr val="E5E7EB"/>
-            </a:solidFill>
-            <a:prstDash val="solid"/>
-          </a:ln>
-        </p:spPr>
-      </p:sp>
-      <p:sp>
-        <p:nvSpPr>
           <p:cNvPr id="42" name="Text 40"/>
           <p:cNvSpPr/>
           <p:nvPr/>
         </p:nvSpPr>
         <p:spPr>
           <a:xfrm>
-            <a:off x="5943600" y="3584448"/>
-            <a:ext cx="1463040" cy="420624"/>
-          </a:xfrm>
-          <a:prstGeom prst="rect">
-            <a:avLst/>
-          </a:prstGeom>
-          <a:noFill/>
-          <a:ln/>
-        </p:spPr>
-        <p:txBody>
-          <a:bodyPr wrap="square" lIns="0" tIns="0" rIns="0" bIns="0" rtlCol="0" anchor="ctr"/>
-          <a:lstStyle/>
-          <a:p>
-            <a:pPr algn="ctr" indent="0" marL="0">
-              <a:buNone/>
-            </a:pPr>
-            <a:r>
-              <a:rPr lang="en-US" sz="1300" b="1" dirty="0">
-                <a:solidFill>
-                  <a:srgbClr val="9D174D"/>
-                </a:solidFill>
-                <a:latin typeface="Trebuchet MS" pitchFamily="34" charset="0"/>
-                <a:ea typeface="Trebuchet MS" pitchFamily="34" charset="-122"/>
-                <a:cs typeface="Trebuchet MS" pitchFamily="34" charset="-120"/>
-              </a:rPr>
-              <a:t>-er</a:t>
-            </a:r>
-            <a:endParaRPr lang="en-US" sz="1300" dirty="0"/>
-          </a:p>
-        </p:txBody>
-      </p:sp>
-      <p:sp>
-        <p:nvSpPr>
-          <p:cNvPr id="43" name="Text 41"/>
-          <p:cNvSpPr/>
-          <p:nvPr/>
-        </p:nvSpPr>
-        <p:spPr>
-          <a:xfrm>
-            <a:off x="365760" y="4178808"/>
+            <a:off x="365760" y="4636008"/>
             <a:ext cx="1097280" cy="420624"/>
           </a:xfrm>
           <a:prstGeom prst="rect">
@@ -39800,14 +38748,14 @@
       </p:sp>
       <p:sp>
         <p:nvSpPr>
-          <p:cNvPr id="44" name="Shape 42"/>
-          <p:cNvSpPr/>
-          <p:nvPr/>
-        </p:nvSpPr>
-        <p:spPr>
-          <a:xfrm>
-            <a:off x="1508760" y="4178808"/>
-            <a:ext cx="822960" cy="420624"/>
+          <p:cNvPr id="43" name="Shape 41"/>
+          <p:cNvSpPr/>
+          <p:nvPr/>
+        </p:nvSpPr>
+        <p:spPr>
+          <a:xfrm>
+            <a:off x="1508760" y="4636008"/>
+            <a:ext cx="1389888" cy="420624"/>
           </a:xfrm>
           <a:prstGeom prst="rect">
             <a:avLst>
@@ -39815,11 +38763,11 @@
             </a:avLst>
           </a:prstGeom>
           <a:solidFill>
-            <a:srgbClr val="DDD6FE"/>
+            <a:srgbClr val="CCFBF1"/>
           </a:solidFill>
           <a:ln w="19050">
             <a:solidFill>
-              <a:srgbClr val="7C3AED"/>
+              <a:srgbClr val="0D9488"/>
             </a:solidFill>
             <a:prstDash val="solid"/>
           </a:ln>
@@ -39834,14 +38782,14 @@
       </p:sp>
       <p:sp>
         <p:nvSpPr>
-          <p:cNvPr id="45" name="Text 43"/>
-          <p:cNvSpPr/>
-          <p:nvPr/>
-        </p:nvSpPr>
-        <p:spPr>
-          <a:xfrm>
-            <a:off x="1508760" y="4178808"/>
-            <a:ext cx="822960" cy="420624"/>
+          <p:cNvPr id="44" name="Text 42"/>
+          <p:cNvSpPr/>
+          <p:nvPr/>
+        </p:nvSpPr>
+        <p:spPr>
+          <a:xfrm>
+            <a:off x="1508760" y="4636008"/>
+            <a:ext cx="1389888" cy="420624"/>
           </a:xfrm>
           <a:prstGeom prst="rect">
             <a:avLst/>
@@ -39859,13 +38807,13 @@
             <a:r>
               <a:rPr lang="en-US" sz="1300" b="1" dirty="0">
                 <a:solidFill>
-                  <a:srgbClr val="4C1D95"/>
+                  <a:srgbClr val="0F766E"/>
                 </a:solidFill>
                 <a:latin typeface="Trebuchet MS" pitchFamily="34" charset="0"/>
                 <a:ea typeface="Trebuchet MS" pitchFamily="34" charset="-122"/>
                 <a:cs typeface="Trebuchet MS" pitchFamily="34" charset="-120"/>
               </a:rPr>
-              <a:t>un-</a:t>
+              <a:t>'enjoy'</a:t>
             </a:r>
             <a:endParaRPr lang="en-US" sz="1300" dirty="0"/>
           </a:p>
@@ -39873,13 +38821,13 @@
       </p:sp>
       <p:sp>
         <p:nvSpPr>
-          <p:cNvPr id="46" name="Text 44"/>
-          <p:cNvSpPr/>
-          <p:nvPr/>
-        </p:nvSpPr>
-        <p:spPr>
-          <a:xfrm>
-            <a:off x="2359152" y="4178808"/>
+          <p:cNvPr id="45" name="Text 43"/>
+          <p:cNvSpPr/>
+          <p:nvPr/>
+        </p:nvSpPr>
+        <p:spPr>
+          <a:xfrm>
+            <a:off x="2926080" y="4636008"/>
             <a:ext cx="320040" cy="420624"/>
           </a:xfrm>
           <a:prstGeom prst="rect">
@@ -39912,14 +38860,14 @@
       </p:sp>
       <p:sp>
         <p:nvSpPr>
-          <p:cNvPr id="47" name="Shape 45"/>
-          <p:cNvSpPr/>
-          <p:nvPr/>
-        </p:nvSpPr>
-        <p:spPr>
-          <a:xfrm>
-            <a:off x="2706624" y="4178808"/>
-            <a:ext cx="1389888" cy="420624"/>
+          <p:cNvPr id="46" name="Shape 44"/>
+          <p:cNvSpPr/>
+          <p:nvPr/>
+        </p:nvSpPr>
+        <p:spPr>
+          <a:xfrm>
+            <a:off x="3273552" y="4636008"/>
+            <a:ext cx="1097280" cy="420624"/>
           </a:xfrm>
           <a:prstGeom prst="rect">
             <a:avLst>
@@ -39927,11 +38875,11 @@
             </a:avLst>
           </a:prstGeom>
           <a:solidFill>
-            <a:srgbClr val="CCFBF1"/>
+            <a:srgbClr val="FCE7F3"/>
           </a:solidFill>
           <a:ln w="19050">
             <a:solidFill>
-              <a:srgbClr val="0D9488"/>
+              <a:srgbClr val="DB2777"/>
             </a:solidFill>
             <a:prstDash val="solid"/>
           </a:ln>
@@ -39946,14 +38894,14 @@
       </p:sp>
       <p:sp>
         <p:nvSpPr>
-          <p:cNvPr id="48" name="Text 46"/>
-          <p:cNvSpPr/>
-          <p:nvPr/>
-        </p:nvSpPr>
-        <p:spPr>
-          <a:xfrm>
-            <a:off x="2706624" y="4178808"/>
-            <a:ext cx="1389888" cy="420624"/>
+          <p:cNvPr id="47" name="Text 45"/>
+          <p:cNvSpPr/>
+          <p:nvPr/>
+        </p:nvSpPr>
+        <p:spPr>
+          <a:xfrm>
+            <a:off x="3273552" y="4636008"/>
+            <a:ext cx="1097280" cy="420624"/>
           </a:xfrm>
           <a:prstGeom prst="rect">
             <a:avLst/>
@@ -39971,13 +38919,13 @@
             <a:r>
               <a:rPr lang="en-US" sz="1300" b="1" dirty="0">
                 <a:solidFill>
-                  <a:srgbClr val="0F766E"/>
+                  <a:srgbClr val="9D174D"/>
                 </a:solidFill>
                 <a:latin typeface="Trebuchet MS" pitchFamily="34" charset="0"/>
                 <a:ea typeface="Trebuchet MS" pitchFamily="34" charset="-122"/>
                 <a:cs typeface="Trebuchet MS" pitchFamily="34" charset="-120"/>
               </a:rPr>
-              <a:t>'enjoy'</a:t>
+              <a:t>-able</a:t>
             </a:r>
             <a:endParaRPr lang="en-US" sz="1300" dirty="0"/>
           </a:p>
@@ -39985,14 +38933,14 @@
       </p:sp>
       <p:sp>
         <p:nvSpPr>
-          <p:cNvPr id="49" name="Text 47"/>
-          <p:cNvSpPr/>
-          <p:nvPr/>
-        </p:nvSpPr>
-        <p:spPr>
-          <a:xfrm>
-            <a:off x="4123944" y="4178808"/>
-            <a:ext cx="320040" cy="420624"/>
+          <p:cNvPr id="48" name="Text 46"/>
+          <p:cNvSpPr/>
+          <p:nvPr/>
+        </p:nvSpPr>
+        <p:spPr>
+          <a:xfrm>
+            <a:off x="4443984" y="4636008"/>
+            <a:ext cx="365760" cy="420624"/>
           </a:xfrm>
           <a:prstGeom prst="rect">
             <a:avLst/>
@@ -40008,30 +38956,30 @@
               <a:buNone/>
             </a:pPr>
             <a:r>
-              <a:rPr lang="en-US" sz="1400" dirty="0">
-                <a:solidFill>
-                  <a:srgbClr val="475569"/>
+              <a:rPr lang="en-US" sz="1800" b="1" dirty="0">
+                <a:solidFill>
+                  <a:srgbClr val="0D9488"/>
                 </a:solidFill>
                 <a:latin typeface="Trebuchet MS" pitchFamily="34" charset="0"/>
                 <a:ea typeface="Trebuchet MS" pitchFamily="34" charset="-122"/>
                 <a:cs typeface="Trebuchet MS" pitchFamily="34" charset="-120"/>
               </a:rPr>
-              <a:t>+</a:t>
-            </a:r>
-            <a:endParaRPr lang="en-US" sz="1400" dirty="0"/>
-          </a:p>
-        </p:txBody>
-      </p:sp>
-      <p:sp>
-        <p:nvSpPr>
-          <p:cNvPr id="50" name="Shape 48"/>
-          <p:cNvSpPr/>
-          <p:nvPr/>
-        </p:nvSpPr>
-        <p:spPr>
-          <a:xfrm>
-            <a:off x="4471416" y="4178808"/>
-            <a:ext cx="1097280" cy="420624"/>
+              <a:t>=</a:t>
+            </a:r>
+            <a:endParaRPr lang="en-US" sz="1800" dirty="0"/>
+          </a:p>
+        </p:txBody>
+      </p:sp>
+      <p:sp>
+        <p:nvSpPr>
+          <p:cNvPr id="49" name="Shape 47"/>
+          <p:cNvSpPr/>
+          <p:nvPr/>
+        </p:nvSpPr>
+        <p:spPr>
+          <a:xfrm>
+            <a:off x="4855464" y="4636008"/>
+            <a:ext cx="2194560" cy="420624"/>
           </a:xfrm>
           <a:prstGeom prst="rect">
             <a:avLst>
@@ -40039,118 +38987,6 @@
             </a:avLst>
           </a:prstGeom>
           <a:solidFill>
-            <a:srgbClr val="FCE7F3"/>
-          </a:solidFill>
-          <a:ln w="19050">
-            <a:solidFill>
-              <a:srgbClr val="DB2777"/>
-            </a:solidFill>
-            <a:prstDash val="solid"/>
-          </a:ln>
-          <a:effectLst>
-            <a:outerShdw sx="100000" sy="100000" kx="0" ky="0" algn="bl" rotWithShape="0" blurRad="101600" dist="38100" dir="8100000">
-              <a:srgbClr val="000000">
-                <a:alpha val="12000"/>
-              </a:srgbClr>
-            </a:outerShdw>
-          </a:effectLst>
-        </p:spPr>
-      </p:sp>
-      <p:sp>
-        <p:nvSpPr>
-          <p:cNvPr id="51" name="Text 49"/>
-          <p:cNvSpPr/>
-          <p:nvPr/>
-        </p:nvSpPr>
-        <p:spPr>
-          <a:xfrm>
-            <a:off x="4471416" y="4178808"/>
-            <a:ext cx="1097280" cy="420624"/>
-          </a:xfrm>
-          <a:prstGeom prst="rect">
-            <a:avLst/>
-          </a:prstGeom>
-          <a:noFill/>
-          <a:ln/>
-        </p:spPr>
-        <p:txBody>
-          <a:bodyPr wrap="square" lIns="0" tIns="0" rIns="0" bIns="0" rtlCol="0" anchor="ctr"/>
-          <a:lstStyle/>
-          <a:p>
-            <a:pPr algn="ctr" indent="0" marL="0">
-              <a:buNone/>
-            </a:pPr>
-            <a:r>
-              <a:rPr lang="en-US" sz="1300" b="1" dirty="0">
-                <a:solidFill>
-                  <a:srgbClr val="9D174D"/>
-                </a:solidFill>
-                <a:latin typeface="Trebuchet MS" pitchFamily="34" charset="0"/>
-                <a:ea typeface="Trebuchet MS" pitchFamily="34" charset="-122"/>
-                <a:cs typeface="Trebuchet MS" pitchFamily="34" charset="-120"/>
-              </a:rPr>
-              <a:t>-ment</a:t>
-            </a:r>
-            <a:endParaRPr lang="en-US" sz="1300" dirty="0"/>
-          </a:p>
-        </p:txBody>
-      </p:sp>
-      <p:sp>
-        <p:nvSpPr>
-          <p:cNvPr id="52" name="Text 50"/>
-          <p:cNvSpPr/>
-          <p:nvPr/>
-        </p:nvSpPr>
-        <p:spPr>
-          <a:xfrm>
-            <a:off x="5641848" y="4178808"/>
-            <a:ext cx="365760" cy="420624"/>
-          </a:xfrm>
-          <a:prstGeom prst="rect">
-            <a:avLst/>
-          </a:prstGeom>
-          <a:noFill/>
-          <a:ln/>
-        </p:spPr>
-        <p:txBody>
-          <a:bodyPr wrap="square" lIns="0" tIns="0" rIns="0" bIns="0" rtlCol="0" anchor="ctr"/>
-          <a:lstStyle/>
-          <a:p>
-            <a:pPr algn="ctr" indent="0" marL="0">
-              <a:buNone/>
-            </a:pPr>
-            <a:r>
-              <a:rPr lang="en-US" sz="1800" b="1" dirty="0">
-                <a:solidFill>
-                  <a:srgbClr val="0D9488"/>
-                </a:solidFill>
-                <a:latin typeface="Trebuchet MS" pitchFamily="34" charset="0"/>
-                <a:ea typeface="Trebuchet MS" pitchFamily="34" charset="-122"/>
-                <a:cs typeface="Trebuchet MS" pitchFamily="34" charset="-120"/>
-              </a:rPr>
-              <a:t>=</a:t>
-            </a:r>
-            <a:endParaRPr lang="en-US" sz="1800" dirty="0"/>
-          </a:p>
-        </p:txBody>
-      </p:sp>
-      <p:sp>
-        <p:nvSpPr>
-          <p:cNvPr id="53" name="Shape 51"/>
-          <p:cNvSpPr/>
-          <p:nvPr/>
-        </p:nvSpPr>
-        <p:spPr>
-          <a:xfrm>
-            <a:off x="6053328" y="4178808"/>
-            <a:ext cx="2194560" cy="420624"/>
-          </a:xfrm>
-          <a:prstGeom prst="rect">
-            <a:avLst>
-              <a:gd name="adj" fmla="val 17391"/>
-            </a:avLst>
-          </a:prstGeom>
-          <a:solidFill>
             <a:srgbClr val="0D9488"/>
           </a:solidFill>
           <a:ln w="12700">
@@ -40163,13 +38999,13 @@
       </p:sp>
       <p:sp>
         <p:nvSpPr>
-          <p:cNvPr id="54" name="Text 52"/>
-          <p:cNvSpPr/>
-          <p:nvPr/>
-        </p:nvSpPr>
-        <p:spPr>
-          <a:xfrm>
-            <a:off x="6053328" y="4178808"/>
+          <p:cNvPr id="50" name="Text 48"/>
+          <p:cNvSpPr/>
+          <p:nvPr/>
+        </p:nvSpPr>
+        <p:spPr>
+          <a:xfrm>
+            <a:off x="4855464" y="4636008"/>
             <a:ext cx="2194560" cy="420624"/>
           </a:xfrm>
           <a:prstGeom prst="rect">
@@ -40486,7 +39322,7 @@
                 <a:ea typeface="Calibri" pitchFamily="34" charset="-122"/>
                 <a:cs typeface="Calibri" pitchFamily="34" charset="-120"/>
               </a:rPr>
-              <a:t>Word Labs  •  wordlabs.app  •  Root: 'enjoy' = to take pleasure in</a:t>
+              <a:t>Word Labs  •  wordlabs.app  •  Root: 'enjoy' = like; take pleasure in</a:t>
             </a:r>
             <a:endParaRPr lang="en-US" sz="800" dirty="0"/>
           </a:p>
@@ -40664,7 +39500,7 @@
                 <a:ea typeface="Calibri" pitchFamily="34" charset="-122"/>
                 <a:cs typeface="Calibri" pitchFamily="34" charset="-120"/>
               </a:rPr>
-              <a:t>The feeling of pleasure or happiness you get from doing something fun.</a:t>
+              <a:t>gets pleasure from something, present tense of enjoy</a:t>
             </a:r>
             <a:endParaRPr lang="en-US" sz="1200" dirty="0"/>
           </a:p>
@@ -40737,7 +39573,7 @@
                 <a:ea typeface="Trebuchet MS" pitchFamily="34" charset="-122"/>
                 <a:cs typeface="Trebuchet MS" pitchFamily="34" charset="-120"/>
               </a:rPr>
-              <a:t>enjoyed</a:t>
+              <a:t>enjoys</a:t>
             </a:r>
             <a:endParaRPr lang="en-US" sz="1200" dirty="0"/>
           </a:p>
@@ -40803,702 +39639,7 @@
                 <a:ea typeface="Calibri" pitchFamily="34" charset="-122"/>
                 <a:cs typeface="Calibri" pitchFamily="34" charset="-120"/>
               </a:rPr>
-              <a:t>To get happiness or pleasure from something.</a:t>
-            </a:r>
-            <a:endParaRPr lang="en-US" sz="1200" dirty="0"/>
-          </a:p>
-        </p:txBody>
-      </p:sp>
-      <p:sp>
-        <p:nvSpPr>
-          <p:cNvPr id="19" name="Shape 17"/>
-          <p:cNvSpPr/>
-          <p:nvPr/>
-        </p:nvSpPr>
-        <p:spPr>
-          <a:xfrm>
-            <a:off x="365760" y="2249424"/>
-            <a:ext cx="2011680" cy="457200"/>
-          </a:xfrm>
-          <a:prstGeom prst="rect">
-            <a:avLst>
-              <a:gd name="adj" fmla="val 12000"/>
-            </a:avLst>
-          </a:prstGeom>
-          <a:solidFill>
-            <a:srgbClr val="EEF2FF"/>
-          </a:solidFill>
-          <a:ln w="12700">
-            <a:solidFill>
-              <a:srgbClr val="6366F1"/>
-            </a:solidFill>
-            <a:prstDash val="solid"/>
-          </a:ln>
-          <a:effectLst>
-            <a:outerShdw sx="100000" sy="100000" kx="0" ky="0" algn="bl" rotWithShape="0" blurRad="101600" dist="38100" dir="8100000">
-              <a:srgbClr val="000000">
-                <a:alpha val="12000"/>
-              </a:srgbClr>
-            </a:outerShdw>
-          </a:effectLst>
-        </p:spPr>
-      </p:sp>
-      <p:sp>
-        <p:nvSpPr>
-          <p:cNvPr id="20" name="Text 18"/>
-          <p:cNvSpPr/>
-          <p:nvPr/>
-        </p:nvSpPr>
-        <p:spPr>
-          <a:xfrm>
-            <a:off x="365760" y="2249424"/>
-            <a:ext cx="2011680" cy="457200"/>
-          </a:xfrm>
-          <a:prstGeom prst="rect">
-            <a:avLst/>
-          </a:prstGeom>
-          <a:noFill/>
-          <a:ln/>
-        </p:spPr>
-        <p:txBody>
-          <a:bodyPr wrap="square" lIns="0" tIns="0" rIns="0" bIns="0" rtlCol="0" anchor="ctr"/>
-          <a:lstStyle/>
-          <a:p>
-            <a:pPr algn="ctr" indent="0" marL="0">
-              <a:buNone/>
-            </a:pPr>
-            <a:r>
-              <a:rPr lang="en-US" sz="1200" b="1" dirty="0">
-                <a:solidFill>
-                  <a:srgbClr val="4338CA"/>
-                </a:solidFill>
-                <a:latin typeface="Trebuchet MS" pitchFamily="34" charset="0"/>
-                <a:ea typeface="Trebuchet MS" pitchFamily="34" charset="-122"/>
-                <a:cs typeface="Trebuchet MS" pitchFamily="34" charset="-120"/>
-              </a:rPr>
-              <a:t>enjoying</a:t>
-            </a:r>
-            <a:endParaRPr lang="en-US" sz="1200" dirty="0"/>
-          </a:p>
-        </p:txBody>
-      </p:sp>
-      <p:sp>
-        <p:nvSpPr>
-          <p:cNvPr id="21" name="Shape 19"/>
-          <p:cNvSpPr/>
-          <p:nvPr/>
-        </p:nvSpPr>
-        <p:spPr>
-          <a:xfrm>
-            <a:off x="2514600" y="2249424"/>
-            <a:ext cx="6263640" cy="457200"/>
-          </a:xfrm>
-          <a:prstGeom prst="rect">
-            <a:avLst>
-              <a:gd name="adj" fmla="val 12000"/>
-            </a:avLst>
-          </a:prstGeom>
-          <a:solidFill>
-            <a:srgbClr val="F8FAFC"/>
-          </a:solidFill>
-          <a:ln w="12700">
-            <a:solidFill>
-              <a:srgbClr val="E2E8F0"/>
-            </a:solidFill>
-            <a:prstDash val="solid"/>
-          </a:ln>
-        </p:spPr>
-      </p:sp>
-      <p:sp>
-        <p:nvSpPr>
-          <p:cNvPr id="22" name="Text 20"/>
-          <p:cNvSpPr/>
-          <p:nvPr/>
-        </p:nvSpPr>
-        <p:spPr>
-          <a:xfrm>
-            <a:off x="2651760" y="2249424"/>
-            <a:ext cx="6035040" cy="457200"/>
-          </a:xfrm>
-          <a:prstGeom prst="rect">
-            <a:avLst/>
-          </a:prstGeom>
-          <a:noFill/>
-          <a:ln/>
-        </p:spPr>
-        <p:txBody>
-          <a:bodyPr wrap="square" rtlCol="0" anchor="ctr"/>
-          <a:lstStyle/>
-          <a:p>
-            <a:pPr algn="l" indent="0" marL="0">
-              <a:buNone/>
-            </a:pPr>
-            <a:r>
-              <a:rPr lang="en-US" sz="1200" dirty="0">
-                <a:solidFill>
-                  <a:srgbClr val="0F172A"/>
-                </a:solidFill>
-                <a:latin typeface="Calibri" pitchFamily="34" charset="0"/>
-                <a:ea typeface="Calibri" pitchFamily="34" charset="-122"/>
-                <a:cs typeface="Calibri" pitchFamily="34" charset="-120"/>
-              </a:rPr>
-              <a:t>The quality of being fun or pleasant to experience.</a:t>
-            </a:r>
-            <a:endParaRPr lang="en-US" sz="1200" dirty="0"/>
-          </a:p>
-        </p:txBody>
-      </p:sp>
-      <p:sp>
-        <p:nvSpPr>
-          <p:cNvPr id="23" name="Shape 21"/>
-          <p:cNvSpPr/>
-          <p:nvPr/>
-        </p:nvSpPr>
-        <p:spPr>
-          <a:xfrm>
-            <a:off x="365760" y="2779776"/>
-            <a:ext cx="2011680" cy="457200"/>
-          </a:xfrm>
-          <a:prstGeom prst="rect">
-            <a:avLst>
-              <a:gd name="adj" fmla="val 12000"/>
-            </a:avLst>
-          </a:prstGeom>
-          <a:solidFill>
-            <a:srgbClr val="EEF2FF"/>
-          </a:solidFill>
-          <a:ln w="12700">
-            <a:solidFill>
-              <a:srgbClr val="6366F1"/>
-            </a:solidFill>
-            <a:prstDash val="solid"/>
-          </a:ln>
-          <a:effectLst>
-            <a:outerShdw sx="100000" sy="100000" kx="0" ky="0" algn="bl" rotWithShape="0" blurRad="101600" dist="38100" dir="8100000">
-              <a:srgbClr val="000000">
-                <a:alpha val="12000"/>
-              </a:srgbClr>
-            </a:outerShdw>
-          </a:effectLst>
-        </p:spPr>
-      </p:sp>
-      <p:sp>
-        <p:nvSpPr>
-          <p:cNvPr id="24" name="Text 22"/>
-          <p:cNvSpPr/>
-          <p:nvPr/>
-        </p:nvSpPr>
-        <p:spPr>
-          <a:xfrm>
-            <a:off x="365760" y="2779776"/>
-            <a:ext cx="2011680" cy="457200"/>
-          </a:xfrm>
-          <a:prstGeom prst="rect">
-            <a:avLst/>
-          </a:prstGeom>
-          <a:noFill/>
-          <a:ln/>
-        </p:spPr>
-        <p:txBody>
-          <a:bodyPr wrap="square" lIns="0" tIns="0" rIns="0" bIns="0" rtlCol="0" anchor="ctr"/>
-          <a:lstStyle/>
-          <a:p>
-            <a:pPr algn="ctr" indent="0" marL="0">
-              <a:buNone/>
-            </a:pPr>
-            <a:r>
-              <a:rPr lang="en-US" sz="1200" b="1" dirty="0">
-                <a:solidFill>
-                  <a:srgbClr val="4338CA"/>
-                </a:solidFill>
-                <a:latin typeface="Trebuchet MS" pitchFamily="34" charset="0"/>
-                <a:ea typeface="Trebuchet MS" pitchFamily="34" charset="-122"/>
-                <a:cs typeface="Trebuchet MS" pitchFamily="34" charset="-120"/>
-              </a:rPr>
-              <a:t>enjoyment</a:t>
-            </a:r>
-            <a:endParaRPr lang="en-US" sz="1200" dirty="0"/>
-          </a:p>
-        </p:txBody>
-      </p:sp>
-      <p:sp>
-        <p:nvSpPr>
-          <p:cNvPr id="25" name="Shape 23"/>
-          <p:cNvSpPr/>
-          <p:nvPr/>
-        </p:nvSpPr>
-        <p:spPr>
-          <a:xfrm>
-            <a:off x="2514600" y="2779776"/>
-            <a:ext cx="6263640" cy="457200"/>
-          </a:xfrm>
-          <a:prstGeom prst="rect">
-            <a:avLst>
-              <a:gd name="adj" fmla="val 12000"/>
-            </a:avLst>
-          </a:prstGeom>
-          <a:solidFill>
-            <a:srgbClr val="F8FAFC"/>
-          </a:solidFill>
-          <a:ln w="12700">
-            <a:solidFill>
-              <a:srgbClr val="E2E8F0"/>
-            </a:solidFill>
-            <a:prstDash val="solid"/>
-          </a:ln>
-        </p:spPr>
-      </p:sp>
-      <p:sp>
-        <p:nvSpPr>
-          <p:cNvPr id="26" name="Text 24"/>
-          <p:cNvSpPr/>
-          <p:nvPr/>
-        </p:nvSpPr>
-        <p:spPr>
-          <a:xfrm>
-            <a:off x="2651760" y="2779776"/>
-            <a:ext cx="6035040" cy="457200"/>
-          </a:xfrm>
-          <a:prstGeom prst="rect">
-            <a:avLst/>
-          </a:prstGeom>
-          <a:noFill/>
-          <a:ln/>
-        </p:spPr>
-        <p:txBody>
-          <a:bodyPr wrap="square" rtlCol="0" anchor="ctr"/>
-          <a:lstStyle/>
-          <a:p>
-            <a:pPr algn="l" indent="0" marL="0">
-              <a:buNone/>
-            </a:pPr>
-            <a:r>
-              <a:rPr lang="en-US" sz="1200" dirty="0">
-                <a:solidFill>
-                  <a:srgbClr val="0F172A"/>
-                </a:solidFill>
-                <a:latin typeface="Calibri" pitchFamily="34" charset="0"/>
-                <a:ea typeface="Calibri" pitchFamily="34" charset="-122"/>
-                <a:cs typeface="Calibri" pitchFamily="34" charset="-120"/>
-              </a:rPr>
-              <a:t>Currently getting pleasure or happiness from something.</a:t>
-            </a:r>
-            <a:endParaRPr lang="en-US" sz="1200" dirty="0"/>
-          </a:p>
-        </p:txBody>
-      </p:sp>
-      <p:sp>
-        <p:nvSpPr>
-          <p:cNvPr id="27" name="Shape 25"/>
-          <p:cNvSpPr/>
-          <p:nvPr/>
-        </p:nvSpPr>
-        <p:spPr>
-          <a:xfrm>
-            <a:off x="365760" y="3310128"/>
-            <a:ext cx="2011680" cy="457200"/>
-          </a:xfrm>
-          <a:prstGeom prst="rect">
-            <a:avLst>
-              <a:gd name="adj" fmla="val 12000"/>
-            </a:avLst>
-          </a:prstGeom>
-          <a:solidFill>
-            <a:srgbClr val="EEF2FF"/>
-          </a:solidFill>
-          <a:ln w="12700">
-            <a:solidFill>
-              <a:srgbClr val="6366F1"/>
-            </a:solidFill>
-            <a:prstDash val="solid"/>
-          </a:ln>
-          <a:effectLst>
-            <a:outerShdw sx="100000" sy="100000" kx="0" ky="0" algn="bl" rotWithShape="0" blurRad="101600" dist="38100" dir="8100000">
-              <a:srgbClr val="000000">
-                <a:alpha val="12000"/>
-              </a:srgbClr>
-            </a:outerShdw>
-          </a:effectLst>
-        </p:spPr>
-      </p:sp>
-      <p:sp>
-        <p:nvSpPr>
-          <p:cNvPr id="28" name="Text 26"/>
-          <p:cNvSpPr/>
-          <p:nvPr/>
-        </p:nvSpPr>
-        <p:spPr>
-          <a:xfrm>
-            <a:off x="365760" y="3310128"/>
-            <a:ext cx="2011680" cy="457200"/>
-          </a:xfrm>
-          <a:prstGeom prst="rect">
-            <a:avLst/>
-          </a:prstGeom>
-          <a:noFill/>
-          <a:ln/>
-        </p:spPr>
-        <p:txBody>
-          <a:bodyPr wrap="square" lIns="0" tIns="0" rIns="0" bIns="0" rtlCol="0" anchor="ctr"/>
-          <a:lstStyle/>
-          <a:p>
-            <a:pPr algn="ctr" indent="0" marL="0">
-              <a:buNone/>
-            </a:pPr>
-            <a:r>
-              <a:rPr lang="en-US" sz="1200" b="1" dirty="0">
-                <a:solidFill>
-                  <a:srgbClr val="4338CA"/>
-                </a:solidFill>
-                <a:latin typeface="Trebuchet MS" pitchFamily="34" charset="0"/>
-                <a:ea typeface="Trebuchet MS" pitchFamily="34" charset="-122"/>
-                <a:cs typeface="Trebuchet MS" pitchFamily="34" charset="-120"/>
-              </a:rPr>
-              <a:t>enjoyable</a:t>
-            </a:r>
-            <a:endParaRPr lang="en-US" sz="1200" dirty="0"/>
-          </a:p>
-        </p:txBody>
-      </p:sp>
-      <p:sp>
-        <p:nvSpPr>
-          <p:cNvPr id="29" name="Shape 27"/>
-          <p:cNvSpPr/>
-          <p:nvPr/>
-        </p:nvSpPr>
-        <p:spPr>
-          <a:xfrm>
-            <a:off x="2514600" y="3310128"/>
-            <a:ext cx="6263640" cy="457200"/>
-          </a:xfrm>
-          <a:prstGeom prst="rect">
-            <a:avLst>
-              <a:gd name="adj" fmla="val 12000"/>
-            </a:avLst>
-          </a:prstGeom>
-          <a:solidFill>
-            <a:srgbClr val="F8FAFC"/>
-          </a:solidFill>
-          <a:ln w="12700">
-            <a:solidFill>
-              <a:srgbClr val="E2E8F0"/>
-            </a:solidFill>
-            <a:prstDash val="solid"/>
-          </a:ln>
-        </p:spPr>
-      </p:sp>
-      <p:sp>
-        <p:nvSpPr>
-          <p:cNvPr id="30" name="Text 28"/>
-          <p:cNvSpPr/>
-          <p:nvPr/>
-        </p:nvSpPr>
-        <p:spPr>
-          <a:xfrm>
-            <a:off x="2651760" y="3310128"/>
-            <a:ext cx="6035040" cy="457200"/>
-          </a:xfrm>
-          <a:prstGeom prst="rect">
-            <a:avLst/>
-          </a:prstGeom>
-          <a:noFill/>
-          <a:ln/>
-        </p:spPr>
-        <p:txBody>
-          <a:bodyPr wrap="square" rtlCol="0" anchor="ctr"/>
-          <a:lstStyle/>
-          <a:p>
-            <a:pPr algn="l" indent="0" marL="0">
-              <a:buNone/>
-            </a:pPr>
-            <a:r>
-              <a:rPr lang="en-US" sz="1200" dirty="0">
-                <a:solidFill>
-                  <a:srgbClr val="0F172A"/>
-                </a:solidFill>
-                <a:latin typeface="Calibri" pitchFamily="34" charset="0"/>
-                <a:ea typeface="Calibri" pitchFamily="34" charset="-122"/>
-                <a:cs typeface="Calibri" pitchFamily="34" charset="-120"/>
-              </a:rPr>
-              <a:t>Done in a way that is fun and gives pleasure.</a:t>
-            </a:r>
-            <a:endParaRPr lang="en-US" sz="1200" dirty="0"/>
-          </a:p>
-        </p:txBody>
-      </p:sp>
-      <p:sp>
-        <p:nvSpPr>
-          <p:cNvPr id="31" name="Shape 29"/>
-          <p:cNvSpPr/>
-          <p:nvPr/>
-        </p:nvSpPr>
-        <p:spPr>
-          <a:xfrm>
-            <a:off x="365760" y="3840480"/>
-            <a:ext cx="2011680" cy="457200"/>
-          </a:xfrm>
-          <a:prstGeom prst="rect">
-            <a:avLst>
-              <a:gd name="adj" fmla="val 12000"/>
-            </a:avLst>
-          </a:prstGeom>
-          <a:solidFill>
-            <a:srgbClr val="EEF2FF"/>
-          </a:solidFill>
-          <a:ln w="12700">
-            <a:solidFill>
-              <a:srgbClr val="6366F1"/>
-            </a:solidFill>
-            <a:prstDash val="solid"/>
-          </a:ln>
-          <a:effectLst>
-            <a:outerShdw sx="100000" sy="100000" kx="0" ky="0" algn="bl" rotWithShape="0" blurRad="101600" dist="38100" dir="8100000">
-              <a:srgbClr val="000000">
-                <a:alpha val="12000"/>
-              </a:srgbClr>
-            </a:outerShdw>
-          </a:effectLst>
-        </p:spPr>
-      </p:sp>
-      <p:sp>
-        <p:nvSpPr>
-          <p:cNvPr id="32" name="Text 30"/>
-          <p:cNvSpPr/>
-          <p:nvPr/>
-        </p:nvSpPr>
-        <p:spPr>
-          <a:xfrm>
-            <a:off x="365760" y="3840480"/>
-            <a:ext cx="2011680" cy="457200"/>
-          </a:xfrm>
-          <a:prstGeom prst="rect">
-            <a:avLst/>
-          </a:prstGeom>
-          <a:noFill/>
-          <a:ln/>
-        </p:spPr>
-        <p:txBody>
-          <a:bodyPr wrap="square" lIns="0" tIns="0" rIns="0" bIns="0" rtlCol="0" anchor="ctr"/>
-          <a:lstStyle/>
-          <a:p>
-            <a:pPr algn="ctr" indent="0" marL="0">
-              <a:buNone/>
-            </a:pPr>
-            <a:r>
-              <a:rPr lang="en-US" sz="1200" b="1" dirty="0">
-                <a:solidFill>
-                  <a:srgbClr val="4338CA"/>
-                </a:solidFill>
-                <a:latin typeface="Trebuchet MS" pitchFamily="34" charset="0"/>
-                <a:ea typeface="Trebuchet MS" pitchFamily="34" charset="-122"/>
-                <a:cs typeface="Trebuchet MS" pitchFamily="34" charset="-120"/>
-              </a:rPr>
-              <a:t>enjoyably</a:t>
-            </a:r>
-            <a:endParaRPr lang="en-US" sz="1200" dirty="0"/>
-          </a:p>
-        </p:txBody>
-      </p:sp>
-      <p:sp>
-        <p:nvSpPr>
-          <p:cNvPr id="33" name="Shape 31"/>
-          <p:cNvSpPr/>
-          <p:nvPr/>
-        </p:nvSpPr>
-        <p:spPr>
-          <a:xfrm>
-            <a:off x="2514600" y="3840480"/>
-            <a:ext cx="6263640" cy="457200"/>
-          </a:xfrm>
-          <a:prstGeom prst="rect">
-            <a:avLst>
-              <a:gd name="adj" fmla="val 12000"/>
-            </a:avLst>
-          </a:prstGeom>
-          <a:solidFill>
-            <a:srgbClr val="F8FAFC"/>
-          </a:solidFill>
-          <a:ln w="12700">
-            <a:solidFill>
-              <a:srgbClr val="E2E8F0"/>
-            </a:solidFill>
-            <a:prstDash val="solid"/>
-          </a:ln>
-        </p:spPr>
-      </p:sp>
-      <p:sp>
-        <p:nvSpPr>
-          <p:cNvPr id="34" name="Text 32"/>
-          <p:cNvSpPr/>
-          <p:nvPr/>
-        </p:nvSpPr>
-        <p:spPr>
-          <a:xfrm>
-            <a:off x="2651760" y="3840480"/>
-            <a:ext cx="6035040" cy="457200"/>
-          </a:xfrm>
-          <a:prstGeom prst="rect">
-            <a:avLst/>
-          </a:prstGeom>
-          <a:noFill/>
-          <a:ln/>
-        </p:spPr>
-        <p:txBody>
-          <a:bodyPr wrap="square" rtlCol="0" anchor="ctr"/>
-          <a:lstStyle/>
-          <a:p>
-            <a:pPr algn="l" indent="0" marL="0">
-              <a:buNone/>
-            </a:pPr>
-            <a:r>
-              <a:rPr lang="en-US" sz="1200" dirty="0">
-                <a:solidFill>
-                  <a:srgbClr val="0F172A"/>
-                </a:solidFill>
-                <a:latin typeface="Calibri" pitchFamily="34" charset="0"/>
-                <a:ea typeface="Calibri" pitchFamily="34" charset="-122"/>
-                <a:cs typeface="Calibri" pitchFamily="34" charset="-120"/>
-              </a:rPr>
-              <a:t>Something that gives you pleasure and is fun to do or experience.</a:t>
-            </a:r>
-            <a:endParaRPr lang="en-US" sz="1200" dirty="0"/>
-          </a:p>
-        </p:txBody>
-      </p:sp>
-      <p:sp>
-        <p:nvSpPr>
-          <p:cNvPr id="35" name="Shape 33"/>
-          <p:cNvSpPr/>
-          <p:nvPr/>
-        </p:nvSpPr>
-        <p:spPr>
-          <a:xfrm>
-            <a:off x="365760" y="4370832"/>
-            <a:ext cx="2011680" cy="457200"/>
-          </a:xfrm>
-          <a:prstGeom prst="rect">
-            <a:avLst>
-              <a:gd name="adj" fmla="val 12000"/>
-            </a:avLst>
-          </a:prstGeom>
-          <a:solidFill>
-            <a:srgbClr val="EEF2FF"/>
-          </a:solidFill>
-          <a:ln w="12700">
-            <a:solidFill>
-              <a:srgbClr val="6366F1"/>
-            </a:solidFill>
-            <a:prstDash val="solid"/>
-          </a:ln>
-          <a:effectLst>
-            <a:outerShdw sx="100000" sy="100000" kx="0" ky="0" algn="bl" rotWithShape="0" blurRad="101600" dist="38100" dir="8100000">
-              <a:srgbClr val="000000">
-                <a:alpha val="12000"/>
-              </a:srgbClr>
-            </a:outerShdw>
-          </a:effectLst>
-        </p:spPr>
-      </p:sp>
-      <p:sp>
-        <p:nvSpPr>
-          <p:cNvPr id="36" name="Text 34"/>
-          <p:cNvSpPr/>
-          <p:nvPr/>
-        </p:nvSpPr>
-        <p:spPr>
-          <a:xfrm>
-            <a:off x="365760" y="4370832"/>
-            <a:ext cx="2011680" cy="457200"/>
-          </a:xfrm>
-          <a:prstGeom prst="rect">
-            <a:avLst/>
-          </a:prstGeom>
-          <a:noFill/>
-          <a:ln/>
-        </p:spPr>
-        <p:txBody>
-          <a:bodyPr wrap="square" lIns="0" tIns="0" rIns="0" bIns="0" rtlCol="0" anchor="ctr"/>
-          <a:lstStyle/>
-          <a:p>
-            <a:pPr algn="ctr" indent="0" marL="0">
-              <a:buNone/>
-            </a:pPr>
-            <a:r>
-              <a:rPr lang="en-US" sz="1200" b="1" dirty="0">
-                <a:solidFill>
-                  <a:srgbClr val="4338CA"/>
-                </a:solidFill>
-                <a:latin typeface="Trebuchet MS" pitchFamily="34" charset="0"/>
-                <a:ea typeface="Trebuchet MS" pitchFamily="34" charset="-122"/>
-                <a:cs typeface="Trebuchet MS" pitchFamily="34" charset="-120"/>
-              </a:rPr>
-              <a:t>enjoyableness</a:t>
-            </a:r>
-            <a:endParaRPr lang="en-US" sz="1200" dirty="0"/>
-          </a:p>
-        </p:txBody>
-      </p:sp>
-      <p:sp>
-        <p:nvSpPr>
-          <p:cNvPr id="37" name="Shape 35"/>
-          <p:cNvSpPr/>
-          <p:nvPr/>
-        </p:nvSpPr>
-        <p:spPr>
-          <a:xfrm>
-            <a:off x="2514600" y="4370832"/>
-            <a:ext cx="6263640" cy="457200"/>
-          </a:xfrm>
-          <a:prstGeom prst="rect">
-            <a:avLst>
-              <a:gd name="adj" fmla="val 12000"/>
-            </a:avLst>
-          </a:prstGeom>
-          <a:solidFill>
-            <a:srgbClr val="F8FAFC"/>
-          </a:solidFill>
-          <a:ln w="12700">
-            <a:solidFill>
-              <a:srgbClr val="E2E8F0"/>
-            </a:solidFill>
-            <a:prstDash val="solid"/>
-          </a:ln>
-        </p:spPr>
-      </p:sp>
-      <p:sp>
-        <p:nvSpPr>
-          <p:cNvPr id="38" name="Text 36"/>
-          <p:cNvSpPr/>
-          <p:nvPr/>
-        </p:nvSpPr>
-        <p:spPr>
-          <a:xfrm>
-            <a:off x="2651760" y="4370832"/>
-            <a:ext cx="6035040" cy="457200"/>
-          </a:xfrm>
-          <a:prstGeom prst="rect">
-            <a:avLst/>
-          </a:prstGeom>
-          <a:noFill/>
-          <a:ln/>
-        </p:spPr>
-        <p:txBody>
-          <a:bodyPr wrap="square" rtlCol="0" anchor="ctr"/>
-          <a:lstStyle/>
-          <a:p>
-            <a:pPr algn="l" indent="0" marL="0">
-              <a:buNone/>
-            </a:pPr>
-            <a:r>
-              <a:rPr lang="en-US" sz="1200" dirty="0">
-                <a:solidFill>
-                  <a:srgbClr val="0F172A"/>
-                </a:solidFill>
-                <a:latin typeface="Calibri" pitchFamily="34" charset="0"/>
-                <a:ea typeface="Calibri" pitchFamily="34" charset="-122"/>
-                <a:cs typeface="Calibri" pitchFamily="34" charset="-120"/>
-              </a:rPr>
-              <a:t>Felt happy or pleased about something that happened in the past.</a:t>
+              <a:t>to get pleasure or satisfaction from something</a:t>
             </a:r>
             <a:endParaRPr lang="en-US" sz="1200" dirty="0"/>
           </a:p>
@@ -41790,7 +39931,7 @@
                 <a:ea typeface="Calibri" pitchFamily="34" charset="-122"/>
                 <a:cs typeface="Calibri" pitchFamily="34" charset="-120"/>
               </a:rPr>
-              <a:t>Word Labs  •  wordlabs.app  •  Root: 'enjoy' = to take pleasure in</a:t>
+              <a:t>Word Labs  •  wordlabs.app  •  Root: 'enjoy' = like; take pleasure in</a:t>
             </a:r>
             <a:endParaRPr lang="en-US" sz="800" dirty="0"/>
           </a:p>
@@ -41993,7 +40134,7 @@
                 <a:ea typeface="Calibri" pitchFamily="34" charset="-122"/>
                 <a:cs typeface="Calibri" pitchFamily="34" charset="-120"/>
               </a:rPr>
-              <a:t>We really enjoyed the excursion to the museum last Friday.</a:t>
+              <a:t>I really enjoy reading adventure stories.</a:t>
             </a:r>
             <a:endParaRPr lang="en-US" sz="1500" dirty="0"/>
           </a:p>
@@ -42157,7 +40298,7 @@
                 <a:ea typeface="Calibri" pitchFamily="34" charset="-122"/>
                 <a:cs typeface="Calibri" pitchFamily="34" charset="-120"/>
               </a:rPr>
-              <a:t>Reading is more enjoyable when you choose a book that interests you.</a:t>
+              <a:t>My brother enjoys playing football on weekends.</a:t>
             </a:r>
             <a:endParaRPr lang="en-US" sz="1500" dirty="0"/>
           </a:p>
@@ -42321,7 +40462,7 @@
                 <a:ea typeface="Calibri" pitchFamily="34" charset="-122"/>
                 <a:cs typeface="Calibri" pitchFamily="34" charset="-120"/>
               </a:rPr>
-              <a:t>The enjoyment on the children's faces showed how much they loved the show.</a:t>
+              <a:t>She enjoyed the concert so much that she wanted to go again.</a:t>
             </a:r>
             <a:endParaRPr lang="en-US" sz="1500" dirty="0"/>
           </a:p>
